--- a/Bases de Datos II/Clases/Clase 4 - Funciones disparadores seguridad respaldo/Presentacion.pptx
+++ b/Bases de Datos II/Clases/Clase 4 - Funciones disparadores seguridad respaldo/Presentacion.pptx
@@ -9,57 +9,49 @@
     <p:sldId id="257" r:id="rId8"/>
     <p:sldId id="258" r:id="rId9"/>
     <p:sldId id="259" r:id="rId10"/>
-    <p:sldId id="260" r:id="rId11"/>
-    <p:sldId id="261" r:id="rId12"/>
-    <p:sldId id="262" r:id="rId13"/>
-    <p:sldId id="263" r:id="rId14"/>
-    <p:sldId id="264" r:id="rId15"/>
-    <p:sldId id="265" r:id="rId16"/>
-    <p:sldId id="266" r:id="rId17"/>
-    <p:sldId id="267" r:id="rId18"/>
-    <p:sldId id="268" r:id="rId19"/>
-    <p:sldId id="269" r:id="rId20"/>
-    <p:sldId id="270" r:id="rId21"/>
-    <p:sldId id="271" r:id="rId22"/>
-    <p:sldId id="272" r:id="rId23"/>
-    <p:sldId id="273" r:id="rId24"/>
-    <p:sldId id="274" r:id="rId25"/>
-    <p:sldId id="275" r:id="rId26"/>
-    <p:sldId id="276" r:id="rId27"/>
-    <p:sldId id="277" r:id="rId28"/>
-    <p:sldId id="278" r:id="rId29"/>
-    <p:sldId id="279" r:id="rId30"/>
-    <p:sldId id="280" r:id="rId31"/>
-    <p:sldId id="281" r:id="rId32"/>
-    <p:sldId id="282" r:id="rId33"/>
-    <p:sldId id="283" r:id="rId34"/>
-    <p:sldId id="284" r:id="rId35"/>
-    <p:sldId id="285" r:id="rId36"/>
-    <p:sldId id="286" r:id="rId37"/>
-    <p:sldId id="287" r:id="rId38"/>
-    <p:sldId id="288" r:id="rId39"/>
-    <p:sldId id="289" r:id="rId40"/>
-    <p:sldId id="290" r:id="rId41"/>
-    <p:sldId id="291" r:id="rId42"/>
-    <p:sldId id="292" r:id="rId43"/>
-    <p:sldId id="293" r:id="rId44"/>
-    <p:sldId id="294" r:id="rId45"/>
-    <p:sldId id="295" r:id="rId46"/>
-    <p:sldId id="296" r:id="rId47"/>
-    <p:sldId id="297" r:id="rId48"/>
-    <p:sldId id="298" r:id="rId49"/>
-    <p:sldId id="299" r:id="rId50"/>
-    <p:sldId id="300" r:id="rId51"/>
-    <p:sldId id="301" r:id="rId52"/>
-    <p:sldId id="302" r:id="rId53"/>
-    <p:sldId id="303" r:id="rId54"/>
-    <p:sldId id="304" r:id="rId55"/>
-    <p:sldId id="305" r:id="rId56"/>
-    <p:sldId id="306" r:id="rId57"/>
-    <p:sldId id="307" r:id="rId58"/>
-    <p:sldId id="308" r:id="rId59"/>
-    <p:sldId id="309" r:id="rId60"/>
-    <p:sldId id="310" r:id="rId61"/>
+    <p:sldId id="260" r:id="rId12"/>
+    <p:sldId id="261" r:id="rId13"/>
+    <p:sldId id="262" r:id="rId14"/>
+    <p:sldId id="263" r:id="rId15"/>
+    <p:sldId id="264" r:id="rId16"/>
+    <p:sldId id="265" r:id="rId17"/>
+    <p:sldId id="266" r:id="rId18"/>
+    <p:sldId id="267" r:id="rId19"/>
+    <p:sldId id="268" r:id="rId20"/>
+    <p:sldId id="269" r:id="rId21"/>
+    <p:sldId id="270" r:id="rId22"/>
+    <p:sldId id="271" r:id="rId23"/>
+    <p:sldId id="272" r:id="rId24"/>
+    <p:sldId id="273" r:id="rId25"/>
+    <p:sldId id="274" r:id="rId26"/>
+    <p:sldId id="275" r:id="rId27"/>
+    <p:sldId id="276" r:id="rId28"/>
+    <p:sldId id="277" r:id="rId29"/>
+    <p:sldId id="278" r:id="rId30"/>
+    <p:sldId id="279" r:id="rId31"/>
+    <p:sldId id="280" r:id="rId32"/>
+    <p:sldId id="281" r:id="rId33"/>
+    <p:sldId id="282" r:id="rId34"/>
+    <p:sldId id="283" r:id="rId35"/>
+    <p:sldId id="284" r:id="rId36"/>
+    <p:sldId id="285" r:id="rId37"/>
+    <p:sldId id="286" r:id="rId38"/>
+    <p:sldId id="287" r:id="rId39"/>
+    <p:sldId id="288" r:id="rId40"/>
+    <p:sldId id="289" r:id="rId41"/>
+    <p:sldId id="290" r:id="rId42"/>
+    <p:sldId id="291" r:id="rId43"/>
+    <p:sldId id="292" r:id="rId44"/>
+    <p:sldId id="293" r:id="rId45"/>
+    <p:sldId id="294" r:id="rId46"/>
+    <p:sldId id="295" r:id="rId47"/>
+    <p:sldId id="296" r:id="rId48"/>
+    <p:sldId id="297" r:id="rId49"/>
+    <p:sldId id="298" r:id="rId50"/>
+    <p:sldId id="299" r:id="rId51"/>
+    <p:sldId id="300" r:id="rId52"/>
+    <p:sldId id="301" r:id="rId53"/>
+    <p:sldId id="302" r:id="rId54"/>
   </p:sldIdLst>
   <p:sldSz cx="12191695" cy="6858000" type="screen4x3"/>
   <p:notesSz cx="6858000" cy="9144000"/>
@@ -159,6 +151,1186 @@
     </a:lvl9pPr>
   </p:defaultTextStyle>
 </p:presentation>
+</file>
+
+<file path=ppt/notesMasters/notesMaster1.xml><?xml version="1.0" encoding="utf-8"?>
+<p:notesMaster xmlns:a="http://schemas.openxmlformats.org/drawingml/2006/main" xmlns:p="http://schemas.openxmlformats.org/presentationml/2006/main" xmlns:r="http://schemas.openxmlformats.org/officeDocument/2006/relationships">
+  <p:cSld>
+    <p:bg>
+      <p:bgRef idx="1001">
+        <a:schemeClr val="bg1"/>
+      </p:bgRef>
+    </p:bg>
+    <p:spTree>
+      <p:nvGrpSpPr>
+        <p:cNvPr id="1" name=""/>
+        <p:cNvGrpSpPr/>
+        <p:nvPr/>
+      </p:nvGrpSpPr>
+      <p:grpSpPr>
+        <a:xfrm>
+          <a:off x="0" y="0"/>
+          <a:ext cx="0" cy="0"/>
+          <a:chOff x="0" y="0"/>
+          <a:chExt cx="0" cy="0"/>
+        </a:xfrm>
+      </p:grpSpPr>
+      <p:sp>
+        <p:nvSpPr>
+          <p:cNvPr id="2" name="Header Placeholder 1"/>
+          <p:cNvSpPr>
+            <a:spLocks noGrp="1"/>
+          </p:cNvSpPr>
+          <p:nvPr>
+            <p:ph type="hdr" sz="quarter"/>
+          </p:nvPr>
+        </p:nvSpPr>
+        <p:spPr>
+          <a:xfrm>
+            <a:off x="0" y="0"/>
+            <a:ext cx="2971800" cy="457200"/>
+          </a:xfrm>
+          <a:prstGeom prst="rect">
+            <a:avLst/>
+          </a:prstGeom>
+        </p:spPr>
+        <p:txBody>
+          <a:bodyPr vert="horz" lIns="91440" tIns="45720" rIns="91440" bIns="45720" rtlCol="0"/>
+          <a:lstStyle>
+            <a:lvl1pPr algn="l">
+              <a:defRPr sz="1200"/>
+            </a:lvl1pPr>
+          </a:lstStyle>
+          <a:p>
+            <a:endParaRPr lang="en-US"/>
+          </a:p>
+        </p:txBody>
+      </p:sp>
+      <p:sp>
+        <p:nvSpPr>
+          <p:cNvPr id="3" name="Date Placeholder 2"/>
+          <p:cNvSpPr>
+            <a:spLocks noGrp="1"/>
+          </p:cNvSpPr>
+          <p:nvPr>
+            <p:ph type="dt" idx="1"/>
+          </p:nvPr>
+        </p:nvSpPr>
+        <p:spPr>
+          <a:xfrm>
+            <a:off x="3884613" y="0"/>
+            <a:ext cx="2971800" cy="457200"/>
+          </a:xfrm>
+          <a:prstGeom prst="rect">
+            <a:avLst/>
+          </a:prstGeom>
+        </p:spPr>
+        <p:txBody>
+          <a:bodyPr vert="horz" lIns="91440" tIns="45720" rIns="91440" bIns="45720" rtlCol="0"/>
+          <a:lstStyle>
+            <a:lvl1pPr algn="r">
+              <a:defRPr sz="1200"/>
+            </a:lvl1pPr>
+          </a:lstStyle>
+          <a:p>
+            <a:fld id="{0F89C1C7-3DCD-1040-A9CF-14679D8B5DDD}" type="datetimeFigureOut">
+              <a:rPr lang="en-US" smtClean="0"/>
+              <a:t>10/17/16</a:t>
+            </a:fld>
+            <a:endParaRPr lang="en-US"/>
+          </a:p>
+        </p:txBody>
+      </p:sp>
+      <p:sp>
+        <p:nvSpPr>
+          <p:cNvPr id="4" name="Slide Image Placeholder 3"/>
+          <p:cNvSpPr>
+            <a:spLocks noGrp="1" noRot="1" noChangeAspect="1"/>
+          </p:cNvSpPr>
+          <p:nvPr>
+            <p:ph type="sldImg" idx="2"/>
+          </p:nvPr>
+        </p:nvSpPr>
+        <p:spPr>
+          <a:xfrm>
+            <a:off x="1143000" y="685800"/>
+            <a:ext cx="4572000" cy="3429000"/>
+          </a:xfrm>
+          <a:prstGeom prst="rect">
+            <a:avLst/>
+          </a:prstGeom>
+          <a:noFill/>
+          <a:ln w="12700">
+            <a:solidFill>
+              <a:prstClr val="black"/>
+            </a:solidFill>
+          </a:ln>
+        </p:spPr>
+        <p:txBody>
+          <a:bodyPr vert="horz" lIns="91440" tIns="45720" rIns="91440" bIns="45720" rtlCol="0" anchor="ctr"/>
+          <a:lstStyle/>
+          <a:p>
+            <a:endParaRPr lang="en-US"/>
+          </a:p>
+        </p:txBody>
+      </p:sp>
+      <p:sp>
+        <p:nvSpPr>
+          <p:cNvPr id="5" name="Notes Placeholder 4"/>
+          <p:cNvSpPr>
+            <a:spLocks noGrp="1"/>
+          </p:cNvSpPr>
+          <p:nvPr>
+            <p:ph type="body" sz="quarter" idx="3"/>
+          </p:nvPr>
+        </p:nvSpPr>
+        <p:spPr>
+          <a:xfrm>
+            <a:off x="685800" y="4343400"/>
+            <a:ext cx="5486400" cy="4114800"/>
+          </a:xfrm>
+          <a:prstGeom prst="rect">
+            <a:avLst/>
+          </a:prstGeom>
+        </p:spPr>
+        <p:txBody>
+          <a:bodyPr vert="horz" lIns="91440" tIns="45720" rIns="91440" bIns="45720" rtlCol="0"/>
+          <a:lstStyle/>
+          <a:p>
+            <a:pPr lvl="0"/>
+            <a:r>
+              <a:rPr lang="en-US" smtClean="0"/>
+              <a:t>Click to edit Master text styles</a:t>
+            </a:r>
+          </a:p>
+          <a:p>
+            <a:pPr lvl="1"/>
+            <a:r>
+              <a:rPr lang="en-US" smtClean="0"/>
+              <a:t>Second level</a:t>
+            </a:r>
+          </a:p>
+          <a:p>
+            <a:pPr lvl="2"/>
+            <a:r>
+              <a:rPr lang="en-US" smtClean="0"/>
+              <a:t>Third level</a:t>
+            </a:r>
+          </a:p>
+          <a:p>
+            <a:pPr lvl="3"/>
+            <a:r>
+              <a:rPr lang="en-US" smtClean="0"/>
+              <a:t>Fourth level</a:t>
+            </a:r>
+          </a:p>
+          <a:p>
+            <a:pPr lvl="4"/>
+            <a:r>
+              <a:rPr lang="en-US" smtClean="0"/>
+              <a:t>Fifth level</a:t>
+            </a:r>
+            <a:endParaRPr lang="en-US"/>
+          </a:p>
+        </p:txBody>
+      </p:sp>
+      <p:sp>
+        <p:nvSpPr>
+          <p:cNvPr id="6" name="Footer Placeholder 5"/>
+          <p:cNvSpPr>
+            <a:spLocks noGrp="1"/>
+          </p:cNvSpPr>
+          <p:nvPr>
+            <p:ph type="ftr" sz="quarter" idx="4"/>
+          </p:nvPr>
+        </p:nvSpPr>
+        <p:spPr>
+          <a:xfrm>
+            <a:off x="0" y="8685213"/>
+            <a:ext cx="2971800" cy="457200"/>
+          </a:xfrm>
+          <a:prstGeom prst="rect">
+            <a:avLst/>
+          </a:prstGeom>
+        </p:spPr>
+        <p:txBody>
+          <a:bodyPr vert="horz" lIns="91440" tIns="45720" rIns="91440" bIns="45720" rtlCol="0" anchor="b"/>
+          <a:lstStyle>
+            <a:lvl1pPr algn="l">
+              <a:defRPr sz="1200"/>
+            </a:lvl1pPr>
+          </a:lstStyle>
+          <a:p>
+            <a:endParaRPr lang="en-US"/>
+          </a:p>
+        </p:txBody>
+      </p:sp>
+      <p:sp>
+        <p:nvSpPr>
+          <p:cNvPr id="7" name="Slide Number Placeholder 6"/>
+          <p:cNvSpPr>
+            <a:spLocks noGrp="1"/>
+          </p:cNvSpPr>
+          <p:nvPr>
+            <p:ph type="sldNum" sz="quarter" idx="5"/>
+          </p:nvPr>
+        </p:nvSpPr>
+        <p:spPr>
+          <a:xfrm>
+            <a:off x="3884613" y="8685213"/>
+            <a:ext cx="2971800" cy="457200"/>
+          </a:xfrm>
+          <a:prstGeom prst="rect">
+            <a:avLst/>
+          </a:prstGeom>
+        </p:spPr>
+        <p:txBody>
+          <a:bodyPr vert="horz" lIns="91440" tIns="45720" rIns="91440" bIns="45720" rtlCol="0" anchor="b"/>
+          <a:lstStyle>
+            <a:lvl1pPr algn="r">
+              <a:defRPr sz="1200"/>
+            </a:lvl1pPr>
+          </a:lstStyle>
+          <a:p>
+            <a:fld id="{BB5E49A5-4136-284D-997B-48E1D791AD67}" type="slidenum">
+              <a:rPr lang="en-US" smtClean="0"/>
+              <a:t>‹#›</a:t>
+            </a:fld>
+            <a:endParaRPr lang="en-US"/>
+          </a:p>
+        </p:txBody>
+      </p:sp>
+    </p:spTree>
+    <p:extLst>
+      <p:ext uri="{BB962C8B-B14F-4D97-AF65-F5344CB8AC3E}">
+        <p14:creationId xmlns:p14="http://schemas.microsoft.com/office/powerpoint/2010/main" val="2623252185"/>
+      </p:ext>
+    </p:extLst>
+  </p:cSld>
+  <p:clrMap bg1="lt1" tx1="dk1" bg2="lt2" tx2="dk2" accent1="accent1" accent2="accent2" accent3="accent3" accent4="accent4" accent5="accent5" accent6="accent6" hlink="hlink" folHlink="folHlink"/>
+  <p:notesStyle>
+    <a:lvl1pPr marL="0" algn="l" defTabSz="457200" rtl="0" eaLnBrk="1" latinLnBrk="0" hangingPunct="1">
+      <a:defRPr sz="1200" kern="1200">
+        <a:solidFill>
+          <a:schemeClr val="tx1"/>
+        </a:solidFill>
+        <a:latin typeface="+mn-lt"/>
+        <a:ea typeface="+mn-ea"/>
+        <a:cs typeface="+mn-cs"/>
+      </a:defRPr>
+    </a:lvl1pPr>
+    <a:lvl2pPr marL="457200" algn="l" defTabSz="457200" rtl="0" eaLnBrk="1" latinLnBrk="0" hangingPunct="1">
+      <a:defRPr sz="1200" kern="1200">
+        <a:solidFill>
+          <a:schemeClr val="tx1"/>
+        </a:solidFill>
+        <a:latin typeface="+mn-lt"/>
+        <a:ea typeface="+mn-ea"/>
+        <a:cs typeface="+mn-cs"/>
+      </a:defRPr>
+    </a:lvl2pPr>
+    <a:lvl3pPr marL="914400" algn="l" defTabSz="457200" rtl="0" eaLnBrk="1" latinLnBrk="0" hangingPunct="1">
+      <a:defRPr sz="1200" kern="1200">
+        <a:solidFill>
+          <a:schemeClr val="tx1"/>
+        </a:solidFill>
+        <a:latin typeface="+mn-lt"/>
+        <a:ea typeface="+mn-ea"/>
+        <a:cs typeface="+mn-cs"/>
+      </a:defRPr>
+    </a:lvl3pPr>
+    <a:lvl4pPr marL="1371600" algn="l" defTabSz="457200" rtl="0" eaLnBrk="1" latinLnBrk="0" hangingPunct="1">
+      <a:defRPr sz="1200" kern="1200">
+        <a:solidFill>
+          <a:schemeClr val="tx1"/>
+        </a:solidFill>
+        <a:latin typeface="+mn-lt"/>
+        <a:ea typeface="+mn-ea"/>
+        <a:cs typeface="+mn-cs"/>
+      </a:defRPr>
+    </a:lvl4pPr>
+    <a:lvl5pPr marL="1828800" algn="l" defTabSz="457200" rtl="0" eaLnBrk="1" latinLnBrk="0" hangingPunct="1">
+      <a:defRPr sz="1200" kern="1200">
+        <a:solidFill>
+          <a:schemeClr val="tx1"/>
+        </a:solidFill>
+        <a:latin typeface="+mn-lt"/>
+        <a:ea typeface="+mn-ea"/>
+        <a:cs typeface="+mn-cs"/>
+      </a:defRPr>
+    </a:lvl5pPr>
+    <a:lvl6pPr marL="2286000" algn="l" defTabSz="457200" rtl="0" eaLnBrk="1" latinLnBrk="0" hangingPunct="1">
+      <a:defRPr sz="1200" kern="1200">
+        <a:solidFill>
+          <a:schemeClr val="tx1"/>
+        </a:solidFill>
+        <a:latin typeface="+mn-lt"/>
+        <a:ea typeface="+mn-ea"/>
+        <a:cs typeface="+mn-cs"/>
+      </a:defRPr>
+    </a:lvl6pPr>
+    <a:lvl7pPr marL="2743200" algn="l" defTabSz="457200" rtl="0" eaLnBrk="1" latinLnBrk="0" hangingPunct="1">
+      <a:defRPr sz="1200" kern="1200">
+        <a:solidFill>
+          <a:schemeClr val="tx1"/>
+        </a:solidFill>
+        <a:latin typeface="+mn-lt"/>
+        <a:ea typeface="+mn-ea"/>
+        <a:cs typeface="+mn-cs"/>
+      </a:defRPr>
+    </a:lvl7pPr>
+    <a:lvl8pPr marL="3200400" algn="l" defTabSz="457200" rtl="0" eaLnBrk="1" latinLnBrk="0" hangingPunct="1">
+      <a:defRPr sz="1200" kern="1200">
+        <a:solidFill>
+          <a:schemeClr val="tx1"/>
+        </a:solidFill>
+        <a:latin typeface="+mn-lt"/>
+        <a:ea typeface="+mn-ea"/>
+        <a:cs typeface="+mn-cs"/>
+      </a:defRPr>
+    </a:lvl8pPr>
+    <a:lvl9pPr marL="3657600" algn="l" defTabSz="457200" rtl="0" eaLnBrk="1" latinLnBrk="0" hangingPunct="1">
+      <a:defRPr sz="1200" kern="1200">
+        <a:solidFill>
+          <a:schemeClr val="tx1"/>
+        </a:solidFill>
+        <a:latin typeface="+mn-lt"/>
+        <a:ea typeface="+mn-ea"/>
+        <a:cs typeface="+mn-cs"/>
+      </a:defRPr>
+    </a:lvl9pPr>
+  </p:notesStyle>
+</p:notesMaster>
+</file>
+
+<file path=ppt/notesSlides/notesSlide1.xml><?xml version="1.0" encoding="utf-8"?>
+<p:notes xmlns:a="http://schemas.openxmlformats.org/drawingml/2006/main" xmlns:p="http://schemas.openxmlformats.org/presentationml/2006/main" xmlns:r="http://schemas.openxmlformats.org/officeDocument/2006/relationships">
+  <p:cSld>
+    <p:spTree>
+      <p:nvGrpSpPr>
+        <p:cNvPr id="1" name=""/>
+        <p:cNvGrpSpPr/>
+        <p:nvPr/>
+      </p:nvGrpSpPr>
+      <p:grpSpPr>
+        <a:xfrm>
+          <a:off x="0" y="0"/>
+          <a:ext cx="0" cy="0"/>
+          <a:chOff x="0" y="0"/>
+          <a:chExt cx="0" cy="0"/>
+        </a:xfrm>
+      </p:grpSpPr>
+      <p:sp>
+        <p:nvSpPr>
+          <p:cNvPr id="2" name="Slide Image Placeholder 1"/>
+          <p:cNvSpPr>
+            <a:spLocks noGrp="1"/>
+          </p:cNvSpPr>
+          <p:nvPr>
+            <p:ph type="sldImg" idx="2"/>
+          </p:nvPr>
+        </p:nvSpPr>
+        <p:spPr/>
+      </p:sp>
+      <p:sp>
+        <p:nvSpPr>
+          <p:cNvPr id="3" name="Notes Placeholder 2"/>
+          <p:cNvSpPr>
+            <a:spLocks noGrp="1"/>
+          </p:cNvSpPr>
+          <p:nvPr>
+            <p:ph type="body" idx="3" sz="quarter"/>
+          </p:nvPr>
+        </p:nvSpPr>
+        <p:spPr/>
+        <p:txBody>
+          <a:bodyPr/>
+          <a:lstStyle/>
+          <a:p>
+            <a:r>
+              <a:t>Una funcion y un procedimiento se parecen tanto en la escritura que conviene separarlos por su papel y no por su sintaxis.</a:t>
+            </a:r>
+          </a:p>
+          <a:p>
+            <a:r>
+              <a:t>RETURNS declara el tipo del valor devuelto, y dentro del cuerpo tiene que haber al menos un RETURN, porque una funcion de PL/pgSQL que termina sin retornar lanza un error en ejecucion.</a:t>
+            </a:r>
+          </a:p>
+        </p:txBody>
+      </p:sp>
+      <p:sp>
+        <p:nvSpPr>
+          <p:cNvPr id="4" name="Slide Number Placeholder 3"/>
+          <p:cNvSpPr>
+            <a:spLocks noGrp="1"/>
+          </p:cNvSpPr>
+          <p:nvPr>
+            <p:ph type="sldNum" idx="5" sz="quarter"/>
+          </p:nvPr>
+        </p:nvSpPr>
+        <p:spPr/>
+      </p:sp>
+    </p:spTree>
+  </p:cSld>
+  <p:clrMapOvr>
+    <a:masterClrMapping/>
+  </p:clrMapOvr>
+</p:notes>
+</file>
+
+<file path=ppt/notesSlides/notesSlide10.xml><?xml version="1.0" encoding="utf-8"?>
+<p:notes xmlns:a="http://schemas.openxmlformats.org/drawingml/2006/main" xmlns:p="http://schemas.openxmlformats.org/presentationml/2006/main" xmlns:r="http://schemas.openxmlformats.org/officeDocument/2006/relationships">
+  <p:cSld>
+    <p:spTree>
+      <p:nvGrpSpPr>
+        <p:cNvPr id="1" name=""/>
+        <p:cNvGrpSpPr/>
+        <p:nvPr/>
+      </p:nvGrpSpPr>
+      <p:grpSpPr>
+        <a:xfrm>
+          <a:off x="0" y="0"/>
+          <a:ext cx="0" cy="0"/>
+          <a:chOff x="0" y="0"/>
+          <a:chExt cx="0" cy="0"/>
+        </a:xfrm>
+      </p:grpSpPr>
+      <p:sp>
+        <p:nvSpPr>
+          <p:cNvPr id="2" name="Slide Image Placeholder 1"/>
+          <p:cNvSpPr>
+            <a:spLocks noGrp="1"/>
+          </p:cNvSpPr>
+          <p:nvPr>
+            <p:ph type="sldImg" idx="2"/>
+          </p:nvPr>
+        </p:nvSpPr>
+        <p:spPr/>
+      </p:sp>
+      <p:sp>
+        <p:nvSpPr>
+          <p:cNvPr id="3" name="Notes Placeholder 2"/>
+          <p:cNvSpPr>
+            <a:spLocks noGrp="1"/>
+          </p:cNvSpPr>
+          <p:nvPr>
+            <p:ph type="body" idx="3" sz="quarter"/>
+          </p:nvPr>
+        </p:nvSpPr>
+        <p:spPr/>
+        <p:txBody>
+          <a:bodyPr/>
+          <a:lstStyle/>
+          <a:p>
+            <a:r>
+              <a:t>Lo que NO se puede ejecutar es pg_dump, pg_dumpall, pg_basebackup ni pg_restore, y la razon hay que decirla con precision en vez de dejarla en «la herramienta no sirve»: son programas de linea de comandos que leen y escriben archivos, y ahi no hay sistema de archivos ni servidor al que conectarse.</a:t>
+            </a:r>
+          </a:p>
+          <a:p>
+            <a:r>
+              <a:t>Por eso la pregunta 5 es un documento y no una ejecucion: se califica que el plan nombre la herramienta correcta para cada cosa, no que el estudiante la haya corrido.</a:t>
+            </a:r>
+          </a:p>
+          <a:p>
+            <a:r>
+              <a:t>Esa distincion hay que decirla en clase, porque un estudiante que intente ejecutar pg_dump en la consola de ExamLab va a perder veinte minutos y va a creer que hizo algo mal.</a:t>
+            </a:r>
+          </a:p>
+          <a:p>
+            <a:r>
+              <a:t>Lo que si se puede ensayar de verdad, y conviene hacerlo, es el restore a escala de aula: borrar el esquema completo y volverlo a levantar pegando el propio guion del estudiante, con cronometro en mano.</a:t>
+            </a:r>
+          </a:p>
+          <a:p>
+            <a:r>
+              <a:t>Vale un minuto senalarlo para quien se encuentre Oracle en el trabajo, y no vale mas, porque la calificacion ocurre en PostgreSQL.</a:t>
+            </a:r>
+          </a:p>
+        </p:txBody>
+      </p:sp>
+      <p:sp>
+        <p:nvSpPr>
+          <p:cNvPr id="4" name="Slide Number Placeholder 3"/>
+          <p:cNvSpPr>
+            <a:spLocks noGrp="1"/>
+          </p:cNvSpPr>
+          <p:nvPr>
+            <p:ph type="sldNum" idx="5" sz="quarter"/>
+          </p:nvPr>
+        </p:nvSpPr>
+        <p:spPr/>
+      </p:sp>
+    </p:spTree>
+  </p:cSld>
+  <p:clrMapOvr>
+    <a:masterClrMapping/>
+  </p:clrMapOvr>
+</p:notes>
+</file>
+
+<file path=ppt/notesSlides/notesSlide2.xml><?xml version="1.0" encoding="utf-8"?>
+<p:notes xmlns:a="http://schemas.openxmlformats.org/drawingml/2006/main" xmlns:p="http://schemas.openxmlformats.org/presentationml/2006/main" xmlns:r="http://schemas.openxmlformats.org/officeDocument/2006/relationships">
+  <p:cSld>
+    <p:spTree>
+      <p:nvGrpSpPr>
+        <p:cNvPr id="1" name=""/>
+        <p:cNvGrpSpPr/>
+        <p:nvPr/>
+      </p:nvGrpSpPr>
+      <p:grpSpPr>
+        <a:xfrm>
+          <a:off x="0" y="0"/>
+          <a:ext cx="0" cy="0"/>
+          <a:chOff x="0" y="0"/>
+          <a:chExt cx="0" cy="0"/>
+        </a:xfrm>
+      </p:grpSpPr>
+      <p:sp>
+        <p:nvSpPr>
+          <p:cNvPr id="2" name="Slide Image Placeholder 1"/>
+          <p:cNvSpPr>
+            <a:spLocks noGrp="1"/>
+          </p:cNvSpPr>
+          <p:nvPr>
+            <p:ph type="sldImg" idx="2"/>
+          </p:nvPr>
+        </p:nvSpPr>
+        <p:spPr/>
+      </p:sp>
+      <p:sp>
+        <p:nvSpPr>
+          <p:cNvPr id="3" name="Notes Placeholder 2"/>
+          <p:cNvSpPr>
+            <a:spLocks noGrp="1"/>
+          </p:cNvSpPr>
+          <p:nvPr>
+            <p:ph type="body" idx="3" sz="quarter"/>
+          </p:nvPr>
+        </p:nvSpPr>
+        <p:spPr/>
+        <p:txBody>
+          <a:bodyPr/>
+          <a:lstStyle/>
+          <a:p>
+            <a:r>
+              <a:t>La aplicacion de Huellitas puede mandar 'Canino', 'canino' o 'CANINO', y comparar el texto tal como llega significa que dos de las tres formas caen al precio de otra especie.</a:t>
+            </a:r>
+          </a:p>
+          <a:p>
+            <a:r>
+              <a:t>Si la casilla de urgencia llega en nulo, que es lo que hace una interfaz donde el usuario no marco nada, entonces IF p_urgencia THEN no entra —nulo no es verdadero— pero cualquier aritmetica con nulo si contamina: v_base * p_urgencia daria nulo y la factura saldria vacia.</a:t>
+            </a:r>
+          </a:p>
+        </p:txBody>
+      </p:sp>
+      <p:sp>
+        <p:nvSpPr>
+          <p:cNvPr id="4" name="Slide Number Placeholder 3"/>
+          <p:cNvSpPr>
+            <a:spLocks noGrp="1"/>
+          </p:cNvSpPr>
+          <p:nvPr>
+            <p:ph type="sldNum" idx="5" sz="quarter"/>
+          </p:nvPr>
+        </p:nvSpPr>
+        <p:spPr/>
+      </p:sp>
+    </p:spTree>
+  </p:cSld>
+  <p:clrMapOvr>
+    <a:masterClrMapping/>
+  </p:clrMapOvr>
+</p:notes>
+</file>
+
+<file path=ppt/notesSlides/notesSlide3.xml><?xml version="1.0" encoding="utf-8"?>
+<p:notes xmlns:a="http://schemas.openxmlformats.org/drawingml/2006/main" xmlns:p="http://schemas.openxmlformats.org/presentationml/2006/main" xmlns:r="http://schemas.openxmlformats.org/officeDocument/2006/relationships">
+  <p:cSld>
+    <p:spTree>
+      <p:nvGrpSpPr>
+        <p:cNvPr id="1" name=""/>
+        <p:cNvGrpSpPr/>
+        <p:nvPr/>
+      </p:nvGrpSpPr>
+      <p:grpSpPr>
+        <a:xfrm>
+          <a:off x="0" y="0"/>
+          <a:ext cx="0" cy="0"/>
+          <a:chOff x="0" y="0"/>
+          <a:chExt cx="0" cy="0"/>
+        </a:xfrm>
+      </p:grpSpPr>
+      <p:sp>
+        <p:nvSpPr>
+          <p:cNvPr id="2" name="Slide Image Placeholder 1"/>
+          <p:cNvSpPr>
+            <a:spLocks noGrp="1"/>
+          </p:cNvSpPr>
+          <p:nvPr>
+            <p:ph type="sldImg" idx="2"/>
+          </p:nvPr>
+        </p:nvSpPr>
+        <p:spPr/>
+      </p:sp>
+      <p:sp>
+        <p:nvSpPr>
+          <p:cNvPr id="3" name="Notes Placeholder 2"/>
+          <p:cNvSpPr>
+            <a:spLocks noGrp="1"/>
+          </p:cNvSpPr>
+          <p:nvPr>
+            <p:ph type="body" idx="3" sz="quarter"/>
+          </p:nvPr>
+        </p:nvSpPr>
+        <p:spPr/>
+        <p:txBody>
+          <a:bodyPr/>
+          <a:lstStyle/>
+          <a:p>
+            <a:r>
+              <a:t>Despues la asociacion,;, que dice cuando dispararla y a quien llamar.</a:t>
+            </a:r>
+          </a:p>
+          <a:p>
+            <a:r>
+              <a:t>EXECUTE PROCEDURE todavia se acepta por compatibilidad, pero esta obsoleto y no conviene ensenarlo.</a:t>
+            </a:r>
+          </a:p>
+          <a:p>
+            <a:r>
+              <a:t>De ahi salen sus dos caras: si el trigger falla, la sentencia original tambien falla y se deshace, que es exactamente lo que se quiere para un invariante como que el stock nunca quede negativo; y si el trigger es lento, la sentencia original se vuelve lenta, y si bloquea, bloquea al usuario que hizo el UPDATE.</a:t>
+            </a:r>
+          </a:p>
+          <a:p>
+            <a:r>
+              <a:t>Conviene mencionar tambien las variables especiales que PL/pgSQL pone a disposicion dentro de una funcion de trigger, porque permiten escribir una sola funcion para varios eventos: TG_OP dice si fue INSERT, UPDATE o DELETE, TG_TABLE_NAME dice sobre que tabla, y TG_WHEN y TG_LEVEL dicen si es BEFORE o AFTER y de fila o de sentencia.</a:t>
+            </a:r>
+          </a:p>
+          <a:p>
+            <a:r>
+              <a:t>Hoy no hacen falta, pero saber que existen evita que el estudiante escriba tres funciones casi identicas.</a:t>
+            </a:r>
+          </a:p>
+        </p:txBody>
+      </p:sp>
+      <p:sp>
+        <p:nvSpPr>
+          <p:cNvPr id="4" name="Slide Number Placeholder 3"/>
+          <p:cNvSpPr>
+            <a:spLocks noGrp="1"/>
+          </p:cNvSpPr>
+          <p:nvPr>
+            <p:ph type="sldNum" idx="5" sz="quarter"/>
+          </p:nvPr>
+        </p:nvSpPr>
+        <p:spPr/>
+      </p:sp>
+    </p:spTree>
+  </p:cSld>
+  <p:clrMapOvr>
+    <a:masterClrMapping/>
+  </p:clrMapOvr>
+</p:notes>
+</file>
+
+<file path=ppt/notesSlides/notesSlide4.xml><?xml version="1.0" encoding="utf-8"?>
+<p:notes xmlns:a="http://schemas.openxmlformats.org/drawingml/2006/main" xmlns:p="http://schemas.openxmlformats.org/presentationml/2006/main" xmlns:r="http://schemas.openxmlformats.org/officeDocument/2006/relationships">
+  <p:cSld>
+    <p:spTree>
+      <p:nvGrpSpPr>
+        <p:cNvPr id="1" name=""/>
+        <p:cNvGrpSpPr/>
+        <p:nvPr/>
+      </p:nvGrpSpPr>
+      <p:grpSpPr>
+        <a:xfrm>
+          <a:off x="0" y="0"/>
+          <a:ext cx="0" cy="0"/>
+          <a:chOff x="0" y="0"/>
+          <a:chExt cx="0" cy="0"/>
+        </a:xfrm>
+      </p:grpSpPr>
+      <p:sp>
+        <p:nvSpPr>
+          <p:cNvPr id="2" name="Slide Image Placeholder 1"/>
+          <p:cNvSpPr>
+            <a:spLocks noGrp="1"/>
+          </p:cNvSpPr>
+          <p:nvPr>
+            <p:ph type="sldImg" idx="2"/>
+          </p:nvPr>
+        </p:nvSpPr>
+        <p:spPr/>
+      </p:sp>
+      <p:sp>
+        <p:nvSpPr>
+          <p:cNvPr id="3" name="Notes Placeholder 2"/>
+          <p:cNvSpPr>
+            <a:spLocks noGrp="1"/>
+          </p:cNvSpPr>
+          <p:nvPr>
+            <p:ph type="body" idx="3" sz="quarter"/>
+          </p:nvPr>
+        </p:nvSpPr>
+        <p:spPr/>
+        <p:txBody>
+          <a:bodyPr/>
+          <a:lstStyle/>
+          <a:p>
+            <a:r>
+              <a:t>Para un trigger de DELETE se retorna OLD, porque NEW no existe en ese evento; simetricamente, en un INSERT no existe OLD.</a:t>
+            </a:r>
+          </a:p>
+          <a:p>
+            <a:r>
+              <a:t>FOR EACH ROW indica que se ejecuta una vez por fila afectada y da acceso a OLD y NEW.</a:t>
+            </a:r>
+          </a:p>
+          <a:p>
+            <a:r>
+              <a:t>La regla operativa, que es la que se califica en la pregunta 4, se dice en una frase: el que VALIDA va BEFORE, porque tiene que abortar antes de que el dato quede escrito y porque solo ahi puede corregirlo; el que AUDITA va AFTER, porque registra un hecho ya consumado.</a:t>
+            </a:r>
+          </a:p>
+        </p:txBody>
+      </p:sp>
+      <p:sp>
+        <p:nvSpPr>
+          <p:cNvPr id="4" name="Slide Number Placeholder 3"/>
+          <p:cNvSpPr>
+            <a:spLocks noGrp="1"/>
+          </p:cNvSpPr>
+          <p:nvPr>
+            <p:ph type="sldNum" idx="5" sz="quarter"/>
+          </p:nvPr>
+        </p:nvSpPr>
+        <p:spPr/>
+      </p:sp>
+    </p:spTree>
+  </p:cSld>
+  <p:clrMapOvr>
+    <a:masterClrMapping/>
+  </p:clrMapOvr>
+</p:notes>
+</file>
+
+<file path=ppt/notesSlides/notesSlide5.xml><?xml version="1.0" encoding="utf-8"?>
+<p:notes xmlns:a="http://schemas.openxmlformats.org/drawingml/2006/main" xmlns:p="http://schemas.openxmlformats.org/presentationml/2006/main" xmlns:r="http://schemas.openxmlformats.org/officeDocument/2006/relationships">
+  <p:cSld>
+    <p:spTree>
+      <p:nvGrpSpPr>
+        <p:cNvPr id="1" name=""/>
+        <p:cNvGrpSpPr/>
+        <p:nvPr/>
+      </p:nvGrpSpPr>
+      <p:grpSpPr>
+        <a:xfrm>
+          <a:off x="0" y="0"/>
+          <a:ext cx="0" cy="0"/>
+          <a:chOff x="0" y="0"/>
+          <a:chExt cx="0" cy="0"/>
+        </a:xfrm>
+      </p:grpSpPr>
+      <p:sp>
+        <p:nvSpPr>
+          <p:cNvPr id="2" name="Slide Image Placeholder 1"/>
+          <p:cNvSpPr>
+            <a:spLocks noGrp="1"/>
+          </p:cNvSpPr>
+          <p:nvPr>
+            <p:ph type="sldImg" idx="2"/>
+          </p:nvPr>
+        </p:nvSpPr>
+        <p:spPr/>
+      </p:sp>
+      <p:sp>
+        <p:nvSpPr>
+          <p:cNvPr id="3" name="Notes Placeholder 2"/>
+          <p:cNvSpPr>
+            <a:spLocks noGrp="1"/>
+          </p:cNvSpPr>
+          <p:nvPr>
+            <p:ph type="body" idx="3" sz="quarter"/>
+          </p:nvPr>
+        </p:nvSpPr>
+        <p:spPr/>
+        <p:txBody>
+          <a:bodyPr/>
+          <a:lstStyle/>
+          <a:p>
+            <a:r>
+              <a:t>Vale leer la cabecera del trigger del proyecto palabra por palabra, porque cada pieza tiene razon.</a:t>
+            </a:r>
+          </a:p>
+          <a:p>
+            <a:r>
+              <a:t>AFTER UPDATE OF estado ON cita limita el disparo a los cambios de esa columna y no a cualquier actualizacion de la fila, de modo que corregir el telefono no escribe una fila de auditoria.</a:t>
+            </a:r>
+          </a:p>
+          <a:p>
+            <a:r>
+              <a:t>FOR EACH ROW da acceso a OLD y NEW.</a:t>
+            </a:r>
+          </a:p>
+          <a:p>
+            <a:r>
+              <a:t>Sin WHEN, la auditoria se llena de eventos donde no cambio nada y deja de servir para investigar.</a:t>
+            </a:r>
+          </a:p>
+          <a:p>
+            <a:r>
+              <a:t>Conviene detenerse en esos dos defaults porque tienen matices. current_user devuelve el rol EFECTIVO, es decir el que la Clase 2 cambiaba con SET ROLE, y no necesariamente quien inicio la sesion, que es session_user; para auditar interesa el efectivo.</a:t>
+            </a:r>
+          </a:p>
+          <a:p>
+            <a:r>
+              <a:t>Y now() devuelve el instante de inicio de la transaccion, no el del reloj, asi que si una transaccion escribe cinco filas de auditoria las cinco llevan la misma marca de tiempo; si eso importa, existe clock_timestamp().</a:t>
+            </a:r>
+          </a:p>
+          <a:p>
+            <a:r>
+              <a:t>Como referencia de dimensionamiento, si la clinica registra doscientos cambios auditables por dia, la tabla crece del orden de setenta y tres mil filas en doce meses, cifra que obliga a definir retencion en el mismo plan de respaldo.</a:t>
+            </a:r>
+          </a:p>
+        </p:txBody>
+      </p:sp>
+      <p:sp>
+        <p:nvSpPr>
+          <p:cNvPr id="4" name="Slide Number Placeholder 3"/>
+          <p:cNvSpPr>
+            <a:spLocks noGrp="1"/>
+          </p:cNvSpPr>
+          <p:nvPr>
+            <p:ph type="sldNum" idx="5" sz="quarter"/>
+          </p:nvPr>
+        </p:nvSpPr>
+        <p:spPr/>
+      </p:sp>
+    </p:spTree>
+  </p:cSld>
+  <p:clrMapOvr>
+    <a:masterClrMapping/>
+  </p:clrMapOvr>
+</p:notes>
+</file>
+
+<file path=ppt/notesSlides/notesSlide6.xml><?xml version="1.0" encoding="utf-8"?>
+<p:notes xmlns:a="http://schemas.openxmlformats.org/drawingml/2006/main" xmlns:p="http://schemas.openxmlformats.org/presentationml/2006/main" xmlns:r="http://schemas.openxmlformats.org/officeDocument/2006/relationships">
+  <p:cSld>
+    <p:spTree>
+      <p:nvGrpSpPr>
+        <p:cNvPr id="1" name=""/>
+        <p:cNvGrpSpPr/>
+        <p:nvPr/>
+      </p:nvGrpSpPr>
+      <p:grpSpPr>
+        <a:xfrm>
+          <a:off x="0" y="0"/>
+          <a:ext cx="0" cy="0"/>
+          <a:chOff x="0" y="0"/>
+          <a:chExt cx="0" cy="0"/>
+        </a:xfrm>
+      </p:grpSpPr>
+      <p:sp>
+        <p:nvSpPr>
+          <p:cNvPr id="2" name="Slide Image Placeholder 1"/>
+          <p:cNvSpPr>
+            <a:spLocks noGrp="1"/>
+          </p:cNvSpPr>
+          <p:nvPr>
+            <p:ph type="sldImg" idx="2"/>
+          </p:nvPr>
+        </p:nvSpPr>
+        <p:spPr/>
+      </p:sp>
+      <p:sp>
+        <p:nvSpPr>
+          <p:cNvPr id="3" name="Notes Placeholder 2"/>
+          <p:cNvSpPr>
+            <a:spLocks noGrp="1"/>
+          </p:cNvSpPr>
+          <p:nvPr>
+            <p:ph type="body" idx="3" sz="quarter"/>
+          </p:nvPr>
+        </p:nvSpPr>
+        <p:spPr/>
+        <p:txBody>
+          <a:bodyPr/>
+          <a:lstStyle/>
+          <a:p>
+            <a:r>
+              <a:t>Lo que un CHECK no puede hacer es mirar OTRA fila, OTRA tabla, o el valor ANTERIOR de la fila que se esta cambiando; solo ve los valores finales de la fila que se inserta o actualiza.</a:t>
+            </a:r>
+          </a:p>
+          <a:p>
+            <a:r>
+              <a:t>Por eso el trigger de stock del taller no es un reemplazo del CHECK sino una demostracion de la capacidad extra: la funcion fn_trg_stock_no_negativo() puede escribir RAISE EXCEPTION 'ERROR: el stock de % no puede quedar negativo (resultado: %)', OLD.nombre, NEW.stock, es decir puede nombrar el insumo tomando el dato de OLD y el resultado de NEW en el mismo mensaje.</a:t>
+            </a:r>
+          </a:p>
+        </p:txBody>
+      </p:sp>
+      <p:sp>
+        <p:nvSpPr>
+          <p:cNvPr id="4" name="Slide Number Placeholder 3"/>
+          <p:cNvSpPr>
+            <a:spLocks noGrp="1"/>
+          </p:cNvSpPr>
+          <p:nvPr>
+            <p:ph type="sldNum" idx="5" sz="quarter"/>
+          </p:nvPr>
+        </p:nvSpPr>
+        <p:spPr/>
+      </p:sp>
+    </p:spTree>
+  </p:cSld>
+  <p:clrMapOvr>
+    <a:masterClrMapping/>
+  </p:clrMapOvr>
+</p:notes>
+</file>
+
+<file path=ppt/notesSlides/notesSlide7.xml><?xml version="1.0" encoding="utf-8"?>
+<p:notes xmlns:a="http://schemas.openxmlformats.org/drawingml/2006/main" xmlns:p="http://schemas.openxmlformats.org/presentationml/2006/main" xmlns:r="http://schemas.openxmlformats.org/officeDocument/2006/relationships">
+  <p:cSld>
+    <p:spTree>
+      <p:nvGrpSpPr>
+        <p:cNvPr id="1" name=""/>
+        <p:cNvGrpSpPr/>
+        <p:nvPr/>
+      </p:nvGrpSpPr>
+      <p:grpSpPr>
+        <a:xfrm>
+          <a:off x="0" y="0"/>
+          <a:ext cx="0" cy="0"/>
+          <a:chOff x="0" y="0"/>
+          <a:chExt cx="0" cy="0"/>
+        </a:xfrm>
+      </p:grpSpPr>
+      <p:sp>
+        <p:nvSpPr>
+          <p:cNvPr id="2" name="Slide Image Placeholder 1"/>
+          <p:cNvSpPr>
+            <a:spLocks noGrp="1"/>
+          </p:cNvSpPr>
+          <p:nvPr>
+            <p:ph type="sldImg" idx="2"/>
+          </p:nvPr>
+        </p:nvSpPr>
+        <p:spPr/>
+      </p:sp>
+      <p:sp>
+        <p:nvSpPr>
+          <p:cNvPr id="3" name="Notes Placeholder 2"/>
+          <p:cNvSpPr>
+            <a:spLocks noGrp="1"/>
+          </p:cNvSpPr>
+          <p:nvPr>
+            <p:ph type="body" idx="3" sz="quarter"/>
+          </p:nvPr>
+        </p:nvSpPr>
+        <p:spPr/>
+        <p:txBody>
+          <a:bodyPr/>
+          <a:lstStyle/>
+          <a:p>
+            <a:r>
+              <a:t>La pregunta 4 vale quince puntos, no pide codigo y es la que mejor mide si el estudiante entendio el dia: hay que ubicar cada validacion en su capa y justificar por que ahi.</a:t>
+            </a:r>
+          </a:p>
+          <a:p>
+            <a:r>
+              <a:t>Conviene dictar las cuatro capas en orden de preferencia, porque el orden es la respuesta.</a:t>
+            </a:r>
+          </a:p>
+          <a:p>
+            <a:r>
+              <a:t>Las dos pasan la verificacion y las dos insertan.</a:t>
+            </a:r>
+          </a:p>
+          <a:p>
+            <a:r>
+              <a:t>La respuesta correcta es declarativa ——, es mas rapida, mas clara y a prueba de concurrencia, y el porque completo llega en la Clase 10.</a:t>
+            </a:r>
+          </a:p>
+        </p:txBody>
+      </p:sp>
+      <p:sp>
+        <p:nvSpPr>
+          <p:cNvPr id="4" name="Slide Number Placeholder 3"/>
+          <p:cNvSpPr>
+            <a:spLocks noGrp="1"/>
+          </p:cNvSpPr>
+          <p:nvPr>
+            <p:ph type="sldNum" idx="5" sz="quarter"/>
+          </p:nvPr>
+        </p:nvSpPr>
+        <p:spPr/>
+      </p:sp>
+    </p:spTree>
+  </p:cSld>
+  <p:clrMapOvr>
+    <a:masterClrMapping/>
+  </p:clrMapOvr>
+</p:notes>
+</file>
+
+<file path=ppt/notesSlides/notesSlide8.xml><?xml version="1.0" encoding="utf-8"?>
+<p:notes xmlns:a="http://schemas.openxmlformats.org/drawingml/2006/main" xmlns:p="http://schemas.openxmlformats.org/presentationml/2006/main" xmlns:r="http://schemas.openxmlformats.org/officeDocument/2006/relationships">
+  <p:cSld>
+    <p:spTree>
+      <p:nvGrpSpPr>
+        <p:cNvPr id="1" name=""/>
+        <p:cNvGrpSpPr/>
+        <p:nvPr/>
+      </p:nvGrpSpPr>
+      <p:grpSpPr>
+        <a:xfrm>
+          <a:off x="0" y="0"/>
+          <a:ext cx="0" cy="0"/>
+          <a:chOff x="0" y="0"/>
+          <a:chExt cx="0" cy="0"/>
+        </a:xfrm>
+      </p:grpSpPr>
+      <p:sp>
+        <p:nvSpPr>
+          <p:cNvPr id="2" name="Slide Image Placeholder 1"/>
+          <p:cNvSpPr>
+            <a:spLocks noGrp="1"/>
+          </p:cNvSpPr>
+          <p:nvPr>
+            <p:ph type="sldImg" idx="2"/>
+          </p:nvPr>
+        </p:nvSpPr>
+        <p:spPr/>
+      </p:sp>
+      <p:sp>
+        <p:nvSpPr>
+          <p:cNvPr id="3" name="Notes Placeholder 2"/>
+          <p:cNvSpPr>
+            <a:spLocks noGrp="1"/>
+          </p:cNvSpPr>
+          <p:nvPr>
+            <p:ph type="body" idx="3" sz="quarter"/>
+          </p:nvPr>
+        </p:nvSpPr>
+        <p:spPr/>
+        <p:txBody>
+          <a:bodyPr/>
+          <a:lstStyle/>
+          <a:p>
+            <a:r>
+              <a:t>Hay tres riesgos que conviene exponer con ejemplos y no como advertencia generica.</a:t>
+            </a:r>
+          </a:p>
+          <a:p>
+            <a:r>
+              <a:t>PostgreSQL no la prohibe, la corta cuando se agota la pila, y eso ocurre en produccion y con datos reales, no durante la prueba.</a:t>
+            </a:r>
+          </a:p>
+          <a:p>
+            <a:r>
+              <a:t>TRUNCATE no dispara triggers de fila, asi que un TRUNCATE insumo pasa por encima de la validacion de stock sin que se escriba una sola linea de auditoria.</a:t>
+            </a:r>
+          </a:p>
+        </p:txBody>
+      </p:sp>
+      <p:sp>
+        <p:nvSpPr>
+          <p:cNvPr id="4" name="Slide Number Placeholder 3"/>
+          <p:cNvSpPr>
+            <a:spLocks noGrp="1"/>
+          </p:cNvSpPr>
+          <p:nvPr>
+            <p:ph type="sldNum" idx="5" sz="quarter"/>
+          </p:nvPr>
+        </p:nvSpPr>
+        <p:spPr/>
+      </p:sp>
+    </p:spTree>
+  </p:cSld>
+  <p:clrMapOvr>
+    <a:masterClrMapping/>
+  </p:clrMapOvr>
+</p:notes>
+</file>
+
+<file path=ppt/notesSlides/notesSlide9.xml><?xml version="1.0" encoding="utf-8"?>
+<p:notes xmlns:a="http://schemas.openxmlformats.org/drawingml/2006/main" xmlns:p="http://schemas.openxmlformats.org/presentationml/2006/main" xmlns:r="http://schemas.openxmlformats.org/officeDocument/2006/relationships">
+  <p:cSld>
+    <p:spTree>
+      <p:nvGrpSpPr>
+        <p:cNvPr id="1" name=""/>
+        <p:cNvGrpSpPr/>
+        <p:nvPr/>
+      </p:nvGrpSpPr>
+      <p:grpSpPr>
+        <a:xfrm>
+          <a:off x="0" y="0"/>
+          <a:ext cx="0" cy="0"/>
+          <a:chOff x="0" y="0"/>
+          <a:chExt cx="0" cy="0"/>
+        </a:xfrm>
+      </p:grpSpPr>
+      <p:sp>
+        <p:nvSpPr>
+          <p:cNvPr id="2" name="Slide Image Placeholder 1"/>
+          <p:cNvSpPr>
+            <a:spLocks noGrp="1"/>
+          </p:cNvSpPr>
+          <p:nvPr>
+            <p:ph type="sldImg" idx="2"/>
+          </p:nvPr>
+        </p:nvSpPr>
+        <p:spPr/>
+      </p:sp>
+      <p:sp>
+        <p:nvSpPr>
+          <p:cNvPr id="3" name="Notes Placeholder 2"/>
+          <p:cNvSpPr>
+            <a:spLocks noGrp="1"/>
+          </p:cNvSpPr>
+          <p:nvPr>
+            <p:ph type="body" idx="3" sz="quarter"/>
+          </p:nvPr>
+        </p:nvSpPr>
+        <p:spPr/>
+        <p:txBody>
+          <a:bodyPr/>
+          <a:lstStyle/>
+          <a:p>
+            <a:r>
+              <a:t>RPO y RTO dejan de ser siglas cuando se les pone un numero acordado con el negocio, y la rubrica pide precisamente el numero con su justificacion.</a:t>
+            </a:r>
+          </a:p>
+          <a:p>
+            <a:r>
+              <a:t>Probar un restore de verdad tiene cuatro pasos y conviene dictarlos como procedimiento.</a:t>
+            </a:r>
+          </a:p>
+          <a:p>
+            <a:r>
+              <a:t>Cuatro, dejar bitacora con fecha, responsable, resultado y RTO medido; si no hay bitacora, la prueba no existe.</a:t>
+            </a:r>
+          </a:p>
+        </p:txBody>
+      </p:sp>
+      <p:sp>
+        <p:nvSpPr>
+          <p:cNvPr id="4" name="Slide Number Placeholder 3"/>
+          <p:cNvSpPr>
+            <a:spLocks noGrp="1"/>
+          </p:cNvSpPr>
+          <p:nvPr>
+            <p:ph type="sldNum" idx="5" sz="quarter"/>
+          </p:nvPr>
+        </p:nvSpPr>
+        <p:spPr/>
+      </p:sp>
+    </p:spTree>
+  </p:cSld>
+  <p:clrMapOvr>
+    <a:masterClrMapping/>
+  </p:clrMapOvr>
+</p:notes>
 </file>
 
 <file path=ppt/slideLayouts/slideLayout1.xml><?xml version="1.0" encoding="utf-8"?>
@@ -6540,7 +7712,7 @@
                 </a:solidFill>
                 <a:latin typeface="Calibri"/>
               </a:rPr>
-              <a:t>Encuadre de hoy · Objetivo PI</a:t>
+              <a:t>Encuadre de hoy · Tema y objetivo</a:t>
             </a:r>
           </a:p>
         </p:txBody>
@@ -6588,7 +7760,7 @@
                 </a:solidFill>
                 <a:latin typeface="Calibri"/>
               </a:rPr>
-              <a:t>Hoy avanzamos el PI en:</a:t>
+              <a:t>Tema de hoy:</a:t>
             </a:r>
             <a:r>
               <a:rPr sz="2000" b="0" i="0">
@@ -6597,7 +7769,7 @@
                 </a:solidFill>
                 <a:latin typeface="Calibri"/>
               </a:rPr>
-              <a:t> &gt;=1 funcion + &gt;=1 trigger + borrador plan de respaldo</a:t>
+              <a:t> Funciones · Triggers · Seguridad y respaldo</a:t>
             </a:r>
           </a:p>
           <a:p>
@@ -6642,6 +7814,13 @@
               </a:rPr>
               <a:t>120 min</a:t>
             </a:r>
+          </a:p>
+          <a:p>
+            <a:pPr>
+              <a:spcAft>
+                <a:spcPts val="800"/>
+              </a:spcAft>
+            </a:pPr>
             <a:r>
               <a:rPr sz="2000" b="0" i="0">
                 <a:solidFill>
@@ -6649,7 +7828,7 @@
                 </a:solidFill>
                 <a:latin typeface="Calibri"/>
               </a:rPr>
-              <a:t> · Teoría breve · Taller PI</a:t>
+              <a:t>–   Gratis + navegador · free tier · sin software de pago obligatorio.</a:t>
             </a:r>
           </a:p>
           <a:p>
@@ -6665,17 +7844,15 @@
                 </a:solidFill>
                 <a:latin typeface="Calibri"/>
               </a:rPr>
-              <a:t>–   </a:t>
-            </a:r>
-            <a:r>
-              <a:rPr sz="2000" b="1" i="0">
-                <a:solidFill>
-                  <a:srgbClr val="333333"/>
-                </a:solidFill>
-                <a:latin typeface="Calibri"/>
-              </a:rPr>
-              <a:t>Entregable de hoy:</a:t>
-            </a:r>
+              <a:t>–   Recorrido: teoría del tema, una lámina por concepto, y demo del docente sobre VetCare DB.</a:t>
+            </a:r>
+          </a:p>
+          <a:p>
+            <a:pPr>
+              <a:spcAft>
+                <a:spcPts val="800"/>
+              </a:spcAft>
+            </a:pPr>
             <a:r>
               <a:rPr sz="2000" b="0" i="0">
                 <a:solidFill>
@@ -6683,55 +7860,7 @@
                 </a:solidFill>
                 <a:latin typeface="Calibri"/>
               </a:rPr>
-              <a:t> fn_precio_consulta + 2 triggers corriendo en la plataforma del curso + Plan_Backup_VetCare con sus 6 secciones (1 pag.)</a:t>
-            </a:r>
-          </a:p>
-          <a:p>
-            <a:pPr>
-              <a:spcAft>
-                <a:spcPts val="800"/>
-              </a:spcAft>
-            </a:pPr>
-            <a:r>
-              <a:rPr sz="2000" b="0" i="0">
-                <a:solidFill>
-                  <a:srgbClr val="333333"/>
-                </a:solidFill>
-                <a:latin typeface="Calibri"/>
-              </a:rPr>
-              <a:t>–   Gratis + navegador · free tier · sin software de pago obligatorio.</a:t>
-            </a:r>
-          </a:p>
-          <a:p>
-            <a:pPr>
-              <a:spcAft>
-                <a:spcPts val="800"/>
-              </a:spcAft>
-            </a:pPr>
-            <a:r>
-              <a:rPr sz="2000" b="0" i="0">
-                <a:solidFill>
-                  <a:srgbClr val="333333"/>
-                </a:solidFill>
-                <a:latin typeface="Calibri"/>
-              </a:rPr>
-              <a:t>–   La teoría no es un tema aislado: alimenta evidencias de la rúbrica del PI.</a:t>
-            </a:r>
-          </a:p>
-          <a:p>
-            <a:pPr>
-              <a:spcAft>
-                <a:spcPts val="800"/>
-              </a:spcAft>
-            </a:pPr>
-            <a:r>
-              <a:rPr sz="2000" b="0" i="0">
-                <a:solidFill>
-                  <a:srgbClr val="333333"/>
-                </a:solidFill>
-                <a:latin typeface="Calibri"/>
-              </a:rPr>
-              <a:t>–   Al salir: avance concreto en su paquete VetCare.</a:t>
+              <a:t>–   Cada lámina se sostiene sola: sirve para repasar aunque hayas faltado.</a:t>
             </a:r>
           </a:p>
         </p:txBody>
@@ -10167,7 +11296,7 @@
                 </a:solidFill>
                 <a:latin typeface="Calibri"/>
               </a:rPr>
-              <a:t>Taller guiado = tarea del PI</a:t>
+              <a:t>Práctica (opcional, guía en la carpeta)</a:t>
             </a:r>
           </a:p>
         </p:txBody>
@@ -10282,7 +11411,7 @@
                 </a:solidFill>
                 <a:latin typeface="Calibri"/>
               </a:rPr>
-              <a:t>Criterios de exito · cierre · dudas del PI</a:t>
+              <a:t>Cierre conceptual · dudas</a:t>
             </a:r>
           </a:p>
         </p:txBody>
@@ -17484,13 +18613,13 @@
         <p:spPr>
           <a:xfrm>
             <a:off x="0" y="0"/>
-            <a:ext cx="12191695" cy="1170432"/>
+            <a:ext cx="12191695" cy="164592"/>
           </a:xfrm>
           <a:prstGeom prst="rect">
             <a:avLst/>
           </a:prstGeom>
           <a:solidFill>
-            <a:srgbClr val="095292"/>
+            <a:srgbClr val="269CCB"/>
           </a:solidFill>
           <a:ln>
             <a:noFill/>
@@ -17518,251 +18647,9 @@
           </a:p>
         </p:txBody>
       </p:sp>
-      <p:sp>
-        <p:nvSpPr>
-          <p:cNvPr id="3" name="Rectangle 2"/>
-          <p:cNvSpPr/>
-          <p:nvPr/>
-        </p:nvSpPr>
-        <p:spPr>
-          <a:xfrm>
-            <a:off x="0" y="1170432"/>
-            <a:ext cx="12191695" cy="41148"/>
-          </a:xfrm>
-          <a:prstGeom prst="rect">
-            <a:avLst/>
-          </a:prstGeom>
-          <a:solidFill>
-            <a:srgbClr val="FFD000"/>
-          </a:solidFill>
-          <a:ln>
-            <a:noFill/>
-          </a:ln>
-        </p:spPr>
-        <p:style>
-          <a:lnRef idx="1">
-            <a:schemeClr val="accent1"/>
-          </a:lnRef>
-          <a:fillRef idx="3">
-            <a:schemeClr val="accent1"/>
-          </a:fillRef>
-          <a:effectRef idx="2">
-            <a:schemeClr val="accent1"/>
-          </a:effectRef>
-          <a:fontRef idx="minor">
-            <a:schemeClr val="lt1"/>
-          </a:fontRef>
-        </p:style>
-        <p:txBody>
-          <a:bodyPr rtlCol="0" anchor="ctr"/>
-          <a:lstStyle/>
-          <a:p>
-            <a:pPr algn="ctr"/>
-          </a:p>
-        </p:txBody>
-      </p:sp>
-      <p:sp>
-        <p:nvSpPr>
-          <p:cNvPr id="4" name="TextBox 3"/>
-          <p:cNvSpPr txBox="1"/>
-          <p:nvPr/>
-        </p:nvSpPr>
-        <p:spPr>
-          <a:xfrm>
-            <a:off x="457200" y="164592"/>
-            <a:ext cx="11277295" cy="384048"/>
-          </a:xfrm>
-          <a:prstGeom prst="rect">
-            <a:avLst/>
-          </a:prstGeom>
-          <a:noFill/>
-        </p:spPr>
-        <p:txBody>
-          <a:bodyPr wrap="square">
-            <a:spAutoFit/>
-          </a:bodyPr>
-          <a:lstStyle/>
-          <a:p>
-            <a:r>
-              <a:rPr sz="2600" b="1" i="0">
-                <a:solidFill>
-                  <a:srgbClr val="FFFFFF"/>
-                </a:solidFill>
-                <a:latin typeface="Calibri"/>
-              </a:rPr>
-              <a:t>Herramientas de hoy</a:t>
-            </a:r>
-          </a:p>
-        </p:txBody>
-      </p:sp>
-      <p:sp>
-        <p:nvSpPr>
-          <p:cNvPr id="5" name="TextBox 4"/>
-          <p:cNvSpPr txBox="1"/>
-          <p:nvPr/>
-        </p:nvSpPr>
-        <p:spPr>
-          <a:xfrm>
-            <a:off x="457200" y="566928"/>
-            <a:ext cx="11277295" cy="411480"/>
-          </a:xfrm>
-          <a:prstGeom prst="rect">
-            <a:avLst/>
-          </a:prstGeom>
-          <a:noFill/>
-        </p:spPr>
-        <p:txBody>
-          <a:bodyPr wrap="square">
-            <a:spAutoFit/>
-          </a:bodyPr>
-          <a:lstStyle/>
-          <a:p>
-            <a:r>
-              <a:rPr sz="1400" b="0" i="0">
-                <a:solidFill>
-                  <a:srgbClr val="B8D8EE"/>
-                </a:solidFill>
-                <a:latin typeface="Calibri"/>
-              </a:rPr>
-              <a:t>Gratis · navegador o free tier</a:t>
-            </a:r>
-          </a:p>
-        </p:txBody>
-      </p:sp>
-      <p:sp>
-        <p:nvSpPr>
-          <p:cNvPr id="6" name="Rounded Rectangle 5"/>
-          <p:cNvSpPr/>
-          <p:nvPr/>
-        </p:nvSpPr>
-        <p:spPr>
-          <a:xfrm>
-            <a:off x="457200" y="1591056"/>
-            <a:ext cx="3624986" cy="2299716"/>
-          </a:xfrm>
-          <a:prstGeom prst="roundRect">
-            <a:avLst>
-              <a:gd name="adj" fmla="val 12000"/>
-            </a:avLst>
-          </a:prstGeom>
-          <a:solidFill>
-            <a:srgbClr val="F2F2F2"/>
-          </a:solidFill>
-          <a:ln>
-            <a:noFill/>
-          </a:ln>
-        </p:spPr>
-        <p:style>
-          <a:lnRef idx="1">
-            <a:schemeClr val="accent1"/>
-          </a:lnRef>
-          <a:fillRef idx="3">
-            <a:schemeClr val="accent1"/>
-          </a:fillRef>
-          <a:effectRef idx="2">
-            <a:schemeClr val="accent1"/>
-          </a:effectRef>
-          <a:fontRef idx="minor">
-            <a:schemeClr val="lt1"/>
-          </a:fontRef>
-        </p:style>
-        <p:txBody>
-          <a:bodyPr rtlCol="0" anchor="ctr"/>
-          <a:lstStyle/>
-          <a:p>
-            <a:pPr algn="ctr"/>
-          </a:p>
-        </p:txBody>
-      </p:sp>
-      <p:sp>
-        <p:nvSpPr>
-          <p:cNvPr id="7" name="Rectangle 6"/>
-          <p:cNvSpPr/>
-          <p:nvPr/>
-        </p:nvSpPr>
-        <p:spPr>
-          <a:xfrm>
-            <a:off x="457200" y="1591056"/>
-            <a:ext cx="3624986" cy="64008"/>
-          </a:xfrm>
-          <a:prstGeom prst="rect">
-            <a:avLst/>
-          </a:prstGeom>
-          <a:solidFill>
-            <a:srgbClr val="095292"/>
-          </a:solidFill>
-          <a:ln>
-            <a:noFill/>
-          </a:ln>
-        </p:spPr>
-        <p:style>
-          <a:lnRef idx="1">
-            <a:schemeClr val="accent1"/>
-          </a:lnRef>
-          <a:fillRef idx="3">
-            <a:schemeClr val="accent1"/>
-          </a:fillRef>
-          <a:effectRef idx="2">
-            <a:schemeClr val="accent1"/>
-          </a:effectRef>
-          <a:fontRef idx="minor">
-            <a:schemeClr val="lt1"/>
-          </a:fontRef>
-        </p:style>
-        <p:txBody>
-          <a:bodyPr rtlCol="0" anchor="ctr"/>
-          <a:lstStyle/>
-          <a:p>
-            <a:pPr algn="ctr"/>
-          </a:p>
-        </p:txBody>
-      </p:sp>
-      <p:sp>
-        <p:nvSpPr>
-          <p:cNvPr id="8" name="Rectangle 7"/>
-          <p:cNvSpPr/>
-          <p:nvPr/>
-        </p:nvSpPr>
-        <p:spPr>
-          <a:xfrm>
-            <a:off x="457200" y="1655064"/>
-            <a:ext cx="3624986" cy="27432"/>
-          </a:xfrm>
-          <a:prstGeom prst="rect">
-            <a:avLst/>
-          </a:prstGeom>
-          <a:solidFill>
-            <a:srgbClr val="FFD000"/>
-          </a:solidFill>
-          <a:ln>
-            <a:noFill/>
-          </a:ln>
-        </p:spPr>
-        <p:style>
-          <a:lnRef idx="1">
-            <a:schemeClr val="accent1"/>
-          </a:lnRef>
-          <a:fillRef idx="3">
-            <a:schemeClr val="accent1"/>
-          </a:fillRef>
-          <a:effectRef idx="2">
-            <a:schemeClr val="accent1"/>
-          </a:effectRef>
-          <a:fontRef idx="minor">
-            <a:schemeClr val="lt1"/>
-          </a:fontRef>
-        </p:style>
-        <p:txBody>
-          <a:bodyPr rtlCol="0" anchor="ctr"/>
-          <a:lstStyle/>
-          <a:p>
-            <a:pPr algn="ctr"/>
-          </a:p>
-        </p:txBody>
-      </p:sp>
       <p:pic>
         <p:nvPicPr>
-          <p:cNvPr id="9" name="Picture 8" descr="examlab.png"/>
+          <p:cNvPr id="3" name="Picture 2" descr="logo_uniajc_color.png"/>
           <p:cNvPicPr>
             <a:picLocks noChangeAspect="1"/>
           </p:cNvPicPr>
@@ -17776,8 +18663,8 @@
         </p:blipFill>
         <p:spPr>
           <a:xfrm>
-            <a:off x="1659331" y="1847087"/>
-            <a:ext cx="1220724" cy="1220724"/>
+            <a:off x="10271455" y="5998464"/>
+            <a:ext cx="1463040" cy="643233"/>
           </a:xfrm>
           <a:prstGeom prst="rect">
             <a:avLst/>
@@ -17786,14 +18673,14 @@
       </p:pic>
       <p:sp>
         <p:nvSpPr>
-          <p:cNvPr id="10" name="TextBox 9"/>
+          <p:cNvPr id="4" name="TextBox 3"/>
           <p:cNvSpPr txBox="1"/>
           <p:nvPr/>
         </p:nvSpPr>
         <p:spPr>
           <a:xfrm>
-            <a:off x="530352" y="3159251"/>
-            <a:ext cx="3478682" cy="621792"/>
+            <a:off x="457200" y="1737360"/>
+            <a:ext cx="11277295" cy="1097280"/>
           </a:xfrm>
           <a:prstGeom prst="rect">
             <a:avLst/>
@@ -17801,660 +18688,32 @@
           <a:noFill/>
         </p:spPr>
         <p:txBody>
-          <a:bodyPr wrap="square" anchor="t"/>
+          <a:bodyPr wrap="square" anchor="ctr"/>
           <a:lstStyle/>
           <a:p>
             <a:pPr algn="ctr"/>
             <a:r>
-              <a:rPr sz="1300" b="1" i="0">
+              <a:rPr sz="3400" b="1" i="0">
                 <a:solidFill>
                   <a:srgbClr val="095292"/>
                 </a:solidFill>
                 <a:latin typeface="Calibri"/>
               </a:rPr>
-              <a:t>la plataforma del curso</a:t>
-            </a:r>
-          </a:p>
-          <a:p>
-            <a:pPr algn="ctr">
-              <a:spcBef>
-                <a:spcPts val="200"/>
-              </a:spcBef>
-            </a:pPr>
-            <a:r>
-              <a:rPr sz="1000" b="0" i="0">
-                <a:solidFill>
-                  <a:srgbClr val="666666"/>
-                </a:solidFill>
-                <a:latin typeface="Calibri"/>
-              </a:rPr>
-              <a:t>Funcion y triggers</a:t>
-            </a:r>
-          </a:p>
-        </p:txBody>
-      </p:sp>
-      <p:sp>
-        <p:nvSpPr>
-          <p:cNvPr id="11" name="Rounded Rectangle 10"/>
-          <p:cNvSpPr/>
-          <p:nvPr/>
-        </p:nvSpPr>
-        <p:spPr>
-          <a:xfrm>
-            <a:off x="4283354" y="1591056"/>
-            <a:ext cx="3624986" cy="2299716"/>
-          </a:xfrm>
-          <a:prstGeom prst="roundRect">
-            <a:avLst>
-              <a:gd name="adj" fmla="val 12000"/>
-            </a:avLst>
-          </a:prstGeom>
-          <a:solidFill>
-            <a:srgbClr val="F2F2F2"/>
-          </a:solidFill>
-          <a:ln>
-            <a:noFill/>
-          </a:ln>
-        </p:spPr>
-        <p:style>
-          <a:lnRef idx="1">
-            <a:schemeClr val="accent1"/>
-          </a:lnRef>
-          <a:fillRef idx="3">
-            <a:schemeClr val="accent1"/>
-          </a:fillRef>
-          <a:effectRef idx="2">
-            <a:schemeClr val="accent1"/>
-          </a:effectRef>
-          <a:fontRef idx="minor">
-            <a:schemeClr val="lt1"/>
-          </a:fontRef>
-        </p:style>
-        <p:txBody>
-          <a:bodyPr rtlCol="0" anchor="ctr"/>
-          <a:lstStyle/>
-          <a:p>
-            <a:pPr algn="ctr"/>
-          </a:p>
-        </p:txBody>
-      </p:sp>
-      <p:sp>
-        <p:nvSpPr>
-          <p:cNvPr id="12" name="Rectangle 11"/>
-          <p:cNvSpPr/>
-          <p:nvPr/>
-        </p:nvSpPr>
-        <p:spPr>
-          <a:xfrm>
-            <a:off x="4283354" y="1591056"/>
-            <a:ext cx="3624986" cy="64008"/>
-          </a:xfrm>
-          <a:prstGeom prst="rect">
-            <a:avLst/>
-          </a:prstGeom>
-          <a:solidFill>
-            <a:srgbClr val="095292"/>
-          </a:solidFill>
-          <a:ln>
-            <a:noFill/>
-          </a:ln>
-        </p:spPr>
-        <p:style>
-          <a:lnRef idx="1">
-            <a:schemeClr val="accent1"/>
-          </a:lnRef>
-          <a:fillRef idx="3">
-            <a:schemeClr val="accent1"/>
-          </a:fillRef>
-          <a:effectRef idx="2">
-            <a:schemeClr val="accent1"/>
-          </a:effectRef>
-          <a:fontRef idx="minor">
-            <a:schemeClr val="lt1"/>
-          </a:fontRef>
-        </p:style>
-        <p:txBody>
-          <a:bodyPr rtlCol="0" anchor="ctr"/>
-          <a:lstStyle/>
-          <a:p>
-            <a:pPr algn="ctr"/>
-          </a:p>
-        </p:txBody>
-      </p:sp>
-      <p:sp>
-        <p:nvSpPr>
-          <p:cNvPr id="13" name="Rectangle 12"/>
-          <p:cNvSpPr/>
-          <p:nvPr/>
-        </p:nvSpPr>
-        <p:spPr>
-          <a:xfrm>
-            <a:off x="4283354" y="1655064"/>
-            <a:ext cx="3624986" cy="27432"/>
-          </a:xfrm>
-          <a:prstGeom prst="rect">
-            <a:avLst/>
-          </a:prstGeom>
-          <a:solidFill>
-            <a:srgbClr val="FFD000"/>
-          </a:solidFill>
-          <a:ln>
-            <a:noFill/>
-          </a:ln>
-        </p:spPr>
-        <p:style>
-          <a:lnRef idx="1">
-            <a:schemeClr val="accent1"/>
-          </a:lnRef>
-          <a:fillRef idx="3">
-            <a:schemeClr val="accent1"/>
-          </a:fillRef>
-          <a:effectRef idx="2">
-            <a:schemeClr val="accent1"/>
-          </a:effectRef>
-          <a:fontRef idx="minor">
-            <a:schemeClr val="lt1"/>
-          </a:fontRef>
-        </p:style>
-        <p:txBody>
-          <a:bodyPr rtlCol="0" anchor="ctr"/>
-          <a:lstStyle/>
-          <a:p>
-            <a:pPr algn="ctr"/>
-          </a:p>
-        </p:txBody>
-      </p:sp>
-      <p:pic>
-        <p:nvPicPr>
-          <p:cNvPr id="14" name="Picture 13" descr="google_docs.png"/>
-          <p:cNvPicPr>
-            <a:picLocks noChangeAspect="1"/>
-          </p:cNvPicPr>
-          <p:nvPr/>
-        </p:nvPicPr>
-        <p:blipFill>
-          <a:blip r:embed="rId3"/>
-          <a:stretch>
-            <a:fillRect/>
-          </a:stretch>
-        </p:blipFill>
-        <p:spPr>
-          <a:xfrm>
-            <a:off x="5485485" y="1847087"/>
-            <a:ext cx="1220724" cy="1220724"/>
-          </a:xfrm>
-          <a:prstGeom prst="rect">
-            <a:avLst/>
-          </a:prstGeom>
-        </p:spPr>
-      </p:pic>
-      <p:sp>
-        <p:nvSpPr>
-          <p:cNvPr id="15" name="TextBox 14"/>
+              <a:t>Clase 4 · Funciones · Triggers · Seguridad y respaldo</a:t>
+            </a:r>
+          </a:p>
+        </p:txBody>
+      </p:sp>
+      <p:sp>
+        <p:nvSpPr>
+          <p:cNvPr id="5" name="TextBox 4"/>
           <p:cNvSpPr txBox="1"/>
           <p:nvPr/>
         </p:nvSpPr>
         <p:spPr>
           <a:xfrm>
-            <a:off x="4356506" y="3159251"/>
-            <a:ext cx="3478682" cy="621792"/>
-          </a:xfrm>
-          <a:prstGeom prst="rect">
-            <a:avLst/>
-          </a:prstGeom>
-          <a:noFill/>
-        </p:spPr>
-        <p:txBody>
-          <a:bodyPr wrap="square" anchor="t"/>
-          <a:lstStyle/>
-          <a:p>
-            <a:pPr algn="ctr"/>
-            <a:r>
-              <a:rPr sz="1300" b="1" i="0">
-                <a:solidFill>
-                  <a:srgbClr val="095292"/>
-                </a:solidFill>
-                <a:latin typeface="Calibri"/>
-              </a:rPr>
-              <a:t>Google Docs</a:t>
-            </a:r>
-          </a:p>
-          <a:p>
-            <a:pPr algn="ctr">
-              <a:spcBef>
-                <a:spcPts val="200"/>
-              </a:spcBef>
-            </a:pPr>
-            <a:r>
-              <a:rPr sz="1000" b="0" i="0">
-                <a:solidFill>
-                  <a:srgbClr val="666666"/>
-                </a:solidFill>
-                <a:latin typeface="Calibri"/>
-              </a:rPr>
-              <a:t>Plan de respaldo</a:t>
-            </a:r>
-          </a:p>
-        </p:txBody>
-      </p:sp>
-      <p:sp>
-        <p:nvSpPr>
-          <p:cNvPr id="16" name="Rounded Rectangle 15"/>
-          <p:cNvSpPr/>
-          <p:nvPr/>
-        </p:nvSpPr>
-        <p:spPr>
-          <a:xfrm>
-            <a:off x="8109508" y="1591056"/>
-            <a:ext cx="3624986" cy="2299716"/>
-          </a:xfrm>
-          <a:prstGeom prst="roundRect">
-            <a:avLst>
-              <a:gd name="adj" fmla="val 12000"/>
-            </a:avLst>
-          </a:prstGeom>
-          <a:solidFill>
-            <a:srgbClr val="F2F2F2"/>
-          </a:solidFill>
-          <a:ln>
-            <a:noFill/>
-          </a:ln>
-        </p:spPr>
-        <p:style>
-          <a:lnRef idx="1">
-            <a:schemeClr val="accent1"/>
-          </a:lnRef>
-          <a:fillRef idx="3">
-            <a:schemeClr val="accent1"/>
-          </a:fillRef>
-          <a:effectRef idx="2">
-            <a:schemeClr val="accent1"/>
-          </a:effectRef>
-          <a:fontRef idx="minor">
-            <a:schemeClr val="lt1"/>
-          </a:fontRef>
-        </p:style>
-        <p:txBody>
-          <a:bodyPr rtlCol="0" anchor="ctr"/>
-          <a:lstStyle/>
-          <a:p>
-            <a:pPr algn="ctr"/>
-          </a:p>
-        </p:txBody>
-      </p:sp>
-      <p:sp>
-        <p:nvSpPr>
-          <p:cNvPr id="17" name="Rectangle 16"/>
-          <p:cNvSpPr/>
-          <p:nvPr/>
-        </p:nvSpPr>
-        <p:spPr>
-          <a:xfrm>
-            <a:off x="8109508" y="1591056"/>
-            <a:ext cx="3624986" cy="64008"/>
-          </a:xfrm>
-          <a:prstGeom prst="rect">
-            <a:avLst/>
-          </a:prstGeom>
-          <a:solidFill>
-            <a:srgbClr val="095292"/>
-          </a:solidFill>
-          <a:ln>
-            <a:noFill/>
-          </a:ln>
-        </p:spPr>
-        <p:style>
-          <a:lnRef idx="1">
-            <a:schemeClr val="accent1"/>
-          </a:lnRef>
-          <a:fillRef idx="3">
-            <a:schemeClr val="accent1"/>
-          </a:fillRef>
-          <a:effectRef idx="2">
-            <a:schemeClr val="accent1"/>
-          </a:effectRef>
-          <a:fontRef idx="minor">
-            <a:schemeClr val="lt1"/>
-          </a:fontRef>
-        </p:style>
-        <p:txBody>
-          <a:bodyPr rtlCol="0" anchor="ctr"/>
-          <a:lstStyle/>
-          <a:p>
-            <a:pPr algn="ctr"/>
-          </a:p>
-        </p:txBody>
-      </p:sp>
-      <p:sp>
-        <p:nvSpPr>
-          <p:cNvPr id="18" name="Rectangle 17"/>
-          <p:cNvSpPr/>
-          <p:nvPr/>
-        </p:nvSpPr>
-        <p:spPr>
-          <a:xfrm>
-            <a:off x="8109508" y="1655064"/>
-            <a:ext cx="3624986" cy="27432"/>
-          </a:xfrm>
-          <a:prstGeom prst="rect">
-            <a:avLst/>
-          </a:prstGeom>
-          <a:solidFill>
-            <a:srgbClr val="FFD000"/>
-          </a:solidFill>
-          <a:ln>
-            <a:noFill/>
-          </a:ln>
-        </p:spPr>
-        <p:style>
-          <a:lnRef idx="1">
-            <a:schemeClr val="accent1"/>
-          </a:lnRef>
-          <a:fillRef idx="3">
-            <a:schemeClr val="accent1"/>
-          </a:fillRef>
-          <a:effectRef idx="2">
-            <a:schemeClr val="accent1"/>
-          </a:effectRef>
-          <a:fontRef idx="minor">
-            <a:schemeClr val="lt1"/>
-          </a:fontRef>
-        </p:style>
-        <p:txBody>
-          <a:bodyPr rtlCol="0" anchor="ctr"/>
-          <a:lstStyle/>
-          <a:p>
-            <a:pPr algn="ctr"/>
-          </a:p>
-        </p:txBody>
-      </p:sp>
-      <p:pic>
-        <p:nvPicPr>
-          <p:cNvPr id="19" name="Picture 18" descr="dbfiddle.png"/>
-          <p:cNvPicPr>
-            <a:picLocks noChangeAspect="1"/>
-          </p:cNvPicPr>
-          <p:nvPr/>
-        </p:nvPicPr>
-        <p:blipFill>
-          <a:blip r:embed="rId4"/>
-          <a:stretch>
-            <a:fillRect/>
-          </a:stretch>
-        </p:blipFill>
-        <p:spPr>
-          <a:xfrm>
-            <a:off x="9311640" y="1847087"/>
-            <a:ext cx="1220724" cy="1220724"/>
-          </a:xfrm>
-          <a:prstGeom prst="rect">
-            <a:avLst/>
-          </a:prstGeom>
-        </p:spPr>
-      </p:pic>
-      <p:sp>
-        <p:nvSpPr>
-          <p:cNvPr id="20" name="TextBox 19"/>
-          <p:cNvSpPr txBox="1"/>
-          <p:nvPr/>
-        </p:nvSpPr>
-        <p:spPr>
-          <a:xfrm>
-            <a:off x="8182660" y="3159251"/>
-            <a:ext cx="3478682" cy="621792"/>
-          </a:xfrm>
-          <a:prstGeom prst="rect">
-            <a:avLst/>
-          </a:prstGeom>
-          <a:noFill/>
-        </p:spPr>
-        <p:txBody>
-          <a:bodyPr wrap="square" anchor="t"/>
-          <a:lstStyle/>
-          <a:p>
-            <a:pPr algn="ctr"/>
-            <a:r>
-              <a:rPr sz="1300" b="1" i="0">
-                <a:solidFill>
-                  <a:srgbClr val="095292"/>
-                </a:solidFill>
-                <a:latin typeface="Calibri"/>
-              </a:rPr>
-              <a:t>DB Fiddle</a:t>
-            </a:r>
-          </a:p>
-          <a:p>
-            <a:pPr algn="ctr">
-              <a:spcBef>
-                <a:spcPts val="200"/>
-              </a:spcBef>
-            </a:pPr>
-            <a:r>
-              <a:rPr sz="1000" b="0" i="0">
-                <a:solidFill>
-                  <a:srgbClr val="666666"/>
-                </a:solidFill>
-                <a:latin typeface="Calibri"/>
-              </a:rPr>
-              <a:t>Alterno: PostgreSQL</a:t>
-            </a:r>
-          </a:p>
-        </p:txBody>
-      </p:sp>
-      <p:sp>
-        <p:nvSpPr>
-          <p:cNvPr id="21" name="Rounded Rectangle 20"/>
-          <p:cNvSpPr/>
-          <p:nvPr/>
-        </p:nvSpPr>
-        <p:spPr>
-          <a:xfrm>
-            <a:off x="4283354" y="4055364"/>
-            <a:ext cx="3624986" cy="2299716"/>
-          </a:xfrm>
-          <a:prstGeom prst="roundRect">
-            <a:avLst>
-              <a:gd name="adj" fmla="val 12000"/>
-            </a:avLst>
-          </a:prstGeom>
-          <a:solidFill>
-            <a:srgbClr val="F2F2F2"/>
-          </a:solidFill>
-          <a:ln>
-            <a:noFill/>
-          </a:ln>
-        </p:spPr>
-        <p:style>
-          <a:lnRef idx="1">
-            <a:schemeClr val="accent1"/>
-          </a:lnRef>
-          <a:fillRef idx="3">
-            <a:schemeClr val="accent1"/>
-          </a:fillRef>
-          <a:effectRef idx="2">
-            <a:schemeClr val="accent1"/>
-          </a:effectRef>
-          <a:fontRef idx="minor">
-            <a:schemeClr val="lt1"/>
-          </a:fontRef>
-        </p:style>
-        <p:txBody>
-          <a:bodyPr rtlCol="0" anchor="ctr"/>
-          <a:lstStyle/>
-          <a:p>
-            <a:pPr algn="ctr"/>
-          </a:p>
-        </p:txBody>
-      </p:sp>
-      <p:sp>
-        <p:nvSpPr>
-          <p:cNvPr id="22" name="Rectangle 21"/>
-          <p:cNvSpPr/>
-          <p:nvPr/>
-        </p:nvSpPr>
-        <p:spPr>
-          <a:xfrm>
-            <a:off x="4283354" y="4055364"/>
-            <a:ext cx="3624986" cy="64008"/>
-          </a:xfrm>
-          <a:prstGeom prst="rect">
-            <a:avLst/>
-          </a:prstGeom>
-          <a:solidFill>
-            <a:srgbClr val="095292"/>
-          </a:solidFill>
-          <a:ln>
-            <a:noFill/>
-          </a:ln>
-        </p:spPr>
-        <p:style>
-          <a:lnRef idx="1">
-            <a:schemeClr val="accent1"/>
-          </a:lnRef>
-          <a:fillRef idx="3">
-            <a:schemeClr val="accent1"/>
-          </a:fillRef>
-          <a:effectRef idx="2">
-            <a:schemeClr val="accent1"/>
-          </a:effectRef>
-          <a:fontRef idx="minor">
-            <a:schemeClr val="lt1"/>
-          </a:fontRef>
-        </p:style>
-        <p:txBody>
-          <a:bodyPr rtlCol="0" anchor="ctr"/>
-          <a:lstStyle/>
-          <a:p>
-            <a:pPr algn="ctr"/>
-          </a:p>
-        </p:txBody>
-      </p:sp>
-      <p:sp>
-        <p:nvSpPr>
-          <p:cNvPr id="23" name="Rectangle 22"/>
-          <p:cNvSpPr/>
-          <p:nvPr/>
-        </p:nvSpPr>
-        <p:spPr>
-          <a:xfrm>
-            <a:off x="4283354" y="4119372"/>
-            <a:ext cx="3624986" cy="27432"/>
-          </a:xfrm>
-          <a:prstGeom prst="rect">
-            <a:avLst/>
-          </a:prstGeom>
-          <a:solidFill>
-            <a:srgbClr val="FFD000"/>
-          </a:solidFill>
-          <a:ln>
-            <a:noFill/>
-          </a:ln>
-        </p:spPr>
-        <p:style>
-          <a:lnRef idx="1">
-            <a:schemeClr val="accent1"/>
-          </a:lnRef>
-          <a:fillRef idx="3">
-            <a:schemeClr val="accent1"/>
-          </a:fillRef>
-          <a:effectRef idx="2">
-            <a:schemeClr val="accent1"/>
-          </a:effectRef>
-          <a:fontRef idx="minor">
-            <a:schemeClr val="lt1"/>
-          </a:fontRef>
-        </p:style>
-        <p:txBody>
-          <a:bodyPr rtlCol="0" anchor="ctr"/>
-          <a:lstStyle/>
-          <a:p>
-            <a:pPr algn="ctr"/>
-          </a:p>
-        </p:txBody>
-      </p:sp>
-      <p:pic>
-        <p:nvPicPr>
-          <p:cNvPr id="24" name="Picture 23" descr="oracle_livesql.png"/>
-          <p:cNvPicPr>
-            <a:picLocks noChangeAspect="1"/>
-          </p:cNvPicPr>
-          <p:nvPr/>
-        </p:nvPicPr>
-        <p:blipFill>
-          <a:blip r:embed="rId5"/>
-          <a:stretch>
-            <a:fillRect/>
-          </a:stretch>
-        </p:blipFill>
-        <p:spPr>
-          <a:xfrm>
-            <a:off x="5485485" y="4311396"/>
-            <a:ext cx="1220724" cy="1220724"/>
-          </a:xfrm>
-          <a:prstGeom prst="rect">
-            <a:avLst/>
-          </a:prstGeom>
-        </p:spPr>
-      </p:pic>
-      <p:sp>
-        <p:nvSpPr>
-          <p:cNvPr id="25" name="TextBox 24"/>
-          <p:cNvSpPr txBox="1"/>
-          <p:nvPr/>
-        </p:nvSpPr>
-        <p:spPr>
-          <a:xfrm>
-            <a:off x="4356506" y="5623560"/>
-            <a:ext cx="3478682" cy="621792"/>
-          </a:xfrm>
-          <a:prstGeom prst="rect">
-            <a:avLst/>
-          </a:prstGeom>
-          <a:noFill/>
-        </p:spPr>
-        <p:txBody>
-          <a:bodyPr wrap="square" anchor="t"/>
-          <a:lstStyle/>
-          <a:p>
-            <a:pPr algn="ctr"/>
-            <a:r>
-              <a:rPr sz="1300" b="1" i="0">
-                <a:solidFill>
-                  <a:srgbClr val="095292"/>
-                </a:solidFill>
-                <a:latin typeface="Calibri"/>
-              </a:rPr>
-              <a:t>Oracle Live SQL</a:t>
-            </a:r>
-          </a:p>
-          <a:p>
-            <a:pPr algn="ctr">
-              <a:spcBef>
-                <a:spcPts val="200"/>
-              </a:spcBef>
-            </a:pPr>
-            <a:r>
-              <a:rPr sz="1000" b="0" i="0">
-                <a:solidFill>
-                  <a:srgbClr val="666666"/>
-                </a:solidFill>
-                <a:latin typeface="Calibri"/>
-              </a:rPr>
-              <a:t>Solo contraste</a:t>
-            </a:r>
-          </a:p>
-        </p:txBody>
-      </p:sp>
-      <p:sp>
-        <p:nvSpPr>
-          <p:cNvPr id="26" name="TextBox 25"/>
-          <p:cNvSpPr txBox="1"/>
-          <p:nvPr/>
-        </p:nvSpPr>
-        <p:spPr>
-          <a:xfrm>
-            <a:off x="11185855" y="6473952"/>
-            <a:ext cx="640080" cy="274320"/>
+            <a:off x="457200" y="3017520"/>
+            <a:ext cx="11277295" cy="1645920"/>
           </a:xfrm>
           <a:prstGeom prst="rect">
             <a:avLst/>
@@ -18467,141 +18726,65 @@
           </a:bodyPr>
           <a:lstStyle/>
           <a:p>
-            <a:pPr algn="r"/>
-            <a:r>
-              <a:rPr sz="1100" b="0" i="0">
-                <a:solidFill>
-                  <a:srgbClr val="666666"/>
-                </a:solidFill>
-                <a:latin typeface="Calibri"/>
-              </a:rPr>
-              <a:t>47</a:t>
-            </a:r>
-          </a:p>
-        </p:txBody>
-      </p:sp>
-    </p:spTree>
-  </p:cSld>
-  <p:clrMapOvr>
-    <a:masterClrMapping/>
-  </p:clrMapOvr>
-</p:sld>
-</file>
-
-<file path=ppt/slides/slide48.xml><?xml version="1.0" encoding="utf-8"?>
-<p:sld xmlns:a="http://schemas.openxmlformats.org/drawingml/2006/main" xmlns:p="http://schemas.openxmlformats.org/presentationml/2006/main" xmlns:r="http://schemas.openxmlformats.org/officeDocument/2006/relationships">
-  <p:cSld>
-    <p:bg>
-      <p:bgPr>
-        <a:solidFill>
-          <a:srgbClr val="FFFFFF"/>
-        </a:solidFill>
-        <a:effectLst/>
-      </p:bgPr>
-    </p:bg>
-    <p:spTree>
-      <p:nvGrpSpPr>
-        <p:cNvPr id="1" name=""/>
-        <p:cNvGrpSpPr/>
-        <p:nvPr/>
-      </p:nvGrpSpPr>
-      <p:grpSpPr/>
-      <p:sp>
-        <p:nvSpPr>
-          <p:cNvPr id="2" name="Rectangle 1"/>
-          <p:cNvSpPr/>
-          <p:nvPr/>
-        </p:nvSpPr>
-        <p:spPr>
-          <a:xfrm>
-            <a:off x="0" y="0"/>
-            <a:ext cx="12191695" cy="960120"/>
-          </a:xfrm>
-          <a:prstGeom prst="rect">
-            <a:avLst/>
-          </a:prstGeom>
-          <a:solidFill>
-            <a:srgbClr val="095292"/>
-          </a:solidFill>
-          <a:ln>
-            <a:noFill/>
-          </a:ln>
-        </p:spPr>
-        <p:style>
-          <a:lnRef idx="1">
-            <a:schemeClr val="accent1"/>
-          </a:lnRef>
-          <a:fillRef idx="3">
-            <a:schemeClr val="accent1"/>
-          </a:fillRef>
-          <a:effectRef idx="2">
-            <a:schemeClr val="accent1"/>
-          </a:effectRef>
-          <a:fontRef idx="minor">
-            <a:schemeClr val="lt1"/>
-          </a:fontRef>
-        </p:style>
-        <p:txBody>
-          <a:bodyPr rtlCol="0" anchor="ctr"/>
-          <a:lstStyle/>
-          <a:p>
-            <a:pPr algn="ctr"/>
-          </a:p>
-        </p:txBody>
-      </p:sp>
-      <p:sp>
-        <p:nvSpPr>
-          <p:cNvPr id="3" name="Rectangle 2"/>
-          <p:cNvSpPr/>
-          <p:nvPr/>
-        </p:nvSpPr>
-        <p:spPr>
-          <a:xfrm>
-            <a:off x="0" y="960120"/>
-            <a:ext cx="12191695" cy="41148"/>
-          </a:xfrm>
-          <a:prstGeom prst="rect">
-            <a:avLst/>
-          </a:prstGeom>
-          <a:solidFill>
-            <a:srgbClr val="FFD000"/>
-          </a:solidFill>
-          <a:ln>
-            <a:noFill/>
-          </a:ln>
-        </p:spPr>
-        <p:style>
-          <a:lnRef idx="1">
-            <a:schemeClr val="accent1"/>
-          </a:lnRef>
-          <a:fillRef idx="3">
-            <a:schemeClr val="accent1"/>
-          </a:fillRef>
-          <a:effectRef idx="2">
-            <a:schemeClr val="accent1"/>
-          </a:effectRef>
-          <a:fontRef idx="minor">
-            <a:schemeClr val="lt1"/>
-          </a:fontRef>
-        </p:style>
-        <p:txBody>
-          <a:bodyPr rtlCol="0" anchor="ctr"/>
-          <a:lstStyle/>
-          <a:p>
-            <a:pPr algn="ctr"/>
-          </a:p>
-        </p:txBody>
-      </p:sp>
-      <p:sp>
-        <p:nvSpPr>
-          <p:cNvPr id="4" name="TextBox 3"/>
+            <a:pPr algn="ctr">
+              <a:spcAft>
+                <a:spcPts val="600"/>
+              </a:spcAft>
+            </a:pPr>
+            <a:r>
+              <a:rPr sz="1600" b="0" i="0">
+                <a:solidFill>
+                  <a:srgbClr val="333333"/>
+                </a:solidFill>
+                <a:latin typeface="Calibri"/>
+              </a:rPr>
+              <a:t>Funcion y procedimiento</a:t>
+            </a:r>
+          </a:p>
+          <a:p>
+            <a:pPr algn="ctr">
+              <a:spcAft>
+                <a:spcPts val="600"/>
+              </a:spcAft>
+            </a:pPr>
+            <a:r>
+              <a:rPr sz="1600" b="0" i="0">
+                <a:solidFill>
+                  <a:srgbClr val="333333"/>
+                </a:solidFill>
+                <a:latin typeface="Calibri"/>
+              </a:rPr>
+              <a:t>Los tres detalles de fn_precio_consulta que valen puntos</a:t>
+            </a:r>
+          </a:p>
+          <a:p>
+            <a:pPr algn="ctr">
+              <a:spcAft>
+                <a:spcPts val="600"/>
+              </a:spcAft>
+            </a:pPr>
+            <a:r>
+              <a:rPr sz="1600" b="0" i="0">
+                <a:solidFill>
+                  <a:srgbClr val="333333"/>
+                </a:solidFill>
+                <a:latin typeface="Calibri"/>
+              </a:rPr>
+              <a:t>El trigger</a:t>
+            </a:r>
+          </a:p>
+        </p:txBody>
+      </p:sp>
+      <p:sp>
+        <p:nvSpPr>
+          <p:cNvPr id="6" name="TextBox 5"/>
           <p:cNvSpPr txBox="1"/>
           <p:nvPr/>
         </p:nvSpPr>
         <p:spPr>
           <a:xfrm>
-            <a:off x="457200" y="164592"/>
-            <a:ext cx="11277295" cy="502920"/>
+            <a:off x="457200" y="4754880"/>
+            <a:ext cx="11277295" cy="640080"/>
           </a:xfrm>
           <a:prstGeom prst="rect">
             <a:avLst/>
@@ -18614,706 +18797,15 @@
           </a:bodyPr>
           <a:lstStyle/>
           <a:p>
-            <a:r>
-              <a:rPr sz="2600" b="1" i="0">
-                <a:solidFill>
-                  <a:srgbClr val="FFFFFF"/>
-                </a:solidFill>
-                <a:latin typeface="Calibri"/>
-              </a:rPr>
-              <a:t>Taller PI VetCare — contexto / por que importa</a:t>
-            </a:r>
-          </a:p>
-        </p:txBody>
-      </p:sp>
-      <p:sp>
-        <p:nvSpPr>
-          <p:cNvPr id="5" name="TextBox 4"/>
-          <p:cNvSpPr txBox="1"/>
-          <p:nvPr/>
-        </p:nvSpPr>
-        <p:spPr>
-          <a:xfrm>
-            <a:off x="457200" y="1170432"/>
-            <a:ext cx="11277295" cy="5230368"/>
-          </a:xfrm>
-          <a:prstGeom prst="rect">
-            <a:avLst/>
-          </a:prstGeom>
-          <a:noFill/>
-        </p:spPr>
-        <p:txBody>
-          <a:bodyPr wrap="square">
-            <a:spAutoFit/>
-          </a:bodyPr>
-          <a:lstStyle/>
-          <a:p>
-            <a:pPr>
-              <a:spcAft>
-                <a:spcPts val="800"/>
-              </a:spcAft>
-            </a:pPr>
-            <a:r>
-              <a:rPr sz="2000" b="0" i="0">
-                <a:solidFill>
-                  <a:srgbClr val="333333"/>
-                </a:solidFill>
-                <a:latin typeface="Calibri"/>
-              </a:rPr>
-              <a:t>–   </a:t>
-            </a:r>
+            <a:pPr algn="ctr"/>
             <a:r>
               <a:rPr sz="2000" b="1" i="0">
                 <a:solidFill>
-                  <a:srgbClr val="333333"/>
-                </a:solidFill>
-                <a:latin typeface="Calibri"/>
-              </a:rPr>
-              <a:t>Por qué importa al PI:</a:t>
-            </a:r>
-            <a:r>
-              <a:rPr sz="2000" b="0" i="0">
-                <a:solidFill>
-                  <a:srgbClr val="333333"/>
-                </a:solidFill>
-                <a:latin typeface="Calibri"/>
-              </a:rPr>
-              <a:t> integridad y trazabilidad son criterios de la rúbrica, y la evidencia son el trigger corriendo y la fila de auditoría — no una promesa.</a:t>
-            </a:r>
-          </a:p>
-          <a:p>
-            <a:pPr>
-              <a:spcAft>
-                <a:spcPts val="800"/>
-              </a:spcAft>
-            </a:pPr>
-            <a:r>
-              <a:rPr sz="2000" b="0" i="0">
-                <a:solidFill>
-                  <a:srgbClr val="333333"/>
-                </a:solidFill>
-                <a:latin typeface="Calibri"/>
-              </a:rPr>
-              <a:t>–   La auditoría es el único mecanismo que </a:t>
-            </a:r>
-            <a:r>
-              <a:rPr sz="2000" b="1" i="0">
-                <a:solidFill>
-                  <a:srgbClr val="333333"/>
-                </a:solidFill>
-                <a:latin typeface="Calibri"/>
-              </a:rPr>
-              <a:t>no se puede evitar olvidándose de llamarlo</a:t>
-            </a:r>
-            <a:r>
-              <a:rPr sz="2000" b="0" i="0">
-                <a:solidFill>
-                  <a:srgbClr val="333333"/>
-                </a:solidFill>
-                <a:latin typeface="Calibri"/>
-              </a:rPr>
-              <a:t>: nadie invoca un trigger, lo dispara el motor.</a:t>
-            </a:r>
-          </a:p>
-          <a:p>
-            <a:pPr>
-              <a:spcAft>
-                <a:spcPts val="800"/>
-              </a:spcAft>
-            </a:pPr>
-            <a:r>
-              <a:rPr sz="2000" b="0" i="0">
-                <a:solidFill>
-                  <a:srgbClr val="333333"/>
-                </a:solidFill>
-                <a:latin typeface="Calibri"/>
-              </a:rPr>
-              <a:t>–   El plan de respaldo es lo que un evaluador pregunta primero: cuánto se pierde y en cuánto tiempo se vuelve a operar, con </a:t>
-            </a:r>
-            <a:r>
-              <a:rPr sz="2000" b="1" i="0">
-                <a:solidFill>
-                  <a:srgbClr val="333333"/>
-                </a:solidFill>
-                <a:latin typeface="Calibri"/>
-              </a:rPr>
-              <a:t>números</a:t>
-            </a:r>
-            <a:r>
-              <a:rPr sz="2000" b="0" i="0">
-                <a:solidFill>
-                  <a:srgbClr val="333333"/>
-                </a:solidFill>
-                <a:latin typeface="Calibri"/>
-              </a:rPr>
-              <a:t>.</a:t>
-            </a:r>
-          </a:p>
-        </p:txBody>
-      </p:sp>
-      <p:sp>
-        <p:nvSpPr>
-          <p:cNvPr id="6" name="TextBox 5"/>
-          <p:cNvSpPr txBox="1"/>
-          <p:nvPr/>
-        </p:nvSpPr>
-        <p:spPr>
-          <a:xfrm>
-            <a:off x="11185855" y="6473952"/>
-            <a:ext cx="640080" cy="274320"/>
-          </a:xfrm>
-          <a:prstGeom prst="rect">
-            <a:avLst/>
-          </a:prstGeom>
-          <a:noFill/>
-        </p:spPr>
-        <p:txBody>
-          <a:bodyPr wrap="square">
-            <a:spAutoFit/>
-          </a:bodyPr>
-          <a:lstStyle/>
-          <a:p>
-            <a:pPr algn="r"/>
-            <a:r>
-              <a:rPr sz="1100" b="0" i="0">
-                <a:solidFill>
-                  <a:srgbClr val="666666"/>
-                </a:solidFill>
-                <a:latin typeface="Calibri"/>
-              </a:rPr>
-              <a:t>48</a:t>
-            </a:r>
-          </a:p>
-        </p:txBody>
-      </p:sp>
-    </p:spTree>
-  </p:cSld>
-  <p:clrMapOvr>
-    <a:masterClrMapping/>
-  </p:clrMapOvr>
-</p:sld>
-</file>
-
-<file path=ppt/slides/slide49.xml><?xml version="1.0" encoding="utf-8"?>
-<p:sld xmlns:a="http://schemas.openxmlformats.org/drawingml/2006/main" xmlns:p="http://schemas.openxmlformats.org/presentationml/2006/main" xmlns:r="http://schemas.openxmlformats.org/officeDocument/2006/relationships">
-  <p:cSld>
-    <p:bg>
-      <p:bgPr>
-        <a:solidFill>
-          <a:srgbClr val="FFFFFF"/>
-        </a:solidFill>
-        <a:effectLst/>
-      </p:bgPr>
-    </p:bg>
-    <p:spTree>
-      <p:nvGrpSpPr>
-        <p:cNvPr id="1" name=""/>
-        <p:cNvGrpSpPr/>
-        <p:nvPr/>
-      </p:nvGrpSpPr>
-      <p:grpSpPr/>
-      <p:sp>
-        <p:nvSpPr>
-          <p:cNvPr id="2" name="Rectangle 1"/>
-          <p:cNvSpPr/>
-          <p:nvPr/>
-        </p:nvSpPr>
-        <p:spPr>
-          <a:xfrm>
-            <a:off x="0" y="0"/>
-            <a:ext cx="12191695" cy="960120"/>
-          </a:xfrm>
-          <a:prstGeom prst="rect">
-            <a:avLst/>
-          </a:prstGeom>
-          <a:solidFill>
-            <a:srgbClr val="095292"/>
-          </a:solidFill>
-          <a:ln>
-            <a:noFill/>
-          </a:ln>
-        </p:spPr>
-        <p:style>
-          <a:lnRef idx="1">
-            <a:schemeClr val="accent1"/>
-          </a:lnRef>
-          <a:fillRef idx="3">
-            <a:schemeClr val="accent1"/>
-          </a:fillRef>
-          <a:effectRef idx="2">
-            <a:schemeClr val="accent1"/>
-          </a:effectRef>
-          <a:fontRef idx="minor">
-            <a:schemeClr val="lt1"/>
-          </a:fontRef>
-        </p:style>
-        <p:txBody>
-          <a:bodyPr rtlCol="0" anchor="ctr"/>
-          <a:lstStyle/>
-          <a:p>
-            <a:pPr algn="ctr"/>
-          </a:p>
-        </p:txBody>
-      </p:sp>
-      <p:sp>
-        <p:nvSpPr>
-          <p:cNvPr id="3" name="Rectangle 2"/>
-          <p:cNvSpPr/>
-          <p:nvPr/>
-        </p:nvSpPr>
-        <p:spPr>
-          <a:xfrm>
-            <a:off x="0" y="960120"/>
-            <a:ext cx="12191695" cy="41148"/>
-          </a:xfrm>
-          <a:prstGeom prst="rect">
-            <a:avLst/>
-          </a:prstGeom>
-          <a:solidFill>
-            <a:srgbClr val="FFD000"/>
-          </a:solidFill>
-          <a:ln>
-            <a:noFill/>
-          </a:ln>
-        </p:spPr>
-        <p:style>
-          <a:lnRef idx="1">
-            <a:schemeClr val="accent1"/>
-          </a:lnRef>
-          <a:fillRef idx="3">
-            <a:schemeClr val="accent1"/>
-          </a:fillRef>
-          <a:effectRef idx="2">
-            <a:schemeClr val="accent1"/>
-          </a:effectRef>
-          <a:fontRef idx="minor">
-            <a:schemeClr val="lt1"/>
-          </a:fontRef>
-        </p:style>
-        <p:txBody>
-          <a:bodyPr rtlCol="0" anchor="ctr"/>
-          <a:lstStyle/>
-          <a:p>
-            <a:pPr algn="ctr"/>
-          </a:p>
-        </p:txBody>
-      </p:sp>
-      <p:sp>
-        <p:nvSpPr>
-          <p:cNvPr id="4" name="TextBox 3"/>
-          <p:cNvSpPr txBox="1"/>
-          <p:nvPr/>
-        </p:nvSpPr>
-        <p:spPr>
-          <a:xfrm>
-            <a:off x="457200" y="164592"/>
-            <a:ext cx="11277295" cy="502920"/>
-          </a:xfrm>
-          <a:prstGeom prst="rect">
-            <a:avLst/>
-          </a:prstGeom>
-          <a:noFill/>
-        </p:spPr>
-        <p:txBody>
-          <a:bodyPr wrap="square">
-            <a:spAutoFit/>
-          </a:bodyPr>
-          <a:lstStyle/>
-          <a:p>
-            <a:r>
-              <a:rPr sz="2600" b="1" i="0">
-                <a:solidFill>
-                  <a:srgbClr val="FFFFFF"/>
-                </a:solidFill>
-                <a:latin typeface="Calibri"/>
-              </a:rPr>
-              <a:t>Taller PI VetCare — objetivo y criterios</a:t>
-            </a:r>
-          </a:p>
-        </p:txBody>
-      </p:sp>
-      <p:sp>
-        <p:nvSpPr>
-          <p:cNvPr id="5" name="TextBox 4"/>
-          <p:cNvSpPr txBox="1"/>
-          <p:nvPr/>
-        </p:nvSpPr>
-        <p:spPr>
-          <a:xfrm>
-            <a:off x="457200" y="1170432"/>
-            <a:ext cx="11277295" cy="5230368"/>
-          </a:xfrm>
-          <a:prstGeom prst="rect">
-            <a:avLst/>
-          </a:prstGeom>
-          <a:noFill/>
-        </p:spPr>
-        <p:txBody>
-          <a:bodyPr wrap="square">
-            <a:spAutoFit/>
-          </a:bodyPr>
-          <a:lstStyle/>
-          <a:p>
-            <a:pPr>
-              <a:spcAft>
-                <a:spcPts val="800"/>
-              </a:spcAft>
-            </a:pPr>
-            <a:r>
-              <a:rPr sz="2000" b="0" i="0">
-                <a:solidFill>
-                  <a:srgbClr val="333333"/>
-                </a:solidFill>
-                <a:latin typeface="Calibri"/>
-              </a:rPr>
-              <a:t>–   </a:t>
-            </a:r>
-            <a:r>
-              <a:rPr sz="2000" b="1" i="0">
-                <a:solidFill>
-                  <a:srgbClr val="333333"/>
-                </a:solidFill>
-                <a:latin typeface="Calibri"/>
-              </a:rPr>
-              <a:t>Objetivo:</a:t>
-            </a:r>
-            <a:r>
-              <a:rPr sz="2000" b="0" i="0">
-                <a:solidFill>
-                  <a:srgbClr val="333333"/>
-                </a:solidFill>
-                <a:latin typeface="Calibri"/>
-              </a:rPr>
-              <a:t> Una función de tarifas y dos triggers —auditoría y stock— corriendo en la plataforma del curso, más el Plan_Backup_VetCare con sus 6 secciones.</a:t>
-            </a:r>
-          </a:p>
-          <a:p>
-            <a:pPr>
-              <a:spcAft>
-                <a:spcPts val="800"/>
-              </a:spcAft>
-            </a:pPr>
-            <a:r>
-              <a:rPr sz="2000" b="0" i="0">
-                <a:solidFill>
-                  <a:srgbClr val="333333"/>
-                </a:solidFill>
-                <a:latin typeface="Calibri"/>
-              </a:rPr>
-              <a:t>–   </a:t>
-            </a:r>
-            <a:r>
-              <a:rPr sz="2000" b="1" i="0">
-                <a:solidFill>
-                  <a:srgbClr val="333333"/>
-                </a:solidFill>
-                <a:latin typeface="Calibri"/>
-              </a:rPr>
-              <a:t>Exito:</a:t>
-            </a:r>
-            <a:r>
-              <a:rPr sz="2000" b="0" i="0">
-                <a:solidFill>
-                  <a:srgbClr val="333333"/>
-                </a:solidFill>
-                <a:latin typeface="Calibri"/>
-              </a:rPr>
-              <a:t> «fn_precio_consulta» con «RETURNS NUMERIC», «IMMUTABLE», insensible a mayúsculas, recargo del 35 % y «NULL» tratado como falso (45000 → </a:t>
-            </a:r>
-            <a:r>
-              <a:rPr sz="2000" b="1" i="0">
-                <a:solidFill>
-                  <a:srgbClr val="333333"/>
-                </a:solidFill>
-                <a:latin typeface="Calibri"/>
-              </a:rPr>
-              <a:t>60750</a:t>
-            </a:r>
-            <a:r>
-              <a:rPr sz="2000" b="0" i="0">
-                <a:solidFill>
-                  <a:srgbClr val="333333"/>
-                </a:solidFill>
-                <a:latin typeface="Calibri"/>
-              </a:rPr>
-              <a:t>).</a:t>
-            </a:r>
-          </a:p>
-          <a:p>
-            <a:pPr>
-              <a:spcAft>
-                <a:spcPts val="800"/>
-              </a:spcAft>
-            </a:pPr>
-            <a:r>
-              <a:rPr sz="2000" b="0" i="0">
-                <a:solidFill>
-                  <a:srgbClr val="333333"/>
-                </a:solidFill>
-                <a:latin typeface="Calibri"/>
-              </a:rPr>
-              <a:t>–   </a:t>
-            </a:r>
-            <a:r>
-              <a:rPr sz="2000" b="1" i="0">
-                <a:solidFill>
-                  <a:srgbClr val="333333"/>
-                </a:solidFill>
-                <a:latin typeface="Calibri"/>
-              </a:rPr>
-              <a:t>Exito:</a:t>
-            </a:r>
-            <a:r>
-              <a:rPr sz="2000" b="0" i="0">
-                <a:solidFill>
-                  <a:srgbClr val="333333"/>
-                </a:solidFill>
-                <a:latin typeface="Calibri"/>
-              </a:rPr>
-              <a:t> El trigger de auditoría en sus </a:t>
-            </a:r>
-            <a:r>
-              <a:rPr sz="2000" b="1" i="0">
-                <a:solidFill>
-                  <a:srgbClr val="333333"/>
-                </a:solidFill>
-                <a:latin typeface="Calibri"/>
-              </a:rPr>
-              <a:t>dos objetos</a:t>
-            </a:r>
-            <a:r>
-              <a:rPr sz="2000" b="0" i="0">
-                <a:solidFill>
-                  <a:srgbClr val="333333"/>
-                </a:solidFill>
-                <a:latin typeface="Calibri"/>
-              </a:rPr>
-              <a:t>: «fn_trg_audit_cita() RETURNS TRIGGER» + «CREATE TRIGGER ... EXECUTE FUNCTION». Cero «:NEW» / «:OLD».</a:t>
-            </a:r>
-          </a:p>
-          <a:p>
-            <a:pPr>
-              <a:spcAft>
-                <a:spcPts val="800"/>
-              </a:spcAft>
-            </a:pPr>
-            <a:r>
-              <a:rPr sz="2000" b="0" i="0">
-                <a:solidFill>
-                  <a:srgbClr val="333333"/>
-                </a:solidFill>
-                <a:latin typeface="Calibri"/>
-              </a:rPr>
-              <a:t>–   </a:t>
-            </a:r>
-            <a:r>
-              <a:rPr sz="2000" b="1" i="0">
-                <a:solidFill>
-                  <a:srgbClr val="333333"/>
-                </a:solidFill>
-                <a:latin typeface="Calibri"/>
-              </a:rPr>
-              <a:t>Exito:</a:t>
-            </a:r>
-            <a:r>
-              <a:rPr sz="2000" b="0" i="0">
-                <a:solidFill>
-                  <a:srgbClr val="333333"/>
-                </a:solidFill>
-                <a:latin typeface="Calibri"/>
-              </a:rPr>
-              <a:t> Los 3 «UPDATE» dejan </a:t>
-            </a:r>
-            <a:r>
-              <a:rPr sz="2000" b="1" i="0">
-                <a:solidFill>
-                  <a:srgbClr val="333333"/>
-                </a:solidFill>
-                <a:latin typeface="Calibri"/>
-              </a:rPr>
-              <a:t>2 filas</a:t>
-            </a:r>
-            <a:r>
-              <a:rPr sz="2000" b="0" i="0">
-                <a:solidFill>
-                  <a:srgbClr val="333333"/>
-                </a:solidFill>
-                <a:latin typeface="Calibri"/>
-              </a:rPr>
-              <a:t> en «audit_cita» y el estudiante explica por qué la tercera no se auditó.</a:t>
-            </a:r>
-          </a:p>
-          <a:p>
-            <a:pPr>
-              <a:spcAft>
-                <a:spcPts val="800"/>
-              </a:spcAft>
-            </a:pPr>
-            <a:r>
-              <a:rPr sz="2000" b="0" i="0">
-                <a:solidFill>
-                  <a:srgbClr val="333333"/>
-                </a:solidFill>
-                <a:latin typeface="Calibri"/>
-              </a:rPr>
-              <a:t>–   </a:t>
-            </a:r>
-            <a:r>
-              <a:rPr sz="2000" b="1" i="0">
-                <a:solidFill>
-                  <a:srgbClr val="333333"/>
-                </a:solidFill>
-                <a:latin typeface="Calibri"/>
-              </a:rPr>
-              <a:t>Exito:</a:t>
-            </a:r>
-            <a:r>
-              <a:rPr sz="2000" b="0" i="0">
-                <a:solidFill>
-                  <a:srgbClr val="333333"/>
-                </a:solidFill>
-                <a:latin typeface="Calibri"/>
-              </a:rPr>
-              <a:t> El stock negativo (</a:t>
-            </a:r>
-            <a:r>
-              <a:rPr sz="2000" b="1" i="0">
-                <a:solidFill>
-                  <a:srgbClr val="333333"/>
-                </a:solidFill>
-                <a:latin typeface="Calibri"/>
-              </a:rPr>
-              <a:t>-7</a:t>
-            </a:r>
-            <a:r>
-              <a:rPr sz="2000" b="0" i="0">
-                <a:solidFill>
-                  <a:srgbClr val="333333"/>
-                </a:solidFill>
-                <a:latin typeface="Calibri"/>
-              </a:rPr>
-              <a:t>) evidenciado </a:t>
-            </a:r>
-            <a:r>
-              <a:rPr sz="2000" b="1" i="0">
-                <a:solidFill>
-                  <a:srgbClr val="333333"/>
-                </a:solidFill>
-                <a:latin typeface="Calibri"/>
-              </a:rPr>
-              <a:t>antes</a:t>
-            </a:r>
-            <a:r>
-              <a:rPr sz="2000" b="0" i="0">
-                <a:solidFill>
-                  <a:srgbClr val="333333"/>
-                </a:solidFill>
-                <a:latin typeface="Calibri"/>
-              </a:rPr>
-              <a:t> del trigger, y el trigger «BEFORE UPDATE» con el mensaje literal de la rúbrica.</a:t>
-            </a:r>
-          </a:p>
-          <a:p>
-            <a:pPr>
-              <a:spcAft>
-                <a:spcPts val="800"/>
-              </a:spcAft>
-            </a:pPr>
-            <a:r>
-              <a:rPr sz="2000" b="0" i="0">
-                <a:solidFill>
-                  <a:srgbClr val="333333"/>
-                </a:solidFill>
-                <a:latin typeface="Calibri"/>
-              </a:rPr>
-              <a:t>–   </a:t>
-            </a:r>
-            <a:r>
-              <a:rPr sz="2000" b="1" i="0">
-                <a:solidFill>
-                  <a:srgbClr val="333333"/>
-                </a:solidFill>
-                <a:latin typeface="Calibri"/>
-              </a:rPr>
-              <a:t>Exito:</a:t>
-            </a:r>
-            <a:r>
-              <a:rPr sz="2000" b="0" i="0">
-                <a:solidFill>
-                  <a:srgbClr val="333333"/>
-                </a:solidFill>
-                <a:latin typeface="Calibri"/>
-              </a:rPr>
-              <a:t> «Plan_Backup_VetCare» con las 6 secciones, RPO y RTO justificados contra el horario de la clínica, y la consulta de validación post-restore.</a:t>
-            </a:r>
-          </a:p>
-          <a:p>
-            <a:pPr>
-              <a:spcAft>
-                <a:spcPts val="800"/>
-              </a:spcAft>
-            </a:pPr>
-            <a:r>
-              <a:rPr sz="2000" b="0" i="0">
-                <a:solidFill>
-                  <a:srgbClr val="333333"/>
-                </a:solidFill>
-                <a:latin typeface="Calibri"/>
-              </a:rPr>
-              <a:t>–   </a:t>
-            </a:r>
-            <a:r>
-              <a:rPr sz="2000" b="1" i="0">
-                <a:solidFill>
-                  <a:srgbClr val="333333"/>
-                </a:solidFill>
-                <a:latin typeface="Calibri"/>
-              </a:rPr>
-              <a:t>Exito:</a:t>
-            </a:r>
-            <a:r>
-              <a:rPr sz="2000" b="0" i="0">
-                <a:solidFill>
-                  <a:srgbClr val="333333"/>
-                </a:solidFill>
-                <a:latin typeface="Calibri"/>
-              </a:rPr>
-              <a:t> Entrega en la fecha que indique el docente.</a:t>
-            </a:r>
-          </a:p>
-        </p:txBody>
-      </p:sp>
-      <p:sp>
-        <p:nvSpPr>
-          <p:cNvPr id="6" name="TextBox 5"/>
-          <p:cNvSpPr txBox="1"/>
-          <p:nvPr/>
-        </p:nvSpPr>
-        <p:spPr>
-          <a:xfrm>
-            <a:off x="11185855" y="6473952"/>
-            <a:ext cx="640080" cy="274320"/>
-          </a:xfrm>
-          <a:prstGeom prst="rect">
-            <a:avLst/>
-          </a:prstGeom>
-          <a:noFill/>
-        </p:spPr>
-        <p:txBody>
-          <a:bodyPr wrap="square">
-            <a:spAutoFit/>
-          </a:bodyPr>
-          <a:lstStyle/>
-          <a:p>
-            <a:pPr algn="r"/>
-            <a:r>
-              <a:rPr sz="1100" b="0" i="0">
-                <a:solidFill>
-                  <a:srgbClr val="666666"/>
-                </a:solidFill>
-                <a:latin typeface="Calibri"/>
-              </a:rPr>
-              <a:t>49</a:t>
+                  <a:srgbClr val="269CCB"/>
+                </a:solidFill>
+                <a:latin typeface="Calibri"/>
+              </a:rPr>
+              <a:t>Todo lo visto queda proyectado para repasar</a:t>
             </a:r>
           </a:p>
         </p:txBody>
@@ -19598,4094 +19090,6 @@
                 <a:latin typeface="Calibri"/>
               </a:rPr>
               <a:t>5</a:t>
-            </a:r>
-          </a:p>
-        </p:txBody>
-      </p:sp>
-    </p:spTree>
-  </p:cSld>
-  <p:clrMapOvr>
-    <a:masterClrMapping/>
-  </p:clrMapOvr>
-</p:sld>
-</file>
-
-<file path=ppt/slides/slide50.xml><?xml version="1.0" encoding="utf-8"?>
-<p:sld xmlns:a="http://schemas.openxmlformats.org/drawingml/2006/main" xmlns:p="http://schemas.openxmlformats.org/presentationml/2006/main" xmlns:r="http://schemas.openxmlformats.org/officeDocument/2006/relationships">
-  <p:cSld>
-    <p:bg>
-      <p:bgPr>
-        <a:solidFill>
-          <a:srgbClr val="FFFFFF"/>
-        </a:solidFill>
-        <a:effectLst/>
-      </p:bgPr>
-    </p:bg>
-    <p:spTree>
-      <p:nvGrpSpPr>
-        <p:cNvPr id="1" name=""/>
-        <p:cNvGrpSpPr/>
-        <p:nvPr/>
-      </p:nvGrpSpPr>
-      <p:grpSpPr/>
-      <p:sp>
-        <p:nvSpPr>
-          <p:cNvPr id="2" name="Rectangle 1"/>
-          <p:cNvSpPr/>
-          <p:nvPr/>
-        </p:nvSpPr>
-        <p:spPr>
-          <a:xfrm>
-            <a:off x="0" y="0"/>
-            <a:ext cx="12191695" cy="960120"/>
-          </a:xfrm>
-          <a:prstGeom prst="rect">
-            <a:avLst/>
-          </a:prstGeom>
-          <a:solidFill>
-            <a:srgbClr val="095292"/>
-          </a:solidFill>
-          <a:ln>
-            <a:noFill/>
-          </a:ln>
-        </p:spPr>
-        <p:style>
-          <a:lnRef idx="1">
-            <a:schemeClr val="accent1"/>
-          </a:lnRef>
-          <a:fillRef idx="3">
-            <a:schemeClr val="accent1"/>
-          </a:fillRef>
-          <a:effectRef idx="2">
-            <a:schemeClr val="accent1"/>
-          </a:effectRef>
-          <a:fontRef idx="minor">
-            <a:schemeClr val="lt1"/>
-          </a:fontRef>
-        </p:style>
-        <p:txBody>
-          <a:bodyPr rtlCol="0" anchor="ctr"/>
-          <a:lstStyle/>
-          <a:p>
-            <a:pPr algn="ctr"/>
-          </a:p>
-        </p:txBody>
-      </p:sp>
-      <p:sp>
-        <p:nvSpPr>
-          <p:cNvPr id="3" name="Rectangle 2"/>
-          <p:cNvSpPr/>
-          <p:nvPr/>
-        </p:nvSpPr>
-        <p:spPr>
-          <a:xfrm>
-            <a:off x="0" y="960120"/>
-            <a:ext cx="12191695" cy="41148"/>
-          </a:xfrm>
-          <a:prstGeom prst="rect">
-            <a:avLst/>
-          </a:prstGeom>
-          <a:solidFill>
-            <a:srgbClr val="FFD000"/>
-          </a:solidFill>
-          <a:ln>
-            <a:noFill/>
-          </a:ln>
-        </p:spPr>
-        <p:style>
-          <a:lnRef idx="1">
-            <a:schemeClr val="accent1"/>
-          </a:lnRef>
-          <a:fillRef idx="3">
-            <a:schemeClr val="accent1"/>
-          </a:fillRef>
-          <a:effectRef idx="2">
-            <a:schemeClr val="accent1"/>
-          </a:effectRef>
-          <a:fontRef idx="minor">
-            <a:schemeClr val="lt1"/>
-          </a:fontRef>
-        </p:style>
-        <p:txBody>
-          <a:bodyPr rtlCol="0" anchor="ctr"/>
-          <a:lstStyle/>
-          <a:p>
-            <a:pPr algn="ctr"/>
-          </a:p>
-        </p:txBody>
-      </p:sp>
-      <p:sp>
-        <p:nvSpPr>
-          <p:cNvPr id="4" name="TextBox 3"/>
-          <p:cNvSpPr txBox="1"/>
-          <p:nvPr/>
-        </p:nvSpPr>
-        <p:spPr>
-          <a:xfrm>
-            <a:off x="457200" y="164592"/>
-            <a:ext cx="11277295" cy="502920"/>
-          </a:xfrm>
-          <a:prstGeom prst="rect">
-            <a:avLst/>
-          </a:prstGeom>
-          <a:noFill/>
-        </p:spPr>
-        <p:txBody>
-          <a:bodyPr wrap="square">
-            <a:spAutoFit/>
-          </a:bodyPr>
-          <a:lstStyle/>
-          <a:p>
-            <a:r>
-              <a:rPr sz="2600" b="1" i="0">
-                <a:solidFill>
-                  <a:srgbClr val="FFFFFF"/>
-                </a:solidFill>
-                <a:latin typeface="Calibri"/>
-              </a:rPr>
-              <a:t>Taller PI VetCare — escenario / datos de partida</a:t>
-            </a:r>
-          </a:p>
-        </p:txBody>
-      </p:sp>
-      <p:sp>
-        <p:nvSpPr>
-          <p:cNvPr id="5" name="TextBox 4"/>
-          <p:cNvSpPr txBox="1"/>
-          <p:nvPr/>
-        </p:nvSpPr>
-        <p:spPr>
-          <a:xfrm>
-            <a:off x="457200" y="1170432"/>
-            <a:ext cx="11277295" cy="5230368"/>
-          </a:xfrm>
-          <a:prstGeom prst="rect">
-            <a:avLst/>
-          </a:prstGeom>
-          <a:noFill/>
-        </p:spPr>
-        <p:txBody>
-          <a:bodyPr wrap="square">
-            <a:spAutoFit/>
-          </a:bodyPr>
-          <a:lstStyle/>
-          <a:p>
-            <a:pPr>
-              <a:spcAft>
-                <a:spcPts val="800"/>
-              </a:spcAft>
-            </a:pPr>
-            <a:r>
-              <a:rPr sz="2000" b="0" i="0">
-                <a:solidFill>
-                  <a:srgbClr val="333333"/>
-                </a:solidFill>
-                <a:latin typeface="Calibri"/>
-              </a:rPr>
-              <a:t>–   Esquema de VetCare completo y poblado: 10 citas, con consultas ya registradas en las citas 2, 5, 7 y 10.</a:t>
-            </a:r>
-          </a:p>
-          <a:p>
-            <a:pPr>
-              <a:spcAft>
-                <a:spcPts val="800"/>
-              </a:spcAft>
-            </a:pPr>
-            <a:r>
-              <a:rPr sz="2000" b="0" i="0">
-                <a:solidFill>
-                  <a:srgbClr val="333333"/>
-                </a:solidFill>
-                <a:latin typeface="Calibri"/>
-              </a:rPr>
-              <a:t>–   «insumo» fue creada </a:t>
-            </a:r>
-            <a:r>
-              <a:rPr sz="2000" b="1" i="0">
-                <a:solidFill>
-                  <a:srgbClr val="333333"/>
-                </a:solidFill>
-                <a:latin typeface="Calibri"/>
-              </a:rPr>
-              <a:t>a propósito sin</a:t>
-            </a:r>
-            <a:r>
-              <a:rPr sz="2000" b="0" i="0">
-                <a:solidFill>
-                  <a:srgbClr val="333333"/>
-                </a:solidFill>
-                <a:latin typeface="Calibri"/>
-              </a:rPr>
-              <a:t> «CHECK (stock &gt;= 0)»: el insumo </a:t>
-            </a:r>
-            <a:r>
-              <a:rPr sz="2000" b="1" i="0">
-                <a:solidFill>
-                  <a:srgbClr val="333333"/>
-                </a:solidFill>
-                <a:latin typeface="Calibri"/>
-              </a:rPr>
-              <a:t>2 (Vacuna triple felina) tiene stock 3</a:t>
-            </a:r>
-            <a:r>
-              <a:rPr sz="2000" b="0" i="0">
-                <a:solidFill>
-                  <a:srgbClr val="333333"/>
-                </a:solidFill>
-                <a:latin typeface="Calibri"/>
-              </a:rPr>
-              <a:t>, y de ahí sale el -7 de la demostración.</a:t>
-            </a:r>
-          </a:p>
-          <a:p>
-            <a:pPr>
-              <a:spcAft>
-                <a:spcPts val="800"/>
-              </a:spcAft>
-            </a:pPr>
-            <a:r>
-              <a:rPr sz="2000" b="0" i="0">
-                <a:solidFill>
-                  <a:srgbClr val="333333"/>
-                </a:solidFill>
-                <a:latin typeface="Calibri"/>
-              </a:rPr>
-              <a:t>–   </a:t>
-            </a:r>
-            <a:r>
-              <a:rPr sz="2000" b="1" i="0">
-                <a:solidFill>
-                  <a:srgbClr val="333333"/>
-                </a:solidFill>
-                <a:latin typeface="Calibri"/>
-              </a:rPr>
-              <a:t>Motor:</a:t>
-            </a:r>
-            <a:r>
-              <a:rPr sz="2000" b="0" i="0">
-                <a:solidFill>
-                  <a:srgbClr val="333333"/>
-                </a:solidFill>
-                <a:latin typeface="Calibri"/>
-              </a:rPr>
-              <a:t> PostgreSQL dentro de la plataforma del curso. La función, los dos triggers y sus pruebas con bloques «DO» corren de verdad y ahí se califican.</a:t>
-            </a:r>
-          </a:p>
-          <a:p>
-            <a:pPr>
-              <a:spcAft>
-                <a:spcPts val="800"/>
-              </a:spcAft>
-            </a:pPr>
-            <a:r>
-              <a:rPr sz="2000" b="0" i="0">
-                <a:solidFill>
-                  <a:srgbClr val="333333"/>
-                </a:solidFill>
-                <a:latin typeface="Calibri"/>
-              </a:rPr>
-              <a:t>–   </a:t>
-            </a:r>
-            <a:r>
-              <a:rPr sz="2000" b="1" i="0">
-                <a:solidFill>
-                  <a:srgbClr val="333333"/>
-                </a:solidFill>
-                <a:latin typeface="Calibri"/>
-              </a:rPr>
-              <a:t>Lo que NO se ejecuta:</a:t>
-            </a:r>
-            <a:r>
-              <a:rPr sz="2000" b="0" i="0">
-                <a:solidFill>
-                  <a:srgbClr val="333333"/>
-                </a:solidFill>
-                <a:latin typeface="Calibri"/>
-              </a:rPr>
-              <a:t> «pg_dump», «pg_dumpall», «pg_basebackup» ni «pg_restore» —son programas que escriben archivos y la plataforma del curso corre en el navegador—. La pregunta 5 es un documento: se califica que nombre la herramienta correcta.</a:t>
-            </a:r>
-          </a:p>
-        </p:txBody>
-      </p:sp>
-      <p:sp>
-        <p:nvSpPr>
-          <p:cNvPr id="6" name="TextBox 5"/>
-          <p:cNvSpPr txBox="1"/>
-          <p:nvPr/>
-        </p:nvSpPr>
-        <p:spPr>
-          <a:xfrm>
-            <a:off x="11185855" y="6473952"/>
-            <a:ext cx="640080" cy="274320"/>
-          </a:xfrm>
-          <a:prstGeom prst="rect">
-            <a:avLst/>
-          </a:prstGeom>
-          <a:noFill/>
-        </p:spPr>
-        <p:txBody>
-          <a:bodyPr wrap="square">
-            <a:spAutoFit/>
-          </a:bodyPr>
-          <a:lstStyle/>
-          <a:p>
-            <a:pPr algn="r"/>
-            <a:r>
-              <a:rPr sz="1100" b="0" i="0">
-                <a:solidFill>
-                  <a:srgbClr val="666666"/>
-                </a:solidFill>
-                <a:latin typeface="Calibri"/>
-              </a:rPr>
-              <a:t>50</a:t>
-            </a:r>
-          </a:p>
-        </p:txBody>
-      </p:sp>
-    </p:spTree>
-  </p:cSld>
-  <p:clrMapOvr>
-    <a:masterClrMapping/>
-  </p:clrMapOvr>
-</p:sld>
-</file>
-
-<file path=ppt/slides/slide51.xml><?xml version="1.0" encoding="utf-8"?>
-<p:sld xmlns:a="http://schemas.openxmlformats.org/drawingml/2006/main" xmlns:p="http://schemas.openxmlformats.org/presentationml/2006/main" xmlns:r="http://schemas.openxmlformats.org/officeDocument/2006/relationships">
-  <p:cSld>
-    <p:bg>
-      <p:bgPr>
-        <a:solidFill>
-          <a:srgbClr val="FFFFFF"/>
-        </a:solidFill>
-        <a:effectLst/>
-      </p:bgPr>
-    </p:bg>
-    <p:spTree>
-      <p:nvGrpSpPr>
-        <p:cNvPr id="1" name=""/>
-        <p:cNvGrpSpPr/>
-        <p:nvPr/>
-      </p:nvGrpSpPr>
-      <p:grpSpPr/>
-      <p:sp>
-        <p:nvSpPr>
-          <p:cNvPr id="2" name="Rectangle 1"/>
-          <p:cNvSpPr/>
-          <p:nvPr/>
-        </p:nvSpPr>
-        <p:spPr>
-          <a:xfrm>
-            <a:off x="0" y="0"/>
-            <a:ext cx="12191695" cy="960120"/>
-          </a:xfrm>
-          <a:prstGeom prst="rect">
-            <a:avLst/>
-          </a:prstGeom>
-          <a:solidFill>
-            <a:srgbClr val="095292"/>
-          </a:solidFill>
-          <a:ln>
-            <a:noFill/>
-          </a:ln>
-        </p:spPr>
-        <p:style>
-          <a:lnRef idx="1">
-            <a:schemeClr val="accent1"/>
-          </a:lnRef>
-          <a:fillRef idx="3">
-            <a:schemeClr val="accent1"/>
-          </a:fillRef>
-          <a:effectRef idx="2">
-            <a:schemeClr val="accent1"/>
-          </a:effectRef>
-          <a:fontRef idx="minor">
-            <a:schemeClr val="lt1"/>
-          </a:fontRef>
-        </p:style>
-        <p:txBody>
-          <a:bodyPr rtlCol="0" anchor="ctr"/>
-          <a:lstStyle/>
-          <a:p>
-            <a:pPr algn="ctr"/>
-          </a:p>
-        </p:txBody>
-      </p:sp>
-      <p:sp>
-        <p:nvSpPr>
-          <p:cNvPr id="3" name="Rectangle 2"/>
-          <p:cNvSpPr/>
-          <p:nvPr/>
-        </p:nvSpPr>
-        <p:spPr>
-          <a:xfrm>
-            <a:off x="0" y="960120"/>
-            <a:ext cx="12191695" cy="41148"/>
-          </a:xfrm>
-          <a:prstGeom prst="rect">
-            <a:avLst/>
-          </a:prstGeom>
-          <a:solidFill>
-            <a:srgbClr val="FFD000"/>
-          </a:solidFill>
-          <a:ln>
-            <a:noFill/>
-          </a:ln>
-        </p:spPr>
-        <p:style>
-          <a:lnRef idx="1">
-            <a:schemeClr val="accent1"/>
-          </a:lnRef>
-          <a:fillRef idx="3">
-            <a:schemeClr val="accent1"/>
-          </a:fillRef>
-          <a:effectRef idx="2">
-            <a:schemeClr val="accent1"/>
-          </a:effectRef>
-          <a:fontRef idx="minor">
-            <a:schemeClr val="lt1"/>
-          </a:fontRef>
-        </p:style>
-        <p:txBody>
-          <a:bodyPr rtlCol="0" anchor="ctr"/>
-          <a:lstStyle/>
-          <a:p>
-            <a:pPr algn="ctr"/>
-          </a:p>
-        </p:txBody>
-      </p:sp>
-      <p:sp>
-        <p:nvSpPr>
-          <p:cNvPr id="4" name="TextBox 3"/>
-          <p:cNvSpPr txBox="1"/>
-          <p:nvPr/>
-        </p:nvSpPr>
-        <p:spPr>
-          <a:xfrm>
-            <a:off x="457200" y="164592"/>
-            <a:ext cx="11277295" cy="502920"/>
-          </a:xfrm>
-          <a:prstGeom prst="rect">
-            <a:avLst/>
-          </a:prstGeom>
-          <a:noFill/>
-        </p:spPr>
-        <p:txBody>
-          <a:bodyPr wrap="square">
-            <a:spAutoFit/>
-          </a:bodyPr>
-          <a:lstStyle/>
-          <a:p>
-            <a:r>
-              <a:rPr sz="2600" b="1" i="0">
-                <a:solidFill>
-                  <a:srgbClr val="FFFFFF"/>
-                </a:solidFill>
-                <a:latin typeface="Calibri"/>
-              </a:rPr>
-              <a:t>Taller PI VetCare — pasos guiados</a:t>
-            </a:r>
-          </a:p>
-        </p:txBody>
-      </p:sp>
-      <p:sp>
-        <p:nvSpPr>
-          <p:cNvPr id="5" name="Rounded Rectangle 4"/>
-          <p:cNvSpPr/>
-          <p:nvPr/>
-        </p:nvSpPr>
-        <p:spPr>
-          <a:xfrm>
-            <a:off x="457200" y="1234440"/>
-            <a:ext cx="11277295" cy="950976"/>
-          </a:xfrm>
-          <a:prstGeom prst="roundRect">
-            <a:avLst>
-              <a:gd name="adj" fmla="val 12000"/>
-            </a:avLst>
-          </a:prstGeom>
-          <a:solidFill>
-            <a:srgbClr val="F2F2F2"/>
-          </a:solidFill>
-          <a:ln>
-            <a:noFill/>
-          </a:ln>
-        </p:spPr>
-        <p:style>
-          <a:lnRef idx="1">
-            <a:schemeClr val="accent1"/>
-          </a:lnRef>
-          <a:fillRef idx="3">
-            <a:schemeClr val="accent1"/>
-          </a:fillRef>
-          <a:effectRef idx="2">
-            <a:schemeClr val="accent1"/>
-          </a:effectRef>
-          <a:fontRef idx="minor">
-            <a:schemeClr val="lt1"/>
-          </a:fontRef>
-        </p:style>
-        <p:txBody>
-          <a:bodyPr rtlCol="0" anchor="ctr"/>
-          <a:lstStyle/>
-          <a:p>
-            <a:pPr algn="ctr"/>
-          </a:p>
-        </p:txBody>
-      </p:sp>
-      <p:sp>
-        <p:nvSpPr>
-          <p:cNvPr id="6" name="Rounded Rectangle 5"/>
-          <p:cNvSpPr/>
-          <p:nvPr/>
-        </p:nvSpPr>
-        <p:spPr>
-          <a:xfrm>
-            <a:off x="594360" y="1490472"/>
-            <a:ext cx="438912" cy="438912"/>
-          </a:xfrm>
-          <a:prstGeom prst="roundRect">
-            <a:avLst>
-              <a:gd name="adj" fmla="val 12000"/>
-            </a:avLst>
-          </a:prstGeom>
-          <a:solidFill>
-            <a:srgbClr val="095292"/>
-          </a:solidFill>
-          <a:ln>
-            <a:noFill/>
-          </a:ln>
-        </p:spPr>
-        <p:style>
-          <a:lnRef idx="1">
-            <a:schemeClr val="accent1"/>
-          </a:lnRef>
-          <a:fillRef idx="3">
-            <a:schemeClr val="accent1"/>
-          </a:fillRef>
-          <a:effectRef idx="2">
-            <a:schemeClr val="accent1"/>
-          </a:effectRef>
-          <a:fontRef idx="minor">
-            <a:schemeClr val="lt1"/>
-          </a:fontRef>
-        </p:style>
-        <p:txBody>
-          <a:bodyPr rtlCol="0" anchor="ctr"/>
-          <a:lstStyle/>
-          <a:p>
-            <a:pPr algn="ctr"/>
-          </a:p>
-        </p:txBody>
-      </p:sp>
-      <p:sp>
-        <p:nvSpPr>
-          <p:cNvPr id="7" name="TextBox 6"/>
-          <p:cNvSpPr txBox="1"/>
-          <p:nvPr/>
-        </p:nvSpPr>
-        <p:spPr>
-          <a:xfrm>
-            <a:off x="594360" y="1490472"/>
-            <a:ext cx="438912" cy="438912"/>
-          </a:xfrm>
-          <a:prstGeom prst="rect">
-            <a:avLst/>
-          </a:prstGeom>
-          <a:noFill/>
-        </p:spPr>
-        <p:txBody>
-          <a:bodyPr wrap="square" anchor="ctr"/>
-          <a:lstStyle/>
-          <a:p>
-            <a:pPr algn="ctr"/>
-            <a:r>
-              <a:rPr sz="1600" b="1" i="0">
-                <a:solidFill>
-                  <a:srgbClr val="FFFFFF"/>
-                </a:solidFill>
-                <a:latin typeface="Calibri"/>
-              </a:rPr>
-              <a:t>1</a:t>
-            </a:r>
-          </a:p>
-        </p:txBody>
-      </p:sp>
-      <p:sp>
-        <p:nvSpPr>
-          <p:cNvPr id="8" name="TextBox 7"/>
-          <p:cNvSpPr txBox="1"/>
-          <p:nvPr/>
-        </p:nvSpPr>
-        <p:spPr>
-          <a:xfrm>
-            <a:off x="1188720" y="1325880"/>
-            <a:ext cx="10271455" cy="786384"/>
-          </a:xfrm>
-          <a:prstGeom prst="rect">
-            <a:avLst/>
-          </a:prstGeom>
-          <a:noFill/>
-        </p:spPr>
-        <p:txBody>
-          <a:bodyPr wrap="square" anchor="ctr"/>
-          <a:lstStyle/>
-          <a:p>
-            <a:r>
-              <a:rPr sz="1500" b="1" i="0">
-                <a:solidFill>
-                  <a:srgbClr val="095292"/>
-                </a:solidFill>
-                <a:latin typeface="Calibri"/>
-              </a:rPr>
-              <a:t>Escribir fn_precio_consulta(especie, urgencia) RETURNS NUMERIC en PL/pgSQL y probarla con SELECT sobre las 3 especies.</a:t>
-            </a:r>
-          </a:p>
-        </p:txBody>
-      </p:sp>
-      <p:sp>
-        <p:nvSpPr>
-          <p:cNvPr id="9" name="Rounded Rectangle 8"/>
-          <p:cNvSpPr/>
-          <p:nvPr/>
-        </p:nvSpPr>
-        <p:spPr>
-          <a:xfrm>
-            <a:off x="457200" y="2276856"/>
-            <a:ext cx="11277295" cy="950976"/>
-          </a:xfrm>
-          <a:prstGeom prst="roundRect">
-            <a:avLst>
-              <a:gd name="adj" fmla="val 12000"/>
-            </a:avLst>
-          </a:prstGeom>
-          <a:solidFill>
-            <a:srgbClr val="E8F4FA"/>
-          </a:solidFill>
-          <a:ln>
-            <a:noFill/>
-          </a:ln>
-        </p:spPr>
-        <p:style>
-          <a:lnRef idx="1">
-            <a:schemeClr val="accent1"/>
-          </a:lnRef>
-          <a:fillRef idx="3">
-            <a:schemeClr val="accent1"/>
-          </a:fillRef>
-          <a:effectRef idx="2">
-            <a:schemeClr val="accent1"/>
-          </a:effectRef>
-          <a:fontRef idx="minor">
-            <a:schemeClr val="lt1"/>
-          </a:fontRef>
-        </p:style>
-        <p:txBody>
-          <a:bodyPr rtlCol="0" anchor="ctr"/>
-          <a:lstStyle/>
-          <a:p>
-            <a:pPr algn="ctr"/>
-          </a:p>
-        </p:txBody>
-      </p:sp>
-      <p:sp>
-        <p:nvSpPr>
-          <p:cNvPr id="10" name="Rounded Rectangle 9"/>
-          <p:cNvSpPr/>
-          <p:nvPr/>
-        </p:nvSpPr>
-        <p:spPr>
-          <a:xfrm>
-            <a:off x="594360" y="2532888"/>
-            <a:ext cx="438912" cy="438912"/>
-          </a:xfrm>
-          <a:prstGeom prst="roundRect">
-            <a:avLst>
-              <a:gd name="adj" fmla="val 12000"/>
-            </a:avLst>
-          </a:prstGeom>
-          <a:solidFill>
-            <a:srgbClr val="095292"/>
-          </a:solidFill>
-          <a:ln>
-            <a:noFill/>
-          </a:ln>
-        </p:spPr>
-        <p:style>
-          <a:lnRef idx="1">
-            <a:schemeClr val="accent1"/>
-          </a:lnRef>
-          <a:fillRef idx="3">
-            <a:schemeClr val="accent1"/>
-          </a:fillRef>
-          <a:effectRef idx="2">
-            <a:schemeClr val="accent1"/>
-          </a:effectRef>
-          <a:fontRef idx="minor">
-            <a:schemeClr val="lt1"/>
-          </a:fontRef>
-        </p:style>
-        <p:txBody>
-          <a:bodyPr rtlCol="0" anchor="ctr"/>
-          <a:lstStyle/>
-          <a:p>
-            <a:pPr algn="ctr"/>
-          </a:p>
-        </p:txBody>
-      </p:sp>
-      <p:sp>
-        <p:nvSpPr>
-          <p:cNvPr id="11" name="TextBox 10"/>
-          <p:cNvSpPr txBox="1"/>
-          <p:nvPr/>
-        </p:nvSpPr>
-        <p:spPr>
-          <a:xfrm>
-            <a:off x="594360" y="2532888"/>
-            <a:ext cx="438912" cy="438912"/>
-          </a:xfrm>
-          <a:prstGeom prst="rect">
-            <a:avLst/>
-          </a:prstGeom>
-          <a:noFill/>
-        </p:spPr>
-        <p:txBody>
-          <a:bodyPr wrap="square" anchor="ctr"/>
-          <a:lstStyle/>
-          <a:p>
-            <a:pPr algn="ctr"/>
-            <a:r>
-              <a:rPr sz="1600" b="1" i="0">
-                <a:solidFill>
-                  <a:srgbClr val="FFFFFF"/>
-                </a:solidFill>
-                <a:latin typeface="Calibri"/>
-              </a:rPr>
-              <a:t>2</a:t>
-            </a:r>
-          </a:p>
-        </p:txBody>
-      </p:sp>
-      <p:sp>
-        <p:nvSpPr>
-          <p:cNvPr id="12" name="TextBox 11"/>
-          <p:cNvSpPr txBox="1"/>
-          <p:nvPr/>
-        </p:nvSpPr>
-        <p:spPr>
-          <a:xfrm>
-            <a:off x="1188720" y="2368296"/>
-            <a:ext cx="10271455" cy="786384"/>
-          </a:xfrm>
-          <a:prstGeom prst="rect">
-            <a:avLst/>
-          </a:prstGeom>
-          <a:noFill/>
-        </p:spPr>
-        <p:txBody>
-          <a:bodyPr wrap="square" anchor="ctr"/>
-          <a:lstStyle/>
-          <a:p>
-            <a:r>
-              <a:rPr sz="1500" b="1" i="0">
-                <a:solidFill>
-                  <a:srgbClr val="095292"/>
-                </a:solidFill>
-                <a:latin typeface="Calibri"/>
-              </a:rPr>
-              <a:t>Crear la tabla audit_cita y el trigger de auditoria en sus dos objetos: fn_trg_audit_cita() RETURNS TRIGGER + CREATE TRIGGER ... EXECUTE FUNCTION.</a:t>
-            </a:r>
-          </a:p>
-        </p:txBody>
-      </p:sp>
-      <p:sp>
-        <p:nvSpPr>
-          <p:cNvPr id="13" name="Rounded Rectangle 12"/>
-          <p:cNvSpPr/>
-          <p:nvPr/>
-        </p:nvSpPr>
-        <p:spPr>
-          <a:xfrm>
-            <a:off x="457200" y="3319272"/>
-            <a:ext cx="11277295" cy="950976"/>
-          </a:xfrm>
-          <a:prstGeom prst="roundRect">
-            <a:avLst>
-              <a:gd name="adj" fmla="val 12000"/>
-            </a:avLst>
-          </a:prstGeom>
-          <a:solidFill>
-            <a:srgbClr val="F2F2F2"/>
-          </a:solidFill>
-          <a:ln>
-            <a:noFill/>
-          </a:ln>
-        </p:spPr>
-        <p:style>
-          <a:lnRef idx="1">
-            <a:schemeClr val="accent1"/>
-          </a:lnRef>
-          <a:fillRef idx="3">
-            <a:schemeClr val="accent1"/>
-          </a:fillRef>
-          <a:effectRef idx="2">
-            <a:schemeClr val="accent1"/>
-          </a:effectRef>
-          <a:fontRef idx="minor">
-            <a:schemeClr val="lt1"/>
-          </a:fontRef>
-        </p:style>
-        <p:txBody>
-          <a:bodyPr rtlCol="0" anchor="ctr"/>
-          <a:lstStyle/>
-          <a:p>
-            <a:pPr algn="ctr"/>
-          </a:p>
-        </p:txBody>
-      </p:sp>
-      <p:sp>
-        <p:nvSpPr>
-          <p:cNvPr id="14" name="Rounded Rectangle 13"/>
-          <p:cNvSpPr/>
-          <p:nvPr/>
-        </p:nvSpPr>
-        <p:spPr>
-          <a:xfrm>
-            <a:off x="594360" y="3575304"/>
-            <a:ext cx="438912" cy="438912"/>
-          </a:xfrm>
-          <a:prstGeom prst="roundRect">
-            <a:avLst>
-              <a:gd name="adj" fmla="val 12000"/>
-            </a:avLst>
-          </a:prstGeom>
-          <a:solidFill>
-            <a:srgbClr val="095292"/>
-          </a:solidFill>
-          <a:ln>
-            <a:noFill/>
-          </a:ln>
-        </p:spPr>
-        <p:style>
-          <a:lnRef idx="1">
-            <a:schemeClr val="accent1"/>
-          </a:lnRef>
-          <a:fillRef idx="3">
-            <a:schemeClr val="accent1"/>
-          </a:fillRef>
-          <a:effectRef idx="2">
-            <a:schemeClr val="accent1"/>
-          </a:effectRef>
-          <a:fontRef idx="minor">
-            <a:schemeClr val="lt1"/>
-          </a:fontRef>
-        </p:style>
-        <p:txBody>
-          <a:bodyPr rtlCol="0" anchor="ctr"/>
-          <a:lstStyle/>
-          <a:p>
-            <a:pPr algn="ctr"/>
-          </a:p>
-        </p:txBody>
-      </p:sp>
-      <p:sp>
-        <p:nvSpPr>
-          <p:cNvPr id="15" name="TextBox 14"/>
-          <p:cNvSpPr txBox="1"/>
-          <p:nvPr/>
-        </p:nvSpPr>
-        <p:spPr>
-          <a:xfrm>
-            <a:off x="594360" y="3575304"/>
-            <a:ext cx="438912" cy="438912"/>
-          </a:xfrm>
-          <a:prstGeom prst="rect">
-            <a:avLst/>
-          </a:prstGeom>
-          <a:noFill/>
-        </p:spPr>
-        <p:txBody>
-          <a:bodyPr wrap="square" anchor="ctr"/>
-          <a:lstStyle/>
-          <a:p>
-            <a:pPr algn="ctr"/>
-            <a:r>
-              <a:rPr sz="1600" b="1" i="0">
-                <a:solidFill>
-                  <a:srgbClr val="FFFFFF"/>
-                </a:solidFill>
-                <a:latin typeface="Calibri"/>
-              </a:rPr>
-              <a:t>3</a:t>
-            </a:r>
-          </a:p>
-        </p:txBody>
-      </p:sp>
-      <p:sp>
-        <p:nvSpPr>
-          <p:cNvPr id="16" name="TextBox 15"/>
-          <p:cNvSpPr txBox="1"/>
-          <p:nvPr/>
-        </p:nvSpPr>
-        <p:spPr>
-          <a:xfrm>
-            <a:off x="1188720" y="3410712"/>
-            <a:ext cx="10271455" cy="786384"/>
-          </a:xfrm>
-          <a:prstGeom prst="rect">
-            <a:avLst/>
-          </a:prstGeom>
-          <a:noFill/>
-        </p:spPr>
-        <p:txBody>
-          <a:bodyPr wrap="square" anchor="ctr"/>
-          <a:lstStyle/>
-          <a:p>
-            <a:r>
-              <a:rPr sz="1500" b="1" i="0">
-                <a:solidFill>
-                  <a:srgbClr val="095292"/>
-                </a:solidFill>
-                <a:latin typeface="Calibri"/>
-              </a:rPr>
-              <a:t>Crear el trigger de stock no negativo (BEFORE UPDATE), evidenciando primero que sin el el stock llega a -7.</a:t>
-            </a:r>
-          </a:p>
-        </p:txBody>
-      </p:sp>
-      <p:sp>
-        <p:nvSpPr>
-          <p:cNvPr id="17" name="Rounded Rectangle 16"/>
-          <p:cNvSpPr/>
-          <p:nvPr/>
-        </p:nvSpPr>
-        <p:spPr>
-          <a:xfrm>
-            <a:off x="457200" y="4361688"/>
-            <a:ext cx="11277295" cy="950976"/>
-          </a:xfrm>
-          <a:prstGeom prst="roundRect">
-            <a:avLst>
-              <a:gd name="adj" fmla="val 12000"/>
-            </a:avLst>
-          </a:prstGeom>
-          <a:solidFill>
-            <a:srgbClr val="E8F4FA"/>
-          </a:solidFill>
-          <a:ln>
-            <a:noFill/>
-          </a:ln>
-        </p:spPr>
-        <p:style>
-          <a:lnRef idx="1">
-            <a:schemeClr val="accent1"/>
-          </a:lnRef>
-          <a:fillRef idx="3">
-            <a:schemeClr val="accent1"/>
-          </a:fillRef>
-          <a:effectRef idx="2">
-            <a:schemeClr val="accent1"/>
-          </a:effectRef>
-          <a:fontRef idx="minor">
-            <a:schemeClr val="lt1"/>
-          </a:fontRef>
-        </p:style>
-        <p:txBody>
-          <a:bodyPr rtlCol="0" anchor="ctr"/>
-          <a:lstStyle/>
-          <a:p>
-            <a:pPr algn="ctr"/>
-          </a:p>
-        </p:txBody>
-      </p:sp>
-      <p:sp>
-        <p:nvSpPr>
-          <p:cNvPr id="18" name="Rounded Rectangle 17"/>
-          <p:cNvSpPr/>
-          <p:nvPr/>
-        </p:nvSpPr>
-        <p:spPr>
-          <a:xfrm>
-            <a:off x="594360" y="4617720"/>
-            <a:ext cx="438912" cy="438912"/>
-          </a:xfrm>
-          <a:prstGeom prst="roundRect">
-            <a:avLst>
-              <a:gd name="adj" fmla="val 12000"/>
-            </a:avLst>
-          </a:prstGeom>
-          <a:solidFill>
-            <a:srgbClr val="095292"/>
-          </a:solidFill>
-          <a:ln>
-            <a:noFill/>
-          </a:ln>
-        </p:spPr>
-        <p:style>
-          <a:lnRef idx="1">
-            <a:schemeClr val="accent1"/>
-          </a:lnRef>
-          <a:fillRef idx="3">
-            <a:schemeClr val="accent1"/>
-          </a:fillRef>
-          <a:effectRef idx="2">
-            <a:schemeClr val="accent1"/>
-          </a:effectRef>
-          <a:fontRef idx="minor">
-            <a:schemeClr val="lt1"/>
-          </a:fontRef>
-        </p:style>
-        <p:txBody>
-          <a:bodyPr rtlCol="0" anchor="ctr"/>
-          <a:lstStyle/>
-          <a:p>
-            <a:pPr algn="ctr"/>
-          </a:p>
-        </p:txBody>
-      </p:sp>
-      <p:sp>
-        <p:nvSpPr>
-          <p:cNvPr id="19" name="TextBox 18"/>
-          <p:cNvSpPr txBox="1"/>
-          <p:nvPr/>
-        </p:nvSpPr>
-        <p:spPr>
-          <a:xfrm>
-            <a:off x="594360" y="4617720"/>
-            <a:ext cx="438912" cy="438912"/>
-          </a:xfrm>
-          <a:prstGeom prst="rect">
-            <a:avLst/>
-          </a:prstGeom>
-          <a:noFill/>
-        </p:spPr>
-        <p:txBody>
-          <a:bodyPr wrap="square" anchor="ctr"/>
-          <a:lstStyle/>
-          <a:p>
-            <a:pPr algn="ctr"/>
-            <a:r>
-              <a:rPr sz="1600" b="1" i="0">
-                <a:solidFill>
-                  <a:srgbClr val="FFFFFF"/>
-                </a:solidFill>
-                <a:latin typeface="Calibri"/>
-              </a:rPr>
-              <a:t>4</a:t>
-            </a:r>
-          </a:p>
-        </p:txBody>
-      </p:sp>
-      <p:sp>
-        <p:nvSpPr>
-          <p:cNvPr id="20" name="TextBox 19"/>
-          <p:cNvSpPr txBox="1"/>
-          <p:nvPr/>
-        </p:nvSpPr>
-        <p:spPr>
-          <a:xfrm>
-            <a:off x="1188720" y="4453128"/>
-            <a:ext cx="10271455" cy="786384"/>
-          </a:xfrm>
-          <a:prstGeom prst="rect">
-            <a:avLst/>
-          </a:prstGeom>
-          <a:noFill/>
-        </p:spPr>
-        <p:txBody>
-          <a:bodyPr wrap="square" anchor="ctr"/>
-          <a:lstStyle/>
-          <a:p>
-            <a:r>
-              <a:rPr sz="1500" b="1" i="0">
-                <a:solidFill>
-                  <a:srgbClr val="095292"/>
-                </a:solidFill>
-                <a:latin typeface="Calibri"/>
-              </a:rPr>
-              <a:t>Decidir donde vive cada validacion: CHECK, trigger o aplicacion (pregunta 4).</a:t>
-            </a:r>
-          </a:p>
-        </p:txBody>
-      </p:sp>
-      <p:sp>
-        <p:nvSpPr>
-          <p:cNvPr id="21" name="Rounded Rectangle 20"/>
-          <p:cNvSpPr/>
-          <p:nvPr/>
-        </p:nvSpPr>
-        <p:spPr>
-          <a:xfrm>
-            <a:off x="457200" y="5404104"/>
-            <a:ext cx="11277295" cy="950976"/>
-          </a:xfrm>
-          <a:prstGeom prst="roundRect">
-            <a:avLst>
-              <a:gd name="adj" fmla="val 12000"/>
-            </a:avLst>
-          </a:prstGeom>
-          <a:solidFill>
-            <a:srgbClr val="F2F2F2"/>
-          </a:solidFill>
-          <a:ln>
-            <a:noFill/>
-          </a:ln>
-        </p:spPr>
-        <p:style>
-          <a:lnRef idx="1">
-            <a:schemeClr val="accent1"/>
-          </a:lnRef>
-          <a:fillRef idx="3">
-            <a:schemeClr val="accent1"/>
-          </a:fillRef>
-          <a:effectRef idx="2">
-            <a:schemeClr val="accent1"/>
-          </a:effectRef>
-          <a:fontRef idx="minor">
-            <a:schemeClr val="lt1"/>
-          </a:fontRef>
-        </p:style>
-        <p:txBody>
-          <a:bodyPr rtlCol="0" anchor="ctr"/>
-          <a:lstStyle/>
-          <a:p>
-            <a:pPr algn="ctr"/>
-          </a:p>
-        </p:txBody>
-      </p:sp>
-      <p:sp>
-        <p:nvSpPr>
-          <p:cNvPr id="22" name="Rounded Rectangle 21"/>
-          <p:cNvSpPr/>
-          <p:nvPr/>
-        </p:nvSpPr>
-        <p:spPr>
-          <a:xfrm>
-            <a:off x="594360" y="5660136"/>
-            <a:ext cx="438912" cy="438912"/>
-          </a:xfrm>
-          <a:prstGeom prst="roundRect">
-            <a:avLst>
-              <a:gd name="adj" fmla="val 12000"/>
-            </a:avLst>
-          </a:prstGeom>
-          <a:solidFill>
-            <a:srgbClr val="095292"/>
-          </a:solidFill>
-          <a:ln>
-            <a:noFill/>
-          </a:ln>
-        </p:spPr>
-        <p:style>
-          <a:lnRef idx="1">
-            <a:schemeClr val="accent1"/>
-          </a:lnRef>
-          <a:fillRef idx="3">
-            <a:schemeClr val="accent1"/>
-          </a:fillRef>
-          <a:effectRef idx="2">
-            <a:schemeClr val="accent1"/>
-          </a:effectRef>
-          <a:fontRef idx="minor">
-            <a:schemeClr val="lt1"/>
-          </a:fontRef>
-        </p:style>
-        <p:txBody>
-          <a:bodyPr rtlCol="0" anchor="ctr"/>
-          <a:lstStyle/>
-          <a:p>
-            <a:pPr algn="ctr"/>
-          </a:p>
-        </p:txBody>
-      </p:sp>
-      <p:sp>
-        <p:nvSpPr>
-          <p:cNvPr id="23" name="TextBox 22"/>
-          <p:cNvSpPr txBox="1"/>
-          <p:nvPr/>
-        </p:nvSpPr>
-        <p:spPr>
-          <a:xfrm>
-            <a:off x="594360" y="5660136"/>
-            <a:ext cx="438912" cy="438912"/>
-          </a:xfrm>
-          <a:prstGeom prst="rect">
-            <a:avLst/>
-          </a:prstGeom>
-          <a:noFill/>
-        </p:spPr>
-        <p:txBody>
-          <a:bodyPr wrap="square" anchor="ctr"/>
-          <a:lstStyle/>
-          <a:p>
-            <a:pPr algn="ctr"/>
-            <a:r>
-              <a:rPr sz="1600" b="1" i="0">
-                <a:solidFill>
-                  <a:srgbClr val="FFFFFF"/>
-                </a:solidFill>
-                <a:latin typeface="Calibri"/>
-              </a:rPr>
-              <a:t>5</a:t>
-            </a:r>
-          </a:p>
-        </p:txBody>
-      </p:sp>
-      <p:sp>
-        <p:nvSpPr>
-          <p:cNvPr id="24" name="TextBox 23"/>
-          <p:cNvSpPr txBox="1"/>
-          <p:nvPr/>
-        </p:nvSpPr>
-        <p:spPr>
-          <a:xfrm>
-            <a:off x="1188720" y="5495544"/>
-            <a:ext cx="10271455" cy="786384"/>
-          </a:xfrm>
-          <a:prstGeom prst="rect">
-            <a:avLst/>
-          </a:prstGeom>
-          <a:noFill/>
-        </p:spPr>
-        <p:txBody>
-          <a:bodyPr wrap="square" anchor="ctr"/>
-          <a:lstStyle/>
-          <a:p>
-            <a:r>
-              <a:rPr sz="1500" b="1" i="0">
-                <a:solidFill>
-                  <a:srgbClr val="095292"/>
-                </a:solidFill>
-                <a:latin typeface="Calibri"/>
-              </a:rPr>
-              <a:t>Redactar Plan_Backup_VetCare con sus 6 secciones (plantilla en este documento): que se respalda y con que, frecuencia, retencion, RPO/RTO, restore de prueba con quien firma, y que NO cubre el plan.</a:t>
-            </a:r>
-          </a:p>
-        </p:txBody>
-      </p:sp>
-      <p:sp>
-        <p:nvSpPr>
-          <p:cNvPr id="25" name="TextBox 24"/>
-          <p:cNvSpPr txBox="1"/>
-          <p:nvPr/>
-        </p:nvSpPr>
-        <p:spPr>
-          <a:xfrm>
-            <a:off x="11185855" y="6473952"/>
-            <a:ext cx="640080" cy="274320"/>
-          </a:xfrm>
-          <a:prstGeom prst="rect">
-            <a:avLst/>
-          </a:prstGeom>
-          <a:noFill/>
-        </p:spPr>
-        <p:txBody>
-          <a:bodyPr wrap="square">
-            <a:spAutoFit/>
-          </a:bodyPr>
-          <a:lstStyle/>
-          <a:p>
-            <a:pPr algn="r"/>
-            <a:r>
-              <a:rPr sz="1100" b="0" i="0">
-                <a:solidFill>
-                  <a:srgbClr val="666666"/>
-                </a:solidFill>
-                <a:latin typeface="Calibri"/>
-              </a:rPr>
-              <a:t>51</a:t>
-            </a:r>
-          </a:p>
-        </p:txBody>
-      </p:sp>
-    </p:spTree>
-  </p:cSld>
-  <p:clrMapOvr>
-    <a:masterClrMapping/>
-  </p:clrMapOvr>
-</p:sld>
-</file>
-
-<file path=ppt/slides/slide52.xml><?xml version="1.0" encoding="utf-8"?>
-<p:sld xmlns:a="http://schemas.openxmlformats.org/drawingml/2006/main" xmlns:p="http://schemas.openxmlformats.org/presentationml/2006/main" xmlns:r="http://schemas.openxmlformats.org/officeDocument/2006/relationships">
-  <p:cSld>
-    <p:bg>
-      <p:bgPr>
-        <a:solidFill>
-          <a:srgbClr val="FFFFFF"/>
-        </a:solidFill>
-        <a:effectLst/>
-      </p:bgPr>
-    </p:bg>
-    <p:spTree>
-      <p:nvGrpSpPr>
-        <p:cNvPr id="1" name=""/>
-        <p:cNvGrpSpPr/>
-        <p:nvPr/>
-      </p:nvGrpSpPr>
-      <p:grpSpPr/>
-      <p:sp>
-        <p:nvSpPr>
-          <p:cNvPr id="2" name="Rectangle 1"/>
-          <p:cNvSpPr/>
-          <p:nvPr/>
-        </p:nvSpPr>
-        <p:spPr>
-          <a:xfrm>
-            <a:off x="0" y="0"/>
-            <a:ext cx="12191695" cy="960120"/>
-          </a:xfrm>
-          <a:prstGeom prst="rect">
-            <a:avLst/>
-          </a:prstGeom>
-          <a:solidFill>
-            <a:srgbClr val="095292"/>
-          </a:solidFill>
-          <a:ln>
-            <a:noFill/>
-          </a:ln>
-        </p:spPr>
-        <p:style>
-          <a:lnRef idx="1">
-            <a:schemeClr val="accent1"/>
-          </a:lnRef>
-          <a:fillRef idx="3">
-            <a:schemeClr val="accent1"/>
-          </a:fillRef>
-          <a:effectRef idx="2">
-            <a:schemeClr val="accent1"/>
-          </a:effectRef>
-          <a:fontRef idx="minor">
-            <a:schemeClr val="lt1"/>
-          </a:fontRef>
-        </p:style>
-        <p:txBody>
-          <a:bodyPr rtlCol="0" anchor="ctr"/>
-          <a:lstStyle/>
-          <a:p>
-            <a:pPr algn="ctr"/>
-          </a:p>
-        </p:txBody>
-      </p:sp>
-      <p:sp>
-        <p:nvSpPr>
-          <p:cNvPr id="3" name="Rectangle 2"/>
-          <p:cNvSpPr/>
-          <p:nvPr/>
-        </p:nvSpPr>
-        <p:spPr>
-          <a:xfrm>
-            <a:off x="0" y="960120"/>
-            <a:ext cx="12191695" cy="41148"/>
-          </a:xfrm>
-          <a:prstGeom prst="rect">
-            <a:avLst/>
-          </a:prstGeom>
-          <a:solidFill>
-            <a:srgbClr val="FFD000"/>
-          </a:solidFill>
-          <a:ln>
-            <a:noFill/>
-          </a:ln>
-        </p:spPr>
-        <p:style>
-          <a:lnRef idx="1">
-            <a:schemeClr val="accent1"/>
-          </a:lnRef>
-          <a:fillRef idx="3">
-            <a:schemeClr val="accent1"/>
-          </a:fillRef>
-          <a:effectRef idx="2">
-            <a:schemeClr val="accent1"/>
-          </a:effectRef>
-          <a:fontRef idx="minor">
-            <a:schemeClr val="lt1"/>
-          </a:fontRef>
-        </p:style>
-        <p:txBody>
-          <a:bodyPr rtlCol="0" anchor="ctr"/>
-          <a:lstStyle/>
-          <a:p>
-            <a:pPr algn="ctr"/>
-          </a:p>
-        </p:txBody>
-      </p:sp>
-      <p:sp>
-        <p:nvSpPr>
-          <p:cNvPr id="4" name="TextBox 3"/>
-          <p:cNvSpPr txBox="1"/>
-          <p:nvPr/>
-        </p:nvSpPr>
-        <p:spPr>
-          <a:xfrm>
-            <a:off x="457200" y="164592"/>
-            <a:ext cx="11277295" cy="502920"/>
-          </a:xfrm>
-          <a:prstGeom prst="rect">
-            <a:avLst/>
-          </a:prstGeom>
-          <a:noFill/>
-        </p:spPr>
-        <p:txBody>
-          <a:bodyPr wrap="square">
-            <a:spAutoFit/>
-          </a:bodyPr>
-          <a:lstStyle/>
-          <a:p>
-            <a:r>
-              <a:rPr sz="2600" b="1" i="0">
-                <a:solidFill>
-                  <a:srgbClr val="FFFFFF"/>
-                </a:solidFill>
-                <a:latin typeface="Calibri"/>
-              </a:rPr>
-              <a:t>Taller PI VetCare — pistas (checklist vacio)</a:t>
-            </a:r>
-          </a:p>
-        </p:txBody>
-      </p:sp>
-      <p:sp>
-        <p:nvSpPr>
-          <p:cNvPr id="5" name="Rounded Rectangle 4"/>
-          <p:cNvSpPr/>
-          <p:nvPr/>
-        </p:nvSpPr>
-        <p:spPr>
-          <a:xfrm>
-            <a:off x="457200" y="1261872"/>
-            <a:ext cx="11277295" cy="566928"/>
-          </a:xfrm>
-          <a:prstGeom prst="roundRect">
-            <a:avLst>
-              <a:gd name="adj" fmla="val 12000"/>
-            </a:avLst>
-          </a:prstGeom>
-          <a:solidFill>
-            <a:srgbClr val="F2F2F2"/>
-          </a:solidFill>
-          <a:ln>
-            <a:noFill/>
-          </a:ln>
-        </p:spPr>
-        <p:style>
-          <a:lnRef idx="1">
-            <a:schemeClr val="accent1"/>
-          </a:lnRef>
-          <a:fillRef idx="3">
-            <a:schemeClr val="accent1"/>
-          </a:fillRef>
-          <a:effectRef idx="2">
-            <a:schemeClr val="accent1"/>
-          </a:effectRef>
-          <a:fontRef idx="minor">
-            <a:schemeClr val="lt1"/>
-          </a:fontRef>
-        </p:style>
-        <p:txBody>
-          <a:bodyPr rtlCol="0" anchor="ctr"/>
-          <a:lstStyle/>
-          <a:p>
-            <a:pPr algn="ctr"/>
-          </a:p>
-        </p:txBody>
-      </p:sp>
-      <p:sp>
-        <p:nvSpPr>
-          <p:cNvPr id="6" name="Rectangle 5"/>
-          <p:cNvSpPr/>
-          <p:nvPr/>
-        </p:nvSpPr>
-        <p:spPr>
-          <a:xfrm>
-            <a:off x="640080" y="1408175"/>
-            <a:ext cx="274320" cy="274320"/>
-          </a:xfrm>
-          <a:prstGeom prst="rect">
-            <a:avLst/>
-          </a:prstGeom>
-          <a:solidFill>
-            <a:srgbClr val="FFFFFF"/>
-          </a:solidFill>
-          <a:ln>
-            <a:solidFill>
-              <a:srgbClr val="333333"/>
-            </a:solidFill>
-          </a:ln>
-        </p:spPr>
-        <p:style>
-          <a:lnRef idx="1">
-            <a:schemeClr val="accent1"/>
-          </a:lnRef>
-          <a:fillRef idx="3">
-            <a:schemeClr val="accent1"/>
-          </a:fillRef>
-          <a:effectRef idx="2">
-            <a:schemeClr val="accent1"/>
-          </a:effectRef>
-          <a:fontRef idx="minor">
-            <a:schemeClr val="lt1"/>
-          </a:fontRef>
-        </p:style>
-        <p:txBody>
-          <a:bodyPr rtlCol="0" anchor="ctr"/>
-          <a:lstStyle/>
-          <a:p>
-            <a:pPr algn="ctr"/>
-          </a:p>
-        </p:txBody>
-      </p:sp>
-      <p:sp>
-        <p:nvSpPr>
-          <p:cNvPr id="7" name="Rectangle 6"/>
-          <p:cNvSpPr/>
-          <p:nvPr/>
-        </p:nvSpPr>
-        <p:spPr>
-          <a:xfrm>
-            <a:off x="640080" y="1408175"/>
-            <a:ext cx="73152" cy="274320"/>
-          </a:xfrm>
-          <a:prstGeom prst="rect">
-            <a:avLst/>
-          </a:prstGeom>
-          <a:solidFill>
-            <a:srgbClr val="269CCB"/>
-          </a:solidFill>
-          <a:ln>
-            <a:noFill/>
-          </a:ln>
-        </p:spPr>
-        <p:style>
-          <a:lnRef idx="1">
-            <a:schemeClr val="accent1"/>
-          </a:lnRef>
-          <a:fillRef idx="3">
-            <a:schemeClr val="accent1"/>
-          </a:fillRef>
-          <a:effectRef idx="2">
-            <a:schemeClr val="accent1"/>
-          </a:effectRef>
-          <a:fontRef idx="minor">
-            <a:schemeClr val="lt1"/>
-          </a:fontRef>
-        </p:style>
-        <p:txBody>
-          <a:bodyPr rtlCol="0" anchor="ctr"/>
-          <a:lstStyle/>
-          <a:p>
-            <a:pPr algn="ctr"/>
-          </a:p>
-        </p:txBody>
-      </p:sp>
-      <p:sp>
-        <p:nvSpPr>
-          <p:cNvPr id="8" name="TextBox 7"/>
-          <p:cNvSpPr txBox="1"/>
-          <p:nvPr/>
-        </p:nvSpPr>
-        <p:spPr>
-          <a:xfrm>
-            <a:off x="1097280" y="1353312"/>
-            <a:ext cx="10362895" cy="402336"/>
-          </a:xfrm>
-          <a:prstGeom prst="rect">
-            <a:avLst/>
-          </a:prstGeom>
-          <a:noFill/>
-        </p:spPr>
-        <p:txBody>
-          <a:bodyPr wrap="square" anchor="ctr"/>
-          <a:lstStyle/>
-          <a:p>
-            <a:r>
-              <a:rPr sz="1500" b="0" i="0">
-                <a:solidFill>
-                  <a:srgbClr val="333333"/>
-                </a:solidFill>
-                <a:latin typeface="Calibri"/>
-              </a:rPr>
-              <a:t>□ ¿La función es «IMMUTABLE» y un canino en urgencia da </a:t>
-            </a:r>
-            <a:r>
-              <a:rPr sz="1500" b="1" i="0">
-                <a:solidFill>
-                  <a:srgbClr val="333333"/>
-                </a:solidFill>
-                <a:latin typeface="Calibri"/>
-              </a:rPr>
-              <a:t>60750</a:t>
-            </a:r>
-            <a:r>
-              <a:rPr sz="1500" b="0" i="0">
-                <a:solidFill>
-                  <a:srgbClr val="333333"/>
-                </a:solidFill>
-                <a:latin typeface="Calibri"/>
-              </a:rPr>
-              <a:t>?</a:t>
-            </a:r>
-          </a:p>
-        </p:txBody>
-      </p:sp>
-      <p:sp>
-        <p:nvSpPr>
-          <p:cNvPr id="9" name="Rounded Rectangle 8"/>
-          <p:cNvSpPr/>
-          <p:nvPr/>
-        </p:nvSpPr>
-        <p:spPr>
-          <a:xfrm>
-            <a:off x="457200" y="1938528"/>
-            <a:ext cx="11277295" cy="566928"/>
-          </a:xfrm>
-          <a:prstGeom prst="roundRect">
-            <a:avLst>
-              <a:gd name="adj" fmla="val 12000"/>
-            </a:avLst>
-          </a:prstGeom>
-          <a:solidFill>
-            <a:srgbClr val="F2F2F2"/>
-          </a:solidFill>
-          <a:ln>
-            <a:noFill/>
-          </a:ln>
-        </p:spPr>
-        <p:style>
-          <a:lnRef idx="1">
-            <a:schemeClr val="accent1"/>
-          </a:lnRef>
-          <a:fillRef idx="3">
-            <a:schemeClr val="accent1"/>
-          </a:fillRef>
-          <a:effectRef idx="2">
-            <a:schemeClr val="accent1"/>
-          </a:effectRef>
-          <a:fontRef idx="minor">
-            <a:schemeClr val="lt1"/>
-          </a:fontRef>
-        </p:style>
-        <p:txBody>
-          <a:bodyPr rtlCol="0" anchor="ctr"/>
-          <a:lstStyle/>
-          <a:p>
-            <a:pPr algn="ctr"/>
-          </a:p>
-        </p:txBody>
-      </p:sp>
-      <p:sp>
-        <p:nvSpPr>
-          <p:cNvPr id="10" name="Rectangle 9"/>
-          <p:cNvSpPr/>
-          <p:nvPr/>
-        </p:nvSpPr>
-        <p:spPr>
-          <a:xfrm>
-            <a:off x="640080" y="2084832"/>
-            <a:ext cx="274320" cy="274320"/>
-          </a:xfrm>
-          <a:prstGeom prst="rect">
-            <a:avLst/>
-          </a:prstGeom>
-          <a:solidFill>
-            <a:srgbClr val="FFFFFF"/>
-          </a:solidFill>
-          <a:ln>
-            <a:solidFill>
-              <a:srgbClr val="333333"/>
-            </a:solidFill>
-          </a:ln>
-        </p:spPr>
-        <p:style>
-          <a:lnRef idx="1">
-            <a:schemeClr val="accent1"/>
-          </a:lnRef>
-          <a:fillRef idx="3">
-            <a:schemeClr val="accent1"/>
-          </a:fillRef>
-          <a:effectRef idx="2">
-            <a:schemeClr val="accent1"/>
-          </a:effectRef>
-          <a:fontRef idx="minor">
-            <a:schemeClr val="lt1"/>
-          </a:fontRef>
-        </p:style>
-        <p:txBody>
-          <a:bodyPr rtlCol="0" anchor="ctr"/>
-          <a:lstStyle/>
-          <a:p>
-            <a:pPr algn="ctr"/>
-          </a:p>
-        </p:txBody>
-      </p:sp>
-      <p:sp>
-        <p:nvSpPr>
-          <p:cNvPr id="11" name="Rectangle 10"/>
-          <p:cNvSpPr/>
-          <p:nvPr/>
-        </p:nvSpPr>
-        <p:spPr>
-          <a:xfrm>
-            <a:off x="640080" y="2084832"/>
-            <a:ext cx="73152" cy="274320"/>
-          </a:xfrm>
-          <a:prstGeom prst="rect">
-            <a:avLst/>
-          </a:prstGeom>
-          <a:solidFill>
-            <a:srgbClr val="269CCB"/>
-          </a:solidFill>
-          <a:ln>
-            <a:noFill/>
-          </a:ln>
-        </p:spPr>
-        <p:style>
-          <a:lnRef idx="1">
-            <a:schemeClr val="accent1"/>
-          </a:lnRef>
-          <a:fillRef idx="3">
-            <a:schemeClr val="accent1"/>
-          </a:fillRef>
-          <a:effectRef idx="2">
-            <a:schemeClr val="accent1"/>
-          </a:effectRef>
-          <a:fontRef idx="minor">
-            <a:schemeClr val="lt1"/>
-          </a:fontRef>
-        </p:style>
-        <p:txBody>
-          <a:bodyPr rtlCol="0" anchor="ctr"/>
-          <a:lstStyle/>
-          <a:p>
-            <a:pPr algn="ctr"/>
-          </a:p>
-        </p:txBody>
-      </p:sp>
-      <p:sp>
-        <p:nvSpPr>
-          <p:cNvPr id="12" name="TextBox 11"/>
-          <p:cNvSpPr txBox="1"/>
-          <p:nvPr/>
-        </p:nvSpPr>
-        <p:spPr>
-          <a:xfrm>
-            <a:off x="1097280" y="2029968"/>
-            <a:ext cx="10362895" cy="402336"/>
-          </a:xfrm>
-          <a:prstGeom prst="rect">
-            <a:avLst/>
-          </a:prstGeom>
-          <a:noFill/>
-        </p:spPr>
-        <p:txBody>
-          <a:bodyPr wrap="square" anchor="ctr"/>
-          <a:lstStyle/>
-          <a:p>
-            <a:r>
-              <a:rPr sz="1500" b="0" i="0">
-                <a:solidFill>
-                  <a:srgbClr val="333333"/>
-                </a:solidFill>
-                <a:latin typeface="Calibri"/>
-              </a:rPr>
-              <a:t>□ ¿Creaste los </a:t>
-            </a:r>
-            <a:r>
-              <a:rPr sz="1500" b="1" i="0">
-                <a:solidFill>
-                  <a:srgbClr val="333333"/>
-                </a:solidFill>
-                <a:latin typeface="Calibri"/>
-              </a:rPr>
-              <a:t>dos</a:t>
-            </a:r>
-            <a:r>
-              <a:rPr sz="1500" b="0" i="0">
-                <a:solidFill>
-                  <a:srgbClr val="333333"/>
-                </a:solidFill>
-                <a:latin typeface="Calibri"/>
-              </a:rPr>
-              <a:t> objetos del trigger? Una función sola no dispara nada.</a:t>
-            </a:r>
-          </a:p>
-        </p:txBody>
-      </p:sp>
-      <p:sp>
-        <p:nvSpPr>
-          <p:cNvPr id="13" name="Rounded Rectangle 12"/>
-          <p:cNvSpPr/>
-          <p:nvPr/>
-        </p:nvSpPr>
-        <p:spPr>
-          <a:xfrm>
-            <a:off x="457200" y="2615184"/>
-            <a:ext cx="11277295" cy="566928"/>
-          </a:xfrm>
-          <a:prstGeom prst="roundRect">
-            <a:avLst>
-              <a:gd name="adj" fmla="val 12000"/>
-            </a:avLst>
-          </a:prstGeom>
-          <a:solidFill>
-            <a:srgbClr val="F2F2F2"/>
-          </a:solidFill>
-          <a:ln>
-            <a:noFill/>
-          </a:ln>
-        </p:spPr>
-        <p:style>
-          <a:lnRef idx="1">
-            <a:schemeClr val="accent1"/>
-          </a:lnRef>
-          <a:fillRef idx="3">
-            <a:schemeClr val="accent1"/>
-          </a:fillRef>
-          <a:effectRef idx="2">
-            <a:schemeClr val="accent1"/>
-          </a:effectRef>
-          <a:fontRef idx="minor">
-            <a:schemeClr val="lt1"/>
-          </a:fontRef>
-        </p:style>
-        <p:txBody>
-          <a:bodyPr rtlCol="0" anchor="ctr"/>
-          <a:lstStyle/>
-          <a:p>
-            <a:pPr algn="ctr"/>
-          </a:p>
-        </p:txBody>
-      </p:sp>
-      <p:sp>
-        <p:nvSpPr>
-          <p:cNvPr id="14" name="Rectangle 13"/>
-          <p:cNvSpPr/>
-          <p:nvPr/>
-        </p:nvSpPr>
-        <p:spPr>
-          <a:xfrm>
-            <a:off x="640080" y="2761488"/>
-            <a:ext cx="274320" cy="274320"/>
-          </a:xfrm>
-          <a:prstGeom prst="rect">
-            <a:avLst/>
-          </a:prstGeom>
-          <a:solidFill>
-            <a:srgbClr val="FFFFFF"/>
-          </a:solidFill>
-          <a:ln>
-            <a:solidFill>
-              <a:srgbClr val="333333"/>
-            </a:solidFill>
-          </a:ln>
-        </p:spPr>
-        <p:style>
-          <a:lnRef idx="1">
-            <a:schemeClr val="accent1"/>
-          </a:lnRef>
-          <a:fillRef idx="3">
-            <a:schemeClr val="accent1"/>
-          </a:fillRef>
-          <a:effectRef idx="2">
-            <a:schemeClr val="accent1"/>
-          </a:effectRef>
-          <a:fontRef idx="minor">
-            <a:schemeClr val="lt1"/>
-          </a:fontRef>
-        </p:style>
-        <p:txBody>
-          <a:bodyPr rtlCol="0" anchor="ctr"/>
-          <a:lstStyle/>
-          <a:p>
-            <a:pPr algn="ctr"/>
-          </a:p>
-        </p:txBody>
-      </p:sp>
-      <p:sp>
-        <p:nvSpPr>
-          <p:cNvPr id="15" name="Rectangle 14"/>
-          <p:cNvSpPr/>
-          <p:nvPr/>
-        </p:nvSpPr>
-        <p:spPr>
-          <a:xfrm>
-            <a:off x="640080" y="2761488"/>
-            <a:ext cx="73152" cy="274320"/>
-          </a:xfrm>
-          <a:prstGeom prst="rect">
-            <a:avLst/>
-          </a:prstGeom>
-          <a:solidFill>
-            <a:srgbClr val="269CCB"/>
-          </a:solidFill>
-          <a:ln>
-            <a:noFill/>
-          </a:ln>
-        </p:spPr>
-        <p:style>
-          <a:lnRef idx="1">
-            <a:schemeClr val="accent1"/>
-          </a:lnRef>
-          <a:fillRef idx="3">
-            <a:schemeClr val="accent1"/>
-          </a:fillRef>
-          <a:effectRef idx="2">
-            <a:schemeClr val="accent1"/>
-          </a:effectRef>
-          <a:fontRef idx="minor">
-            <a:schemeClr val="lt1"/>
-          </a:fontRef>
-        </p:style>
-        <p:txBody>
-          <a:bodyPr rtlCol="0" anchor="ctr"/>
-          <a:lstStyle/>
-          <a:p>
-            <a:pPr algn="ctr"/>
-          </a:p>
-        </p:txBody>
-      </p:sp>
-      <p:sp>
-        <p:nvSpPr>
-          <p:cNvPr id="16" name="TextBox 15"/>
-          <p:cNvSpPr txBox="1"/>
-          <p:nvPr/>
-        </p:nvSpPr>
-        <p:spPr>
-          <a:xfrm>
-            <a:off x="1097280" y="2706624"/>
-            <a:ext cx="10362895" cy="402336"/>
-          </a:xfrm>
-          <a:prstGeom prst="rect">
-            <a:avLst/>
-          </a:prstGeom>
-          <a:noFill/>
-        </p:spPr>
-        <p:txBody>
-          <a:bodyPr wrap="square" anchor="ctr"/>
-          <a:lstStyle/>
-          <a:p>
-            <a:r>
-              <a:rPr sz="1500" b="0" i="0">
-                <a:solidFill>
-                  <a:srgbClr val="333333"/>
-                </a:solidFill>
-                <a:latin typeface="Calibri"/>
-              </a:rPr>
-              <a:t>□ ¿Está el «WHEN (OLD.estado IS DISTINCT FROM NEW.estado)», y «audit_cita» quedó con </a:t>
-            </a:r>
-            <a:r>
-              <a:rPr sz="1500" b="1" i="0">
-                <a:solidFill>
-                  <a:srgbClr val="333333"/>
-                </a:solidFill>
-                <a:latin typeface="Calibri"/>
-              </a:rPr>
-              <a:t>2</a:t>
-            </a:r>
-            <a:r>
-              <a:rPr sz="1500" b="0" i="0">
-                <a:solidFill>
-                  <a:srgbClr val="333333"/>
-                </a:solidFill>
-                <a:latin typeface="Calibri"/>
-              </a:rPr>
-              <a:t> filas?</a:t>
-            </a:r>
-          </a:p>
-        </p:txBody>
-      </p:sp>
-      <p:sp>
-        <p:nvSpPr>
-          <p:cNvPr id="17" name="Rounded Rectangle 16"/>
-          <p:cNvSpPr/>
-          <p:nvPr/>
-        </p:nvSpPr>
-        <p:spPr>
-          <a:xfrm>
-            <a:off x="457200" y="3291840"/>
-            <a:ext cx="11277295" cy="566928"/>
-          </a:xfrm>
-          <a:prstGeom prst="roundRect">
-            <a:avLst>
-              <a:gd name="adj" fmla="val 12000"/>
-            </a:avLst>
-          </a:prstGeom>
-          <a:solidFill>
-            <a:srgbClr val="F2F2F2"/>
-          </a:solidFill>
-          <a:ln>
-            <a:noFill/>
-          </a:ln>
-        </p:spPr>
-        <p:style>
-          <a:lnRef idx="1">
-            <a:schemeClr val="accent1"/>
-          </a:lnRef>
-          <a:fillRef idx="3">
-            <a:schemeClr val="accent1"/>
-          </a:fillRef>
-          <a:effectRef idx="2">
-            <a:schemeClr val="accent1"/>
-          </a:effectRef>
-          <a:fontRef idx="minor">
-            <a:schemeClr val="lt1"/>
-          </a:fontRef>
-        </p:style>
-        <p:txBody>
-          <a:bodyPr rtlCol="0" anchor="ctr"/>
-          <a:lstStyle/>
-          <a:p>
-            <a:pPr algn="ctr"/>
-          </a:p>
-        </p:txBody>
-      </p:sp>
-      <p:sp>
-        <p:nvSpPr>
-          <p:cNvPr id="18" name="Rectangle 17"/>
-          <p:cNvSpPr/>
-          <p:nvPr/>
-        </p:nvSpPr>
-        <p:spPr>
-          <a:xfrm>
-            <a:off x="640080" y="3438144"/>
-            <a:ext cx="274320" cy="274320"/>
-          </a:xfrm>
-          <a:prstGeom prst="rect">
-            <a:avLst/>
-          </a:prstGeom>
-          <a:solidFill>
-            <a:srgbClr val="FFFFFF"/>
-          </a:solidFill>
-          <a:ln>
-            <a:solidFill>
-              <a:srgbClr val="333333"/>
-            </a:solidFill>
-          </a:ln>
-        </p:spPr>
-        <p:style>
-          <a:lnRef idx="1">
-            <a:schemeClr val="accent1"/>
-          </a:lnRef>
-          <a:fillRef idx="3">
-            <a:schemeClr val="accent1"/>
-          </a:fillRef>
-          <a:effectRef idx="2">
-            <a:schemeClr val="accent1"/>
-          </a:effectRef>
-          <a:fontRef idx="minor">
-            <a:schemeClr val="lt1"/>
-          </a:fontRef>
-        </p:style>
-        <p:txBody>
-          <a:bodyPr rtlCol="0" anchor="ctr"/>
-          <a:lstStyle/>
-          <a:p>
-            <a:pPr algn="ctr"/>
-          </a:p>
-        </p:txBody>
-      </p:sp>
-      <p:sp>
-        <p:nvSpPr>
-          <p:cNvPr id="19" name="Rectangle 18"/>
-          <p:cNvSpPr/>
-          <p:nvPr/>
-        </p:nvSpPr>
-        <p:spPr>
-          <a:xfrm>
-            <a:off x="640080" y="3438144"/>
-            <a:ext cx="73152" cy="274320"/>
-          </a:xfrm>
-          <a:prstGeom prst="rect">
-            <a:avLst/>
-          </a:prstGeom>
-          <a:solidFill>
-            <a:srgbClr val="269CCB"/>
-          </a:solidFill>
-          <a:ln>
-            <a:noFill/>
-          </a:ln>
-        </p:spPr>
-        <p:style>
-          <a:lnRef idx="1">
-            <a:schemeClr val="accent1"/>
-          </a:lnRef>
-          <a:fillRef idx="3">
-            <a:schemeClr val="accent1"/>
-          </a:fillRef>
-          <a:effectRef idx="2">
-            <a:schemeClr val="accent1"/>
-          </a:effectRef>
-          <a:fontRef idx="minor">
-            <a:schemeClr val="lt1"/>
-          </a:fontRef>
-        </p:style>
-        <p:txBody>
-          <a:bodyPr rtlCol="0" anchor="ctr"/>
-          <a:lstStyle/>
-          <a:p>
-            <a:pPr algn="ctr"/>
-          </a:p>
-        </p:txBody>
-      </p:sp>
-      <p:sp>
-        <p:nvSpPr>
-          <p:cNvPr id="20" name="TextBox 19"/>
-          <p:cNvSpPr txBox="1"/>
-          <p:nvPr/>
-        </p:nvSpPr>
-        <p:spPr>
-          <a:xfrm>
-            <a:off x="1097280" y="3383280"/>
-            <a:ext cx="10362895" cy="402336"/>
-          </a:xfrm>
-          <a:prstGeom prst="rect">
-            <a:avLst/>
-          </a:prstGeom>
-          <a:noFill/>
-        </p:spPr>
-        <p:txBody>
-          <a:bodyPr wrap="square" anchor="ctr"/>
-          <a:lstStyle/>
-          <a:p>
-            <a:r>
-              <a:rPr sz="1500" b="0" i="0">
-                <a:solidFill>
-                  <a:srgbClr val="333333"/>
-                </a:solidFill>
-                <a:latin typeface="Calibri"/>
-              </a:rPr>
-              <a:t>□ ¿«usuario_bd» y «fecha_evento» se llenan por «DEFAULT», no desde el trigger?</a:t>
-            </a:r>
-          </a:p>
-        </p:txBody>
-      </p:sp>
-      <p:sp>
-        <p:nvSpPr>
-          <p:cNvPr id="21" name="Rounded Rectangle 20"/>
-          <p:cNvSpPr/>
-          <p:nvPr/>
-        </p:nvSpPr>
-        <p:spPr>
-          <a:xfrm>
-            <a:off x="457200" y="3968496"/>
-            <a:ext cx="11277295" cy="566928"/>
-          </a:xfrm>
-          <a:prstGeom prst="roundRect">
-            <a:avLst>
-              <a:gd name="adj" fmla="val 12000"/>
-            </a:avLst>
-          </a:prstGeom>
-          <a:solidFill>
-            <a:srgbClr val="F2F2F2"/>
-          </a:solidFill>
-          <a:ln>
-            <a:noFill/>
-          </a:ln>
-        </p:spPr>
-        <p:style>
-          <a:lnRef idx="1">
-            <a:schemeClr val="accent1"/>
-          </a:lnRef>
-          <a:fillRef idx="3">
-            <a:schemeClr val="accent1"/>
-          </a:fillRef>
-          <a:effectRef idx="2">
-            <a:schemeClr val="accent1"/>
-          </a:effectRef>
-          <a:fontRef idx="minor">
-            <a:schemeClr val="lt1"/>
-          </a:fontRef>
-        </p:style>
-        <p:txBody>
-          <a:bodyPr rtlCol="0" anchor="ctr"/>
-          <a:lstStyle/>
-          <a:p>
-            <a:pPr algn="ctr"/>
-          </a:p>
-        </p:txBody>
-      </p:sp>
-      <p:sp>
-        <p:nvSpPr>
-          <p:cNvPr id="22" name="Rectangle 21"/>
-          <p:cNvSpPr/>
-          <p:nvPr/>
-        </p:nvSpPr>
-        <p:spPr>
-          <a:xfrm>
-            <a:off x="640080" y="4114800"/>
-            <a:ext cx="274320" cy="274320"/>
-          </a:xfrm>
-          <a:prstGeom prst="rect">
-            <a:avLst/>
-          </a:prstGeom>
-          <a:solidFill>
-            <a:srgbClr val="FFFFFF"/>
-          </a:solidFill>
-          <a:ln>
-            <a:solidFill>
-              <a:srgbClr val="333333"/>
-            </a:solidFill>
-          </a:ln>
-        </p:spPr>
-        <p:style>
-          <a:lnRef idx="1">
-            <a:schemeClr val="accent1"/>
-          </a:lnRef>
-          <a:fillRef idx="3">
-            <a:schemeClr val="accent1"/>
-          </a:fillRef>
-          <a:effectRef idx="2">
-            <a:schemeClr val="accent1"/>
-          </a:effectRef>
-          <a:fontRef idx="minor">
-            <a:schemeClr val="lt1"/>
-          </a:fontRef>
-        </p:style>
-        <p:txBody>
-          <a:bodyPr rtlCol="0" anchor="ctr"/>
-          <a:lstStyle/>
-          <a:p>
-            <a:pPr algn="ctr"/>
-          </a:p>
-        </p:txBody>
-      </p:sp>
-      <p:sp>
-        <p:nvSpPr>
-          <p:cNvPr id="23" name="Rectangle 22"/>
-          <p:cNvSpPr/>
-          <p:nvPr/>
-        </p:nvSpPr>
-        <p:spPr>
-          <a:xfrm>
-            <a:off x="640080" y="4114800"/>
-            <a:ext cx="73152" cy="274320"/>
-          </a:xfrm>
-          <a:prstGeom prst="rect">
-            <a:avLst/>
-          </a:prstGeom>
-          <a:solidFill>
-            <a:srgbClr val="269CCB"/>
-          </a:solidFill>
-          <a:ln>
-            <a:noFill/>
-          </a:ln>
-        </p:spPr>
-        <p:style>
-          <a:lnRef idx="1">
-            <a:schemeClr val="accent1"/>
-          </a:lnRef>
-          <a:fillRef idx="3">
-            <a:schemeClr val="accent1"/>
-          </a:fillRef>
-          <a:effectRef idx="2">
-            <a:schemeClr val="accent1"/>
-          </a:effectRef>
-          <a:fontRef idx="minor">
-            <a:schemeClr val="lt1"/>
-          </a:fontRef>
-        </p:style>
-        <p:txBody>
-          <a:bodyPr rtlCol="0" anchor="ctr"/>
-          <a:lstStyle/>
-          <a:p>
-            <a:pPr algn="ctr"/>
-          </a:p>
-        </p:txBody>
-      </p:sp>
-      <p:sp>
-        <p:nvSpPr>
-          <p:cNvPr id="24" name="TextBox 23"/>
-          <p:cNvSpPr txBox="1"/>
-          <p:nvPr/>
-        </p:nvSpPr>
-        <p:spPr>
-          <a:xfrm>
-            <a:off x="1097280" y="4059936"/>
-            <a:ext cx="10362895" cy="402336"/>
-          </a:xfrm>
-          <a:prstGeom prst="rect">
-            <a:avLst/>
-          </a:prstGeom>
-          <a:noFill/>
-        </p:spPr>
-        <p:txBody>
-          <a:bodyPr wrap="square" anchor="ctr"/>
-          <a:lstStyle/>
-          <a:p>
-            <a:r>
-              <a:rPr sz="1500" b="0" i="0">
-                <a:solidFill>
-                  <a:srgbClr val="333333"/>
-                </a:solidFill>
-                <a:latin typeface="Calibri"/>
-              </a:rPr>
-              <a:t>□ ¿Se ve el </a:t>
-            </a:r>
-            <a:r>
-              <a:rPr sz="1500" b="1" i="0">
-                <a:solidFill>
-                  <a:srgbClr val="333333"/>
-                </a:solidFill>
-                <a:latin typeface="Calibri"/>
-              </a:rPr>
-              <a:t>-7</a:t>
-            </a:r>
-            <a:r>
-              <a:rPr sz="1500" b="0" i="0">
-                <a:solidFill>
-                  <a:srgbClr val="333333"/>
-                </a:solidFill>
-                <a:latin typeface="Calibri"/>
-              </a:rPr>
-              <a:t> antes de crear el trigger, y el stock volvió a 3 para probarlo?</a:t>
-            </a:r>
-          </a:p>
-        </p:txBody>
-      </p:sp>
-      <p:sp>
-        <p:nvSpPr>
-          <p:cNvPr id="25" name="Rounded Rectangle 24"/>
-          <p:cNvSpPr/>
-          <p:nvPr/>
-        </p:nvSpPr>
-        <p:spPr>
-          <a:xfrm>
-            <a:off x="457200" y="4645152"/>
-            <a:ext cx="11277295" cy="566928"/>
-          </a:xfrm>
-          <a:prstGeom prst="roundRect">
-            <a:avLst>
-              <a:gd name="adj" fmla="val 12000"/>
-            </a:avLst>
-          </a:prstGeom>
-          <a:solidFill>
-            <a:srgbClr val="F2F2F2"/>
-          </a:solidFill>
-          <a:ln>
-            <a:noFill/>
-          </a:ln>
-        </p:spPr>
-        <p:style>
-          <a:lnRef idx="1">
-            <a:schemeClr val="accent1"/>
-          </a:lnRef>
-          <a:fillRef idx="3">
-            <a:schemeClr val="accent1"/>
-          </a:fillRef>
-          <a:effectRef idx="2">
-            <a:schemeClr val="accent1"/>
-          </a:effectRef>
-          <a:fontRef idx="minor">
-            <a:schemeClr val="lt1"/>
-          </a:fontRef>
-        </p:style>
-        <p:txBody>
-          <a:bodyPr rtlCol="0" anchor="ctr"/>
-          <a:lstStyle/>
-          <a:p>
-            <a:pPr algn="ctr"/>
-          </a:p>
-        </p:txBody>
-      </p:sp>
-      <p:sp>
-        <p:nvSpPr>
-          <p:cNvPr id="26" name="Rectangle 25"/>
-          <p:cNvSpPr/>
-          <p:nvPr/>
-        </p:nvSpPr>
-        <p:spPr>
-          <a:xfrm>
-            <a:off x="640080" y="4791456"/>
-            <a:ext cx="274320" cy="274320"/>
-          </a:xfrm>
-          <a:prstGeom prst="rect">
-            <a:avLst/>
-          </a:prstGeom>
-          <a:solidFill>
-            <a:srgbClr val="FFFFFF"/>
-          </a:solidFill>
-          <a:ln>
-            <a:solidFill>
-              <a:srgbClr val="333333"/>
-            </a:solidFill>
-          </a:ln>
-        </p:spPr>
-        <p:style>
-          <a:lnRef idx="1">
-            <a:schemeClr val="accent1"/>
-          </a:lnRef>
-          <a:fillRef idx="3">
-            <a:schemeClr val="accent1"/>
-          </a:fillRef>
-          <a:effectRef idx="2">
-            <a:schemeClr val="accent1"/>
-          </a:effectRef>
-          <a:fontRef idx="minor">
-            <a:schemeClr val="lt1"/>
-          </a:fontRef>
-        </p:style>
-        <p:txBody>
-          <a:bodyPr rtlCol="0" anchor="ctr"/>
-          <a:lstStyle/>
-          <a:p>
-            <a:pPr algn="ctr"/>
-          </a:p>
-        </p:txBody>
-      </p:sp>
-      <p:sp>
-        <p:nvSpPr>
-          <p:cNvPr id="27" name="Rectangle 26"/>
-          <p:cNvSpPr/>
-          <p:nvPr/>
-        </p:nvSpPr>
-        <p:spPr>
-          <a:xfrm>
-            <a:off x="640080" y="4791456"/>
-            <a:ext cx="73152" cy="274320"/>
-          </a:xfrm>
-          <a:prstGeom prst="rect">
-            <a:avLst/>
-          </a:prstGeom>
-          <a:solidFill>
-            <a:srgbClr val="269CCB"/>
-          </a:solidFill>
-          <a:ln>
-            <a:noFill/>
-          </a:ln>
-        </p:spPr>
-        <p:style>
-          <a:lnRef idx="1">
-            <a:schemeClr val="accent1"/>
-          </a:lnRef>
-          <a:fillRef idx="3">
-            <a:schemeClr val="accent1"/>
-          </a:fillRef>
-          <a:effectRef idx="2">
-            <a:schemeClr val="accent1"/>
-          </a:effectRef>
-          <a:fontRef idx="minor">
-            <a:schemeClr val="lt1"/>
-          </a:fontRef>
-        </p:style>
-        <p:txBody>
-          <a:bodyPr rtlCol="0" anchor="ctr"/>
-          <a:lstStyle/>
-          <a:p>
-            <a:pPr algn="ctr"/>
-          </a:p>
-        </p:txBody>
-      </p:sp>
-      <p:sp>
-        <p:nvSpPr>
-          <p:cNvPr id="28" name="TextBox 27"/>
-          <p:cNvSpPr txBox="1"/>
-          <p:nvPr/>
-        </p:nvSpPr>
-        <p:spPr>
-          <a:xfrm>
-            <a:off x="1097280" y="4736592"/>
-            <a:ext cx="10362895" cy="402336"/>
-          </a:xfrm>
-          <a:prstGeom prst="rect">
-            <a:avLst/>
-          </a:prstGeom>
-          <a:noFill/>
-        </p:spPr>
-        <p:txBody>
-          <a:bodyPr wrap="square" anchor="ctr"/>
-          <a:lstStyle/>
-          <a:p>
-            <a:r>
-              <a:rPr sz="1500" b="0" i="0">
-                <a:solidFill>
-                  <a:srgbClr val="333333"/>
-                </a:solidFill>
-                <a:latin typeface="Calibri"/>
-              </a:rPr>
-              <a:t>□ ¿El trigger de stock es «BEFORE», y el insumo 2 termina en </a:t>
-            </a:r>
-            <a:r>
-              <a:rPr sz="1500" b="1" i="0">
-                <a:solidFill>
-                  <a:srgbClr val="333333"/>
-                </a:solidFill>
-                <a:latin typeface="Calibri"/>
-              </a:rPr>
-              <a:t>stock 1</a:t>
-            </a:r>
-            <a:r>
-              <a:rPr sz="1500" b="0" i="0">
-                <a:solidFill>
-                  <a:srgbClr val="333333"/>
-                </a:solidFill>
-                <a:latin typeface="Calibri"/>
-              </a:rPr>
-              <a:t>?</a:t>
-            </a:r>
-          </a:p>
-        </p:txBody>
-      </p:sp>
-      <p:sp>
-        <p:nvSpPr>
-          <p:cNvPr id="29" name="Rounded Rectangle 28"/>
-          <p:cNvSpPr/>
-          <p:nvPr/>
-        </p:nvSpPr>
-        <p:spPr>
-          <a:xfrm>
-            <a:off x="457200" y="5321808"/>
-            <a:ext cx="11277295" cy="566928"/>
-          </a:xfrm>
-          <a:prstGeom prst="roundRect">
-            <a:avLst>
-              <a:gd name="adj" fmla="val 12000"/>
-            </a:avLst>
-          </a:prstGeom>
-          <a:solidFill>
-            <a:srgbClr val="F2F2F2"/>
-          </a:solidFill>
-          <a:ln>
-            <a:noFill/>
-          </a:ln>
-        </p:spPr>
-        <p:style>
-          <a:lnRef idx="1">
-            <a:schemeClr val="accent1"/>
-          </a:lnRef>
-          <a:fillRef idx="3">
-            <a:schemeClr val="accent1"/>
-          </a:fillRef>
-          <a:effectRef idx="2">
-            <a:schemeClr val="accent1"/>
-          </a:effectRef>
-          <a:fontRef idx="minor">
-            <a:schemeClr val="lt1"/>
-          </a:fontRef>
-        </p:style>
-        <p:txBody>
-          <a:bodyPr rtlCol="0" anchor="ctr"/>
-          <a:lstStyle/>
-          <a:p>
-            <a:pPr algn="ctr"/>
-          </a:p>
-        </p:txBody>
-      </p:sp>
-      <p:sp>
-        <p:nvSpPr>
-          <p:cNvPr id="30" name="Rectangle 29"/>
-          <p:cNvSpPr/>
-          <p:nvPr/>
-        </p:nvSpPr>
-        <p:spPr>
-          <a:xfrm>
-            <a:off x="640080" y="5468112"/>
-            <a:ext cx="274320" cy="274320"/>
-          </a:xfrm>
-          <a:prstGeom prst="rect">
-            <a:avLst/>
-          </a:prstGeom>
-          <a:solidFill>
-            <a:srgbClr val="FFFFFF"/>
-          </a:solidFill>
-          <a:ln>
-            <a:solidFill>
-              <a:srgbClr val="333333"/>
-            </a:solidFill>
-          </a:ln>
-        </p:spPr>
-        <p:style>
-          <a:lnRef idx="1">
-            <a:schemeClr val="accent1"/>
-          </a:lnRef>
-          <a:fillRef idx="3">
-            <a:schemeClr val="accent1"/>
-          </a:fillRef>
-          <a:effectRef idx="2">
-            <a:schemeClr val="accent1"/>
-          </a:effectRef>
-          <a:fontRef idx="minor">
-            <a:schemeClr val="lt1"/>
-          </a:fontRef>
-        </p:style>
-        <p:txBody>
-          <a:bodyPr rtlCol="0" anchor="ctr"/>
-          <a:lstStyle/>
-          <a:p>
-            <a:pPr algn="ctr"/>
-          </a:p>
-        </p:txBody>
-      </p:sp>
-      <p:sp>
-        <p:nvSpPr>
-          <p:cNvPr id="31" name="Rectangle 30"/>
-          <p:cNvSpPr/>
-          <p:nvPr/>
-        </p:nvSpPr>
-        <p:spPr>
-          <a:xfrm>
-            <a:off x="640080" y="5468112"/>
-            <a:ext cx="73152" cy="274320"/>
-          </a:xfrm>
-          <a:prstGeom prst="rect">
-            <a:avLst/>
-          </a:prstGeom>
-          <a:solidFill>
-            <a:srgbClr val="269CCB"/>
-          </a:solidFill>
-          <a:ln>
-            <a:noFill/>
-          </a:ln>
-        </p:spPr>
-        <p:style>
-          <a:lnRef idx="1">
-            <a:schemeClr val="accent1"/>
-          </a:lnRef>
-          <a:fillRef idx="3">
-            <a:schemeClr val="accent1"/>
-          </a:fillRef>
-          <a:effectRef idx="2">
-            <a:schemeClr val="accent1"/>
-          </a:effectRef>
-          <a:fontRef idx="minor">
-            <a:schemeClr val="lt1"/>
-          </a:fontRef>
-        </p:style>
-        <p:txBody>
-          <a:bodyPr rtlCol="0" anchor="ctr"/>
-          <a:lstStyle/>
-          <a:p>
-            <a:pPr algn="ctr"/>
-          </a:p>
-        </p:txBody>
-      </p:sp>
-      <p:sp>
-        <p:nvSpPr>
-          <p:cNvPr id="32" name="TextBox 31"/>
-          <p:cNvSpPr txBox="1"/>
-          <p:nvPr/>
-        </p:nvSpPr>
-        <p:spPr>
-          <a:xfrm>
-            <a:off x="1097280" y="5413248"/>
-            <a:ext cx="10362895" cy="402336"/>
-          </a:xfrm>
-          <a:prstGeom prst="rect">
-            <a:avLst/>
-          </a:prstGeom>
-          <a:noFill/>
-        </p:spPr>
-        <p:txBody>
-          <a:bodyPr wrap="square" anchor="ctr"/>
-          <a:lstStyle/>
-          <a:p>
-            <a:r>
-              <a:rPr sz="1500" b="0" i="0">
-                <a:solidFill>
-                  <a:srgbClr val="333333"/>
-                </a:solidFill>
-                <a:latin typeface="Calibri"/>
-              </a:rPr>
-              <a:t>□ ¿En la de selección múltiple revisaste </a:t>
-            </a:r>
-            <a:r>
-              <a:rPr sz="1500" b="1" i="0">
-                <a:solidFill>
-                  <a:srgbClr val="333333"/>
-                </a:solidFill>
-                <a:latin typeface="Calibri"/>
-              </a:rPr>
-              <a:t>las seis</a:t>
-            </a:r>
-            <a:r>
-              <a:rPr sz="1500" b="0" i="0">
-                <a:solidFill>
-                  <a:srgbClr val="333333"/>
-                </a:solidFill>
-                <a:latin typeface="Calibri"/>
-              </a:rPr>
-              <a:t> afirmaciones, preguntándote si la regla mira solo su propia fila y quién la garantiza cuando el SQL </a:t>
-            </a:r>
-            <a:r>
-              <a:rPr sz="1500" b="1" i="0">
-                <a:solidFill>
-                  <a:srgbClr val="333333"/>
-                </a:solidFill>
-                <a:latin typeface="Calibri"/>
-              </a:rPr>
-              <a:t>no</a:t>
-            </a:r>
-            <a:r>
-              <a:rPr sz="1500" b="0" i="0">
-                <a:solidFill>
-                  <a:srgbClr val="333333"/>
-                </a:solidFill>
-                <a:latin typeface="Calibri"/>
-              </a:rPr>
-              <a:t> viene de la aplicación?</a:t>
-            </a:r>
-          </a:p>
-        </p:txBody>
-      </p:sp>
-      <p:sp>
-        <p:nvSpPr>
-          <p:cNvPr id="33" name="Rounded Rectangle 32"/>
-          <p:cNvSpPr/>
-          <p:nvPr/>
-        </p:nvSpPr>
-        <p:spPr>
-          <a:xfrm>
-            <a:off x="457200" y="5998464"/>
-            <a:ext cx="11277295" cy="566928"/>
-          </a:xfrm>
-          <a:prstGeom prst="roundRect">
-            <a:avLst>
-              <a:gd name="adj" fmla="val 12000"/>
-            </a:avLst>
-          </a:prstGeom>
-          <a:solidFill>
-            <a:srgbClr val="F2F2F2"/>
-          </a:solidFill>
-          <a:ln>
-            <a:noFill/>
-          </a:ln>
-        </p:spPr>
-        <p:style>
-          <a:lnRef idx="1">
-            <a:schemeClr val="accent1"/>
-          </a:lnRef>
-          <a:fillRef idx="3">
-            <a:schemeClr val="accent1"/>
-          </a:fillRef>
-          <a:effectRef idx="2">
-            <a:schemeClr val="accent1"/>
-          </a:effectRef>
-          <a:fontRef idx="minor">
-            <a:schemeClr val="lt1"/>
-          </a:fontRef>
-        </p:style>
-        <p:txBody>
-          <a:bodyPr rtlCol="0" anchor="ctr"/>
-          <a:lstStyle/>
-          <a:p>
-            <a:pPr algn="ctr"/>
-          </a:p>
-        </p:txBody>
-      </p:sp>
-      <p:sp>
-        <p:nvSpPr>
-          <p:cNvPr id="34" name="Rectangle 33"/>
-          <p:cNvSpPr/>
-          <p:nvPr/>
-        </p:nvSpPr>
-        <p:spPr>
-          <a:xfrm>
-            <a:off x="640080" y="6144768"/>
-            <a:ext cx="274320" cy="274320"/>
-          </a:xfrm>
-          <a:prstGeom prst="rect">
-            <a:avLst/>
-          </a:prstGeom>
-          <a:solidFill>
-            <a:srgbClr val="FFFFFF"/>
-          </a:solidFill>
-          <a:ln>
-            <a:solidFill>
-              <a:srgbClr val="333333"/>
-            </a:solidFill>
-          </a:ln>
-        </p:spPr>
-        <p:style>
-          <a:lnRef idx="1">
-            <a:schemeClr val="accent1"/>
-          </a:lnRef>
-          <a:fillRef idx="3">
-            <a:schemeClr val="accent1"/>
-          </a:fillRef>
-          <a:effectRef idx="2">
-            <a:schemeClr val="accent1"/>
-          </a:effectRef>
-          <a:fontRef idx="minor">
-            <a:schemeClr val="lt1"/>
-          </a:fontRef>
-        </p:style>
-        <p:txBody>
-          <a:bodyPr rtlCol="0" anchor="ctr"/>
-          <a:lstStyle/>
-          <a:p>
-            <a:pPr algn="ctr"/>
-          </a:p>
-        </p:txBody>
-      </p:sp>
-      <p:sp>
-        <p:nvSpPr>
-          <p:cNvPr id="35" name="Rectangle 34"/>
-          <p:cNvSpPr/>
-          <p:nvPr/>
-        </p:nvSpPr>
-        <p:spPr>
-          <a:xfrm>
-            <a:off x="640080" y="6144768"/>
-            <a:ext cx="73152" cy="274320"/>
-          </a:xfrm>
-          <a:prstGeom prst="rect">
-            <a:avLst/>
-          </a:prstGeom>
-          <a:solidFill>
-            <a:srgbClr val="269CCB"/>
-          </a:solidFill>
-          <a:ln>
-            <a:noFill/>
-          </a:ln>
-        </p:spPr>
-        <p:style>
-          <a:lnRef idx="1">
-            <a:schemeClr val="accent1"/>
-          </a:lnRef>
-          <a:fillRef idx="3">
-            <a:schemeClr val="accent1"/>
-          </a:fillRef>
-          <a:effectRef idx="2">
-            <a:schemeClr val="accent1"/>
-          </a:effectRef>
-          <a:fontRef idx="minor">
-            <a:schemeClr val="lt1"/>
-          </a:fontRef>
-        </p:style>
-        <p:txBody>
-          <a:bodyPr rtlCol="0" anchor="ctr"/>
-          <a:lstStyle/>
-          <a:p>
-            <a:pPr algn="ctr"/>
-          </a:p>
-        </p:txBody>
-      </p:sp>
-      <p:sp>
-        <p:nvSpPr>
-          <p:cNvPr id="36" name="TextBox 35"/>
-          <p:cNvSpPr txBox="1"/>
-          <p:nvPr/>
-        </p:nvSpPr>
-        <p:spPr>
-          <a:xfrm>
-            <a:off x="1097280" y="6089904"/>
-            <a:ext cx="10362895" cy="402336"/>
-          </a:xfrm>
-          <a:prstGeom prst="rect">
-            <a:avLst/>
-          </a:prstGeom>
-          <a:noFill/>
-        </p:spPr>
-        <p:txBody>
-          <a:bodyPr wrap="square" anchor="ctr"/>
-          <a:lstStyle/>
-          <a:p>
-            <a:r>
-              <a:rPr sz="1500" b="0" i="0">
-                <a:solidFill>
-                  <a:srgbClr val="333333"/>
-                </a:solidFill>
-                <a:latin typeface="Calibri"/>
-              </a:rPr>
-              <a:t>□ ¿El plan trae RPO y RTO en números, «pg_dumpall» para los roles y la sección 6 de lo que </a:t>
-            </a:r>
-            <a:r>
-              <a:rPr sz="1500" b="1" i="0">
-                <a:solidFill>
-                  <a:srgbClr val="333333"/>
-                </a:solidFill>
-                <a:latin typeface="Calibri"/>
-              </a:rPr>
-              <a:t>no</a:t>
-            </a:r>
-            <a:r>
-              <a:rPr sz="1500" b="0" i="0">
-                <a:solidFill>
-                  <a:srgbClr val="333333"/>
-                </a:solidFill>
-                <a:latin typeface="Calibri"/>
-              </a:rPr>
-              <a:t> cubre?</a:t>
-            </a:r>
-          </a:p>
-        </p:txBody>
-      </p:sp>
-      <p:sp>
-        <p:nvSpPr>
-          <p:cNvPr id="37" name="TextBox 36"/>
-          <p:cNvSpPr txBox="1"/>
-          <p:nvPr/>
-        </p:nvSpPr>
-        <p:spPr>
-          <a:xfrm>
-            <a:off x="11185855" y="6473952"/>
-            <a:ext cx="640080" cy="274320"/>
-          </a:xfrm>
-          <a:prstGeom prst="rect">
-            <a:avLst/>
-          </a:prstGeom>
-          <a:noFill/>
-        </p:spPr>
-        <p:txBody>
-          <a:bodyPr wrap="square">
-            <a:spAutoFit/>
-          </a:bodyPr>
-          <a:lstStyle/>
-          <a:p>
-            <a:pPr algn="r"/>
-            <a:r>
-              <a:rPr sz="1100" b="0" i="0">
-                <a:solidFill>
-                  <a:srgbClr val="666666"/>
-                </a:solidFill>
-                <a:latin typeface="Calibri"/>
-              </a:rPr>
-              <a:t>52</a:t>
-            </a:r>
-          </a:p>
-        </p:txBody>
-      </p:sp>
-    </p:spTree>
-  </p:cSld>
-  <p:clrMapOvr>
-    <a:masterClrMapping/>
-  </p:clrMapOvr>
-</p:sld>
-</file>
-
-<file path=ppt/slides/slide53.xml><?xml version="1.0" encoding="utf-8"?>
-<p:sld xmlns:a="http://schemas.openxmlformats.org/drawingml/2006/main" xmlns:p="http://schemas.openxmlformats.org/presentationml/2006/main" xmlns:r="http://schemas.openxmlformats.org/officeDocument/2006/relationships">
-  <p:cSld>
-    <p:bg>
-      <p:bgPr>
-        <a:solidFill>
-          <a:srgbClr val="FFFFFF"/>
-        </a:solidFill>
-        <a:effectLst/>
-      </p:bgPr>
-    </p:bg>
-    <p:spTree>
-      <p:nvGrpSpPr>
-        <p:cNvPr id="1" name=""/>
-        <p:cNvGrpSpPr/>
-        <p:nvPr/>
-      </p:nvGrpSpPr>
-      <p:grpSpPr/>
-      <p:sp>
-        <p:nvSpPr>
-          <p:cNvPr id="2" name="Rectangle 1"/>
-          <p:cNvSpPr/>
-          <p:nvPr/>
-        </p:nvSpPr>
-        <p:spPr>
-          <a:xfrm>
-            <a:off x="0" y="0"/>
-            <a:ext cx="12191695" cy="960120"/>
-          </a:xfrm>
-          <a:prstGeom prst="rect">
-            <a:avLst/>
-          </a:prstGeom>
-          <a:solidFill>
-            <a:srgbClr val="095292"/>
-          </a:solidFill>
-          <a:ln>
-            <a:noFill/>
-          </a:ln>
-        </p:spPr>
-        <p:style>
-          <a:lnRef idx="1">
-            <a:schemeClr val="accent1"/>
-          </a:lnRef>
-          <a:fillRef idx="3">
-            <a:schemeClr val="accent1"/>
-          </a:fillRef>
-          <a:effectRef idx="2">
-            <a:schemeClr val="accent1"/>
-          </a:effectRef>
-          <a:fontRef idx="minor">
-            <a:schemeClr val="lt1"/>
-          </a:fontRef>
-        </p:style>
-        <p:txBody>
-          <a:bodyPr rtlCol="0" anchor="ctr"/>
-          <a:lstStyle/>
-          <a:p>
-            <a:pPr algn="ctr"/>
-          </a:p>
-        </p:txBody>
-      </p:sp>
-      <p:sp>
-        <p:nvSpPr>
-          <p:cNvPr id="3" name="Rectangle 2"/>
-          <p:cNvSpPr/>
-          <p:nvPr/>
-        </p:nvSpPr>
-        <p:spPr>
-          <a:xfrm>
-            <a:off x="0" y="960120"/>
-            <a:ext cx="12191695" cy="41148"/>
-          </a:xfrm>
-          <a:prstGeom prst="rect">
-            <a:avLst/>
-          </a:prstGeom>
-          <a:solidFill>
-            <a:srgbClr val="FFD000"/>
-          </a:solidFill>
-          <a:ln>
-            <a:noFill/>
-          </a:ln>
-        </p:spPr>
-        <p:style>
-          <a:lnRef idx="1">
-            <a:schemeClr val="accent1"/>
-          </a:lnRef>
-          <a:fillRef idx="3">
-            <a:schemeClr val="accent1"/>
-          </a:fillRef>
-          <a:effectRef idx="2">
-            <a:schemeClr val="accent1"/>
-          </a:effectRef>
-          <a:fontRef idx="minor">
-            <a:schemeClr val="lt1"/>
-          </a:fontRef>
-        </p:style>
-        <p:txBody>
-          <a:bodyPr rtlCol="0" anchor="ctr"/>
-          <a:lstStyle/>
-          <a:p>
-            <a:pPr algn="ctr"/>
-          </a:p>
-        </p:txBody>
-      </p:sp>
-      <p:sp>
-        <p:nvSpPr>
-          <p:cNvPr id="4" name="TextBox 3"/>
-          <p:cNvSpPr txBox="1"/>
-          <p:nvPr/>
-        </p:nvSpPr>
-        <p:spPr>
-          <a:xfrm>
-            <a:off x="457200" y="164592"/>
-            <a:ext cx="11277295" cy="502920"/>
-          </a:xfrm>
-          <a:prstGeom prst="rect">
-            <a:avLst/>
-          </a:prstGeom>
-          <a:noFill/>
-        </p:spPr>
-        <p:txBody>
-          <a:bodyPr wrap="square">
-            <a:spAutoFit/>
-          </a:bodyPr>
-          <a:lstStyle/>
-          <a:p>
-            <a:r>
-              <a:rPr sz="2600" b="1" i="0">
-                <a:solidFill>
-                  <a:srgbClr val="FFFFFF"/>
-                </a:solidFill>
-                <a:latin typeface="Calibri"/>
-              </a:rPr>
-              <a:t>Criterios de exito / entregable</a:t>
-            </a:r>
-          </a:p>
-        </p:txBody>
-      </p:sp>
-      <p:sp>
-        <p:nvSpPr>
-          <p:cNvPr id="5" name="TextBox 4"/>
-          <p:cNvSpPr txBox="1"/>
-          <p:nvPr/>
-        </p:nvSpPr>
-        <p:spPr>
-          <a:xfrm>
-            <a:off x="457200" y="1170432"/>
-            <a:ext cx="11277295" cy="5230368"/>
-          </a:xfrm>
-          <a:prstGeom prst="rect">
-            <a:avLst/>
-          </a:prstGeom>
-          <a:noFill/>
-        </p:spPr>
-        <p:txBody>
-          <a:bodyPr wrap="square">
-            <a:spAutoFit/>
-          </a:bodyPr>
-          <a:lstStyle/>
-          <a:p>
-            <a:pPr>
-              <a:spcAft>
-                <a:spcPts val="800"/>
-              </a:spcAft>
-            </a:pPr>
-            <a:r>
-              <a:rPr sz="2000" b="0" i="0">
-                <a:solidFill>
-                  <a:srgbClr val="333333"/>
-                </a:solidFill>
-                <a:latin typeface="Calibri"/>
-              </a:rPr>
-              <a:t>–   </a:t>
-            </a:r>
-            <a:r>
-              <a:rPr sz="2000" b="1" i="0">
-                <a:solidFill>
-                  <a:srgbClr val="333333"/>
-                </a:solidFill>
-                <a:latin typeface="Calibri"/>
-              </a:rPr>
-              <a:t>Entregable:</a:t>
-            </a:r>
-            <a:r>
-              <a:rPr sz="2000" b="0" i="0">
-                <a:solidFill>
-                  <a:srgbClr val="333333"/>
-                </a:solidFill>
-                <a:latin typeface="Calibri"/>
-              </a:rPr>
-              <a:t> fn_precio_consulta + 2 triggers corriendo en la plataforma del curso + Plan_Backup_VetCare con sus 6 secciones (1 pag.)</a:t>
-            </a:r>
-          </a:p>
-          <a:p>
-            <a:pPr>
-              <a:spcAft>
-                <a:spcPts val="800"/>
-              </a:spcAft>
-            </a:pPr>
-            <a:r>
-              <a:rPr sz="2000" b="0" i="0">
-                <a:solidFill>
-                  <a:srgbClr val="333333"/>
-                </a:solidFill>
-                <a:latin typeface="Calibri"/>
-              </a:rPr>
-              <a:t>–   Evidencia: el SQL y su salida quedan guardados en cada pregunta de la plataforma del curso.</a:t>
-            </a:r>
-          </a:p>
-          <a:p>
-            <a:pPr>
-              <a:spcAft>
-                <a:spcPts val="800"/>
-              </a:spcAft>
-            </a:pPr>
-            <a:r>
-              <a:rPr sz="2000" b="0" i="0">
-                <a:solidFill>
-                  <a:srgbClr val="333333"/>
-                </a:solidFill>
-                <a:latin typeface="Calibri"/>
-              </a:rPr>
-              <a:t>–   Conserva copia en tu carpeta del PI (los .sql que pide el entregable).</a:t>
-            </a:r>
-          </a:p>
-          <a:p>
-            <a:pPr>
-              <a:spcAft>
-                <a:spcPts val="800"/>
-              </a:spcAft>
-            </a:pPr>
-            <a:r>
-              <a:rPr sz="2000" b="0" i="0">
-                <a:solidFill>
-                  <a:srgbClr val="333333"/>
-                </a:solidFill>
-                <a:latin typeface="Calibri"/>
-              </a:rPr>
-              <a:t>–   Actualizar checklist PI (que criterio de rubrica avanzo).</a:t>
-            </a:r>
-          </a:p>
-          <a:p>
-            <a:pPr>
-              <a:spcAft>
-                <a:spcPts val="800"/>
-              </a:spcAft>
-            </a:pPr>
-            <a:r>
-              <a:rPr sz="2000" b="0" i="0">
-                <a:solidFill>
-                  <a:srgbClr val="333333"/>
-                </a:solidFill>
-                <a:latin typeface="Calibri"/>
-              </a:rPr>
-              <a:t>–   </a:t>
-            </a:r>
-            <a:r>
-              <a:rPr sz="2000" b="1" i="0">
-                <a:solidFill>
-                  <a:srgbClr val="333333"/>
-                </a:solidFill>
-                <a:latin typeface="Calibri"/>
-              </a:rPr>
-              <a:t>Entrega en la plataforma del curso</a:t>
-            </a:r>
-            <a:r>
-              <a:rPr sz="2000" b="0" i="0">
-                <a:solidFill>
-                  <a:srgbClr val="333333"/>
-                </a:solidFill>
-                <a:latin typeface="Calibri"/>
-              </a:rPr>
-              <a:t> — en la fecha que indique el docente.</a:t>
-            </a:r>
-          </a:p>
-        </p:txBody>
-      </p:sp>
-      <p:sp>
-        <p:nvSpPr>
-          <p:cNvPr id="6" name="TextBox 5"/>
-          <p:cNvSpPr txBox="1"/>
-          <p:nvPr/>
-        </p:nvSpPr>
-        <p:spPr>
-          <a:xfrm>
-            <a:off x="11185855" y="6473952"/>
-            <a:ext cx="640080" cy="274320"/>
-          </a:xfrm>
-          <a:prstGeom prst="rect">
-            <a:avLst/>
-          </a:prstGeom>
-          <a:noFill/>
-        </p:spPr>
-        <p:txBody>
-          <a:bodyPr wrap="square">
-            <a:spAutoFit/>
-          </a:bodyPr>
-          <a:lstStyle/>
-          <a:p>
-            <a:pPr algn="r"/>
-            <a:r>
-              <a:rPr sz="1100" b="0" i="0">
-                <a:solidFill>
-                  <a:srgbClr val="666666"/>
-                </a:solidFill>
-                <a:latin typeface="Calibri"/>
-              </a:rPr>
-              <a:t>53</a:t>
-            </a:r>
-          </a:p>
-        </p:txBody>
-      </p:sp>
-    </p:spTree>
-  </p:cSld>
-  <p:clrMapOvr>
-    <a:masterClrMapping/>
-  </p:clrMapOvr>
-</p:sld>
-</file>
-
-<file path=ppt/slides/slide54.xml><?xml version="1.0" encoding="utf-8"?>
-<p:sld xmlns:a="http://schemas.openxmlformats.org/drawingml/2006/main" xmlns:p="http://schemas.openxmlformats.org/presentationml/2006/main" xmlns:r="http://schemas.openxmlformats.org/officeDocument/2006/relationships">
-  <p:cSld>
-    <p:bg>
-      <p:bgPr>
-        <a:solidFill>
-          <a:srgbClr val="FFFFFF"/>
-        </a:solidFill>
-        <a:effectLst/>
-      </p:bgPr>
-    </p:bg>
-    <p:spTree>
-      <p:nvGrpSpPr>
-        <p:cNvPr id="1" name=""/>
-        <p:cNvGrpSpPr/>
-        <p:nvPr/>
-      </p:nvGrpSpPr>
-      <p:grpSpPr/>
-      <p:sp>
-        <p:nvSpPr>
-          <p:cNvPr id="2" name="Rectangle 1"/>
-          <p:cNvSpPr/>
-          <p:nvPr/>
-        </p:nvSpPr>
-        <p:spPr>
-          <a:xfrm>
-            <a:off x="0" y="0"/>
-            <a:ext cx="12191695" cy="960120"/>
-          </a:xfrm>
-          <a:prstGeom prst="rect">
-            <a:avLst/>
-          </a:prstGeom>
-          <a:solidFill>
-            <a:srgbClr val="095292"/>
-          </a:solidFill>
-          <a:ln>
-            <a:noFill/>
-          </a:ln>
-        </p:spPr>
-        <p:style>
-          <a:lnRef idx="1">
-            <a:schemeClr val="accent1"/>
-          </a:lnRef>
-          <a:fillRef idx="3">
-            <a:schemeClr val="accent1"/>
-          </a:fillRef>
-          <a:effectRef idx="2">
-            <a:schemeClr val="accent1"/>
-          </a:effectRef>
-          <a:fontRef idx="minor">
-            <a:schemeClr val="lt1"/>
-          </a:fontRef>
-        </p:style>
-        <p:txBody>
-          <a:bodyPr rtlCol="0" anchor="ctr"/>
-          <a:lstStyle/>
-          <a:p>
-            <a:pPr algn="ctr"/>
-          </a:p>
-        </p:txBody>
-      </p:sp>
-      <p:sp>
-        <p:nvSpPr>
-          <p:cNvPr id="3" name="Rectangle 2"/>
-          <p:cNvSpPr/>
-          <p:nvPr/>
-        </p:nvSpPr>
-        <p:spPr>
-          <a:xfrm>
-            <a:off x="0" y="960120"/>
-            <a:ext cx="12191695" cy="41148"/>
-          </a:xfrm>
-          <a:prstGeom prst="rect">
-            <a:avLst/>
-          </a:prstGeom>
-          <a:solidFill>
-            <a:srgbClr val="FFD000"/>
-          </a:solidFill>
-          <a:ln>
-            <a:noFill/>
-          </a:ln>
-        </p:spPr>
-        <p:style>
-          <a:lnRef idx="1">
-            <a:schemeClr val="accent1"/>
-          </a:lnRef>
-          <a:fillRef idx="3">
-            <a:schemeClr val="accent1"/>
-          </a:fillRef>
-          <a:effectRef idx="2">
-            <a:schemeClr val="accent1"/>
-          </a:effectRef>
-          <a:fontRef idx="minor">
-            <a:schemeClr val="lt1"/>
-          </a:fontRef>
-        </p:style>
-        <p:txBody>
-          <a:bodyPr rtlCol="0" anchor="ctr"/>
-          <a:lstStyle/>
-          <a:p>
-            <a:pPr algn="ctr"/>
-          </a:p>
-        </p:txBody>
-      </p:sp>
-      <p:sp>
-        <p:nvSpPr>
-          <p:cNvPr id="4" name="TextBox 3"/>
-          <p:cNvSpPr txBox="1"/>
-          <p:nvPr/>
-        </p:nvSpPr>
-        <p:spPr>
-          <a:xfrm>
-            <a:off x="457200" y="164592"/>
-            <a:ext cx="11277295" cy="502920"/>
-          </a:xfrm>
-          <a:prstGeom prst="rect">
-            <a:avLst/>
-          </a:prstGeom>
-          <a:noFill/>
-        </p:spPr>
-        <p:txBody>
-          <a:bodyPr wrap="square">
-            <a:spAutoFit/>
-          </a:bodyPr>
-          <a:lstStyle/>
-          <a:p>
-            <a:r>
-              <a:rPr sz="2600" b="1" i="0">
-                <a:solidFill>
-                  <a:srgbClr val="FFFFFF"/>
-                </a:solidFill>
-                <a:latin typeface="Calibri"/>
-              </a:rPr>
-              <a:t>Para el PI esta semana</a:t>
-            </a:r>
-          </a:p>
-        </p:txBody>
-      </p:sp>
-      <p:sp>
-        <p:nvSpPr>
-          <p:cNvPr id="5" name="Rounded Rectangle 4"/>
-          <p:cNvSpPr/>
-          <p:nvPr/>
-        </p:nvSpPr>
-        <p:spPr>
-          <a:xfrm>
-            <a:off x="457200" y="1261872"/>
-            <a:ext cx="11277295" cy="1051560"/>
-          </a:xfrm>
-          <a:prstGeom prst="roundRect">
-            <a:avLst>
-              <a:gd name="adj" fmla="val 12000"/>
-            </a:avLst>
-          </a:prstGeom>
-          <a:solidFill>
-            <a:srgbClr val="E8F4FA"/>
-          </a:solidFill>
-          <a:ln>
-            <a:noFill/>
-          </a:ln>
-        </p:spPr>
-        <p:style>
-          <a:lnRef idx="1">
-            <a:schemeClr val="accent1"/>
-          </a:lnRef>
-          <a:fillRef idx="3">
-            <a:schemeClr val="accent1"/>
-          </a:fillRef>
-          <a:effectRef idx="2">
-            <a:schemeClr val="accent1"/>
-          </a:effectRef>
-          <a:fontRef idx="minor">
-            <a:schemeClr val="lt1"/>
-          </a:fontRef>
-        </p:style>
-        <p:txBody>
-          <a:bodyPr rtlCol="0" anchor="ctr"/>
-          <a:lstStyle/>
-          <a:p>
-            <a:pPr algn="ctr"/>
-          </a:p>
-        </p:txBody>
-      </p:sp>
-      <p:sp>
-        <p:nvSpPr>
-          <p:cNvPr id="6" name="Rectangle 5"/>
-          <p:cNvSpPr/>
-          <p:nvPr/>
-        </p:nvSpPr>
-        <p:spPr>
-          <a:xfrm>
-            <a:off x="457200" y="1261872"/>
-            <a:ext cx="128016" cy="1051560"/>
-          </a:xfrm>
-          <a:prstGeom prst="rect">
-            <a:avLst/>
-          </a:prstGeom>
-          <a:solidFill>
-            <a:srgbClr val="269CCB"/>
-          </a:solidFill>
-          <a:ln>
-            <a:noFill/>
-          </a:ln>
-        </p:spPr>
-        <p:style>
-          <a:lnRef idx="1">
-            <a:schemeClr val="accent1"/>
-          </a:lnRef>
-          <a:fillRef idx="3">
-            <a:schemeClr val="accent1"/>
-          </a:fillRef>
-          <a:effectRef idx="2">
-            <a:schemeClr val="accent1"/>
-          </a:effectRef>
-          <a:fontRef idx="minor">
-            <a:schemeClr val="lt1"/>
-          </a:fontRef>
-        </p:style>
-        <p:txBody>
-          <a:bodyPr rtlCol="0" anchor="ctr"/>
-          <a:lstStyle/>
-          <a:p>
-            <a:pPr algn="ctr"/>
-          </a:p>
-        </p:txBody>
-      </p:sp>
-      <p:sp>
-        <p:nvSpPr>
-          <p:cNvPr id="7" name="TextBox 6"/>
-          <p:cNvSpPr txBox="1"/>
-          <p:nvPr/>
-        </p:nvSpPr>
-        <p:spPr>
-          <a:xfrm>
-            <a:off x="777240" y="1399031"/>
-            <a:ext cx="10774375" cy="822959"/>
-          </a:xfrm>
-          <a:prstGeom prst="rect">
-            <a:avLst/>
-          </a:prstGeom>
-          <a:noFill/>
-        </p:spPr>
-        <p:txBody>
-          <a:bodyPr wrap="square">
-            <a:spAutoFit/>
-          </a:bodyPr>
-          <a:lstStyle/>
-          <a:p>
-            <a:r>
-              <a:rPr sz="1200" b="1" i="0">
-                <a:solidFill>
-                  <a:srgbClr val="269CCB"/>
-                </a:solidFill>
-                <a:latin typeface="Calibri"/>
-              </a:rPr>
-              <a:t>Info</a:t>
-            </a:r>
-          </a:p>
-          <a:p>
-            <a:pPr>
-              <a:spcBef>
-                <a:spcPts val="400"/>
-              </a:spcBef>
-            </a:pPr>
-            <a:r>
-              <a:rPr sz="1400" b="0" i="0">
-                <a:solidFill>
-                  <a:srgbClr val="333333"/>
-                </a:solidFill>
-                <a:latin typeface="Calibri"/>
-              </a:rPr>
-              <a:t>Hito: &gt;=1 funcion + &gt;=1 trigger + borrador plan de respaldo</a:t>
-            </a:r>
-          </a:p>
-        </p:txBody>
-      </p:sp>
-      <p:sp>
-        <p:nvSpPr>
-          <p:cNvPr id="8" name="Rounded Rectangle 7"/>
-          <p:cNvSpPr/>
-          <p:nvPr/>
-        </p:nvSpPr>
-        <p:spPr>
-          <a:xfrm>
-            <a:off x="457200" y="2478024"/>
-            <a:ext cx="11277295" cy="1051560"/>
-          </a:xfrm>
-          <a:prstGeom prst="roundRect">
-            <a:avLst>
-              <a:gd name="adj" fmla="val 12000"/>
-            </a:avLst>
-          </a:prstGeom>
-          <a:solidFill>
-            <a:srgbClr val="FFF8E1"/>
-          </a:solidFill>
-          <a:ln>
-            <a:noFill/>
-          </a:ln>
-        </p:spPr>
-        <p:style>
-          <a:lnRef idx="1">
-            <a:schemeClr val="accent1"/>
-          </a:lnRef>
-          <a:fillRef idx="3">
-            <a:schemeClr val="accent1"/>
-          </a:fillRef>
-          <a:effectRef idx="2">
-            <a:schemeClr val="accent1"/>
-          </a:effectRef>
-          <a:fontRef idx="minor">
-            <a:schemeClr val="lt1"/>
-          </a:fontRef>
-        </p:style>
-        <p:txBody>
-          <a:bodyPr rtlCol="0" anchor="ctr"/>
-          <a:lstStyle/>
-          <a:p>
-            <a:pPr algn="ctr"/>
-          </a:p>
-        </p:txBody>
-      </p:sp>
-      <p:sp>
-        <p:nvSpPr>
-          <p:cNvPr id="9" name="Rectangle 8"/>
-          <p:cNvSpPr/>
-          <p:nvPr/>
-        </p:nvSpPr>
-        <p:spPr>
-          <a:xfrm>
-            <a:off x="457200" y="2478024"/>
-            <a:ext cx="128016" cy="1051560"/>
-          </a:xfrm>
-          <a:prstGeom prst="rect">
-            <a:avLst/>
-          </a:prstGeom>
-          <a:solidFill>
-            <a:srgbClr val="FFD000"/>
-          </a:solidFill>
-          <a:ln>
-            <a:noFill/>
-          </a:ln>
-        </p:spPr>
-        <p:style>
-          <a:lnRef idx="1">
-            <a:schemeClr val="accent1"/>
-          </a:lnRef>
-          <a:fillRef idx="3">
-            <a:schemeClr val="accent1"/>
-          </a:fillRef>
-          <a:effectRef idx="2">
-            <a:schemeClr val="accent1"/>
-          </a:effectRef>
-          <a:fontRef idx="minor">
-            <a:schemeClr val="lt1"/>
-          </a:fontRef>
-        </p:style>
-        <p:txBody>
-          <a:bodyPr rtlCol="0" anchor="ctr"/>
-          <a:lstStyle/>
-          <a:p>
-            <a:pPr algn="ctr"/>
-          </a:p>
-        </p:txBody>
-      </p:sp>
-      <p:sp>
-        <p:nvSpPr>
-          <p:cNvPr id="10" name="TextBox 9"/>
-          <p:cNvSpPr txBox="1"/>
-          <p:nvPr/>
-        </p:nvSpPr>
-        <p:spPr>
-          <a:xfrm>
-            <a:off x="777240" y="2615184"/>
-            <a:ext cx="10774375" cy="822959"/>
-          </a:xfrm>
-          <a:prstGeom prst="rect">
-            <a:avLst/>
-          </a:prstGeom>
-          <a:noFill/>
-        </p:spPr>
-        <p:txBody>
-          <a:bodyPr wrap="square">
-            <a:spAutoFit/>
-          </a:bodyPr>
-          <a:lstStyle/>
-          <a:p>
-            <a:r>
-              <a:rPr sz="1200" b="1" i="0">
-                <a:solidFill>
-                  <a:srgbClr val="FFD000"/>
-                </a:solidFill>
-                <a:latin typeface="Calibri"/>
-              </a:rPr>
-              <a:t>Aclaración</a:t>
-            </a:r>
-          </a:p>
-          <a:p>
-            <a:pPr>
-              <a:spcBef>
-                <a:spcPts val="400"/>
-              </a:spcBef>
-            </a:pPr>
-            <a:r>
-              <a:rPr sz="1400" b="0" i="0">
-                <a:solidFill>
-                  <a:srgbClr val="333333"/>
-                </a:solidFill>
-                <a:latin typeface="Calibri"/>
-              </a:rPr>
-              <a:t>Enunciado completo: Clases/Proyecto Integrador/ (VetCare DB).</a:t>
-            </a:r>
-          </a:p>
-        </p:txBody>
-      </p:sp>
-      <p:sp>
-        <p:nvSpPr>
-          <p:cNvPr id="11" name="Rounded Rectangle 10"/>
-          <p:cNvSpPr/>
-          <p:nvPr/>
-        </p:nvSpPr>
-        <p:spPr>
-          <a:xfrm>
-            <a:off x="457200" y="3694176"/>
-            <a:ext cx="11277295" cy="1051560"/>
-          </a:xfrm>
-          <a:prstGeom prst="roundRect">
-            <a:avLst>
-              <a:gd name="adj" fmla="val 12000"/>
-            </a:avLst>
-          </a:prstGeom>
-          <a:solidFill>
-            <a:srgbClr val="FBE4E4"/>
-          </a:solidFill>
-          <a:ln>
-            <a:noFill/>
-          </a:ln>
-        </p:spPr>
-        <p:style>
-          <a:lnRef idx="1">
-            <a:schemeClr val="accent1"/>
-          </a:lnRef>
-          <a:fillRef idx="3">
-            <a:schemeClr val="accent1"/>
-          </a:fillRef>
-          <a:effectRef idx="2">
-            <a:schemeClr val="accent1"/>
-          </a:effectRef>
-          <a:fontRef idx="minor">
-            <a:schemeClr val="lt1"/>
-          </a:fontRef>
-        </p:style>
-        <p:txBody>
-          <a:bodyPr rtlCol="0" anchor="ctr"/>
-          <a:lstStyle/>
-          <a:p>
-            <a:pPr algn="ctr"/>
-          </a:p>
-        </p:txBody>
-      </p:sp>
-      <p:sp>
-        <p:nvSpPr>
-          <p:cNvPr id="12" name="Rectangle 11"/>
-          <p:cNvSpPr/>
-          <p:nvPr/>
-        </p:nvSpPr>
-        <p:spPr>
-          <a:xfrm>
-            <a:off x="457200" y="3694176"/>
-            <a:ext cx="128016" cy="1051560"/>
-          </a:xfrm>
-          <a:prstGeom prst="rect">
-            <a:avLst/>
-          </a:prstGeom>
-          <a:solidFill>
-            <a:srgbClr val="A02030"/>
-          </a:solidFill>
-          <a:ln>
-            <a:noFill/>
-          </a:ln>
-        </p:spPr>
-        <p:style>
-          <a:lnRef idx="1">
-            <a:schemeClr val="accent1"/>
-          </a:lnRef>
-          <a:fillRef idx="3">
-            <a:schemeClr val="accent1"/>
-          </a:fillRef>
-          <a:effectRef idx="2">
-            <a:schemeClr val="accent1"/>
-          </a:effectRef>
-          <a:fontRef idx="minor">
-            <a:schemeClr val="lt1"/>
-          </a:fontRef>
-        </p:style>
-        <p:txBody>
-          <a:bodyPr rtlCol="0" anchor="ctr"/>
-          <a:lstStyle/>
-          <a:p>
-            <a:pPr algn="ctr"/>
-          </a:p>
-        </p:txBody>
-      </p:sp>
-      <p:sp>
-        <p:nvSpPr>
-          <p:cNvPr id="13" name="TextBox 12"/>
-          <p:cNvSpPr txBox="1"/>
-          <p:nvPr/>
-        </p:nvSpPr>
-        <p:spPr>
-          <a:xfrm>
-            <a:off x="777240" y="3831336"/>
-            <a:ext cx="10774375" cy="822959"/>
-          </a:xfrm>
-          <a:prstGeom prst="rect">
-            <a:avLst/>
-          </a:prstGeom>
-          <a:noFill/>
-        </p:spPr>
-        <p:txBody>
-          <a:bodyPr wrap="square">
-            <a:spAutoFit/>
-          </a:bodyPr>
-          <a:lstStyle/>
-          <a:p>
-            <a:r>
-              <a:rPr sz="1200" b="1" i="0">
-                <a:solidFill>
-                  <a:srgbClr val="A02030"/>
-                </a:solidFill>
-                <a:latin typeface="Calibri"/>
-              </a:rPr>
-              <a:t>Atención</a:t>
-            </a:r>
-          </a:p>
-          <a:p>
-            <a:pPr>
-              <a:spcBef>
-                <a:spcPts val="400"/>
-              </a:spcBef>
-            </a:pPr>
-            <a:r>
-              <a:rPr sz="1400" b="0" i="0">
-                <a:solidFill>
-                  <a:srgbClr val="333333"/>
-                </a:solidFill>
-                <a:latin typeface="Calibri"/>
-              </a:rPr>
-              <a:t>Si el docente asigna taller esta semana, él indica el canal y la fecha.</a:t>
-            </a:r>
-          </a:p>
-        </p:txBody>
-      </p:sp>
-      <p:sp>
-        <p:nvSpPr>
-          <p:cNvPr id="14" name="TextBox 13"/>
-          <p:cNvSpPr txBox="1"/>
-          <p:nvPr/>
-        </p:nvSpPr>
-        <p:spPr>
-          <a:xfrm>
-            <a:off x="11185855" y="6473952"/>
-            <a:ext cx="640080" cy="274320"/>
-          </a:xfrm>
-          <a:prstGeom prst="rect">
-            <a:avLst/>
-          </a:prstGeom>
-          <a:noFill/>
-        </p:spPr>
-        <p:txBody>
-          <a:bodyPr wrap="square">
-            <a:spAutoFit/>
-          </a:bodyPr>
-          <a:lstStyle/>
-          <a:p>
-            <a:pPr algn="r"/>
-            <a:r>
-              <a:rPr sz="1100" b="0" i="0">
-                <a:solidFill>
-                  <a:srgbClr val="666666"/>
-                </a:solidFill>
-                <a:latin typeface="Calibri"/>
-              </a:rPr>
-              <a:t>54</a:t>
-            </a:r>
-          </a:p>
-        </p:txBody>
-      </p:sp>
-    </p:spTree>
-  </p:cSld>
-  <p:clrMapOvr>
-    <a:masterClrMapping/>
-  </p:clrMapOvr>
-</p:sld>
-</file>
-
-<file path=ppt/slides/slide55.xml><?xml version="1.0" encoding="utf-8"?>
-<p:sld xmlns:a="http://schemas.openxmlformats.org/drawingml/2006/main" xmlns:p="http://schemas.openxmlformats.org/presentationml/2006/main" xmlns:r="http://schemas.openxmlformats.org/officeDocument/2006/relationships">
-  <p:cSld>
-    <p:bg>
-      <p:bgPr>
-        <a:solidFill>
-          <a:srgbClr val="FFFFFF"/>
-        </a:solidFill>
-        <a:effectLst/>
-      </p:bgPr>
-    </p:bg>
-    <p:spTree>
-      <p:nvGrpSpPr>
-        <p:cNvPr id="1" name=""/>
-        <p:cNvGrpSpPr/>
-        <p:nvPr/>
-      </p:nvGrpSpPr>
-      <p:grpSpPr/>
-      <p:sp>
-        <p:nvSpPr>
-          <p:cNvPr id="2" name="Rectangle 1"/>
-          <p:cNvSpPr/>
-          <p:nvPr/>
-        </p:nvSpPr>
-        <p:spPr>
-          <a:xfrm>
-            <a:off x="0" y="0"/>
-            <a:ext cx="12191695" cy="164592"/>
-          </a:xfrm>
-          <a:prstGeom prst="rect">
-            <a:avLst/>
-          </a:prstGeom>
-          <a:solidFill>
-            <a:srgbClr val="269CCB"/>
-          </a:solidFill>
-          <a:ln>
-            <a:noFill/>
-          </a:ln>
-        </p:spPr>
-        <p:style>
-          <a:lnRef idx="1">
-            <a:schemeClr val="accent1"/>
-          </a:lnRef>
-          <a:fillRef idx="3">
-            <a:schemeClr val="accent1"/>
-          </a:fillRef>
-          <a:effectRef idx="2">
-            <a:schemeClr val="accent1"/>
-          </a:effectRef>
-          <a:fontRef idx="minor">
-            <a:schemeClr val="lt1"/>
-          </a:fontRef>
-        </p:style>
-        <p:txBody>
-          <a:bodyPr rtlCol="0" anchor="ctr"/>
-          <a:lstStyle/>
-          <a:p>
-            <a:pPr algn="ctr"/>
-          </a:p>
-        </p:txBody>
-      </p:sp>
-      <p:pic>
-        <p:nvPicPr>
-          <p:cNvPr id="3" name="Picture 2" descr="logo_uniajc_color.png"/>
-          <p:cNvPicPr>
-            <a:picLocks noChangeAspect="1"/>
-          </p:cNvPicPr>
-          <p:nvPr/>
-        </p:nvPicPr>
-        <p:blipFill>
-          <a:blip r:embed="rId2"/>
-          <a:stretch>
-            <a:fillRect/>
-          </a:stretch>
-        </p:blipFill>
-        <p:spPr>
-          <a:xfrm>
-            <a:off x="10271455" y="5998464"/>
-            <a:ext cx="1463040" cy="643233"/>
-          </a:xfrm>
-          <a:prstGeom prst="rect">
-            <a:avLst/>
-          </a:prstGeom>
-        </p:spPr>
-      </p:pic>
-      <p:sp>
-        <p:nvSpPr>
-          <p:cNvPr id="4" name="TextBox 3"/>
-          <p:cNvSpPr txBox="1"/>
-          <p:nvPr/>
-        </p:nvSpPr>
-        <p:spPr>
-          <a:xfrm>
-            <a:off x="457200" y="1737360"/>
-            <a:ext cx="11277295" cy="1097280"/>
-          </a:xfrm>
-          <a:prstGeom prst="rect">
-            <a:avLst/>
-          </a:prstGeom>
-          <a:noFill/>
-        </p:spPr>
-        <p:txBody>
-          <a:bodyPr wrap="square" anchor="ctr"/>
-          <a:lstStyle/>
-          <a:p>
-            <a:pPr algn="ctr"/>
-            <a:r>
-              <a:rPr sz="3400" b="1" i="0">
-                <a:solidFill>
-                  <a:srgbClr val="095292"/>
-                </a:solidFill>
-                <a:latin typeface="Calibri"/>
-              </a:rPr>
-              <a:t>Clase 4 · VetCare avanza</a:t>
-            </a:r>
-          </a:p>
-        </p:txBody>
-      </p:sp>
-      <p:sp>
-        <p:nvSpPr>
-          <p:cNvPr id="5" name="TextBox 4"/>
-          <p:cNvSpPr txBox="1"/>
-          <p:nvPr/>
-        </p:nvSpPr>
-        <p:spPr>
-          <a:xfrm>
-            <a:off x="457200" y="3017520"/>
-            <a:ext cx="11277295" cy="1645920"/>
-          </a:xfrm>
-          <a:prstGeom prst="rect">
-            <a:avLst/>
-          </a:prstGeom>
-          <a:noFill/>
-        </p:spPr>
-        <p:txBody>
-          <a:bodyPr wrap="square">
-            <a:spAutoFit/>
-          </a:bodyPr>
-          <a:lstStyle/>
-          <a:p>
-            <a:pPr algn="ctr">
-              <a:spcAft>
-                <a:spcPts val="600"/>
-              </a:spcAft>
-            </a:pPr>
-            <a:r>
-              <a:rPr sz="1600" b="0" i="0">
-                <a:solidFill>
-                  <a:srgbClr val="333333"/>
-                </a:solidFill>
-                <a:latin typeface="Calibri"/>
-              </a:rPr>
-              <a:t>&gt;=1 funcion + &gt;=1 trigger + borrador plan de respaldo</a:t>
-            </a:r>
-          </a:p>
-          <a:p>
-            <a:pPr algn="ctr">
-              <a:spcAft>
-                <a:spcPts val="600"/>
-              </a:spcAft>
-            </a:pPr>
-            <a:r>
-              <a:rPr sz="1600" b="0" i="0">
-                <a:solidFill>
-                  <a:srgbClr val="333333"/>
-                </a:solidFill>
-                <a:latin typeface="Calibri"/>
-              </a:rPr>
-              <a:t>Entregable: fn_precio_consulta + 2 triggers corriendo en la plataforma del curso + Plan_Backup_VetCare con sus 6 secciones (1 pag.)</a:t>
-            </a:r>
-          </a:p>
-          <a:p>
-            <a:pPr algn="ctr">
-              <a:spcAft>
-                <a:spcPts val="600"/>
-              </a:spcAft>
-            </a:pPr>
-            <a:r>
-              <a:rPr sz="1600" b="0" i="0">
-                <a:solidFill>
-                  <a:srgbClr val="333333"/>
-                </a:solidFill>
-                <a:latin typeface="Calibri"/>
-              </a:rPr>
-              <a:t>Siguiente clase: continuar el hilo del PI segun plan</a:t>
-            </a:r>
-          </a:p>
-        </p:txBody>
-      </p:sp>
-      <p:sp>
-        <p:nvSpPr>
-          <p:cNvPr id="6" name="TextBox 5"/>
-          <p:cNvSpPr txBox="1"/>
-          <p:nvPr/>
-        </p:nvSpPr>
-        <p:spPr>
-          <a:xfrm>
-            <a:off x="457200" y="4754880"/>
-            <a:ext cx="11277295" cy="640080"/>
-          </a:xfrm>
-          <a:prstGeom prst="rect">
-            <a:avLst/>
-          </a:prstGeom>
-          <a:noFill/>
-        </p:spPr>
-        <p:txBody>
-          <a:bodyPr wrap="square">
-            <a:spAutoFit/>
-          </a:bodyPr>
-          <a:lstStyle/>
-          <a:p>
-            <a:pPr algn="ctr"/>
-            <a:r>
-              <a:rPr sz="2000" b="1" i="0">
-                <a:solidFill>
-                  <a:srgbClr val="269CCB"/>
-                </a:solidFill>
-                <a:latin typeface="Calibri"/>
-              </a:rPr>
-              <a:t>Teoria breve · practica = PI</a:t>
             </a:r>
           </a:p>
         </p:txBody>
@@ -25256,4 +20660,324 @@
   </a:objectDefaults>
   <a:extraClrSchemeLst/>
 </a:theme>
+</file>
+
+<file path=ppt/theme/theme2.xml><?xml version="1.0" encoding="utf-8"?>
+<a:theme xmlns:a="http://schemas.openxmlformats.org/drawingml/2006/main" name="Office Theme">
+  <a:themeElements>
+    <a:clrScheme name="Office">
+      <a:dk1>
+        <a:sysClr val="windowText" lastClr="000000"/>
+      </a:dk1>
+      <a:lt1>
+        <a:sysClr val="window" lastClr="FFFFFF"/>
+      </a:lt1>
+      <a:dk2>
+        <a:srgbClr val="1F497D"/>
+      </a:dk2>
+      <a:lt2>
+        <a:srgbClr val="EEECE1"/>
+      </a:lt2>
+      <a:accent1>
+        <a:srgbClr val="4F81BD"/>
+      </a:accent1>
+      <a:accent2>
+        <a:srgbClr val="C0504D"/>
+      </a:accent2>
+      <a:accent3>
+        <a:srgbClr val="9BBB59"/>
+      </a:accent3>
+      <a:accent4>
+        <a:srgbClr val="8064A2"/>
+      </a:accent4>
+      <a:accent5>
+        <a:srgbClr val="4BACC6"/>
+      </a:accent5>
+      <a:accent6>
+        <a:srgbClr val="F79646"/>
+      </a:accent6>
+      <a:hlink>
+        <a:srgbClr val="0000FF"/>
+      </a:hlink>
+      <a:folHlink>
+        <a:srgbClr val="800080"/>
+      </a:folHlink>
+    </a:clrScheme>
+    <a:fontScheme name="Office">
+      <a:majorFont>
+        <a:latin typeface="Calibri"/>
+        <a:ea typeface=""/>
+        <a:cs typeface=""/>
+        <a:font script="Jpan" typeface="ＭＳ Ｐゴシック"/>
+        <a:font script="Hang" typeface="맑은 고딕"/>
+        <a:font script="Hans" typeface="宋体"/>
+        <a:font script="Hant" typeface="新細明體"/>
+        <a:font script="Arab" typeface="Times New Roman"/>
+        <a:font script="Hebr" typeface="Times New Roman"/>
+        <a:font script="Thai" typeface="Angsana New"/>
+        <a:font script="Ethi" typeface="Nyala"/>
+        <a:font script="Beng" typeface="Vrinda"/>
+        <a:font script="Gujr" typeface="Shruti"/>
+        <a:font script="Khmr" typeface="MoolBoran"/>
+        <a:font script="Knda" typeface="Tunga"/>
+        <a:font script="Guru" typeface="Raavi"/>
+        <a:font script="Cans" typeface="Euphemia"/>
+        <a:font script="Cher" typeface="Plantagenet Cherokee"/>
+        <a:font script="Yiii" typeface="Microsoft Yi Baiti"/>
+        <a:font script="Tibt" typeface="Microsoft Himalaya"/>
+        <a:font script="Thaa" typeface="MV Boli"/>
+        <a:font script="Deva" typeface="Mangal"/>
+        <a:font script="Telu" typeface="Gautami"/>
+        <a:font script="Taml" typeface="Latha"/>
+        <a:font script="Syrc" typeface="Estrangelo Edessa"/>
+        <a:font script="Orya" typeface="Kalinga"/>
+        <a:font script="Mlym" typeface="Kartika"/>
+        <a:font script="Laoo" typeface="DokChampa"/>
+        <a:font script="Sinh" typeface="Iskoola Pota"/>
+        <a:font script="Mong" typeface="Mongolian Baiti"/>
+        <a:font script="Viet" typeface="Times New Roman"/>
+        <a:font script="Uigh" typeface="Microsoft Uighur"/>
+        <a:font script="Geor" typeface="Sylfaen"/>
+      </a:majorFont>
+      <a:minorFont>
+        <a:latin typeface="Calibri"/>
+        <a:ea typeface=""/>
+        <a:cs typeface=""/>
+        <a:font script="Jpan" typeface="ＭＳ Ｐゴシック"/>
+        <a:font script="Hang" typeface="맑은 고딕"/>
+        <a:font script="Hans" typeface="宋体"/>
+        <a:font script="Hant" typeface="新細明體"/>
+        <a:font script="Arab" typeface="Arial"/>
+        <a:font script="Hebr" typeface="Arial"/>
+        <a:font script="Thai" typeface="Cordia New"/>
+        <a:font script="Ethi" typeface="Nyala"/>
+        <a:font script="Beng" typeface="Vrinda"/>
+        <a:font script="Gujr" typeface="Shruti"/>
+        <a:font script="Khmr" typeface="DaunPenh"/>
+        <a:font script="Knda" typeface="Tunga"/>
+        <a:font script="Guru" typeface="Raavi"/>
+        <a:font script="Cans" typeface="Euphemia"/>
+        <a:font script="Cher" typeface="Plantagenet Cherokee"/>
+        <a:font script="Yiii" typeface="Microsoft Yi Baiti"/>
+        <a:font script="Tibt" typeface="Microsoft Himalaya"/>
+        <a:font script="Thaa" typeface="MV Boli"/>
+        <a:font script="Deva" typeface="Mangal"/>
+        <a:font script="Telu" typeface="Gautami"/>
+        <a:font script="Taml" typeface="Latha"/>
+        <a:font script="Syrc" typeface="Estrangelo Edessa"/>
+        <a:font script="Orya" typeface="Kalinga"/>
+        <a:font script="Mlym" typeface="Kartika"/>
+        <a:font script="Laoo" typeface="DokChampa"/>
+        <a:font script="Sinh" typeface="Iskoola Pota"/>
+        <a:font script="Mong" typeface="Mongolian Baiti"/>
+        <a:font script="Viet" typeface="Arial"/>
+        <a:font script="Uigh" typeface="Microsoft Uighur"/>
+        <a:font script="Geor" typeface="Sylfaen"/>
+      </a:minorFont>
+    </a:fontScheme>
+    <a:fmtScheme name="Office">
+      <a:fillStyleLst>
+        <a:solidFill>
+          <a:schemeClr val="phClr"/>
+        </a:solidFill>
+        <a:gradFill rotWithShape="1">
+          <a:gsLst>
+            <a:gs pos="0">
+              <a:schemeClr val="phClr">
+                <a:tint val="50000"/>
+                <a:satMod val="300000"/>
+              </a:schemeClr>
+            </a:gs>
+            <a:gs pos="35000">
+              <a:schemeClr val="phClr">
+                <a:tint val="37000"/>
+                <a:satMod val="300000"/>
+              </a:schemeClr>
+            </a:gs>
+            <a:gs pos="100000">
+              <a:schemeClr val="phClr">
+                <a:tint val="15000"/>
+                <a:satMod val="350000"/>
+              </a:schemeClr>
+            </a:gs>
+          </a:gsLst>
+          <a:lin ang="16200000" scaled="1"/>
+        </a:gradFill>
+        <a:gradFill rotWithShape="1">
+          <a:gsLst>
+            <a:gs pos="0">
+              <a:schemeClr val="phClr">
+                <a:tint val="100000"/>
+                <a:shade val="100000"/>
+                <a:satMod val="130000"/>
+              </a:schemeClr>
+            </a:gs>
+            <a:gs pos="100000">
+              <a:schemeClr val="phClr">
+                <a:tint val="50000"/>
+                <a:shade val="100000"/>
+                <a:satMod val="350000"/>
+              </a:schemeClr>
+            </a:gs>
+          </a:gsLst>
+          <a:lin ang="16200000" scaled="0"/>
+        </a:gradFill>
+      </a:fillStyleLst>
+      <a:lnStyleLst>
+        <a:ln w="9525" cap="flat" cmpd="sng" algn="ctr">
+          <a:solidFill>
+            <a:schemeClr val="phClr">
+              <a:shade val="95000"/>
+              <a:satMod val="105000"/>
+            </a:schemeClr>
+          </a:solidFill>
+          <a:prstDash val="solid"/>
+        </a:ln>
+        <a:ln w="25400" cap="flat" cmpd="sng" algn="ctr">
+          <a:solidFill>
+            <a:schemeClr val="phClr"/>
+          </a:solidFill>
+          <a:prstDash val="solid"/>
+        </a:ln>
+        <a:ln w="38100" cap="flat" cmpd="sng" algn="ctr">
+          <a:solidFill>
+            <a:schemeClr val="phClr"/>
+          </a:solidFill>
+          <a:prstDash val="solid"/>
+        </a:ln>
+      </a:lnStyleLst>
+      <a:effectStyleLst>
+        <a:effectStyle>
+          <a:effectLst>
+            <a:outerShdw blurRad="40000" dist="20000" dir="5400000" rotWithShape="0">
+              <a:srgbClr val="000000">
+                <a:alpha val="38000"/>
+              </a:srgbClr>
+            </a:outerShdw>
+          </a:effectLst>
+        </a:effectStyle>
+        <a:effectStyle>
+          <a:effectLst>
+            <a:outerShdw blurRad="40000" dist="23000" dir="5400000" rotWithShape="0">
+              <a:srgbClr val="000000">
+                <a:alpha val="35000"/>
+              </a:srgbClr>
+            </a:outerShdw>
+          </a:effectLst>
+        </a:effectStyle>
+        <a:effectStyle>
+          <a:effectLst>
+            <a:outerShdw blurRad="40000" dist="23000" dir="5400000" rotWithShape="0">
+              <a:srgbClr val="000000">
+                <a:alpha val="35000"/>
+              </a:srgbClr>
+            </a:outerShdw>
+          </a:effectLst>
+          <a:scene3d>
+            <a:camera prst="orthographicFront">
+              <a:rot lat="0" lon="0" rev="0"/>
+            </a:camera>
+            <a:lightRig rig="threePt" dir="t">
+              <a:rot lat="0" lon="0" rev="1200000"/>
+            </a:lightRig>
+          </a:scene3d>
+          <a:sp3d>
+            <a:bevelT w="63500" h="25400"/>
+          </a:sp3d>
+        </a:effectStyle>
+      </a:effectStyleLst>
+      <a:bgFillStyleLst>
+        <a:solidFill>
+          <a:schemeClr val="phClr"/>
+        </a:solidFill>
+        <a:gradFill rotWithShape="1">
+          <a:gsLst>
+            <a:gs pos="0">
+              <a:schemeClr val="phClr">
+                <a:tint val="40000"/>
+                <a:satMod val="350000"/>
+              </a:schemeClr>
+            </a:gs>
+            <a:gs pos="40000">
+              <a:schemeClr val="phClr">
+                <a:tint val="45000"/>
+                <a:shade val="99000"/>
+                <a:satMod val="350000"/>
+              </a:schemeClr>
+            </a:gs>
+            <a:gs pos="100000">
+              <a:schemeClr val="phClr">
+                <a:shade val="20000"/>
+                <a:satMod val="255000"/>
+              </a:schemeClr>
+            </a:gs>
+          </a:gsLst>
+          <a:path path="circle">
+            <a:fillToRect l="50000" t="-80000" r="50000" b="180000"/>
+          </a:path>
+        </a:gradFill>
+        <a:gradFill rotWithShape="1">
+          <a:gsLst>
+            <a:gs pos="0">
+              <a:schemeClr val="phClr">
+                <a:tint val="80000"/>
+                <a:satMod val="300000"/>
+              </a:schemeClr>
+            </a:gs>
+            <a:gs pos="100000">
+              <a:schemeClr val="phClr">
+                <a:shade val="30000"/>
+                <a:satMod val="200000"/>
+              </a:schemeClr>
+            </a:gs>
+          </a:gsLst>
+          <a:path path="circle">
+            <a:fillToRect l="50000" t="50000" r="50000" b="50000"/>
+          </a:path>
+        </a:gradFill>
+      </a:bgFillStyleLst>
+    </a:fmtScheme>
+  </a:themeElements>
+  <a:objectDefaults>
+    <a:spDef>
+      <a:spPr/>
+      <a:bodyPr/>
+      <a:lstStyle/>
+      <a:style>
+        <a:lnRef idx="1">
+          <a:schemeClr val="accent1"/>
+        </a:lnRef>
+        <a:fillRef idx="3">
+          <a:schemeClr val="accent1"/>
+        </a:fillRef>
+        <a:effectRef idx="2">
+          <a:schemeClr val="accent1"/>
+        </a:effectRef>
+        <a:fontRef idx="minor">
+          <a:schemeClr val="lt1"/>
+        </a:fontRef>
+      </a:style>
+    </a:spDef>
+    <a:lnDef>
+      <a:spPr/>
+      <a:bodyPr/>
+      <a:lstStyle/>
+      <a:style>
+        <a:lnRef idx="2">
+          <a:schemeClr val="accent1"/>
+        </a:lnRef>
+        <a:fillRef idx="0">
+          <a:schemeClr val="accent1"/>
+        </a:fillRef>
+        <a:effectRef idx="1">
+          <a:schemeClr val="accent1"/>
+        </a:effectRef>
+        <a:fontRef idx="minor">
+          <a:schemeClr val="tx1"/>
+        </a:fontRef>
+      </a:style>
+    </a:lnDef>
+  </a:objectDefaults>
+  <a:extraClrSchemeLst/>
+</a:theme>
 </file>
--- a/Bases de Datos II/Clases/Clase 4 - Funciones disparadores seguridad respaldo/Presentacion.pptx
+++ b/Bases de Datos II/Clases/Clase 4 - Funciones disparadores seguridad respaldo/Presentacion.pptx
@@ -623,6 +623,161 @@
           <a:lstStyle/>
           <a:p>
             <a:r>
+              <a:t>Fuera de la lamina (habla de la practica, no del tema):</a:t>
+            </a:r>
+          </a:p>
+          <a:p>
+            <a:r>
+              <a:t>- Y no hay ninguna senal en el SQL, asi que la unica defensa es documentarlo, que es parte del entregable.</a:t>
+            </a:r>
+          </a:p>
+        </p:txBody>
+      </p:sp>
+      <p:sp>
+        <p:nvSpPr>
+          <p:cNvPr id="4" name="Slide Number Placeholder 3"/>
+          <p:cNvSpPr>
+            <a:spLocks noGrp="1"/>
+          </p:cNvSpPr>
+          <p:nvPr>
+            <p:ph type="sldNum" idx="5" sz="quarter"/>
+          </p:nvPr>
+        </p:nvSpPr>
+        <p:spPr/>
+      </p:sp>
+    </p:spTree>
+  </p:cSld>
+  <p:clrMapOvr>
+    <a:masterClrMapping/>
+  </p:clrMapOvr>
+</p:notes>
+</file>
+
+<file path=ppt/notesSlides/notesSlide11.xml><?xml version="1.0" encoding="utf-8"?>
+<p:notes xmlns:a="http://schemas.openxmlformats.org/drawingml/2006/main" xmlns:p="http://schemas.openxmlformats.org/presentationml/2006/main" xmlns:r="http://schemas.openxmlformats.org/officeDocument/2006/relationships">
+  <p:cSld>
+    <p:spTree>
+      <p:nvGrpSpPr>
+        <p:cNvPr id="1" name=""/>
+        <p:cNvGrpSpPr/>
+        <p:nvPr/>
+      </p:nvGrpSpPr>
+      <p:grpSpPr>
+        <a:xfrm>
+          <a:off x="0" y="0"/>
+          <a:ext cx="0" cy="0"/>
+          <a:chOff x="0" y="0"/>
+          <a:chExt cx="0" cy="0"/>
+        </a:xfrm>
+      </p:grpSpPr>
+      <p:sp>
+        <p:nvSpPr>
+          <p:cNvPr id="2" name="Slide Image Placeholder 1"/>
+          <p:cNvSpPr>
+            <a:spLocks noGrp="1"/>
+          </p:cNvSpPr>
+          <p:nvPr>
+            <p:ph type="sldImg" idx="2"/>
+          </p:nvPr>
+        </p:nvSpPr>
+        <p:spPr/>
+      </p:sp>
+      <p:sp>
+        <p:nvSpPr>
+          <p:cNvPr id="3" name="Notes Placeholder 2"/>
+          <p:cNvSpPr>
+            <a:spLocks noGrp="1"/>
+          </p:cNvSpPr>
+          <p:nvPr>
+            <p:ph type="body" idx="3" sz="quarter"/>
+          </p:nvPr>
+        </p:nvSpPr>
+        <p:spPr/>
+        <p:txBody>
+          <a:bodyPr/>
+          <a:lstStyle/>
+          <a:p>
+            <a:r>
+              <a:t>RPO y RTO dejan de ser siglas cuando se les pone un numero acordado con el negocio, y la rubrica pide precisamente el numero con su justificacion.</a:t>
+            </a:r>
+          </a:p>
+          <a:p>
+            <a:r>
+              <a:t>Probar un restore de verdad tiene cuatro pasos y conviene dictarlos como procedimiento.</a:t>
+            </a:r>
+          </a:p>
+          <a:p>
+            <a:r>
+              <a:t>Cuatro, dejar bitacora con fecha, responsable, resultado y RTO medido; si no hay bitacora, la prueba no existe.</a:t>
+            </a:r>
+          </a:p>
+        </p:txBody>
+      </p:sp>
+      <p:sp>
+        <p:nvSpPr>
+          <p:cNvPr id="4" name="Slide Number Placeholder 3"/>
+          <p:cNvSpPr>
+            <a:spLocks noGrp="1"/>
+          </p:cNvSpPr>
+          <p:nvPr>
+            <p:ph type="sldNum" idx="5" sz="quarter"/>
+          </p:nvPr>
+        </p:nvSpPr>
+        <p:spPr/>
+      </p:sp>
+    </p:spTree>
+  </p:cSld>
+  <p:clrMapOvr>
+    <a:masterClrMapping/>
+  </p:clrMapOvr>
+</p:notes>
+</file>
+
+<file path=ppt/notesSlides/notesSlide12.xml><?xml version="1.0" encoding="utf-8"?>
+<p:notes xmlns:a="http://schemas.openxmlformats.org/drawingml/2006/main" xmlns:p="http://schemas.openxmlformats.org/presentationml/2006/main" xmlns:r="http://schemas.openxmlformats.org/officeDocument/2006/relationships">
+  <p:cSld>
+    <p:spTree>
+      <p:nvGrpSpPr>
+        <p:cNvPr id="1" name=""/>
+        <p:cNvGrpSpPr/>
+        <p:nvPr/>
+      </p:nvGrpSpPr>
+      <p:grpSpPr>
+        <a:xfrm>
+          <a:off x="0" y="0"/>
+          <a:ext cx="0" cy="0"/>
+          <a:chOff x="0" y="0"/>
+          <a:chExt cx="0" cy="0"/>
+        </a:xfrm>
+      </p:grpSpPr>
+      <p:sp>
+        <p:nvSpPr>
+          <p:cNvPr id="2" name="Slide Image Placeholder 1"/>
+          <p:cNvSpPr>
+            <a:spLocks noGrp="1"/>
+          </p:cNvSpPr>
+          <p:nvPr>
+            <p:ph type="sldImg" idx="2"/>
+          </p:nvPr>
+        </p:nvSpPr>
+        <p:spPr/>
+      </p:sp>
+      <p:sp>
+        <p:nvSpPr>
+          <p:cNvPr id="3" name="Notes Placeholder 2"/>
+          <p:cNvSpPr>
+            <a:spLocks noGrp="1"/>
+          </p:cNvSpPr>
+          <p:nvPr>
+            <p:ph type="body" idx="3" sz="quarter"/>
+          </p:nvPr>
+        </p:nvSpPr>
+        <p:spPr/>
+        <p:txBody>
+          <a:bodyPr/>
+          <a:lstStyle/>
+          <a:p>
+            <a:r>
               <a:t>Lo que NO se puede ejecutar es pg_dump, pg_dumpall, pg_basebackup ni pg_restore, y la razon hay que decirla con precision en vez de dejarla en «la herramienta no sirve»: son programas de linea de comandos que leen y escriben archivos, y ahi no hay sistema de archivos ni servidor al que conectarse.</a:t>
             </a:r>
           </a:p>
@@ -644,6 +799,311 @@
           <a:p>
             <a:r>
               <a:t>Vale un minuto senalarlo para quien se encuentre Oracle en el trabajo, y no vale mas, porque la calificacion ocurre en PostgreSQL.</a:t>
+            </a:r>
+          </a:p>
+        </p:txBody>
+      </p:sp>
+      <p:sp>
+        <p:nvSpPr>
+          <p:cNvPr id="4" name="Slide Number Placeholder 3"/>
+          <p:cNvSpPr>
+            <a:spLocks noGrp="1"/>
+          </p:cNvSpPr>
+          <p:nvPr>
+            <p:ph type="sldNum" idx="5" sz="quarter"/>
+          </p:nvPr>
+        </p:nvSpPr>
+        <p:spPr/>
+      </p:sp>
+    </p:spTree>
+  </p:cSld>
+  <p:clrMapOvr>
+    <a:masterClrMapping/>
+  </p:clrMapOvr>
+</p:notes>
+</file>
+
+<file path=ppt/notesSlides/notesSlide13.xml><?xml version="1.0" encoding="utf-8"?>
+<p:notes xmlns:a="http://schemas.openxmlformats.org/drawingml/2006/main" xmlns:p="http://schemas.openxmlformats.org/presentationml/2006/main" xmlns:r="http://schemas.openxmlformats.org/officeDocument/2006/relationships">
+  <p:cSld>
+    <p:spTree>
+      <p:nvGrpSpPr>
+        <p:cNvPr id="1" name=""/>
+        <p:cNvGrpSpPr/>
+        <p:nvPr/>
+      </p:nvGrpSpPr>
+      <p:grpSpPr>
+        <a:xfrm>
+          <a:off x="0" y="0"/>
+          <a:ext cx="0" cy="0"/>
+          <a:chOff x="0" y="0"/>
+          <a:chExt cx="0" cy="0"/>
+        </a:xfrm>
+      </p:grpSpPr>
+      <p:sp>
+        <p:nvSpPr>
+          <p:cNvPr id="2" name="Slide Image Placeholder 1"/>
+          <p:cNvSpPr>
+            <a:spLocks noGrp="1"/>
+          </p:cNvSpPr>
+          <p:nvPr>
+            <p:ph type="sldImg" idx="2"/>
+          </p:nvPr>
+        </p:nvSpPr>
+        <p:spPr/>
+      </p:sp>
+      <p:sp>
+        <p:nvSpPr>
+          <p:cNvPr id="3" name="Notes Placeholder 2"/>
+          <p:cNvSpPr>
+            <a:spLocks noGrp="1"/>
+          </p:cNvSpPr>
+          <p:nvPr>
+            <p:ph type="body" idx="3" sz="quarter"/>
+          </p:nvPr>
+        </p:nvSpPr>
+        <p:spPr/>
+        <p:txBody>
+          <a:bodyPr/>
+          <a:lstStyle/>
+          <a:p>
+            <a:r>
+              <a:t>Fuera de la lamina (habla de la practica, no del tema):</a:t>
+            </a:r>
+          </a:p>
+          <a:p>
+            <a:r>
+              <a:t>- En la rubrica del PI, seguridad y respaldo valen 15 de los 100 puntos del proyecto.</a:t>
+            </a:r>
+          </a:p>
+        </p:txBody>
+      </p:sp>
+      <p:sp>
+        <p:nvSpPr>
+          <p:cNvPr id="4" name="Slide Number Placeholder 3"/>
+          <p:cNvSpPr>
+            <a:spLocks noGrp="1"/>
+          </p:cNvSpPr>
+          <p:nvPr>
+            <p:ph type="sldNum" idx="5" sz="quarter"/>
+          </p:nvPr>
+        </p:nvSpPr>
+        <p:spPr/>
+      </p:sp>
+    </p:spTree>
+  </p:cSld>
+  <p:clrMapOvr>
+    <a:masterClrMapping/>
+  </p:clrMapOvr>
+</p:notes>
+</file>
+
+<file path=ppt/notesSlides/notesSlide14.xml><?xml version="1.0" encoding="utf-8"?>
+<p:notes xmlns:a="http://schemas.openxmlformats.org/drawingml/2006/main" xmlns:p="http://schemas.openxmlformats.org/presentationml/2006/main" xmlns:r="http://schemas.openxmlformats.org/officeDocument/2006/relationships">
+  <p:cSld>
+    <p:spTree>
+      <p:nvGrpSpPr>
+        <p:cNvPr id="1" name=""/>
+        <p:cNvGrpSpPr/>
+        <p:nvPr/>
+      </p:nvGrpSpPr>
+      <p:grpSpPr>
+        <a:xfrm>
+          <a:off x="0" y="0"/>
+          <a:ext cx="0" cy="0"/>
+          <a:chOff x="0" y="0"/>
+          <a:chExt cx="0" cy="0"/>
+        </a:xfrm>
+      </p:grpSpPr>
+      <p:sp>
+        <p:nvSpPr>
+          <p:cNvPr id="2" name="Slide Image Placeholder 1"/>
+          <p:cNvSpPr>
+            <a:spLocks noGrp="1"/>
+          </p:cNvSpPr>
+          <p:nvPr>
+            <p:ph type="sldImg" idx="2"/>
+          </p:nvPr>
+        </p:nvSpPr>
+        <p:spPr/>
+      </p:sp>
+      <p:sp>
+        <p:nvSpPr>
+          <p:cNvPr id="3" name="Notes Placeholder 2"/>
+          <p:cNvSpPr>
+            <a:spLocks noGrp="1"/>
+          </p:cNvSpPr>
+          <p:nvPr>
+            <p:ph type="body" idx="3" sz="quarter"/>
+          </p:nvPr>
+        </p:nvSpPr>
+        <p:spPr/>
+        <p:txBody>
+          <a:bodyPr/>
+          <a:lstStyle/>
+          <a:p>
+            <a:r>
+              <a:t>Fuera de la lamina (habla de la practica, no del tema):</a:t>
+            </a:r>
+          </a:p>
+          <a:p>
+            <a:r>
+              <a:t>- Son 20 de los 100 puntos, y se pierden casi siempre por tres cosas: un RETURNS TRIGGER copiado del trigger, el UPPER() olvidado y un IMMUTABLE que lee tablas</a:t>
+            </a:r>
+          </a:p>
+        </p:txBody>
+      </p:sp>
+      <p:sp>
+        <p:nvSpPr>
+          <p:cNvPr id="4" name="Slide Number Placeholder 3"/>
+          <p:cNvSpPr>
+            <a:spLocks noGrp="1"/>
+          </p:cNvSpPr>
+          <p:nvPr>
+            <p:ph type="sldNum" idx="5" sz="quarter"/>
+          </p:nvPr>
+        </p:nvSpPr>
+        <p:spPr/>
+      </p:sp>
+    </p:spTree>
+  </p:cSld>
+  <p:clrMapOvr>
+    <a:masterClrMapping/>
+  </p:clrMapOvr>
+</p:notes>
+</file>
+
+<file path=ppt/notesSlides/notesSlide15.xml><?xml version="1.0" encoding="utf-8"?>
+<p:notes xmlns:a="http://schemas.openxmlformats.org/drawingml/2006/main" xmlns:p="http://schemas.openxmlformats.org/presentationml/2006/main" xmlns:r="http://schemas.openxmlformats.org/officeDocument/2006/relationships">
+  <p:cSld>
+    <p:spTree>
+      <p:nvGrpSpPr>
+        <p:cNvPr id="1" name=""/>
+        <p:cNvGrpSpPr/>
+        <p:nvPr/>
+      </p:nvGrpSpPr>
+      <p:grpSpPr>
+        <a:xfrm>
+          <a:off x="0" y="0"/>
+          <a:ext cx="0" cy="0"/>
+          <a:chOff x="0" y="0"/>
+          <a:chExt cx="0" cy="0"/>
+        </a:xfrm>
+      </p:grpSpPr>
+      <p:sp>
+        <p:nvSpPr>
+          <p:cNvPr id="2" name="Slide Image Placeholder 1"/>
+          <p:cNvSpPr>
+            <a:spLocks noGrp="1"/>
+          </p:cNvSpPr>
+          <p:nvPr>
+            <p:ph type="sldImg" idx="2"/>
+          </p:nvPr>
+        </p:nvSpPr>
+        <p:spPr/>
+      </p:sp>
+      <p:sp>
+        <p:nvSpPr>
+          <p:cNvPr id="3" name="Notes Placeholder 2"/>
+          <p:cNvSpPr>
+            <a:spLocks noGrp="1"/>
+          </p:cNvSpPr>
+          <p:nvPr>
+            <p:ph type="body" idx="3" sz="quarter"/>
+          </p:nvPr>
+        </p:nvSpPr>
+        <p:spPr/>
+        <p:txBody>
+          <a:bodyPr/>
+          <a:lstStyle/>
+          <a:p>
+            <a:r>
+              <a:t>Fuera de la lamina (habla de la practica, no del tema):</a:t>
+            </a:r>
+          </a:p>
+          <a:p>
+            <a:r>
+              <a:t>- La pregunta 4 son 15 puntos y no pide codigo: pide ubicar cada validacion en su capa y justificar por que ahi</a:t>
+            </a:r>
+          </a:p>
+        </p:txBody>
+      </p:sp>
+      <p:sp>
+        <p:nvSpPr>
+          <p:cNvPr id="4" name="Slide Number Placeholder 3"/>
+          <p:cNvSpPr>
+            <a:spLocks noGrp="1"/>
+          </p:cNvSpPr>
+          <p:nvPr>
+            <p:ph type="sldNum" idx="5" sz="quarter"/>
+          </p:nvPr>
+        </p:nvSpPr>
+        <p:spPr/>
+      </p:sp>
+    </p:spTree>
+  </p:cSld>
+  <p:clrMapOvr>
+    <a:masterClrMapping/>
+  </p:clrMapOvr>
+</p:notes>
+</file>
+
+<file path=ppt/notesSlides/notesSlide16.xml><?xml version="1.0" encoding="utf-8"?>
+<p:notes xmlns:a="http://schemas.openxmlformats.org/drawingml/2006/main" xmlns:p="http://schemas.openxmlformats.org/presentationml/2006/main" xmlns:r="http://schemas.openxmlformats.org/officeDocument/2006/relationships">
+  <p:cSld>
+    <p:spTree>
+      <p:nvGrpSpPr>
+        <p:cNvPr id="1" name=""/>
+        <p:cNvGrpSpPr/>
+        <p:nvPr/>
+      </p:nvGrpSpPr>
+      <p:grpSpPr>
+        <a:xfrm>
+          <a:off x="0" y="0"/>
+          <a:ext cx="0" cy="0"/>
+          <a:chOff x="0" y="0"/>
+          <a:chExt cx="0" cy="0"/>
+        </a:xfrm>
+      </p:grpSpPr>
+      <p:sp>
+        <p:nvSpPr>
+          <p:cNvPr id="2" name="Slide Image Placeholder 1"/>
+          <p:cNvSpPr>
+            <a:spLocks noGrp="1"/>
+          </p:cNvSpPr>
+          <p:nvPr>
+            <p:ph type="sldImg" idx="2"/>
+          </p:nvPr>
+        </p:nvSpPr>
+        <p:spPr/>
+      </p:sp>
+      <p:sp>
+        <p:nvSpPr>
+          <p:cNvPr id="3" name="Notes Placeholder 2"/>
+          <p:cNvSpPr>
+            <a:spLocks noGrp="1"/>
+          </p:cNvSpPr>
+          <p:nvPr>
+            <p:ph type="body" idx="3" sz="quarter"/>
+          </p:nvPr>
+        </p:nvSpPr>
+        <p:spPr/>
+        <p:txBody>
+          <a:bodyPr/>
+          <a:lstStyle/>
+          <a:p>
+            <a:r>
+              <a:t>Fuera de la lamina (habla de la practica, no del tema):</a:t>
+            </a:r>
+          </a:p>
+          <a:p>
+            <a:r>
+              <a:t>- Son 25 de los 100 puntos de la clase y se califican seccion por seccion.</a:t>
+            </a:r>
+          </a:p>
+          <a:p>
+            <a:r>
+              <a:t>- La plantilla en blanco esta en el Taller del PI</a:t>
             </a:r>
           </a:p>
         </p:txBody>
@@ -788,6 +1248,17 @@
           <a:lstStyle/>
           <a:p>
             <a:r>
+              <a:t>Fuera de la lamina (habla de la practica, no del tema):</a:t>
+            </a:r>
+          </a:p>
+          <a:p>
+            <a:r>
+              <a:t>- No existe la forma de Oracle con el cuerpo dentro del CREATE TRIGGER, y hay que decirlo tal cual porque es el error que la rubrica penaliza expresamente.</a:t>
+            </a:r>
+          </a:p>
+          <a:p/>
+          <a:p>
+            <a:r>
               <a:t>Despues la asociacion,;, que dice cuando dispararla y a quien llamar.</a:t>
             </a:r>
           </a:p>
@@ -1133,22 +1604,12 @@
           <a:lstStyle/>
           <a:p>
             <a:r>
-              <a:t>La pregunta 4 vale quince puntos, no pide codigo y es la que mejor mide si el estudiante entendio el dia: hay que ubicar cada validacion en su capa y justificar por que ahi.</a:t>
-            </a:r>
-          </a:p>
-          <a:p>
-            <a:r>
-              <a:t>Conviene dictar las cuatro capas en orden de preferencia, porque el orden es la respuesta.</a:t>
-            </a:r>
-          </a:p>
-          <a:p>
-            <a:r>
-              <a:t>Las dos pasan la verificacion y las dos insertan.</a:t>
-            </a:r>
-          </a:p>
-          <a:p>
-            <a:r>
-              <a:t>La respuesta correcta es declarativa ——, es mas rapida, mas clara y a prueba de concurrencia, y el porque completo llega en la Clase 10.</a:t>
+              <a:t>Fuera de la lamina (habla de la practica, no del tema):</a:t>
+            </a:r>
+          </a:p>
+          <a:p>
+            <a:r>
+              <a:t>- La asociacion va BEFORE UPDATE OF stock ON insumo FOR EACH ROW, y el mensaje es parte del entregable, igual que en la Clase 3: es lo que la aplicacion va a mostrar y lo que la prueba va a verificar.</a:t>
             </a:r>
           </a:p>
         </p:txBody>
@@ -1218,17 +1679,22 @@
           <a:lstStyle/>
           <a:p>
             <a:r>
-              <a:t>Hay tres riesgos que conviene exponer con ejemplos y no como advertencia generica.</a:t>
-            </a:r>
-          </a:p>
-          <a:p>
-            <a:r>
-              <a:t>PostgreSQL no la prohibe, la corta cuando se agota la pila, y eso ocurre en produccion y con datos reales, no durante la prueba.</a:t>
-            </a:r>
-          </a:p>
-          <a:p>
-            <a:r>
-              <a:t>TRUNCATE no dispara triggers de fila, asi que un TRUNCATE insumo pasa por encima de la validacion de stock sin que se escriba una sola linea de auditoria.</a:t>
+              <a:t>La pregunta 4 vale quince puntos, no pide codigo y es la que mejor mide si el estudiante entendio el dia: hay que ubicar cada validacion en su capa y justificar por que ahi.</a:t>
+            </a:r>
+          </a:p>
+          <a:p>
+            <a:r>
+              <a:t>Conviene dictar las cuatro capas en orden de preferencia, porque el orden es la respuesta.</a:t>
+            </a:r>
+          </a:p>
+          <a:p>
+            <a:r>
+              <a:t>Las dos pasan la verificacion y las dos insertan.</a:t>
+            </a:r>
+          </a:p>
+          <a:p>
+            <a:r>
+              <a:t>La respuesta correcta es declarativa ——, es mas rapida, mas clara y a prueba de concurrencia, y el porque completo llega en la Clase 10.</a:t>
             </a:r>
           </a:p>
         </p:txBody>
@@ -1298,17 +1764,17 @@
           <a:lstStyle/>
           <a:p>
             <a:r>
-              <a:t>RPO y RTO dejan de ser siglas cuando se les pone un numero acordado con el negocio, y la rubrica pide precisamente el numero con su justificacion.</a:t>
-            </a:r>
-          </a:p>
-          <a:p>
-            <a:r>
-              <a:t>Probar un restore de verdad tiene cuatro pasos y conviene dictarlos como procedimiento.</a:t>
-            </a:r>
-          </a:p>
-          <a:p>
-            <a:r>
-              <a:t>Cuatro, dejar bitacora con fecha, responsable, resultado y RTO medido; si no hay bitacora, la prueba no existe.</a:t>
+              <a:t>Hay tres riesgos que conviene exponer con ejemplos y no como advertencia generica.</a:t>
+            </a:r>
+          </a:p>
+          <a:p>
+            <a:r>
+              <a:t>PostgreSQL no la prohibe, la corta cuando se agota la pila, y eso ocurre en produccion y con datos reales, no durante la prueba.</a:t>
+            </a:r>
+          </a:p>
+          <a:p>
+            <a:r>
+              <a:t>TRUNCATE no dispara triggers de fila, asi que un TRUNCATE insumo pasa por encima de la validacion de stock sin que se escriba una sola linea de auditoria.</a:t>
             </a:r>
           </a:p>
         </p:txBody>
@@ -4887,7 +5353,7 @@
                 </a:solidFill>
                 <a:latin typeface="Calibri"/>
               </a:rPr>
-              <a:t>–   Y aqui esta la pieza de sintaxis que decide la mitad de los puntos del dia: en PostgreSQL un trigger son SIEMPRE dos objetos separados, no uno.</a:t>
+              <a:t>–   Y aqui esta la pieza de sintaxis central del dia: en PostgreSQL un trigger son SIEMPRE dos objetos separados, no uno.</a:t>
             </a:r>
           </a:p>
           <a:p>
@@ -4919,7 +5385,7 @@
                 </a:solidFill>
                 <a:latin typeface="Calibri"/>
               </a:rPr>
-              <a:t>–   No existe la forma de Oracle con el cuerpo dentro del CREATE TRIGGER, y hay que decirlo tal cual porque es el error que la rubrica penaliza expresamente.</a:t>
+              <a:t>–   No existe la forma de Oracle con el cuerpo dentro del CREATE TRIGGER.</a:t>
             </a:r>
           </a:p>
         </p:txBody>
@@ -6647,7 +7113,7 @@
                 </a:solidFill>
                 <a:latin typeface="Calibri"/>
               </a:rPr>
-              <a:t>–   Las columnas del taller son id_cita, accion con el texto 'CAMBIO_ESTADO', valor_anterior y valor_nuevo tomados de OLD.estado y NEW.estado, y dos que se llenan solas con DEFAULT: usuario_bd con current_user y fecha_evento con now().</a:t>
+              <a:t>–   Las columnas de audit_cita son id_cita, accion con el texto 'CAMBIO_ESTADO', valor_anterior y valor_nuevo tomados de OLD.estado y NEW.estado, y dos que se llenan solas con DEFAULT: usuario_bd con current_user y fecha_evento con now().</a:t>
             </a:r>
           </a:p>
           <a:p>
@@ -6899,7 +7365,7 @@
                 </a:solidFill>
                 <a:latin typeface="Calibri"/>
               </a:rPr>
-              <a:t>–   La segunda mitad del taller es el trigger que rechaza, y la demostracion se monta sobre un hueco real.</a:t>
+              <a:t>–   La segunda mitad del tema es el trigger que rechaza, y la demostracion se monta sobre un hueco real.</a:t>
             </a:r>
           </a:p>
           <a:p>
@@ -7215,7 +7681,7 @@
                 </a:solidFill>
                 <a:latin typeface="Calibri"/>
               </a:rPr>
-              <a:t>–   La asociacion va BEFORE UPDATE OF stock ON insumo FOR EACH ROW, y el mensaje es parte del entregable, igual que en la Clase 3: es lo que la aplicacion va a mostrar y lo que la prueba va a verificar.</a:t>
+              <a:t>–   La asociacion va BEFORE UPDATE OF stock ON insumo FOR EACH ROW.</a:t>
             </a:r>
           </a:p>
           <a:p>
@@ -7794,7 +8260,7 @@
                 </a:solidFill>
                 <a:latin typeface="Calibri"/>
               </a:rPr>
-              <a:t>PostgreSQL en el navegador + Google Docs</a:t>
+              <a:t>PostgreSQL + Google Docs</a:t>
             </a:r>
             <a:r>
               <a:rPr sz="2000" b="0" i="0">
@@ -9256,7 +9722,7 @@
                 </a:solidFill>
                 <a:latin typeface="Calibri"/>
               </a:rPr>
-              <a:t>–   Y no hay ninguna senal en el SQL, asi que la unica defensa es documentarlo, que es parte del entregable.</a:t>
+              <a:t>–   Y no hay ninguna senal en el SQL, asi que la unica defensa es documentarlo.</a:t>
             </a:r>
           </a:p>
           <a:p>
@@ -9524,7 +9990,7 @@
                 </a:solidFill>
                 <a:latin typeface="Calibri"/>
               </a:rPr>
-              <a:t>–   El entregable pide dos triggers, no cinco, y esa cifra es deliberada.</a:t>
+              <a:t>–   Dos triggers, no cinco, y esa cifra es deliberada.</a:t>
             </a:r>
           </a:p>
         </p:txBody>
@@ -10028,7 +10494,7 @@
                 </a:solidFill>
                 <a:latin typeface="Calibri"/>
               </a:rPr>
-              <a:t>–   Aqui hay un hueco que casi nadie ve y que la rubrica busca: pg_dump respalda UNA base de datos y NO respalda los roles, porque los roles son objetos del cluster y no de la base.</a:t>
+              <a:t>–   Aqui hay un hueco que casi nadie ve: pg_dump respalda UNA base de datos y NO respalda los roles, porque los roles son objetos del cluster y no de la base.</a:t>
             </a:r>
           </a:p>
           <a:p>
@@ -10344,7 +10810,7 @@
                 </a:solidFill>
                 <a:latin typeface="Calibri"/>
               </a:rPr>
-              <a:t>–   La consecuencia para este curso hay que decirla sin rodeos y esta en la seccion siguiente: nada de esto se puede EJECUTAR en la plataforma del curso.</a:t>
+              <a:t>–   La consecuencia para este curso hay que decirla sin rodeos y esta en la seccion siguiente: nada de esto se puede EJECUTAR.</a:t>
             </a:r>
           </a:p>
         </p:txBody>
@@ -11952,7 +12418,7 @@
                 </a:solidFill>
                 <a:latin typeface="Calibri"/>
               </a:rPr>
-              <a:t>–   Y hay una sexta seccion que el estudiante siempre omite y que vale puntos: que NO cubre el plan, y cual es el riesgo residual que se asume.</a:t>
+              <a:t>–   Y hay una sexta seccion que casi siempre se omite: que NO cubre el plan, y cual es el riesgo residual que se asume.</a:t>
             </a:r>
           </a:p>
           <a:p>
@@ -12165,7 +12631,7 @@
                 </a:solidFill>
                 <a:latin typeface="Calibri"/>
               </a:rPr>
-              <a:t>Lo que la plataforma del curso si puede demostrar, y lo que se documenta en papel</a:t>
+              <a:t>Lo que PostgreSQL en el navegador si puede demostrar, y lo que se documenta en papel</a:t>
             </a:r>
           </a:p>
         </p:txBody>
@@ -12204,7 +12670,7 @@
                 </a:solidFill>
                 <a:latin typeface="Calibri"/>
               </a:rPr>
-              <a:t>–   Hay que ser preciso aqui porque es la parte del taller que se puede entregar mal por una expectativa equivocada.</a:t>
+              <a:t>–   Hay que ser preciso aqui porque es la parte de la clase que se puede entregar mal por una expectativa equivocada.</a:t>
             </a:r>
           </a:p>
           <a:p>
@@ -12220,7 +12686,7 @@
                 </a:solidFill>
                 <a:latin typeface="Calibri"/>
               </a:rPr>
-              <a:t>–   El taller se resuelve y se califica en la plataforma del curso, que ejecuta PostgreSQL dentro del navegador</a:t>
+              <a:t>–   El motor de la clase es PostgreSQL, que corre dentro del navegador, y ahi funciona todo el codigo del dia: CREATE FUNCTION con IMMUTABLE</a:t>
             </a:r>
           </a:p>
           <a:p>
@@ -12236,7 +12702,7 @@
                 </a:solidFill>
                 <a:latin typeface="Calibri"/>
               </a:rPr>
-              <a:t>–   Y ahi funciona todo el codigo del dia: CREATE FUNCTION con IMMUTABLE, las dos partes del trigger, RAISE EXCEPTION y RAISE NOTICE, los bloques DO de la Clase 3, current_user, now() e IS DISTINCT FROM.</a:t>
+              <a:t>–   Las dos partes del trigger, RAISE EXCEPTION y RAISE NOTICE, los bloques DO de la Clase 3, current_user, now() e IS DISTINCT FROM.</a:t>
             </a:r>
           </a:p>
           <a:p>
@@ -12465,7 +12931,7 @@
                 </a:solidFill>
                 <a:latin typeface="Calibri"/>
               </a:rPr>
-              <a:t>Como amarra con las clases vecinas y con la rubrica del PI (1/2)</a:t>
+              <a:t>Como amarra con las clases vecinas y con el PI (1/2)</a:t>
             </a:r>
           </a:p>
         </p:txBody>
@@ -12733,7 +13199,7 @@
                 </a:solidFill>
                 <a:latin typeface="Calibri"/>
               </a:rPr>
-              <a:t>Como amarra con las clases vecinas y con la rubrica del PI (2/2)</a:t>
+              <a:t>Como amarra con las clases vecinas y con el PI (2/2)</a:t>
             </a:r>
           </a:p>
         </p:txBody>
@@ -12789,22 +13255,6 @@
                 <a:latin typeface="Calibri"/>
               </a:rPr>
               <a:t>–   Que es el marco dentro del cual corre todo trigger; la Clase 10 explica por que el trigger de conteo no protege de la doble reserva; y la Clase 12 conecta la aplicacion, que es cuando la invisibilidad del trigger deja de ser un concepto.</a:t>
-            </a:r>
-          </a:p>
-          <a:p>
-            <a:pPr>
-              <a:spcAft>
-                <a:spcPts val="800"/>
-              </a:spcAft>
-            </a:pPr>
-            <a:r>
-              <a:rPr sz="2000" b="0" i="0">
-                <a:solidFill>
-                  <a:srgbClr val="333333"/>
-                </a:solidFill>
-                <a:latin typeface="Calibri"/>
-              </a:rPr>
-              <a:t>–   En la rubrica del PI, seguridad y respaldo valen 15 de los 100 puntos del proyecto.</a:t>
             </a:r>
           </a:p>
         </p:txBody>
@@ -16806,7 +17256,7 @@
         <p:spPr>
           <a:xfrm>
             <a:off x="0" y="0"/>
-            <a:ext cx="12191695" cy="1170432"/>
+            <a:ext cx="12191695" cy="960120"/>
           </a:xfrm>
           <a:prstGeom prst="rect">
             <a:avLst/>
@@ -16848,7 +17298,7 @@
         </p:nvSpPr>
         <p:spPr>
           <a:xfrm>
-            <a:off x="0" y="1170432"/>
+            <a:off x="0" y="960120"/>
             <a:ext cx="12191695" cy="41148"/>
           </a:xfrm>
           <a:prstGeom prst="rect">
@@ -16892,7 +17342,7 @@
         <p:spPr>
           <a:xfrm>
             <a:off x="457200" y="164592"/>
-            <a:ext cx="11277295" cy="384048"/>
+            <a:ext cx="11277295" cy="502920"/>
           </a:xfrm>
           <a:prstGeom prst="rect">
             <a:avLst/>
@@ -16925,8 +17375,8 @@
         </p:nvSpPr>
         <p:spPr>
           <a:xfrm>
-            <a:off x="457200" y="566928"/>
-            <a:ext cx="11277295" cy="411480"/>
+            <a:off x="457200" y="1170432"/>
+            <a:ext cx="11277295" cy="5230368"/>
           </a:xfrm>
           <a:prstGeom prst="rect">
             <a:avLst/>
@@ -16939,14 +17389,281 @@
           </a:bodyPr>
           <a:lstStyle/>
           <a:p>
-            <a:r>
-              <a:rPr sz="1400" b="0" i="0">
-                <a:solidFill>
-                  <a:srgbClr val="B8D8EE"/>
-                </a:solidFill>
-                <a:latin typeface="Calibri"/>
-              </a:rPr>
-              <a:t>Son 20 de los 100 puntos, y se pierden casi siempre por tres cosas: un RETURNS TRIGGER copiado del trigger, el UPPER() olvidado y un IMMUTABLE que lee tablas</a:t>
+            <a:pPr>
+              <a:spcAft>
+                <a:spcPts val="800"/>
+              </a:spcAft>
+            </a:pPr>
+            <a:r>
+              <a:rPr sz="1900" b="0" i="0">
+                <a:solidFill>
+                  <a:srgbClr val="333333"/>
+                </a:solidFill>
+                <a:latin typeface="Calibri"/>
+              </a:rPr>
+              <a:t>–   </a:t>
+            </a:r>
+            <a:r>
+              <a:rPr sz="1900" b="1" i="0">
+                <a:solidFill>
+                  <a:srgbClr val="333333"/>
+                </a:solidFill>
+                <a:latin typeface="Calibri"/>
+              </a:rPr>
+              <a:t>La firma decide todo lo demas.</a:t>
+            </a:r>
+            <a:r>
+              <a:rPr sz="1900" b="0" i="0">
+                <a:solidFill>
+                  <a:srgbClr val="333333"/>
+                </a:solidFill>
+                <a:latin typeface="Calibri"/>
+              </a:rPr>
+              <a:t> «CREATE FUNCTION fn_precio_consulta(p_especie TEXT, p_urgencia BOOLEAN) RETURNS NUMERIC LANGUAGE plpgsql IMMUTABLE AS $fn$ ... $fn$;». Es «RETURNS NUMERIC», </a:t>
+            </a:r>
+            <a:r>
+              <a:rPr sz="1900" b="1" i="0">
+                <a:solidFill>
+                  <a:srgbClr val="333333"/>
+                </a:solidFill>
+                <a:latin typeface="Calibri"/>
+              </a:rPr>
+              <a:t>no «RETURNS TRIGGER»</a:t>
+            </a:r>
+            <a:r>
+              <a:rPr sz="1900" b="0" i="0">
+                <a:solidFill>
+                  <a:srgbClr val="333333"/>
+                </a:solidFill>
+                <a:latin typeface="Calibri"/>
+              </a:rPr>
+              <a:t>: esta funcion no se asocia a ninguna tabla, se llama desde una consulta.</a:t>
+            </a:r>
+          </a:p>
+          <a:p>
+            <a:pPr>
+              <a:spcAft>
+                <a:spcPts val="800"/>
+              </a:spcAft>
+            </a:pPr>
+            <a:r>
+              <a:rPr sz="1900" b="0" i="0">
+                <a:solidFill>
+                  <a:srgbClr val="333333"/>
+                </a:solidFill>
+                <a:latin typeface="Calibri"/>
+              </a:rPr>
+              <a:t>–   </a:t>
+            </a:r>
+            <a:r>
+              <a:rPr sz="1900" b="1" i="0">
+                <a:solidFill>
+                  <a:srgbClr val="333333"/>
+                </a:solidFill>
+                <a:latin typeface="Calibri"/>
+              </a:rPr>
+              <a:t>La tabla de tarifas es un «CASE».</a:t>
+            </a:r>
+            <a:r>
+              <a:rPr sz="1900" b="0" i="0">
+                <a:solidFill>
+                  <a:srgbClr val="333333"/>
+                </a:solidFill>
+                <a:latin typeface="Calibri"/>
+              </a:rPr>
+              <a:t> «CASE UPPER(p_especie) WHEN 'CANINO' THEN 45000 WHEN 'FELINO' THEN 40000 ELSE 35000 END». El «UPPER()» es lo que hace la comparacion </a:t>
+            </a:r>
+            <a:r>
+              <a:rPr sz="1900" b="1" i="0">
+                <a:solidFill>
+                  <a:srgbClr val="333333"/>
+                </a:solidFill>
+                <a:latin typeface="Calibri"/>
+              </a:rPr>
+              <a:t>insensible a mayusculas</a:t>
+            </a:r>
+            <a:r>
+              <a:rPr sz="1900" b="0" i="0">
+                <a:solidFill>
+                  <a:srgbClr val="333333"/>
+                </a:solidFill>
+                <a:latin typeface="Calibri"/>
+              </a:rPr>
+              <a:t>: sin el, «canino» en minuscula cae en el «ELSE» y cobra 35000.</a:t>
+            </a:r>
+          </a:p>
+          <a:p>
+            <a:pPr>
+              <a:spcAft>
+                <a:spcPts val="800"/>
+              </a:spcAft>
+            </a:pPr>
+            <a:r>
+              <a:rPr sz="1900" b="0" i="0">
+                <a:solidFill>
+                  <a:srgbClr val="333333"/>
+                </a:solidFill>
+                <a:latin typeface="Calibri"/>
+              </a:rPr>
+              <a:t>–   </a:t>
+            </a:r>
+            <a:r>
+              <a:rPr sz="1900" b="1" i="0">
+                <a:solidFill>
+                  <a:srgbClr val="333333"/>
+                </a:solidFill>
+                <a:latin typeface="Calibri"/>
+              </a:rPr>
+              <a:t>El «NULL» de la urgencia: hazlo explicito con «COALESCE».</a:t>
+            </a:r>
+            <a:r>
+              <a:rPr sz="1900" b="0" i="0">
+                <a:solidFill>
+                  <a:srgbClr val="333333"/>
+                </a:solidFill>
+                <a:latin typeface="Calibri"/>
+              </a:rPr>
+              <a:t> «IF COALESCE(p_urgencia, FALSE) THEN v_base := v_base * 1.35; END IF;». Un «IF» a secas ya trata «NULL» como falso, pero en cuanto el booleano entra en una </a:t>
+            </a:r>
+            <a:r>
+              <a:rPr sz="1900" b="1" i="0">
+                <a:solidFill>
+                  <a:srgbClr val="333333"/>
+                </a:solidFill>
+                <a:latin typeface="Calibri"/>
+              </a:rPr>
+              <a:t>cuenta</a:t>
+            </a:r>
+            <a:r>
+              <a:rPr sz="1900" b="0" i="0">
+                <a:solidFill>
+                  <a:srgbClr val="333333"/>
+                </a:solidFill>
+                <a:latin typeface="Calibri"/>
+              </a:rPr>
+              <a:t> el «NULL» se propaga y la funcion devuelve «NULL».</a:t>
+            </a:r>
+          </a:p>
+          <a:p>
+            <a:pPr>
+              <a:spcAft>
+                <a:spcPts val="800"/>
+              </a:spcAft>
+            </a:pPr>
+            <a:r>
+              <a:rPr sz="1900" b="0" i="0">
+                <a:solidFill>
+                  <a:srgbClr val="333333"/>
+                </a:solidFill>
+                <a:latin typeface="Calibri"/>
+              </a:rPr>
+              <a:t>–   </a:t>
+            </a:r>
+            <a:r>
+              <a:rPr sz="1900" b="1" i="0">
+                <a:solidFill>
+                  <a:srgbClr val="333333"/>
+                </a:solidFill>
+                <a:latin typeface="Calibri"/>
+              </a:rPr>
+              <a:t>«IMMUTABLE» es una promesa que el motor cobra:</a:t>
+            </a:r>
+            <a:r>
+              <a:rPr sz="1900" b="0" i="0">
+                <a:solidFill>
+                  <a:srgbClr val="333333"/>
+                </a:solidFill>
+                <a:latin typeface="Calibri"/>
+              </a:rPr>
+              <a:t> </a:t>
+            </a:r>
+            <a:r>
+              <a:rPr sz="1900" b="1" i="0">
+                <a:solidFill>
+                  <a:srgbClr val="333333"/>
+                </a:solidFill>
+                <a:latin typeface="Calibri"/>
+              </a:rPr>
+              <a:t>misma entrada, misma salida, sin leer tablas</a:t>
+            </a:r>
+            <a:r>
+              <a:rPr sz="1900" b="0" i="0">
+                <a:solidFill>
+                  <a:srgbClr val="333333"/>
+                </a:solidFill>
+                <a:latin typeface="Calibri"/>
+              </a:rPr>
+              <a:t>. Por eso el filtro «WHERE m.activa = 'S'» va en la consulta y </a:t>
+            </a:r>
+            <a:r>
+              <a:rPr sz="1900" b="1" i="0">
+                <a:solidFill>
+                  <a:srgbClr val="333333"/>
+                </a:solidFill>
+                <a:latin typeface="Calibri"/>
+              </a:rPr>
+              <a:t>no</a:t>
+            </a:r>
+            <a:r>
+              <a:rPr sz="1900" b="0" i="0">
+                <a:solidFill>
+                  <a:srgbClr val="333333"/>
+                </a:solidFill>
+                <a:latin typeface="Calibri"/>
+              </a:rPr>
+              <a:t> dentro de la funcion. Una funcion que consulta tablas seria «STABLE», nunca «IMMUTABLE».</a:t>
+            </a:r>
+          </a:p>
+          <a:p>
+            <a:pPr>
+              <a:spcAft>
+                <a:spcPts val="800"/>
+              </a:spcAft>
+            </a:pPr>
+            <a:r>
+              <a:rPr sz="1900" b="0" i="0">
+                <a:solidFill>
+                  <a:srgbClr val="333333"/>
+                </a:solidFill>
+                <a:latin typeface="Calibri"/>
+              </a:rPr>
+              <a:t>–   </a:t>
+            </a:r>
+            <a:r>
+              <a:rPr sz="1900" b="1" i="0">
+                <a:solidFill>
+                  <a:srgbClr val="333333"/>
+                </a:solidFill>
+                <a:latin typeface="Calibri"/>
+              </a:rPr>
+              <a:t>Y se usa dentro del «SELECT», que es lo que la hace funcion</a:t>
+            </a:r>
+            <a:r>
+              <a:rPr sz="1900" b="0" i="0">
+                <a:solidFill>
+                  <a:srgbClr val="333333"/>
+                </a:solidFill>
+                <a:latin typeface="Calibri"/>
+              </a:rPr>
+              <a:t> (el contraste de la Clase 3): «SELECT nombre, especie, fn_precio_consulta(especie, FALSE) AS tarifa_normal, fn_precio_consulta(especie, TRUE) AS tarifa_urgencia FROM mascota ORDER BY id_mascota;» — un canino en urgencia da </a:t>
+            </a:r>
+            <a:r>
+              <a:rPr sz="1900" b="1" i="0">
+                <a:solidFill>
+                  <a:srgbClr val="333333"/>
+                </a:solidFill>
+                <a:latin typeface="Calibri"/>
+              </a:rPr>
+              <a:t>60750</a:t>
+            </a:r>
+            <a:r>
+              <a:rPr sz="1900" b="0" i="0">
+                <a:solidFill>
+                  <a:srgbClr val="333333"/>
+                </a:solidFill>
+                <a:latin typeface="Calibri"/>
+              </a:rPr>
+              <a:t> (45000 × 1.35).</a:t>
             </a:r>
           </a:p>
         </p:txBody>
@@ -16954,307 +17671,6 @@
       <p:sp>
         <p:nvSpPr>
           <p:cNvPr id="6" name="TextBox 5"/>
-          <p:cNvSpPr txBox="1"/>
-          <p:nvPr/>
-        </p:nvSpPr>
-        <p:spPr>
-          <a:xfrm>
-            <a:off x="457200" y="1380744"/>
-            <a:ext cx="11277295" cy="5020056"/>
-          </a:xfrm>
-          <a:prstGeom prst="rect">
-            <a:avLst/>
-          </a:prstGeom>
-          <a:noFill/>
-        </p:spPr>
-        <p:txBody>
-          <a:bodyPr wrap="square">
-            <a:spAutoFit/>
-          </a:bodyPr>
-          <a:lstStyle/>
-          <a:p>
-            <a:pPr>
-              <a:spcAft>
-                <a:spcPts val="800"/>
-              </a:spcAft>
-            </a:pPr>
-            <a:r>
-              <a:rPr sz="1900" b="0" i="0">
-                <a:solidFill>
-                  <a:srgbClr val="333333"/>
-                </a:solidFill>
-                <a:latin typeface="Calibri"/>
-              </a:rPr>
-              <a:t>–   </a:t>
-            </a:r>
-            <a:r>
-              <a:rPr sz="1900" b="1" i="0">
-                <a:solidFill>
-                  <a:srgbClr val="333333"/>
-                </a:solidFill>
-                <a:latin typeface="Calibri"/>
-              </a:rPr>
-              <a:t>La firma decide todo lo demas.</a:t>
-            </a:r>
-            <a:r>
-              <a:rPr sz="1900" b="0" i="0">
-                <a:solidFill>
-                  <a:srgbClr val="333333"/>
-                </a:solidFill>
-                <a:latin typeface="Calibri"/>
-              </a:rPr>
-              <a:t> «CREATE FUNCTION fn_precio_consulta(p_especie TEXT, p_urgencia BOOLEAN) RETURNS NUMERIC LANGUAGE plpgsql IMMUTABLE AS $fn$ ... $fn$;». Es «RETURNS NUMERIC», </a:t>
-            </a:r>
-            <a:r>
-              <a:rPr sz="1900" b="1" i="0">
-                <a:solidFill>
-                  <a:srgbClr val="333333"/>
-                </a:solidFill>
-                <a:latin typeface="Calibri"/>
-              </a:rPr>
-              <a:t>no «RETURNS TRIGGER»</a:t>
-            </a:r>
-            <a:r>
-              <a:rPr sz="1900" b="0" i="0">
-                <a:solidFill>
-                  <a:srgbClr val="333333"/>
-                </a:solidFill>
-                <a:latin typeface="Calibri"/>
-              </a:rPr>
-              <a:t>: esta funcion no se asocia a ninguna tabla, se llama desde una consulta.</a:t>
-            </a:r>
-          </a:p>
-          <a:p>
-            <a:pPr>
-              <a:spcAft>
-                <a:spcPts val="800"/>
-              </a:spcAft>
-            </a:pPr>
-            <a:r>
-              <a:rPr sz="1900" b="0" i="0">
-                <a:solidFill>
-                  <a:srgbClr val="333333"/>
-                </a:solidFill>
-                <a:latin typeface="Calibri"/>
-              </a:rPr>
-              <a:t>–   </a:t>
-            </a:r>
-            <a:r>
-              <a:rPr sz="1900" b="1" i="0">
-                <a:solidFill>
-                  <a:srgbClr val="333333"/>
-                </a:solidFill>
-                <a:latin typeface="Calibri"/>
-              </a:rPr>
-              <a:t>La tabla de tarifas es un «CASE».</a:t>
-            </a:r>
-            <a:r>
-              <a:rPr sz="1900" b="0" i="0">
-                <a:solidFill>
-                  <a:srgbClr val="333333"/>
-                </a:solidFill>
-                <a:latin typeface="Calibri"/>
-              </a:rPr>
-              <a:t> «CASE UPPER(p_especie) WHEN 'CANINO' THEN 45000 WHEN 'FELINO' THEN 40000 ELSE 35000 END». El «UPPER()» es lo que hace la comparacion </a:t>
-            </a:r>
-            <a:r>
-              <a:rPr sz="1900" b="1" i="0">
-                <a:solidFill>
-                  <a:srgbClr val="333333"/>
-                </a:solidFill>
-                <a:latin typeface="Calibri"/>
-              </a:rPr>
-              <a:t>insensible a mayusculas</a:t>
-            </a:r>
-            <a:r>
-              <a:rPr sz="1900" b="0" i="0">
-                <a:solidFill>
-                  <a:srgbClr val="333333"/>
-                </a:solidFill>
-                <a:latin typeface="Calibri"/>
-              </a:rPr>
-              <a:t>: sin el, «canino» en minuscula cae en el «ELSE» y cobra 35000.</a:t>
-            </a:r>
-          </a:p>
-          <a:p>
-            <a:pPr>
-              <a:spcAft>
-                <a:spcPts val="800"/>
-              </a:spcAft>
-            </a:pPr>
-            <a:r>
-              <a:rPr sz="1900" b="0" i="0">
-                <a:solidFill>
-                  <a:srgbClr val="333333"/>
-                </a:solidFill>
-                <a:latin typeface="Calibri"/>
-              </a:rPr>
-              <a:t>–   </a:t>
-            </a:r>
-            <a:r>
-              <a:rPr sz="1900" b="1" i="0">
-                <a:solidFill>
-                  <a:srgbClr val="333333"/>
-                </a:solidFill>
-                <a:latin typeface="Calibri"/>
-              </a:rPr>
-              <a:t>El «NULL» de la urgencia: hazlo explicito con «COALESCE».</a:t>
-            </a:r>
-            <a:r>
-              <a:rPr sz="1900" b="0" i="0">
-                <a:solidFill>
-                  <a:srgbClr val="333333"/>
-                </a:solidFill>
-                <a:latin typeface="Calibri"/>
-              </a:rPr>
-              <a:t> «IF COALESCE(p_urgencia, FALSE) THEN v_base := v_base * 1.35; END IF;». Un «IF» a secas ya trata «NULL» como falso, pero en cuanto el booleano entra en una </a:t>
-            </a:r>
-            <a:r>
-              <a:rPr sz="1900" b="1" i="0">
-                <a:solidFill>
-                  <a:srgbClr val="333333"/>
-                </a:solidFill>
-                <a:latin typeface="Calibri"/>
-              </a:rPr>
-              <a:t>cuenta</a:t>
-            </a:r>
-            <a:r>
-              <a:rPr sz="1900" b="0" i="0">
-                <a:solidFill>
-                  <a:srgbClr val="333333"/>
-                </a:solidFill>
-                <a:latin typeface="Calibri"/>
-              </a:rPr>
-              <a:t> el «NULL» se propaga y la funcion devuelve «NULL».</a:t>
-            </a:r>
-          </a:p>
-          <a:p>
-            <a:pPr>
-              <a:spcAft>
-                <a:spcPts val="800"/>
-              </a:spcAft>
-            </a:pPr>
-            <a:r>
-              <a:rPr sz="1900" b="0" i="0">
-                <a:solidFill>
-                  <a:srgbClr val="333333"/>
-                </a:solidFill>
-                <a:latin typeface="Calibri"/>
-              </a:rPr>
-              <a:t>–   </a:t>
-            </a:r>
-            <a:r>
-              <a:rPr sz="1900" b="1" i="0">
-                <a:solidFill>
-                  <a:srgbClr val="333333"/>
-                </a:solidFill>
-                <a:latin typeface="Calibri"/>
-              </a:rPr>
-              <a:t>«IMMUTABLE» es una promesa que el motor cobra:</a:t>
-            </a:r>
-            <a:r>
-              <a:rPr sz="1900" b="0" i="0">
-                <a:solidFill>
-                  <a:srgbClr val="333333"/>
-                </a:solidFill>
-                <a:latin typeface="Calibri"/>
-              </a:rPr>
-              <a:t> </a:t>
-            </a:r>
-            <a:r>
-              <a:rPr sz="1900" b="1" i="0">
-                <a:solidFill>
-                  <a:srgbClr val="333333"/>
-                </a:solidFill>
-                <a:latin typeface="Calibri"/>
-              </a:rPr>
-              <a:t>misma entrada, misma salida, sin leer tablas</a:t>
-            </a:r>
-            <a:r>
-              <a:rPr sz="1900" b="0" i="0">
-                <a:solidFill>
-                  <a:srgbClr val="333333"/>
-                </a:solidFill>
-                <a:latin typeface="Calibri"/>
-              </a:rPr>
-              <a:t>. Por eso el filtro «WHERE m.activa = 'S'» va en la consulta y </a:t>
-            </a:r>
-            <a:r>
-              <a:rPr sz="1900" b="1" i="0">
-                <a:solidFill>
-                  <a:srgbClr val="333333"/>
-                </a:solidFill>
-                <a:latin typeface="Calibri"/>
-              </a:rPr>
-              <a:t>no</a:t>
-            </a:r>
-            <a:r>
-              <a:rPr sz="1900" b="0" i="0">
-                <a:solidFill>
-                  <a:srgbClr val="333333"/>
-                </a:solidFill>
-                <a:latin typeface="Calibri"/>
-              </a:rPr>
-              <a:t> dentro de la funcion. Una funcion que consulta tablas seria «STABLE», nunca «IMMUTABLE».</a:t>
-            </a:r>
-          </a:p>
-          <a:p>
-            <a:pPr>
-              <a:spcAft>
-                <a:spcPts val="800"/>
-              </a:spcAft>
-            </a:pPr>
-            <a:r>
-              <a:rPr sz="1900" b="0" i="0">
-                <a:solidFill>
-                  <a:srgbClr val="333333"/>
-                </a:solidFill>
-                <a:latin typeface="Calibri"/>
-              </a:rPr>
-              <a:t>–   </a:t>
-            </a:r>
-            <a:r>
-              <a:rPr sz="1900" b="1" i="0">
-                <a:solidFill>
-                  <a:srgbClr val="333333"/>
-                </a:solidFill>
-                <a:latin typeface="Calibri"/>
-              </a:rPr>
-              <a:t>Y se usa dentro del «SELECT», que es lo que la hace funcion</a:t>
-            </a:r>
-            <a:r>
-              <a:rPr sz="1900" b="0" i="0">
-                <a:solidFill>
-                  <a:srgbClr val="333333"/>
-                </a:solidFill>
-                <a:latin typeface="Calibri"/>
-              </a:rPr>
-              <a:t> (el contraste de la Clase 3): «SELECT nombre, especie, fn_precio_consulta(especie, FALSE) AS tarifa_normal, fn_precio_consulta(especie, TRUE) AS tarifa_urgencia FROM mascota ORDER BY id_mascota;» — un canino en urgencia da </a:t>
-            </a:r>
-            <a:r>
-              <a:rPr sz="1900" b="1" i="0">
-                <a:solidFill>
-                  <a:srgbClr val="333333"/>
-                </a:solidFill>
-                <a:latin typeface="Calibri"/>
-              </a:rPr>
-              <a:t>60750</a:t>
-            </a:r>
-            <a:r>
-              <a:rPr sz="1900" b="0" i="0">
-                <a:solidFill>
-                  <a:srgbClr val="333333"/>
-                </a:solidFill>
-                <a:latin typeface="Calibri"/>
-              </a:rPr>
-              <a:t> (45000 × 1.35).</a:t>
-            </a:r>
-          </a:p>
-        </p:txBody>
-      </p:sp>
-      <p:sp>
-        <p:nvSpPr>
-          <p:cNvPr id="7" name="TextBox 6"/>
           <p:cNvSpPr txBox="1"/>
           <p:nvPr/>
         </p:nvSpPr>
@@ -17322,7 +17738,7 @@
         <p:spPr>
           <a:xfrm>
             <a:off x="0" y="0"/>
-            <a:ext cx="12191695" cy="1170432"/>
+            <a:ext cx="12191695" cy="960120"/>
           </a:xfrm>
           <a:prstGeom prst="rect">
             <a:avLst/>
@@ -17364,7 +17780,7 @@
         </p:nvSpPr>
         <p:spPr>
           <a:xfrm>
-            <a:off x="0" y="1170432"/>
+            <a:off x="0" y="960120"/>
             <a:ext cx="12191695" cy="41148"/>
           </a:xfrm>
           <a:prstGeom prst="rect">
@@ -17408,7 +17824,7 @@
         <p:spPr>
           <a:xfrm>
             <a:off x="457200" y="164592"/>
-            <a:ext cx="11277295" cy="384048"/>
+            <a:ext cx="11277295" cy="502920"/>
           </a:xfrm>
           <a:prstGeom prst="rect">
             <a:avLst/>
@@ -17441,8 +17857,8 @@
         </p:nvSpPr>
         <p:spPr>
           <a:xfrm>
-            <a:off x="457200" y="566928"/>
-            <a:ext cx="11277295" cy="411480"/>
+            <a:off x="457200" y="1170432"/>
+            <a:ext cx="11277295" cy="5230368"/>
           </a:xfrm>
           <a:prstGeom prst="rect">
             <a:avLst/>
@@ -17455,14 +17871,218 @@
           </a:bodyPr>
           <a:lstStyle/>
           <a:p>
-            <a:r>
-              <a:rPr sz="1400" b="0" i="0">
-                <a:solidFill>
-                  <a:srgbClr val="B8D8EE"/>
-                </a:solidFill>
-                <a:latin typeface="Calibri"/>
-              </a:rPr>
-              <a:t>La pregunta 4 son 15 puntos y no pide codigo: pide ubicar cada validacion en su capa y justificar por que ahi</a:t>
+            <a:pPr>
+              <a:spcAft>
+                <a:spcPts val="800"/>
+              </a:spcAft>
+            </a:pPr>
+            <a:r>
+              <a:rPr sz="2000" b="0" i="0">
+                <a:solidFill>
+                  <a:srgbClr val="333333"/>
+                </a:solidFill>
+                <a:latin typeface="Calibri"/>
+              </a:rPr>
+              <a:t>–   </a:t>
+            </a:r>
+            <a:r>
+              <a:rPr sz="2000" b="1" i="0">
+                <a:solidFill>
+                  <a:srgbClr val="333333"/>
+                </a:solidFill>
+                <a:latin typeface="Calibri"/>
+              </a:rPr>
+              <a:t>«CHECK»: una sola fila, una sola columna.</a:t>
+            </a:r>
+            <a:r>
+              <a:rPr sz="2000" b="0" i="0">
+                <a:solidFill>
+                  <a:srgbClr val="333333"/>
+                </a:solidFill>
+                <a:latin typeface="Calibri"/>
+              </a:rPr>
+              <a:t> «stock &gt;= 0», «precio &gt; 0», «estado IN (...)». Es lo mas barato y lo mas dificil de saltarse, porque lo aplica el motor sin una linea de codigo. </a:t>
+            </a:r>
+            <a:r>
+              <a:rPr sz="2000" b="1" i="0">
+                <a:solidFill>
+                  <a:srgbClr val="333333"/>
+                </a:solidFill>
+                <a:latin typeface="Calibri"/>
+              </a:rPr>
+              <a:t>Si la regla cabe en un CHECK, no se hace trigger.</a:t>
+            </a:r>
+          </a:p>
+          <a:p>
+            <a:pPr>
+              <a:spcAft>
+                <a:spcPts val="800"/>
+              </a:spcAft>
+            </a:pPr>
+            <a:r>
+              <a:rPr sz="2000" b="0" i="0">
+                <a:solidFill>
+                  <a:srgbClr val="333333"/>
+                </a:solidFill>
+                <a:latin typeface="Calibri"/>
+              </a:rPr>
+              <a:t>–   </a:t>
+            </a:r>
+            <a:r>
+              <a:rPr sz="2000" b="1" i="0">
+                <a:solidFill>
+                  <a:srgbClr val="333333"/>
+                </a:solidFill>
+                <a:latin typeface="Calibri"/>
+              </a:rPr>
+              <a:t>«UNIQUE» y «FK»: la relacion entre filas o entre tablas.</a:t>
+            </a:r>
+            <a:r>
+              <a:rPr sz="2000" b="0" i="0">
+                <a:solidFill>
+                  <a:srgbClr val="333333"/>
+                </a:solidFill>
+                <a:latin typeface="Calibri"/>
+              </a:rPr>
+              <a:t> «un veterinario no puede tener dos citas en la misma franja» es «UNIQUE (id_veterinario, fecha_hora)», no un trigger.</a:t>
+            </a:r>
+          </a:p>
+          <a:p>
+            <a:pPr>
+              <a:spcAft>
+                <a:spcPts val="800"/>
+              </a:spcAft>
+            </a:pPr>
+            <a:r>
+              <a:rPr sz="2000" b="0" i="0">
+                <a:solidFill>
+                  <a:srgbClr val="333333"/>
+                </a:solidFill>
+                <a:latin typeface="Calibri"/>
+              </a:rPr>
+              <a:t>–   </a:t>
+            </a:r>
+            <a:r>
+              <a:rPr sz="2000" b="1" i="0">
+                <a:solidFill>
+                  <a:srgbClr val="333333"/>
+                </a:solidFill>
+                <a:latin typeface="Calibri"/>
+              </a:rPr>
+              <a:t>Trigger: cuando la regla necesita OTRA fila u OTRA tabla.</a:t>
+            </a:r>
+            <a:r>
+              <a:rPr sz="2000" b="0" i="0">
+                <a:solidFill>
+                  <a:srgbClr val="333333"/>
+                </a:solidFill>
+                <a:latin typeface="Calibri"/>
+              </a:rPr>
+              <a:t> Comparar «OLD» con «NEW», mirar el stock de «insumo» mientras se actualiza otra tabla, o </a:t>
+            </a:r>
+            <a:r>
+              <a:rPr sz="2000" b="1" i="0">
+                <a:solidFill>
+                  <a:srgbClr val="333333"/>
+                </a:solidFill>
+                <a:latin typeface="Calibri"/>
+              </a:rPr>
+              <a:t>escribir en una segunda tabla</a:t>
+            </a:r>
+            <a:r>
+              <a:rPr sz="2000" b="0" i="0">
+                <a:solidFill>
+                  <a:srgbClr val="333333"/>
+                </a:solidFill>
+                <a:latin typeface="Calibri"/>
+              </a:rPr>
+              <a:t> (auditoria). Nada de eso cabe en un «CHECK».</a:t>
+            </a:r>
+          </a:p>
+          <a:p>
+            <a:pPr>
+              <a:spcAft>
+                <a:spcPts val="800"/>
+              </a:spcAft>
+            </a:pPr>
+            <a:r>
+              <a:rPr sz="2000" b="0" i="0">
+                <a:solidFill>
+                  <a:srgbClr val="333333"/>
+                </a:solidFill>
+                <a:latin typeface="Calibri"/>
+              </a:rPr>
+              <a:t>–   </a:t>
+            </a:r>
+            <a:r>
+              <a:rPr sz="2000" b="1" i="0">
+                <a:solidFill>
+                  <a:srgbClr val="333333"/>
+                </a:solidFill>
+                <a:latin typeface="Calibri"/>
+              </a:rPr>
+              <a:t>Aplicacion: solo lo que la base no puede saber.</a:t>
+            </a:r>
+            <a:r>
+              <a:rPr sz="2000" b="0" i="0">
+                <a:solidFill>
+                  <a:srgbClr val="333333"/>
+                </a:solidFill>
+                <a:latin typeface="Calibri"/>
+              </a:rPr>
+              <a:t> El formato del correo, el permiso de la pantalla, la traduccion del mensaje. Y el criterio para decidir: </a:t>
+            </a:r>
+            <a:r>
+              <a:rPr sz="2000" b="1" i="0">
+                <a:solidFill>
+                  <a:srgbClr val="333333"/>
+                </a:solidFill>
+                <a:latin typeface="Calibri"/>
+              </a:rPr>
+              <a:t>una validacion que solo vive en la app se salta conectandose por «psql»</a:t>
+            </a:r>
+            <a:r>
+              <a:rPr sz="2000" b="0" i="0">
+                <a:solidFill>
+                  <a:srgbClr val="333333"/>
+                </a:solidFill>
+                <a:latin typeface="Calibri"/>
+              </a:rPr>
+              <a:t>.</a:t>
+            </a:r>
+          </a:p>
+          <a:p>
+            <a:pPr>
+              <a:spcAft>
+                <a:spcPts val="800"/>
+              </a:spcAft>
+            </a:pPr>
+            <a:r>
+              <a:rPr sz="2000" b="0" i="0">
+                <a:solidFill>
+                  <a:srgbClr val="333333"/>
+                </a:solidFill>
+                <a:latin typeface="Calibri"/>
+              </a:rPr>
+              <a:t>–   </a:t>
+            </a:r>
+            <a:r>
+              <a:rPr sz="2000" b="1" i="0">
+                <a:solidFill>
+                  <a:srgbClr val="333333"/>
+                </a:solidFill>
+                <a:latin typeface="Calibri"/>
+              </a:rPr>
+              <a:t>BEFORE valida, AFTER audita.</a:t>
+            </a:r>
+            <a:r>
+              <a:rPr sz="2000" b="0" i="0">
+                <a:solidFill>
+                  <a:srgbClr val="333333"/>
+                </a:solidFill>
+                <a:latin typeface="Calibri"/>
+              </a:rPr>
+              <a:t> Un trigger que rechaza corre «BEFORE», porque despues el dato ya esta escrito; uno que registra un hecho consumado corre «AFTER». Poner «AFTER» en el de stock es el error mas comun del dia.</a:t>
             </a:r>
           </a:p>
         </p:txBody>
@@ -17470,244 +18090,6 @@
       <p:sp>
         <p:nvSpPr>
           <p:cNvPr id="6" name="TextBox 5"/>
-          <p:cNvSpPr txBox="1"/>
-          <p:nvPr/>
-        </p:nvSpPr>
-        <p:spPr>
-          <a:xfrm>
-            <a:off x="457200" y="1380744"/>
-            <a:ext cx="11277295" cy="5020056"/>
-          </a:xfrm>
-          <a:prstGeom prst="rect">
-            <a:avLst/>
-          </a:prstGeom>
-          <a:noFill/>
-        </p:spPr>
-        <p:txBody>
-          <a:bodyPr wrap="square">
-            <a:spAutoFit/>
-          </a:bodyPr>
-          <a:lstStyle/>
-          <a:p>
-            <a:pPr>
-              <a:spcAft>
-                <a:spcPts val="800"/>
-              </a:spcAft>
-            </a:pPr>
-            <a:r>
-              <a:rPr sz="2000" b="0" i="0">
-                <a:solidFill>
-                  <a:srgbClr val="333333"/>
-                </a:solidFill>
-                <a:latin typeface="Calibri"/>
-              </a:rPr>
-              <a:t>–   </a:t>
-            </a:r>
-            <a:r>
-              <a:rPr sz="2000" b="1" i="0">
-                <a:solidFill>
-                  <a:srgbClr val="333333"/>
-                </a:solidFill>
-                <a:latin typeface="Calibri"/>
-              </a:rPr>
-              <a:t>«CHECK»: una sola fila, una sola columna.</a:t>
-            </a:r>
-            <a:r>
-              <a:rPr sz="2000" b="0" i="0">
-                <a:solidFill>
-                  <a:srgbClr val="333333"/>
-                </a:solidFill>
-                <a:latin typeface="Calibri"/>
-              </a:rPr>
-              <a:t> «stock &gt;= 0», «precio &gt; 0», «estado IN (...)». Es lo mas barato y lo mas dificil de saltarse, porque lo aplica el motor sin una linea de codigo. </a:t>
-            </a:r>
-            <a:r>
-              <a:rPr sz="2000" b="1" i="0">
-                <a:solidFill>
-                  <a:srgbClr val="333333"/>
-                </a:solidFill>
-                <a:latin typeface="Calibri"/>
-              </a:rPr>
-              <a:t>Si la regla cabe en un CHECK, no se hace trigger.</a:t>
-            </a:r>
-          </a:p>
-          <a:p>
-            <a:pPr>
-              <a:spcAft>
-                <a:spcPts val="800"/>
-              </a:spcAft>
-            </a:pPr>
-            <a:r>
-              <a:rPr sz="2000" b="0" i="0">
-                <a:solidFill>
-                  <a:srgbClr val="333333"/>
-                </a:solidFill>
-                <a:latin typeface="Calibri"/>
-              </a:rPr>
-              <a:t>–   </a:t>
-            </a:r>
-            <a:r>
-              <a:rPr sz="2000" b="1" i="0">
-                <a:solidFill>
-                  <a:srgbClr val="333333"/>
-                </a:solidFill>
-                <a:latin typeface="Calibri"/>
-              </a:rPr>
-              <a:t>«UNIQUE» y «FK»: la relacion entre filas o entre tablas.</a:t>
-            </a:r>
-            <a:r>
-              <a:rPr sz="2000" b="0" i="0">
-                <a:solidFill>
-                  <a:srgbClr val="333333"/>
-                </a:solidFill>
-                <a:latin typeface="Calibri"/>
-              </a:rPr>
-              <a:t> «un veterinario no puede tener dos citas en la misma franja» es «UNIQUE (id_veterinario, fecha_hora)», no un trigger.</a:t>
-            </a:r>
-          </a:p>
-          <a:p>
-            <a:pPr>
-              <a:spcAft>
-                <a:spcPts val="800"/>
-              </a:spcAft>
-            </a:pPr>
-            <a:r>
-              <a:rPr sz="2000" b="0" i="0">
-                <a:solidFill>
-                  <a:srgbClr val="333333"/>
-                </a:solidFill>
-                <a:latin typeface="Calibri"/>
-              </a:rPr>
-              <a:t>–   </a:t>
-            </a:r>
-            <a:r>
-              <a:rPr sz="2000" b="1" i="0">
-                <a:solidFill>
-                  <a:srgbClr val="333333"/>
-                </a:solidFill>
-                <a:latin typeface="Calibri"/>
-              </a:rPr>
-              <a:t>Trigger: cuando la regla necesita OTRA fila u OTRA tabla.</a:t>
-            </a:r>
-            <a:r>
-              <a:rPr sz="2000" b="0" i="0">
-                <a:solidFill>
-                  <a:srgbClr val="333333"/>
-                </a:solidFill>
-                <a:latin typeface="Calibri"/>
-              </a:rPr>
-              <a:t> Comparar «OLD» con «NEW», mirar el stock de «insumo» mientras se actualiza otra tabla, o </a:t>
-            </a:r>
-            <a:r>
-              <a:rPr sz="2000" b="1" i="0">
-                <a:solidFill>
-                  <a:srgbClr val="333333"/>
-                </a:solidFill>
-                <a:latin typeface="Calibri"/>
-              </a:rPr>
-              <a:t>escribir en una segunda tabla</a:t>
-            </a:r>
-            <a:r>
-              <a:rPr sz="2000" b="0" i="0">
-                <a:solidFill>
-                  <a:srgbClr val="333333"/>
-                </a:solidFill>
-                <a:latin typeface="Calibri"/>
-              </a:rPr>
-              <a:t> (auditoria). Nada de eso cabe en un «CHECK».</a:t>
-            </a:r>
-          </a:p>
-          <a:p>
-            <a:pPr>
-              <a:spcAft>
-                <a:spcPts val="800"/>
-              </a:spcAft>
-            </a:pPr>
-            <a:r>
-              <a:rPr sz="2000" b="0" i="0">
-                <a:solidFill>
-                  <a:srgbClr val="333333"/>
-                </a:solidFill>
-                <a:latin typeface="Calibri"/>
-              </a:rPr>
-              <a:t>–   </a:t>
-            </a:r>
-            <a:r>
-              <a:rPr sz="2000" b="1" i="0">
-                <a:solidFill>
-                  <a:srgbClr val="333333"/>
-                </a:solidFill>
-                <a:latin typeface="Calibri"/>
-              </a:rPr>
-              <a:t>Aplicacion: solo lo que la base no puede saber.</a:t>
-            </a:r>
-            <a:r>
-              <a:rPr sz="2000" b="0" i="0">
-                <a:solidFill>
-                  <a:srgbClr val="333333"/>
-                </a:solidFill>
-                <a:latin typeface="Calibri"/>
-              </a:rPr>
-              <a:t> El formato del correo, el permiso de la pantalla, la traduccion del mensaje. Y el criterio para decidir: </a:t>
-            </a:r>
-            <a:r>
-              <a:rPr sz="2000" b="1" i="0">
-                <a:solidFill>
-                  <a:srgbClr val="333333"/>
-                </a:solidFill>
-                <a:latin typeface="Calibri"/>
-              </a:rPr>
-              <a:t>una validacion que solo vive en la app se salta conectandose por «psql»</a:t>
-            </a:r>
-            <a:r>
-              <a:rPr sz="2000" b="0" i="0">
-                <a:solidFill>
-                  <a:srgbClr val="333333"/>
-                </a:solidFill>
-                <a:latin typeface="Calibri"/>
-              </a:rPr>
-              <a:t>.</a:t>
-            </a:r>
-          </a:p>
-          <a:p>
-            <a:pPr>
-              <a:spcAft>
-                <a:spcPts val="800"/>
-              </a:spcAft>
-            </a:pPr>
-            <a:r>
-              <a:rPr sz="2000" b="0" i="0">
-                <a:solidFill>
-                  <a:srgbClr val="333333"/>
-                </a:solidFill>
-                <a:latin typeface="Calibri"/>
-              </a:rPr>
-              <a:t>–   </a:t>
-            </a:r>
-            <a:r>
-              <a:rPr sz="2000" b="1" i="0">
-                <a:solidFill>
-                  <a:srgbClr val="333333"/>
-                </a:solidFill>
-                <a:latin typeface="Calibri"/>
-              </a:rPr>
-              <a:t>BEFORE valida, AFTER audita.</a:t>
-            </a:r>
-            <a:r>
-              <a:rPr sz="2000" b="0" i="0">
-                <a:solidFill>
-                  <a:srgbClr val="333333"/>
-                </a:solidFill>
-                <a:latin typeface="Calibri"/>
-              </a:rPr>
-              <a:t> Un trigger que rechaza corre «BEFORE», porque despues el dato ya esta escrito; uno que registra un hecho consumado corre «AFTER». Poner «AFTER» en el de stock es el error mas comun del dia.</a:t>
-            </a:r>
-          </a:p>
-        </p:txBody>
-      </p:sp>
-      <p:sp>
-        <p:nvSpPr>
-          <p:cNvPr id="7" name="TextBox 6"/>
           <p:cNvSpPr txBox="1"/>
           <p:nvPr/>
         </p:nvSpPr>
@@ -17775,7 +18157,7 @@
         <p:spPr>
           <a:xfrm>
             <a:off x="0" y="0"/>
-            <a:ext cx="12191695" cy="1170432"/>
+            <a:ext cx="12191695" cy="960120"/>
           </a:xfrm>
           <a:prstGeom prst="rect">
             <a:avLst/>
@@ -17817,7 +18199,7 @@
         </p:nvSpPr>
         <p:spPr>
           <a:xfrm>
-            <a:off x="0" y="1170432"/>
+            <a:off x="0" y="960120"/>
             <a:ext cx="12191695" cy="41148"/>
           </a:xfrm>
           <a:prstGeom prst="rect">
@@ -17861,7 +18243,7 @@
         <p:spPr>
           <a:xfrm>
             <a:off x="457200" y="164592"/>
-            <a:ext cx="11277295" cy="384048"/>
+            <a:ext cx="11277295" cy="502920"/>
           </a:xfrm>
           <a:prstGeom prst="rect">
             <a:avLst/>
@@ -17894,8 +18276,8 @@
         </p:nvSpPr>
         <p:spPr>
           <a:xfrm>
-            <a:off x="457200" y="566928"/>
-            <a:ext cx="11277295" cy="411480"/>
+            <a:off x="457200" y="1170432"/>
+            <a:ext cx="11277295" cy="5230368"/>
           </a:xfrm>
           <a:prstGeom prst="rect">
             <a:avLst/>
@@ -17908,14 +18290,299 @@
           </a:bodyPr>
           <a:lstStyle/>
           <a:p>
-            <a:r>
-              <a:rPr sz="1400" b="0" i="0">
-                <a:solidFill>
-                  <a:srgbClr val="B8D8EE"/>
-                </a:solidFill>
-                <a:latin typeface="Calibri"/>
-              </a:rPr>
-              <a:t>Son 25 de los 100 puntos de la clase y se califican seccion por seccion. La plantilla en blanco esta en el Taller del PI</a:t>
+            <a:pPr>
+              <a:spcAft>
+                <a:spcPts val="800"/>
+              </a:spcAft>
+            </a:pPr>
+            <a:r>
+              <a:rPr sz="2000" b="0" i="0">
+                <a:solidFill>
+                  <a:srgbClr val="333333"/>
+                </a:solidFill>
+                <a:latin typeface="Calibri"/>
+              </a:rPr>
+              <a:t>–   </a:t>
+            </a:r>
+            <a:r>
+              <a:rPr sz="2000" b="1" i="0">
+                <a:solidFill>
+                  <a:srgbClr val="333333"/>
+                </a:solidFill>
+                <a:latin typeface="Calibri"/>
+              </a:rPr>
+              <a:t>1. Que se respalda y con que.</a:t>
+            </a:r>
+            <a:r>
+              <a:rPr sz="2000" b="0" i="0">
+                <a:solidFill>
+                  <a:srgbClr val="333333"/>
+                </a:solidFill>
+                <a:latin typeface="Calibri"/>
+              </a:rPr>
+              <a:t> «pg_dump -Fc -d vetcare -f vetcare_AAAAMMDD.dump» para los datos, y «pg_dumpall --globals-only» para los </a:t>
+            </a:r>
+            <a:r>
+              <a:rPr sz="2000" b="1" i="0">
+                <a:solidFill>
+                  <a:srgbClr val="333333"/>
+                </a:solidFill>
+                <a:latin typeface="Calibri"/>
+              </a:rPr>
+              <a:t>roles de la Clase 2</a:t>
+            </a:r>
+            <a:r>
+              <a:rPr sz="2000" b="0" i="0">
+                <a:solidFill>
+                  <a:srgbClr val="333333"/>
+                </a:solidFill>
+                <a:latin typeface="Calibri"/>
+              </a:rPr>
+              <a:t>: «pg_dump» es de UNA base y los roles son del cluster, asi que no los respalda. Si falta, se restaura la base y ningun rol tiene permisos.</a:t>
+            </a:r>
+          </a:p>
+          <a:p>
+            <a:pPr>
+              <a:spcAft>
+                <a:spcPts val="800"/>
+              </a:spcAft>
+            </a:pPr>
+            <a:r>
+              <a:rPr sz="2000" b="0" i="0">
+                <a:solidFill>
+                  <a:srgbClr val="333333"/>
+                </a:solidFill>
+                <a:latin typeface="Calibri"/>
+              </a:rPr>
+              <a:t>–   </a:t>
+            </a:r>
+            <a:r>
+              <a:rPr sz="2000" b="1" i="0">
+                <a:solidFill>
+                  <a:srgbClr val="333333"/>
+                </a:solidFill>
+                <a:latin typeface="Calibri"/>
+              </a:rPr>
+              <a:t>2. Frecuencia, con su razon.</a:t>
+            </a:r>
+            <a:r>
+              <a:rPr sz="2000" b="0" i="0">
+                <a:solidFill>
+                  <a:srgbClr val="333333"/>
+                </a:solidFill>
+                <a:latin typeface="Calibri"/>
+              </a:rPr>
+              <a:t> No «diario»: ««pg_dump -Fc» a las 20:30 </a:t>
+            </a:r>
+            <a:r>
+              <a:rPr sz="2000" b="1" i="0">
+                <a:solidFill>
+                  <a:srgbClr val="333333"/>
+                </a:solidFill>
+                <a:latin typeface="Calibri"/>
+              </a:rPr>
+              <a:t>porque</a:t>
+            </a:r>
+            <a:r>
+              <a:rPr sz="2000" b="0" i="0">
+                <a:solidFill>
+                  <a:srgbClr val="333333"/>
+                </a:solidFill>
+                <a:latin typeface="Calibri"/>
+              </a:rPr>
+              <a:t> la facturacion de Huellitas cierra a las 20:00». La hora se justifica con un hecho del negocio.</a:t>
+            </a:r>
+          </a:p>
+          <a:p>
+            <a:pPr>
+              <a:spcAft>
+                <a:spcPts val="800"/>
+              </a:spcAft>
+            </a:pPr>
+            <a:r>
+              <a:rPr sz="2000" b="0" i="0">
+                <a:solidFill>
+                  <a:srgbClr val="333333"/>
+                </a:solidFill>
+                <a:latin typeface="Calibri"/>
+              </a:rPr>
+              <a:t>–   </a:t>
+            </a:r>
+            <a:r>
+              <a:rPr sz="2000" b="1" i="0">
+                <a:solidFill>
+                  <a:srgbClr val="333333"/>
+                </a:solidFill>
+                <a:latin typeface="Calibri"/>
+              </a:rPr>
+              <a:t>3. Retencion</a:t>
+            </a:r>
+            <a:r>
+              <a:rPr sz="2000" b="0" i="0">
+                <a:solidFill>
+                  <a:srgbClr val="333333"/>
+                </a:solidFill>
+                <a:latin typeface="Calibri"/>
+              </a:rPr>
+              <a:t> —cuantas copias y donde: 7 diarias, 4 semanales, 12 mensuales, y </a:t>
+            </a:r>
+            <a:r>
+              <a:rPr sz="2000" b="1" i="0">
+                <a:solidFill>
+                  <a:srgbClr val="333333"/>
+                </a:solidFill>
+                <a:latin typeface="Calibri"/>
+              </a:rPr>
+              <a:t>al menos una fuera del mismo servidor</a:t>
+            </a:r>
+            <a:r>
+              <a:rPr sz="2000" b="0" i="0">
+                <a:solidFill>
+                  <a:srgbClr val="333333"/>
+                </a:solidFill>
+                <a:latin typeface="Calibri"/>
+              </a:rPr>
+              <a:t>— y </a:t>
+            </a:r>
+            <a:r>
+              <a:rPr sz="2000" b="1" i="0">
+                <a:solidFill>
+                  <a:srgbClr val="333333"/>
+                </a:solidFill>
+                <a:latin typeface="Calibri"/>
+              </a:rPr>
+              <a:t>4. RPO y RTO en numeros</a:t>
+            </a:r>
+            <a:r>
+              <a:rPr sz="2000" b="0" i="0">
+                <a:solidFill>
+                  <a:srgbClr val="333333"/>
+                </a:solidFill>
+                <a:latin typeface="Calibri"/>
+              </a:rPr>
+              <a:t>: cuantos datos se acepta perder («maximo 1 hora de citas») y cuanto puede estar caida la base. Un dump diario implica un RPO de 24 h: si no alcanza, hace falta </a:t>
+            </a:r>
+            <a:r>
+              <a:rPr sz="2000" b="1" i="0">
+                <a:solidFill>
+                  <a:srgbClr val="333333"/>
+                </a:solidFill>
+                <a:latin typeface="Calibri"/>
+              </a:rPr>
+              <a:t>archivado de WAL</a:t>
+            </a:r>
+            <a:r>
+              <a:rPr sz="2000" b="0" i="0">
+                <a:solidFill>
+                  <a:srgbClr val="333333"/>
+                </a:solidFill>
+                <a:latin typeface="Calibri"/>
+              </a:rPr>
+              <a:t>.</a:t>
+            </a:r>
+          </a:p>
+          <a:p>
+            <a:pPr>
+              <a:spcAft>
+                <a:spcPts val="800"/>
+              </a:spcAft>
+            </a:pPr>
+            <a:r>
+              <a:rPr sz="2000" b="0" i="0">
+                <a:solidFill>
+                  <a:srgbClr val="333333"/>
+                </a:solidFill>
+                <a:latin typeface="Calibri"/>
+              </a:rPr>
+              <a:t>–   </a:t>
+            </a:r>
+            <a:r>
+              <a:rPr sz="2000" b="1" i="0">
+                <a:solidFill>
+                  <a:srgbClr val="333333"/>
+                </a:solidFill>
+                <a:latin typeface="Calibri"/>
+              </a:rPr>
+              <a:t>5. Restore de prueba</a:t>
+            </a:r>
+            <a:r>
+              <a:rPr sz="2000" b="0" i="0">
+                <a:solidFill>
+                  <a:srgbClr val="333333"/>
+                </a:solidFill>
+                <a:latin typeface="Calibri"/>
+              </a:rPr>
+              <a:t> con «pg_restore» sobre una base vacia: fecha, duracion medida, la consulta que confirma el conteo, cada cuanto se ensaya y quien firma. </a:t>
+            </a:r>
+            <a:r>
+              <a:rPr sz="2000" b="1" i="0">
+                <a:solidFill>
+                  <a:srgbClr val="333333"/>
+                </a:solidFill>
+                <a:latin typeface="Calibri"/>
+              </a:rPr>
+              <a:t>Un respaldo que nunca se restauro no es un respaldo:</a:t>
+            </a:r>
+            <a:r>
+              <a:rPr sz="2000" b="0" i="0">
+                <a:solidFill>
+                  <a:srgbClr val="333333"/>
+                </a:solidFill>
+                <a:latin typeface="Calibri"/>
+              </a:rPr>
+              <a:t> es un archivo.</a:t>
+            </a:r>
+          </a:p>
+          <a:p>
+            <a:pPr>
+              <a:spcAft>
+                <a:spcPts val="800"/>
+              </a:spcAft>
+            </a:pPr>
+            <a:r>
+              <a:rPr sz="2000" b="0" i="0">
+                <a:solidFill>
+                  <a:srgbClr val="333333"/>
+                </a:solidFill>
+                <a:latin typeface="Calibri"/>
+              </a:rPr>
+              <a:t>–   </a:t>
+            </a:r>
+            <a:r>
+              <a:rPr sz="2000" b="1" i="0">
+                <a:solidFill>
+                  <a:srgbClr val="333333"/>
+                </a:solidFill>
+                <a:latin typeface="Calibri"/>
+              </a:rPr>
+              <a:t>6. Que NO cubre el plan</a:t>
+            </a:r>
+            <a:r>
+              <a:rPr sz="2000" b="0" i="0">
+                <a:solidFill>
+                  <a:srgbClr val="333333"/>
+                </a:solidFill>
+                <a:latin typeface="Calibri"/>
+              </a:rPr>
+              <a:t> y cual es el riesgo residual que se asume: el borrado por error que se descubre tres dias despues, la hora de citas que cabe en el RPO. </a:t>
+            </a:r>
+            <a:r>
+              <a:rPr sz="2000" b="1" i="0">
+                <a:solidFill>
+                  <a:srgbClr val="333333"/>
+                </a:solidFill>
+                <a:latin typeface="Calibri"/>
+              </a:rPr>
+              <a:t>Es la seccion que separa un plan de una lista de comandos</a:t>
+            </a:r>
+            <a:r>
+              <a:rPr sz="2000" b="0" i="0">
+                <a:solidFill>
+                  <a:srgbClr val="333333"/>
+                </a:solidFill>
+                <a:latin typeface="Calibri"/>
+              </a:rPr>
+              <a:t>, y la que mas se olvida.</a:t>
             </a:r>
           </a:p>
         </p:txBody>
@@ -17923,325 +18590,6 @@
       <p:sp>
         <p:nvSpPr>
           <p:cNvPr id="6" name="TextBox 5"/>
-          <p:cNvSpPr txBox="1"/>
-          <p:nvPr/>
-        </p:nvSpPr>
-        <p:spPr>
-          <a:xfrm>
-            <a:off x="457200" y="1380744"/>
-            <a:ext cx="11277295" cy="5020056"/>
-          </a:xfrm>
-          <a:prstGeom prst="rect">
-            <a:avLst/>
-          </a:prstGeom>
-          <a:noFill/>
-        </p:spPr>
-        <p:txBody>
-          <a:bodyPr wrap="square">
-            <a:spAutoFit/>
-          </a:bodyPr>
-          <a:lstStyle/>
-          <a:p>
-            <a:pPr>
-              <a:spcAft>
-                <a:spcPts val="800"/>
-              </a:spcAft>
-            </a:pPr>
-            <a:r>
-              <a:rPr sz="1900" b="0" i="0">
-                <a:solidFill>
-                  <a:srgbClr val="333333"/>
-                </a:solidFill>
-                <a:latin typeface="Calibri"/>
-              </a:rPr>
-              <a:t>–   </a:t>
-            </a:r>
-            <a:r>
-              <a:rPr sz="1900" b="1" i="0">
-                <a:solidFill>
-                  <a:srgbClr val="333333"/>
-                </a:solidFill>
-                <a:latin typeface="Calibri"/>
-              </a:rPr>
-              <a:t>1. Que se respalda y con que.</a:t>
-            </a:r>
-            <a:r>
-              <a:rPr sz="1900" b="0" i="0">
-                <a:solidFill>
-                  <a:srgbClr val="333333"/>
-                </a:solidFill>
-                <a:latin typeface="Calibri"/>
-              </a:rPr>
-              <a:t> «pg_dump -Fc -d vetcare -f vetcare_AAAAMMDD.dump» para los datos, y «pg_dumpall --globals-only» para los </a:t>
-            </a:r>
-            <a:r>
-              <a:rPr sz="1900" b="1" i="0">
-                <a:solidFill>
-                  <a:srgbClr val="333333"/>
-                </a:solidFill>
-                <a:latin typeface="Calibri"/>
-              </a:rPr>
-              <a:t>roles de la Clase 2</a:t>
-            </a:r>
-            <a:r>
-              <a:rPr sz="1900" b="0" i="0">
-                <a:solidFill>
-                  <a:srgbClr val="333333"/>
-                </a:solidFill>
-                <a:latin typeface="Calibri"/>
-              </a:rPr>
-              <a:t>: «pg_dump» es de UNA base y los roles son del cluster, asi que no los respalda. Si falta, se restaura la base y ningun rol tiene permisos.</a:t>
-            </a:r>
-          </a:p>
-          <a:p>
-            <a:pPr>
-              <a:spcAft>
-                <a:spcPts val="800"/>
-              </a:spcAft>
-            </a:pPr>
-            <a:r>
-              <a:rPr sz="1900" b="0" i="0">
-                <a:solidFill>
-                  <a:srgbClr val="333333"/>
-                </a:solidFill>
-                <a:latin typeface="Calibri"/>
-              </a:rPr>
-              <a:t>–   </a:t>
-            </a:r>
-            <a:r>
-              <a:rPr sz="1900" b="1" i="0">
-                <a:solidFill>
-                  <a:srgbClr val="333333"/>
-                </a:solidFill>
-                <a:latin typeface="Calibri"/>
-              </a:rPr>
-              <a:t>2. Frecuencia, con su razon.</a:t>
-            </a:r>
-            <a:r>
-              <a:rPr sz="1900" b="0" i="0">
-                <a:solidFill>
-                  <a:srgbClr val="333333"/>
-                </a:solidFill>
-                <a:latin typeface="Calibri"/>
-              </a:rPr>
-              <a:t> No «diario»: ««pg_dump -Fc» a las 20:30 </a:t>
-            </a:r>
-            <a:r>
-              <a:rPr sz="1900" b="1" i="0">
-                <a:solidFill>
-                  <a:srgbClr val="333333"/>
-                </a:solidFill>
-                <a:latin typeface="Calibri"/>
-              </a:rPr>
-              <a:t>porque</a:t>
-            </a:r>
-            <a:r>
-              <a:rPr sz="1900" b="0" i="0">
-                <a:solidFill>
-                  <a:srgbClr val="333333"/>
-                </a:solidFill>
-                <a:latin typeface="Calibri"/>
-              </a:rPr>
-              <a:t> la facturacion de Huellitas cierra a las 20:00». La hora se justifica con un hecho del negocio.</a:t>
-            </a:r>
-          </a:p>
-          <a:p>
-            <a:pPr>
-              <a:spcAft>
-                <a:spcPts val="800"/>
-              </a:spcAft>
-            </a:pPr>
-            <a:r>
-              <a:rPr sz="1900" b="0" i="0">
-                <a:solidFill>
-                  <a:srgbClr val="333333"/>
-                </a:solidFill>
-                <a:latin typeface="Calibri"/>
-              </a:rPr>
-              <a:t>–   </a:t>
-            </a:r>
-            <a:r>
-              <a:rPr sz="1900" b="1" i="0">
-                <a:solidFill>
-                  <a:srgbClr val="333333"/>
-                </a:solidFill>
-                <a:latin typeface="Calibri"/>
-              </a:rPr>
-              <a:t>3. Retencion</a:t>
-            </a:r>
-            <a:r>
-              <a:rPr sz="1900" b="0" i="0">
-                <a:solidFill>
-                  <a:srgbClr val="333333"/>
-                </a:solidFill>
-                <a:latin typeface="Calibri"/>
-              </a:rPr>
-              <a:t> —cuantas copias y donde: 7 diarias, 4 semanales, 12 mensuales, y </a:t>
-            </a:r>
-            <a:r>
-              <a:rPr sz="1900" b="1" i="0">
-                <a:solidFill>
-                  <a:srgbClr val="333333"/>
-                </a:solidFill>
-                <a:latin typeface="Calibri"/>
-              </a:rPr>
-              <a:t>al menos una fuera del mismo servidor</a:t>
-            </a:r>
-            <a:r>
-              <a:rPr sz="1900" b="0" i="0">
-                <a:solidFill>
-                  <a:srgbClr val="333333"/>
-                </a:solidFill>
-                <a:latin typeface="Calibri"/>
-              </a:rPr>
-              <a:t>— y </a:t>
-            </a:r>
-            <a:r>
-              <a:rPr sz="1900" b="1" i="0">
-                <a:solidFill>
-                  <a:srgbClr val="333333"/>
-                </a:solidFill>
-                <a:latin typeface="Calibri"/>
-              </a:rPr>
-              <a:t>4. RPO y RTO en numeros</a:t>
-            </a:r>
-            <a:r>
-              <a:rPr sz="1900" b="0" i="0">
-                <a:solidFill>
-                  <a:srgbClr val="333333"/>
-                </a:solidFill>
-                <a:latin typeface="Calibri"/>
-              </a:rPr>
-              <a:t>: cuantos datos se acepta perder («maximo 1 hora de citas») y cuanto puede estar caida la base. Un dump diario implica un RPO de 24 h: si no alcanza, hace falta </a:t>
-            </a:r>
-            <a:r>
-              <a:rPr sz="1900" b="1" i="0">
-                <a:solidFill>
-                  <a:srgbClr val="333333"/>
-                </a:solidFill>
-                <a:latin typeface="Calibri"/>
-              </a:rPr>
-              <a:t>archivado de WAL</a:t>
-            </a:r>
-            <a:r>
-              <a:rPr sz="1900" b="0" i="0">
-                <a:solidFill>
-                  <a:srgbClr val="333333"/>
-                </a:solidFill>
-                <a:latin typeface="Calibri"/>
-              </a:rPr>
-              <a:t>.</a:t>
-            </a:r>
-          </a:p>
-          <a:p>
-            <a:pPr>
-              <a:spcAft>
-                <a:spcPts val="800"/>
-              </a:spcAft>
-            </a:pPr>
-            <a:r>
-              <a:rPr sz="1900" b="0" i="0">
-                <a:solidFill>
-                  <a:srgbClr val="333333"/>
-                </a:solidFill>
-                <a:latin typeface="Calibri"/>
-              </a:rPr>
-              <a:t>–   </a:t>
-            </a:r>
-            <a:r>
-              <a:rPr sz="1900" b="1" i="0">
-                <a:solidFill>
-                  <a:srgbClr val="333333"/>
-                </a:solidFill>
-                <a:latin typeface="Calibri"/>
-              </a:rPr>
-              <a:t>5. Restore de prueba</a:t>
-            </a:r>
-            <a:r>
-              <a:rPr sz="1900" b="0" i="0">
-                <a:solidFill>
-                  <a:srgbClr val="333333"/>
-                </a:solidFill>
-                <a:latin typeface="Calibri"/>
-              </a:rPr>
-              <a:t> con «pg_restore» sobre una base vacia: fecha, duracion medida, la consulta que confirma el conteo, cada cuanto se ensaya y quien firma. </a:t>
-            </a:r>
-            <a:r>
-              <a:rPr sz="1900" b="1" i="0">
-                <a:solidFill>
-                  <a:srgbClr val="333333"/>
-                </a:solidFill>
-                <a:latin typeface="Calibri"/>
-              </a:rPr>
-              <a:t>Un respaldo que nunca se restauro no es un respaldo:</a:t>
-            </a:r>
-            <a:r>
-              <a:rPr sz="1900" b="0" i="0">
-                <a:solidFill>
-                  <a:srgbClr val="333333"/>
-                </a:solidFill>
-                <a:latin typeface="Calibri"/>
-              </a:rPr>
-              <a:t> es un archivo.</a:t>
-            </a:r>
-          </a:p>
-          <a:p>
-            <a:pPr>
-              <a:spcAft>
-                <a:spcPts val="800"/>
-              </a:spcAft>
-            </a:pPr>
-            <a:r>
-              <a:rPr sz="1900" b="0" i="0">
-                <a:solidFill>
-                  <a:srgbClr val="333333"/>
-                </a:solidFill>
-                <a:latin typeface="Calibri"/>
-              </a:rPr>
-              <a:t>–   </a:t>
-            </a:r>
-            <a:r>
-              <a:rPr sz="1900" b="1" i="0">
-                <a:solidFill>
-                  <a:srgbClr val="333333"/>
-                </a:solidFill>
-                <a:latin typeface="Calibri"/>
-              </a:rPr>
-              <a:t>6. Que NO cubre el plan</a:t>
-            </a:r>
-            <a:r>
-              <a:rPr sz="1900" b="0" i="0">
-                <a:solidFill>
-                  <a:srgbClr val="333333"/>
-                </a:solidFill>
-                <a:latin typeface="Calibri"/>
-              </a:rPr>
-              <a:t> y cual es el riesgo residual que se asume: el borrado por error que se descubre tres dias despues, la hora de citas que cabe en el RPO. </a:t>
-            </a:r>
-            <a:r>
-              <a:rPr sz="1900" b="1" i="0">
-                <a:solidFill>
-                  <a:srgbClr val="333333"/>
-                </a:solidFill>
-                <a:latin typeface="Calibri"/>
-              </a:rPr>
-              <a:t>Es la seccion que separa un plan de una lista de comandos</a:t>
-            </a:r>
-            <a:r>
-              <a:rPr sz="1900" b="0" i="0">
-                <a:solidFill>
-                  <a:srgbClr val="333333"/>
-                </a:solidFill>
-                <a:latin typeface="Calibri"/>
-              </a:rPr>
-              <a:t>, y la que mas se olvida.</a:t>
-            </a:r>
-          </a:p>
-        </p:txBody>
-      </p:sp>
-      <p:sp>
-        <p:nvSpPr>
-          <p:cNvPr id="7" name="TextBox 6"/>
           <p:cNvSpPr txBox="1"/>
           <p:nvPr/>
         </p:nvSpPr>
@@ -18472,7 +18820,7 @@
                 </a:solidFill>
                 <a:latin typeface="Calibri"/>
               </a:rPr>
-              <a:t> PostgreSQL en el navegador + Google Docs</a:t>
+              <a:t> PostgreSQL + Google Docs</a:t>
             </a:r>
           </a:p>
           <a:p>
@@ -18506,7 +18854,7 @@
                 </a:solidFill>
                 <a:latin typeface="Calibri"/>
               </a:rPr>
-              <a:t> fn_precio_consulta + fn_trg_audit_cita con su CREATE TRIGGER ... EXECUTE FUNCTION, en la plataforma del curso, y el esqueleto del plan de respaldo.</a:t>
+              <a:t> fn_precio_consulta + fn_trg_audit_cita con su CREATE TRIGGER ... EXECUTE FUNCTION, y el esqueleto del plan de respaldo.</a:t>
             </a:r>
           </a:p>
           <a:p>
@@ -18754,7 +19102,7 @@
                 </a:solidFill>
                 <a:latin typeface="Calibri"/>
               </a:rPr>
-              <a:t>Los tres detalles de fn_precio_consulta que valen puntos</a:t>
+              <a:t>Los tres detalles de fn_precio_consulta</a:t>
             </a:r>
           </a:p>
           <a:p>
@@ -19907,7 +20255,7 @@
                 </a:solidFill>
                 <a:latin typeface="Calibri"/>
               </a:rPr>
-              <a:t>Los tres detalles de fn_precio_consulta que valen puntos (1/2)</a:t>
+              <a:t>Los tres detalles de fn_precio_consulta (1/2)</a:t>
             </a:r>
           </a:p>
         </p:txBody>
@@ -19946,7 +20294,7 @@
                 </a:solidFill>
                 <a:latin typeface="Calibri"/>
               </a:rPr>
-              <a:t>–   La funcion del taller tiene tres decisiones pequenas que la rubrica mira, y conviene dictarlas porque ninguna es evidente.</a:t>
+              <a:t>–   La funcion de la clase tiene tres decisiones pequenas, y ninguna es evidente.</a:t>
             </a:r>
           </a:p>
           <a:p>
@@ -20207,7 +20555,7 @@
                 </a:solidFill>
                 <a:latin typeface="Calibri"/>
               </a:rPr>
-              <a:t>Los tres detalles de fn_precio_consulta que valen puntos (2/2)</a:t>
+              <a:t>Los tres detalles de fn_precio_consulta (2/2)</a:t>
             </a:r>
           </a:p>
         </p:txBody>

--- a/Bases de Datos II/Clases/Clase 4 - Funciones disparadores seguridad respaldo/Presentacion.pptx
+++ b/Bases de Datos II/Clases/Clase 4 - Funciones disparadores seguridad respaldo/Presentacion.pptx
@@ -52,6 +52,7 @@
     <p:sldId id="300" r:id="rId52"/>
     <p:sldId id="301" r:id="rId53"/>
     <p:sldId id="302" r:id="rId54"/>
+    <p:sldId id="303" r:id="rId55"/>
   </p:sldIdLst>
   <p:sldSz cx="12191695" cy="6858000" type="screen4x3"/>
   <p:notesSz cx="6858000" cy="9144000"/>
@@ -623,12 +624,27 @@
           <a:lstStyle/>
           <a:p>
             <a:r>
-              <a:t>Fuera de la lamina (habla de la practica, no del tema):</a:t>
-            </a:r>
-          </a:p>
-          <a:p>
-            <a:r>
-              <a:t>- Y no hay ninguna senal en el SQL, asi que la unica defensa es documentarlo, que es parte del entregable.</a:t>
+              <a:t>Lo que NO se puede ejecutar es pg_dump, pg_dumpall, pg_basebackup ni pg_restore, y la razon hay que decirla con precision en vez de dejarla en «la herramienta no sirve»: son programas de linea de comandos que leen y escriben archivos, y ahi no hay sistema de archivos ni servidor al que conectarse.</a:t>
+            </a:r>
+          </a:p>
+          <a:p>
+            <a:r>
+              <a:t>Esa distincion hay que decirla en clase, porque un estudiante que intente ejecutar pg_dump va a perder veinte minutos y va a creer que hizo algo mal.</a:t>
+            </a:r>
+          </a:p>
+          <a:p>
+            <a:r>
+              <a:t>Lo que si se puede ensayar de verdad, y conviene hacerlo, es el restore a escala de aula: borrar el esquema completo y volverlo a levantar pegando el propio guion del estudiante, con cronometro en mano.</a:t>
+            </a:r>
+          </a:p>
+          <a:p>
+            <a:r>
+              <a:t>Vale un minuto senalarlo para quien se encuentre Oracle en el trabajo, y no vale mas, porque la calificacion ocurre en PostgreSQL.</a:t>
+            </a:r>
+          </a:p>
+          <a:p>
+            <a:r>
+              <a:t>Fuera de la lamina (habla de la practica): Por eso la pregunta 5 es un documento y no una ejecucion: se califica que el plan nombre la herramienta correcta para cada cosa, no que el estudiante la haya corrido.</a:t>
             </a:r>
           </a:p>
         </p:txBody>
@@ -698,412 +714,7 @@
           <a:lstStyle/>
           <a:p>
             <a:r>
-              <a:t>RPO y RTO dejan de ser siglas cuando se les pone un numero acordado con el negocio, y la rubrica pide precisamente el numero con su justificacion.</a:t>
-            </a:r>
-          </a:p>
-          <a:p>
-            <a:r>
-              <a:t>Probar un restore de verdad tiene cuatro pasos y conviene dictarlos como procedimiento.</a:t>
-            </a:r>
-          </a:p>
-          <a:p>
-            <a:r>
-              <a:t>Cuatro, dejar bitacora con fecha, responsable, resultado y RTO medido; si no hay bitacora, la prueba no existe.</a:t>
-            </a:r>
-          </a:p>
-        </p:txBody>
-      </p:sp>
-      <p:sp>
-        <p:nvSpPr>
-          <p:cNvPr id="4" name="Slide Number Placeholder 3"/>
-          <p:cNvSpPr>
-            <a:spLocks noGrp="1"/>
-          </p:cNvSpPr>
-          <p:nvPr>
-            <p:ph type="sldNum" idx="5" sz="quarter"/>
-          </p:nvPr>
-        </p:nvSpPr>
-        <p:spPr/>
-      </p:sp>
-    </p:spTree>
-  </p:cSld>
-  <p:clrMapOvr>
-    <a:masterClrMapping/>
-  </p:clrMapOvr>
-</p:notes>
-</file>
-
-<file path=ppt/notesSlides/notesSlide12.xml><?xml version="1.0" encoding="utf-8"?>
-<p:notes xmlns:a="http://schemas.openxmlformats.org/drawingml/2006/main" xmlns:p="http://schemas.openxmlformats.org/presentationml/2006/main" xmlns:r="http://schemas.openxmlformats.org/officeDocument/2006/relationships">
-  <p:cSld>
-    <p:spTree>
-      <p:nvGrpSpPr>
-        <p:cNvPr id="1" name=""/>
-        <p:cNvGrpSpPr/>
-        <p:nvPr/>
-      </p:nvGrpSpPr>
-      <p:grpSpPr>
-        <a:xfrm>
-          <a:off x="0" y="0"/>
-          <a:ext cx="0" cy="0"/>
-          <a:chOff x="0" y="0"/>
-          <a:chExt cx="0" cy="0"/>
-        </a:xfrm>
-      </p:grpSpPr>
-      <p:sp>
-        <p:nvSpPr>
-          <p:cNvPr id="2" name="Slide Image Placeholder 1"/>
-          <p:cNvSpPr>
-            <a:spLocks noGrp="1"/>
-          </p:cNvSpPr>
-          <p:nvPr>
-            <p:ph type="sldImg" idx="2"/>
-          </p:nvPr>
-        </p:nvSpPr>
-        <p:spPr/>
-      </p:sp>
-      <p:sp>
-        <p:nvSpPr>
-          <p:cNvPr id="3" name="Notes Placeholder 2"/>
-          <p:cNvSpPr>
-            <a:spLocks noGrp="1"/>
-          </p:cNvSpPr>
-          <p:nvPr>
-            <p:ph type="body" idx="3" sz="quarter"/>
-          </p:nvPr>
-        </p:nvSpPr>
-        <p:spPr/>
-        <p:txBody>
-          <a:bodyPr/>
-          <a:lstStyle/>
-          <a:p>
-            <a:r>
-              <a:t>Lo que NO se puede ejecutar es pg_dump, pg_dumpall, pg_basebackup ni pg_restore, y la razon hay que decirla con precision en vez de dejarla en «la herramienta no sirve»: son programas de linea de comandos que leen y escriben archivos, y ahi no hay sistema de archivos ni servidor al que conectarse.</a:t>
-            </a:r>
-          </a:p>
-          <a:p>
-            <a:r>
-              <a:t>Por eso la pregunta 5 es un documento y no una ejecucion: se califica que el plan nombre la herramienta correcta para cada cosa, no que el estudiante la haya corrido.</a:t>
-            </a:r>
-          </a:p>
-          <a:p>
-            <a:r>
-              <a:t>Esa distincion hay que decirla en clase, porque un estudiante que intente ejecutar pg_dump en la consola de ExamLab va a perder veinte minutos y va a creer que hizo algo mal.</a:t>
-            </a:r>
-          </a:p>
-          <a:p>
-            <a:r>
-              <a:t>Lo que si se puede ensayar de verdad, y conviene hacerlo, es el restore a escala de aula: borrar el esquema completo y volverlo a levantar pegando el propio guion del estudiante, con cronometro en mano.</a:t>
-            </a:r>
-          </a:p>
-          <a:p>
-            <a:r>
-              <a:t>Vale un minuto senalarlo para quien se encuentre Oracle en el trabajo, y no vale mas, porque la calificacion ocurre en PostgreSQL.</a:t>
-            </a:r>
-          </a:p>
-        </p:txBody>
-      </p:sp>
-      <p:sp>
-        <p:nvSpPr>
-          <p:cNvPr id="4" name="Slide Number Placeholder 3"/>
-          <p:cNvSpPr>
-            <a:spLocks noGrp="1"/>
-          </p:cNvSpPr>
-          <p:nvPr>
-            <p:ph type="sldNum" idx="5" sz="quarter"/>
-          </p:nvPr>
-        </p:nvSpPr>
-        <p:spPr/>
-      </p:sp>
-    </p:spTree>
-  </p:cSld>
-  <p:clrMapOvr>
-    <a:masterClrMapping/>
-  </p:clrMapOvr>
-</p:notes>
-</file>
-
-<file path=ppt/notesSlides/notesSlide13.xml><?xml version="1.0" encoding="utf-8"?>
-<p:notes xmlns:a="http://schemas.openxmlformats.org/drawingml/2006/main" xmlns:p="http://schemas.openxmlformats.org/presentationml/2006/main" xmlns:r="http://schemas.openxmlformats.org/officeDocument/2006/relationships">
-  <p:cSld>
-    <p:spTree>
-      <p:nvGrpSpPr>
-        <p:cNvPr id="1" name=""/>
-        <p:cNvGrpSpPr/>
-        <p:nvPr/>
-      </p:nvGrpSpPr>
-      <p:grpSpPr>
-        <a:xfrm>
-          <a:off x="0" y="0"/>
-          <a:ext cx="0" cy="0"/>
-          <a:chOff x="0" y="0"/>
-          <a:chExt cx="0" cy="0"/>
-        </a:xfrm>
-      </p:grpSpPr>
-      <p:sp>
-        <p:nvSpPr>
-          <p:cNvPr id="2" name="Slide Image Placeholder 1"/>
-          <p:cNvSpPr>
-            <a:spLocks noGrp="1"/>
-          </p:cNvSpPr>
-          <p:nvPr>
-            <p:ph type="sldImg" idx="2"/>
-          </p:nvPr>
-        </p:nvSpPr>
-        <p:spPr/>
-      </p:sp>
-      <p:sp>
-        <p:nvSpPr>
-          <p:cNvPr id="3" name="Notes Placeholder 2"/>
-          <p:cNvSpPr>
-            <a:spLocks noGrp="1"/>
-          </p:cNvSpPr>
-          <p:nvPr>
-            <p:ph type="body" idx="3" sz="quarter"/>
-          </p:nvPr>
-        </p:nvSpPr>
-        <p:spPr/>
-        <p:txBody>
-          <a:bodyPr/>
-          <a:lstStyle/>
-          <a:p>
-            <a:r>
-              <a:t>Fuera de la lamina (habla de la practica, no del tema):</a:t>
-            </a:r>
-          </a:p>
-          <a:p>
-            <a:r>
-              <a:t>- En la rubrica del PI, seguridad y respaldo valen 15 de los 100 puntos del proyecto.</a:t>
-            </a:r>
-          </a:p>
-        </p:txBody>
-      </p:sp>
-      <p:sp>
-        <p:nvSpPr>
-          <p:cNvPr id="4" name="Slide Number Placeholder 3"/>
-          <p:cNvSpPr>
-            <a:spLocks noGrp="1"/>
-          </p:cNvSpPr>
-          <p:nvPr>
-            <p:ph type="sldNum" idx="5" sz="quarter"/>
-          </p:nvPr>
-        </p:nvSpPr>
-        <p:spPr/>
-      </p:sp>
-    </p:spTree>
-  </p:cSld>
-  <p:clrMapOvr>
-    <a:masterClrMapping/>
-  </p:clrMapOvr>
-</p:notes>
-</file>
-
-<file path=ppt/notesSlides/notesSlide14.xml><?xml version="1.0" encoding="utf-8"?>
-<p:notes xmlns:a="http://schemas.openxmlformats.org/drawingml/2006/main" xmlns:p="http://schemas.openxmlformats.org/presentationml/2006/main" xmlns:r="http://schemas.openxmlformats.org/officeDocument/2006/relationships">
-  <p:cSld>
-    <p:spTree>
-      <p:nvGrpSpPr>
-        <p:cNvPr id="1" name=""/>
-        <p:cNvGrpSpPr/>
-        <p:nvPr/>
-      </p:nvGrpSpPr>
-      <p:grpSpPr>
-        <a:xfrm>
-          <a:off x="0" y="0"/>
-          <a:ext cx="0" cy="0"/>
-          <a:chOff x="0" y="0"/>
-          <a:chExt cx="0" cy="0"/>
-        </a:xfrm>
-      </p:grpSpPr>
-      <p:sp>
-        <p:nvSpPr>
-          <p:cNvPr id="2" name="Slide Image Placeholder 1"/>
-          <p:cNvSpPr>
-            <a:spLocks noGrp="1"/>
-          </p:cNvSpPr>
-          <p:nvPr>
-            <p:ph type="sldImg" idx="2"/>
-          </p:nvPr>
-        </p:nvSpPr>
-        <p:spPr/>
-      </p:sp>
-      <p:sp>
-        <p:nvSpPr>
-          <p:cNvPr id="3" name="Notes Placeholder 2"/>
-          <p:cNvSpPr>
-            <a:spLocks noGrp="1"/>
-          </p:cNvSpPr>
-          <p:nvPr>
-            <p:ph type="body" idx="3" sz="quarter"/>
-          </p:nvPr>
-        </p:nvSpPr>
-        <p:spPr/>
-        <p:txBody>
-          <a:bodyPr/>
-          <a:lstStyle/>
-          <a:p>
-            <a:r>
-              <a:t>Fuera de la lamina (habla de la practica, no del tema):</a:t>
-            </a:r>
-          </a:p>
-          <a:p>
-            <a:r>
-              <a:t>- Son 20 de los 100 puntos, y se pierden casi siempre por tres cosas: un RETURNS TRIGGER copiado del trigger, el UPPER() olvidado y un IMMUTABLE que lee tablas</a:t>
-            </a:r>
-          </a:p>
-        </p:txBody>
-      </p:sp>
-      <p:sp>
-        <p:nvSpPr>
-          <p:cNvPr id="4" name="Slide Number Placeholder 3"/>
-          <p:cNvSpPr>
-            <a:spLocks noGrp="1"/>
-          </p:cNvSpPr>
-          <p:nvPr>
-            <p:ph type="sldNum" idx="5" sz="quarter"/>
-          </p:nvPr>
-        </p:nvSpPr>
-        <p:spPr/>
-      </p:sp>
-    </p:spTree>
-  </p:cSld>
-  <p:clrMapOvr>
-    <a:masterClrMapping/>
-  </p:clrMapOvr>
-</p:notes>
-</file>
-
-<file path=ppt/notesSlides/notesSlide15.xml><?xml version="1.0" encoding="utf-8"?>
-<p:notes xmlns:a="http://schemas.openxmlformats.org/drawingml/2006/main" xmlns:p="http://schemas.openxmlformats.org/presentationml/2006/main" xmlns:r="http://schemas.openxmlformats.org/officeDocument/2006/relationships">
-  <p:cSld>
-    <p:spTree>
-      <p:nvGrpSpPr>
-        <p:cNvPr id="1" name=""/>
-        <p:cNvGrpSpPr/>
-        <p:nvPr/>
-      </p:nvGrpSpPr>
-      <p:grpSpPr>
-        <a:xfrm>
-          <a:off x="0" y="0"/>
-          <a:ext cx="0" cy="0"/>
-          <a:chOff x="0" y="0"/>
-          <a:chExt cx="0" cy="0"/>
-        </a:xfrm>
-      </p:grpSpPr>
-      <p:sp>
-        <p:nvSpPr>
-          <p:cNvPr id="2" name="Slide Image Placeholder 1"/>
-          <p:cNvSpPr>
-            <a:spLocks noGrp="1"/>
-          </p:cNvSpPr>
-          <p:nvPr>
-            <p:ph type="sldImg" idx="2"/>
-          </p:nvPr>
-        </p:nvSpPr>
-        <p:spPr/>
-      </p:sp>
-      <p:sp>
-        <p:nvSpPr>
-          <p:cNvPr id="3" name="Notes Placeholder 2"/>
-          <p:cNvSpPr>
-            <a:spLocks noGrp="1"/>
-          </p:cNvSpPr>
-          <p:nvPr>
-            <p:ph type="body" idx="3" sz="quarter"/>
-          </p:nvPr>
-        </p:nvSpPr>
-        <p:spPr/>
-        <p:txBody>
-          <a:bodyPr/>
-          <a:lstStyle/>
-          <a:p>
-            <a:r>
-              <a:t>Fuera de la lamina (habla de la practica, no del tema):</a:t>
-            </a:r>
-          </a:p>
-          <a:p>
-            <a:r>
-              <a:t>- La pregunta 4 son 15 puntos y no pide codigo: pide ubicar cada validacion en su capa y justificar por que ahi</a:t>
-            </a:r>
-          </a:p>
-        </p:txBody>
-      </p:sp>
-      <p:sp>
-        <p:nvSpPr>
-          <p:cNvPr id="4" name="Slide Number Placeholder 3"/>
-          <p:cNvSpPr>
-            <a:spLocks noGrp="1"/>
-          </p:cNvSpPr>
-          <p:nvPr>
-            <p:ph type="sldNum" idx="5" sz="quarter"/>
-          </p:nvPr>
-        </p:nvSpPr>
-        <p:spPr/>
-      </p:sp>
-    </p:spTree>
-  </p:cSld>
-  <p:clrMapOvr>
-    <a:masterClrMapping/>
-  </p:clrMapOvr>
-</p:notes>
-</file>
-
-<file path=ppt/notesSlides/notesSlide16.xml><?xml version="1.0" encoding="utf-8"?>
-<p:notes xmlns:a="http://schemas.openxmlformats.org/drawingml/2006/main" xmlns:p="http://schemas.openxmlformats.org/presentationml/2006/main" xmlns:r="http://schemas.openxmlformats.org/officeDocument/2006/relationships">
-  <p:cSld>
-    <p:spTree>
-      <p:nvGrpSpPr>
-        <p:cNvPr id="1" name=""/>
-        <p:cNvGrpSpPr/>
-        <p:nvPr/>
-      </p:nvGrpSpPr>
-      <p:grpSpPr>
-        <a:xfrm>
-          <a:off x="0" y="0"/>
-          <a:ext cx="0" cy="0"/>
-          <a:chOff x="0" y="0"/>
-          <a:chExt cx="0" cy="0"/>
-        </a:xfrm>
-      </p:grpSpPr>
-      <p:sp>
-        <p:nvSpPr>
-          <p:cNvPr id="2" name="Slide Image Placeholder 1"/>
-          <p:cNvSpPr>
-            <a:spLocks noGrp="1"/>
-          </p:cNvSpPr>
-          <p:nvPr>
-            <p:ph type="sldImg" idx="2"/>
-          </p:nvPr>
-        </p:nvSpPr>
-        <p:spPr/>
-      </p:sp>
-      <p:sp>
-        <p:nvSpPr>
-          <p:cNvPr id="3" name="Notes Placeholder 2"/>
-          <p:cNvSpPr>
-            <a:spLocks noGrp="1"/>
-          </p:cNvSpPr>
-          <p:nvPr>
-            <p:ph type="body" idx="3" sz="quarter"/>
-          </p:nvPr>
-        </p:nvSpPr>
-        <p:spPr/>
-        <p:txBody>
-          <a:bodyPr/>
-          <a:lstStyle/>
-          <a:p>
-            <a:r>
-              <a:t>Fuera de la lamina (habla de la practica, no del tema):</a:t>
-            </a:r>
-          </a:p>
-          <a:p>
-            <a:r>
-              <a:t>- Son 25 de los 100 puntos de la clase y se califican seccion por seccion.</a:t>
-            </a:r>
-          </a:p>
-          <a:p>
-            <a:r>
-              <a:t>- La plantilla en blanco esta en el Taller del PI</a:t>
+              <a:t>Fuera de la lamina (habla de la practica): En la rubrica del PI, seguridad y respaldo valen 15 de los 100 puntos del proyecto.</a:t>
             </a:r>
           </a:p>
         </p:txBody>
@@ -1248,22 +859,16 @@
           <a:lstStyle/>
           <a:p>
             <a:r>
-              <a:t>Fuera de la lamina (habla de la practica, no del tema):</a:t>
-            </a:r>
-          </a:p>
-          <a:p>
-            <a:r>
-              <a:t>- No existe la forma de Oracle con el cuerpo dentro del CREATE TRIGGER, y hay que decirlo tal cual porque es el error que la rubrica penaliza expresamente.</a:t>
-            </a:r>
-          </a:p>
-          <a:p/>
-          <a:p>
-            <a:r>
               <a:t>Despues la asociacion,;, que dice cuando dispararla y a quien llamar.</a:t>
             </a:r>
           </a:p>
           <a:p>
             <a:r>
+              <a:t>No existe la forma de Oracle con el cuerpo dentro del CREATE TRIGGER.</a:t>
+            </a:r>
+          </a:p>
+          <a:p>
+            <a:r>
               <a:t>EXECUTE PROCEDURE todavia se acepta por compatibilidad, pero esta obsoleto y no conviene ensenarlo.</a:t>
             </a:r>
           </a:p>
@@ -1280,6 +885,11 @@
           <a:p>
             <a:r>
               <a:t>Hoy no hacen falta, pero saber que existen evita que el estudiante escriba tres funciones casi identicas.</a:t>
+            </a:r>
+          </a:p>
+          <a:p>
+            <a:r>
+              <a:t>Fuera de la lamina (habla de la practica): No existe la forma de Oracle con el cuerpo dentro del CREATE TRIGGER, y hay que decirlo tal cual porque es el error que la rubrica penaliza expresamente.</a:t>
             </a:r>
           </a:p>
         </p:txBody>
@@ -1359,7 +969,12 @@
           </a:p>
           <a:p>
             <a:r>
-              <a:t>La regla operativa, que es la que se califica en la pregunta 4, se dice en una frase: el que VALIDA va BEFORE, porque tiene que abortar antes de que el dato quede escrito y porque solo ahi puede corregirlo; el que AUDITA va AFTER, porque registra un hecho ya consumado.</a:t>
+              <a:t>La regla operativa.</a:t>
+            </a:r>
+          </a:p>
+          <a:p>
+            <a:r>
+              <a:t>Fuera de la lamina (habla de la practica): La regla operativa, que es la que se califica en la pregunta 4, se dice en una frase: el que VALIDA va BEFORE, porque tiene que abortar antes de que el dato quede escrito y porque solo ahi puede corregirlo; el que AUDITA va AFTER, porque registra un hecho ya consumado.</a:t>
             </a:r>
           </a:p>
         </p:txBody>
@@ -1534,7 +1149,17 @@
           </a:p>
           <a:p>
             <a:r>
-              <a:t>Por eso el trigger de stock del taller no es un reemplazo del CHECK sino una demostracion de la capacidad extra: la funcion fn_trg_stock_no_negativo() puede escribir RAISE EXCEPTION 'ERROR: el stock de % no puede quedar negativo (resultado: %)', OLD.nombre, NEW.stock, es decir puede nombrar el insumo tomando el dato de OLD y el resultado de NEW en el mismo mensaje.</a:t>
+              <a:t>Por eso el trigger de stock de la clase no es un reemplazo del CHECK sino una demostracion de la capacidad extra: la funcion fn_trg_stock_no_negativo() puede escribir RAISE EXCEPTION 'ERROR: el stock de % no puede quedar negativo (resultado: %)', OLD.nombre, NEW.stock, es decir puede nombrar el insumo tomando el dato de OLD y el resultado de NEW en el mismo mensaje.</a:t>
+            </a:r>
+          </a:p>
+          <a:p>
+            <a:r>
+              <a:t>La asociacion va BEFORE</a:t>
+            </a:r>
+          </a:p>
+          <a:p>
+            <a:r>
+              <a:t>Fuera de la lamina (habla de la practica): La asociacion va BEFORE UPDATE OF stock ON insumo FOR EACH ROW, y el mensaje es parte del entregable, igual que en la Clase 3: es lo que la aplicacion va a mostrar y lo que la prueba va a verificar.</a:t>
             </a:r>
           </a:p>
         </p:txBody>
@@ -1604,12 +1229,22 @@
           <a:lstStyle/>
           <a:p>
             <a:r>
-              <a:t>Fuera de la lamina (habla de la practica, no del tema):</a:t>
-            </a:r>
-          </a:p>
-          <a:p>
-            <a:r>
-              <a:t>- La asociacion va BEFORE UPDATE OF stock ON insumo FOR EACH ROW, y el mensaje es parte del entregable, igual que en la Clase 3: es lo que la aplicacion va a mostrar y lo que la prueba va a verificar.</a:t>
+              <a:t>Conviene dictar las cuatro capas en orden de preferencia, porque el orden es la respuesta.</a:t>
+            </a:r>
+          </a:p>
+          <a:p>
+            <a:r>
+              <a:t>Las dos pasan la verificacion y las dos insertan.</a:t>
+            </a:r>
+          </a:p>
+          <a:p>
+            <a:r>
+              <a:t>La respuesta correcta es declarativa ——, es mas rapida, mas clara y a prueba de concurrencia, y el porque completo llega en la Clase 10.</a:t>
+            </a:r>
+          </a:p>
+          <a:p>
+            <a:r>
+              <a:t>Fuera de la lamina (habla de la practica): La pregunta 4 vale quince puntos, no pide codigo y es la que mejor mide si el estudiante entendio el dia: hay que ubicar cada validacion en su capa y justificar por que ahi.</a:t>
             </a:r>
           </a:p>
         </p:txBody>
@@ -1679,22 +1314,22 @@
           <a:lstStyle/>
           <a:p>
             <a:r>
-              <a:t>La pregunta 4 vale quince puntos, no pide codigo y es la que mejor mide si el estudiante entendio el dia: hay que ubicar cada validacion en su capa y justificar por que ahi.</a:t>
-            </a:r>
-          </a:p>
-          <a:p>
-            <a:r>
-              <a:t>Conviene dictar las cuatro capas en orden de preferencia, porque el orden es la respuesta.</a:t>
-            </a:r>
-          </a:p>
-          <a:p>
-            <a:r>
-              <a:t>Las dos pasan la verificacion y las dos insertan.</a:t>
-            </a:r>
-          </a:p>
-          <a:p>
-            <a:r>
-              <a:t>La respuesta correcta es declarativa ——, es mas rapida, mas clara y a prueba de concurrencia, y el porque completo llega en la Clase 10.</a:t>
+              <a:t>Hay tres riesgos que conviene exponer con ejemplos y no como advertencia generica.</a:t>
+            </a:r>
+          </a:p>
+          <a:p>
+            <a:r>
+              <a:t>PostgreSQL no la prohibe, la corta cuando se agota la pila, y eso ocurre en produccion y con datos reales, no durante la prueba.</a:t>
+            </a:r>
+          </a:p>
+          <a:p>
+            <a:r>
+              <a:t>TRUNCATE no dispara triggers de fila, asi que un TRUNCATE insumo pasa por encima de la validacion de stock sin que se escriba una sola linea de auditoria.</a:t>
+            </a:r>
+          </a:p>
+          <a:p>
+            <a:r>
+              <a:t>Fuera de la lamina (habla de la practica): Y no hay ninguna senal en el SQL, asi que la unica defensa es documentarlo, que es parte del entregable.</a:t>
             </a:r>
           </a:p>
         </p:txBody>
@@ -1764,17 +1399,22 @@
           <a:lstStyle/>
           <a:p>
             <a:r>
-              <a:t>Hay tres riesgos que conviene exponer con ejemplos y no como advertencia generica.</a:t>
-            </a:r>
-          </a:p>
-          <a:p>
-            <a:r>
-              <a:t>PostgreSQL no la prohibe, la corta cuando se agota la pila, y eso ocurre en produccion y con datos reales, no durante la prueba.</a:t>
-            </a:r>
-          </a:p>
-          <a:p>
-            <a:r>
-              <a:t>TRUNCATE no dispara triggers de fila, asi que un TRUNCATE insumo pasa por encima de la validacion de stock sin que se escriba una sola linea de auditoria.</a:t>
+              <a:t>RPO y RTO dejan de ser siglas cuando se les pone un numero acordado con el negocio.</a:t>
+            </a:r>
+          </a:p>
+          <a:p>
+            <a:r>
+              <a:t>Probar un restore de verdad tiene cuatro pasos y conviene dictarlos como procedimiento.</a:t>
+            </a:r>
+          </a:p>
+          <a:p>
+            <a:r>
+              <a:t>Cuatro, dejar bitacora con fecha, responsable, resultado y RTO medido; si no hay bitacora, la prueba no existe.</a:t>
+            </a:r>
+          </a:p>
+          <a:p>
+            <a:r>
+              <a:t>Fuera de la lamina (habla de la practica): RPO y RTO dejan de ser siglas cuando se les pone un numero acordado con el negocio, y la rubrica pide precisamente el numero con su justificacion.</a:t>
             </a:r>
           </a:p>
         </p:txBody>
@@ -5385,7 +5025,7 @@
                 </a:solidFill>
                 <a:latin typeface="Calibri"/>
               </a:rPr>
-              <a:t>–   No existe la forma de Oracle con el cuerpo dentro del CREATE TRIGGER.</a:t>
+              <a:t>–   Dos notas de sintaxis que ahorran tiempo: dentro de la funcion las filas se leen como NEW y OLD SIN los dos puntos —NEW.estado, no:NEW.estado, que aqui es un error de sintaxis—, y en la asociacion se escribe EXECUTE FUNCTION</a:t>
             </a:r>
           </a:p>
         </p:txBody>
@@ -5605,7 +5245,7 @@
                 </a:solidFill>
                 <a:latin typeface="Calibri"/>
               </a:rPr>
-              <a:t>–   Dos notas de sintaxis que ahorran tiempo: dentro de la funcion las filas se leen como NEW y OLD SIN los dos puntos —NEW.estado, no:NEW.estado, que aqui es un error de sintaxis—, y en la asociacion se escribe EXECUTE FUNCTION</a:t>
+              <a:t>–   El detalle que cambia todo el analisis, y que rara vez se dice, es que el trigger corre dentro de la misma transaccion de la sentencia que lo activo.</a:t>
             </a:r>
           </a:p>
           <a:p>
@@ -5621,7 +5261,23 @@
                 </a:solidFill>
                 <a:latin typeface="Calibri"/>
               </a:rPr>
-              <a:t>–   El detalle que cambia todo el analisis, y que rara vez se dice, es que el trigger corre dentro de la misma transaccion de la sentencia que lo activo.</a:t>
+              <a:t>–   El orden de creacion es fijo: primero la funcion RETURNS TRIGGER y despues el CREATE TRIGGER que la asocia a la tabla.</a:t>
+            </a:r>
+          </a:p>
+          <a:p>
+            <a:pPr>
+              <a:spcAft>
+                <a:spcPts val="800"/>
+              </a:spcAft>
+            </a:pPr>
+            <a:r>
+              <a:rPr sz="2000" b="0" i="0">
+                <a:solidFill>
+                  <a:srgbClr val="333333"/>
+                </a:solidFill>
+                <a:latin typeface="Calibri"/>
+              </a:rPr>
+              <a:t>–   Mientras el trigger exista, la funcion no se puede borrar con un DROP FUNCTION simple: hace falta CASCADE, que elimina tambien el trigger.</a:t>
             </a:r>
           </a:p>
         </p:txBody>
@@ -7432,22 +7088,6 @@
               <a:t>–   Hay que ser preciso al comparar los dos mecanismos, porque decir que el trigger es mejor seria falso.</a:t>
             </a:r>
           </a:p>
-          <a:p>
-            <a:pPr>
-              <a:spcAft>
-                <a:spcPts val="800"/>
-              </a:spcAft>
-            </a:pPr>
-            <a:r>
-              <a:rPr sz="2000" b="0" i="0">
-                <a:solidFill>
-                  <a:srgbClr val="333333"/>
-                </a:solidFill>
-                <a:latin typeface="Calibri"/>
-              </a:rPr>
-              <a:t>–   Un CHECK es mas barato, no se puede olvidar, lo aplica el motor sin una linea de codigo y se documenta solo al leer el DDL: si la regla cabe en un CHECK, no se hace trigger.</a:t>
-            </a:r>
-          </a:p>
         </p:txBody>
       </p:sp>
       <p:sp>
@@ -7665,23 +7305,23 @@
                 </a:solidFill>
                 <a:latin typeface="Calibri"/>
               </a:rPr>
+              <a:t>–   Un CHECK es mas barato, no se puede olvidar, lo aplica el motor sin una linea de codigo y se documenta solo al leer el DDL: si la regla cabe en un CHECK, no se hace trigger.</a:t>
+            </a:r>
+          </a:p>
+          <a:p>
+            <a:pPr>
+              <a:spcAft>
+                <a:spcPts val="800"/>
+              </a:spcAft>
+            </a:pPr>
+            <a:r>
+              <a:rPr sz="2000" b="0" i="0">
+                <a:solidFill>
+                  <a:srgbClr val="333333"/>
+                </a:solidFill>
+                <a:latin typeface="Calibri"/>
+              </a:rPr>
               <a:t>–   Un CHECK solo puede fallar; no puede explicar.</a:t>
-            </a:r>
-          </a:p>
-          <a:p>
-            <a:pPr>
-              <a:spcAft>
-                <a:spcPts val="800"/>
-              </a:spcAft>
-            </a:pPr>
-            <a:r>
-              <a:rPr sz="2000" b="0" i="0">
-                <a:solidFill>
-                  <a:srgbClr val="333333"/>
-                </a:solidFill>
-                <a:latin typeface="Calibri"/>
-              </a:rPr>
-              <a:t>–   La asociacion va BEFORE UPDATE OF stock ON insumo FOR EACH ROW.</a:t>
             </a:r>
           </a:p>
           <a:p>
@@ -7894,21 +7534,141 @@
                 </a:solidFill>
                 <a:latin typeface="Calibri"/>
               </a:rPr>
-              <a:t>Las cuatro capas, y en cual vive cada regla (1/3)</a:t>
-            </a:r>
-          </a:p>
-        </p:txBody>
-      </p:sp>
-      <p:sp>
-        <p:nvSpPr>
-          <p:cNvPr id="5" name="TextBox 4"/>
+              <a:t>El trigger que impide: el hueco que el CHECK... — sintaxis</a:t>
+            </a:r>
+          </a:p>
+        </p:txBody>
+      </p:sp>
+      <p:sp>
+        <p:nvSpPr>
+          <p:cNvPr id="5" name="Rounded Rectangle 4"/>
+          <p:cNvSpPr/>
+          <p:nvPr/>
+        </p:nvSpPr>
+        <p:spPr>
+          <a:xfrm>
+            <a:off x="457200" y="1261872"/>
+            <a:ext cx="11277295" cy="5093208"/>
+          </a:xfrm>
+          <a:prstGeom prst="roundRect">
+            <a:avLst>
+              <a:gd name="adj" fmla="val 12000"/>
+            </a:avLst>
+          </a:prstGeom>
+          <a:solidFill>
+            <a:srgbClr val="1E2A38"/>
+          </a:solidFill>
+          <a:ln>
+            <a:noFill/>
+          </a:ln>
+        </p:spPr>
+        <p:style>
+          <a:lnRef idx="1">
+            <a:schemeClr val="accent1"/>
+          </a:lnRef>
+          <a:fillRef idx="3">
+            <a:schemeClr val="accent1"/>
+          </a:fillRef>
+          <a:effectRef idx="2">
+            <a:schemeClr val="accent1"/>
+          </a:effectRef>
+          <a:fontRef idx="minor">
+            <a:schemeClr val="lt1"/>
+          </a:fontRef>
+        </p:style>
+        <p:txBody>
+          <a:bodyPr rtlCol="0" anchor="ctr"/>
+          <a:lstStyle/>
+          <a:p>
+            <a:pPr algn="ctr"/>
+          </a:p>
+        </p:txBody>
+      </p:sp>
+      <p:sp>
+        <p:nvSpPr>
+          <p:cNvPr id="6" name="Rectangle 5"/>
+          <p:cNvSpPr/>
+          <p:nvPr/>
+        </p:nvSpPr>
+        <p:spPr>
+          <a:xfrm>
+            <a:off x="457200" y="1261872"/>
+            <a:ext cx="11277295" cy="320040"/>
+          </a:xfrm>
+          <a:prstGeom prst="rect">
+            <a:avLst/>
+          </a:prstGeom>
+          <a:solidFill>
+            <a:srgbClr val="095292"/>
+          </a:solidFill>
+          <a:ln>
+            <a:noFill/>
+          </a:ln>
+        </p:spPr>
+        <p:style>
+          <a:lnRef idx="1">
+            <a:schemeClr val="accent1"/>
+          </a:lnRef>
+          <a:fillRef idx="3">
+            <a:schemeClr val="accent1"/>
+          </a:fillRef>
+          <a:effectRef idx="2">
+            <a:schemeClr val="accent1"/>
+          </a:effectRef>
+          <a:fontRef idx="minor">
+            <a:schemeClr val="lt1"/>
+          </a:fontRef>
+        </p:style>
+        <p:txBody>
+          <a:bodyPr rtlCol="0" anchor="ctr"/>
+          <a:lstStyle/>
+          <a:p>
+            <a:pPr algn="ctr"/>
+          </a:p>
+        </p:txBody>
+      </p:sp>
+      <p:sp>
+        <p:nvSpPr>
+          <p:cNvPr id="7" name="TextBox 6"/>
           <p:cNvSpPr txBox="1"/>
           <p:nvPr/>
         </p:nvSpPr>
         <p:spPr>
           <a:xfrm>
-            <a:off x="457200" y="1170432"/>
-            <a:ext cx="11277295" cy="5230368"/>
+            <a:off x="685800" y="1307592"/>
+            <a:ext cx="10820095" cy="256032"/>
+          </a:xfrm>
+          <a:prstGeom prst="rect">
+            <a:avLst/>
+          </a:prstGeom>
+          <a:noFill/>
+        </p:spPr>
+        <p:txBody>
+          <a:bodyPr wrap="square" anchor="ctr"/>
+          <a:lstStyle/>
+          <a:p>
+            <a:r>
+              <a:rPr sz="1000" b="1" i="0">
+                <a:solidFill>
+                  <a:srgbClr val="269CCB"/>
+                </a:solidFill>
+                <a:latin typeface="Calibri"/>
+              </a:rPr>
+              <a:t>● ● ●</a:t>
+            </a:r>
+          </a:p>
+        </p:txBody>
+      </p:sp>
+      <p:sp>
+        <p:nvSpPr>
+          <p:cNvPr id="8" name="TextBox 7"/>
+          <p:cNvSpPr txBox="1"/>
+          <p:nvPr/>
+        </p:nvSpPr>
+        <p:spPr>
+          <a:xfrm>
+            <a:off x="777240" y="1719072"/>
+            <a:ext cx="10637215" cy="4453128"/>
           </a:xfrm>
           <a:prstGeom prst="rect">
             <a:avLst/>
@@ -7923,88 +7683,24 @@
           <a:p>
             <a:pPr>
               <a:spcAft>
-                <a:spcPts val="800"/>
-              </a:spcAft>
-            </a:pPr>
-            <a:r>
-              <a:rPr sz="2000" b="0" i="0">
-                <a:solidFill>
-                  <a:srgbClr val="333333"/>
-                </a:solidFill>
-                <a:latin typeface="Calibri"/>
-              </a:rPr>
-              <a:t>–   Primero lo declarativo de una fila: NOT NULL, CHECK y DEFAULT resuelven todo lo que se puede decidir mirando los valores finales de una sola fila —stock no negativo</a:t>
-            </a:r>
-          </a:p>
-          <a:p>
-            <a:pPr>
-              <a:spcAft>
-                <a:spcPts val="800"/>
-              </a:spcAft>
-            </a:pPr>
-            <a:r>
-              <a:rPr sz="2000" b="0" i="0">
-                <a:solidFill>
-                  <a:srgbClr val="333333"/>
-                </a:solidFill>
-                <a:latin typeface="Calibri"/>
-              </a:rPr>
-              <a:t>–   Precio positivo, estado dentro de una lista—, y son lo mas barato y lo mas dificil de saltarse.</a:t>
-            </a:r>
-          </a:p>
-          <a:p>
-            <a:pPr>
-              <a:spcAft>
-                <a:spcPts val="800"/>
-              </a:spcAft>
-            </a:pPr>
-            <a:r>
-              <a:rPr sz="2000" b="0" i="0">
-                <a:solidFill>
-                  <a:srgbClr val="333333"/>
-                </a:solidFill>
-                <a:latin typeface="Calibri"/>
-              </a:rPr>
-              <a:t>–   Segundo lo declarativo entre filas y entre tablas: UNIQUE y las claves foraneas.</a:t>
-            </a:r>
-          </a:p>
-          <a:p>
-            <a:pPr>
-              <a:spcAft>
-                <a:spcPts val="800"/>
-              </a:spcAft>
-            </a:pPr>
-            <a:r>
-              <a:rPr sz="2000" b="0" i="0">
-                <a:solidFill>
-                  <a:srgbClr val="333333"/>
-                </a:solidFill>
-                <a:latin typeface="Calibri"/>
-              </a:rPr>
-              <a:t>–   Aqui hay un ejemplo que hay que dar porque es el que el estudiante resuelve mal: la regla de que un veterinario no puede tener dos citas en la misma franja es UNIQUE (id_veterinario, fecha_hora) y no un trigger.</a:t>
-            </a:r>
-          </a:p>
-          <a:p>
-            <a:pPr>
-              <a:spcAft>
-                <a:spcPts val="800"/>
-              </a:spcAft>
-            </a:pPr>
-            <a:r>
-              <a:rPr sz="2000" b="0" i="0">
-                <a:solidFill>
-                  <a:srgbClr val="333333"/>
-                </a:solidFill>
-                <a:latin typeface="Calibri"/>
-              </a:rPr>
-              <a:t>–   Tercero el trigger, cuando la regla necesita comparar OLD con NEW, mirar otra tabla o escribir en una segunda tabla; la auditoria entra aqui por definicion, porque escribir en audit_cita no cabe en ninguna restriccion.</a:t>
-            </a:r>
-          </a:p>
-        </p:txBody>
-      </p:sp>
-      <p:sp>
-        <p:nvSpPr>
-          <p:cNvPr id="6" name="TextBox 5"/>
+                <a:spcPts val="400"/>
+              </a:spcAft>
+            </a:pPr>
+            <a:r>
+              <a:rPr sz="1400" b="0" i="0">
+                <a:solidFill>
+                  <a:srgbClr val="FFFFFF"/>
+                </a:solidFill>
+                <a:latin typeface="Calibri"/>
+              </a:rPr>
+              <a:t>UPDATE OF stock ON insumo FOR EACH ROW</a:t>
+            </a:r>
+          </a:p>
+        </p:txBody>
+      </p:sp>
+      <p:sp>
+        <p:nvSpPr>
+          <p:cNvPr id="9" name="TextBox 8"/>
           <p:cNvSpPr txBox="1"/>
           <p:nvPr/>
         </p:nvSpPr>
@@ -8329,6 +8025,40 @@
               <a:t>–   Cada lámina se sostiene sola: sirve para repasar aunque hayas faltado.</a:t>
             </a:r>
           </a:p>
+          <a:p>
+            <a:pPr>
+              <a:spcAft>
+                <a:spcPts val="800"/>
+              </a:spcAft>
+            </a:pPr>
+            <a:r>
+              <a:rPr sz="2000" b="0" i="0">
+                <a:solidFill>
+                  <a:srgbClr val="333333"/>
+                </a:solidFill>
+                <a:latin typeface="Calibri"/>
+              </a:rPr>
+              <a:t>–   </a:t>
+            </a:r>
+            <a:r>
+              <a:rPr sz="2000" b="1" i="0">
+                <a:solidFill>
+                  <a:srgbClr val="333333"/>
+                </a:solidFill>
+                <a:latin typeface="Calibri"/>
+              </a:rPr>
+              <a:t>Conceptos de hoy:</a:t>
+            </a:r>
+            <a:r>
+              <a:rPr sz="2000" b="0" i="0">
+                <a:solidFill>
+                  <a:srgbClr val="333333"/>
+                </a:solidFill>
+                <a:latin typeface="Calibri"/>
+              </a:rPr>
+              <a:t> Funcion y procedimiento · Los tres detalles de fn_precio_consulta · El trigger · BEFORE o AFTER, y que significa el valor que se retorna.</a:t>
+            </a:r>
+          </a:p>
         </p:txBody>
       </p:sp>
       <p:sp>
@@ -8507,7 +8237,7 @@
                 </a:solidFill>
                 <a:latin typeface="Calibri"/>
               </a:rPr>
-              <a:t>Las cuatro capas, y en cual vive cada regla (2/3)</a:t>
+              <a:t>Las cuatro capas, y en cual vive cada regla (1/3)</a:t>
             </a:r>
           </a:p>
         </p:txBody>
@@ -8546,7 +8276,7 @@
                 </a:solidFill>
                 <a:latin typeface="Calibri"/>
               </a:rPr>
-              <a:t>–   Cuarto la aplicacion, y solo para lo que la base no puede saber: el formato del correo, el permiso de la pantalla, el idioma del mensaje.</a:t>
+              <a:t>–   Primero lo declarativo de una fila: NOT NULL, CHECK y DEFAULT resuelven todo lo que se puede decidir mirando los valores finales de una sola fila —stock no negativo</a:t>
             </a:r>
           </a:p>
           <a:p>
@@ -8562,7 +8292,7 @@
                 </a:solidFill>
                 <a:latin typeface="Calibri"/>
               </a:rPr>
-              <a:t>–   El criterio para decidir si algo pertenece a la aplicacion se dice en una frase y conviene escribirla en el tablero: una validacion que solo vive en la app se salta conectandose por otra via, como hizo la Clase 2 con SET ROLE.</a:t>
+              <a:t>–   Precio positivo, estado dentro de una lista—, y son lo mas barato y lo mas dificil de saltarse.</a:t>
             </a:r>
           </a:p>
           <a:p>
@@ -8578,7 +8308,7 @@
                 </a:solidFill>
                 <a:latin typeface="Calibri"/>
               </a:rPr>
-              <a:t>–   Merece un parrafo la trampa que el estudiante intentara, porque la respuesta correcta es contraintuitiva y depende del motor.</a:t>
+              <a:t>–   Segundo lo declarativo entre filas y entre tablas: UNIQUE y las claves foraneas.</a:t>
             </a:r>
           </a:p>
           <a:p>
@@ -8594,7 +8324,23 @@
                 </a:solidFill>
                 <a:latin typeface="Calibri"/>
               </a:rPr>
-              <a:t>–   La primera idea de todo el mundo para impedir la doble reserva es un trigger que haga SELECT COUNT(*) FROM cita WHERE id_veterinario = NEW.id_veterinario AND fecha_hora = NEW.fecha_hora.</a:t>
+              <a:t>–   Aqui hay un ejemplo que hay que dar porque es el que el estudiante resuelve mal: la regla de que un veterinario no puede tener dos citas en la misma franja es UNIQUE (id_veterinario, fecha_hora) y no un trigger.</a:t>
+            </a:r>
+          </a:p>
+          <a:p>
+            <a:pPr>
+              <a:spcAft>
+                <a:spcPts val="800"/>
+              </a:spcAft>
+            </a:pPr>
+            <a:r>
+              <a:rPr sz="2000" b="0" i="0">
+                <a:solidFill>
+                  <a:srgbClr val="333333"/>
+                </a:solidFill>
+                <a:latin typeface="Calibri"/>
+              </a:rPr>
+              <a:t>–   Tercero el trigger, cuando la regla necesita comparar OLD con NEW, mirar otra tabla o escribir en una segunda tabla; la auditoria entra aqui por definicion, porque escribir en audit_cita no cabe en ninguna restriccion.</a:t>
             </a:r>
           </a:p>
         </p:txBody>
@@ -8775,7 +8521,7 @@
                 </a:solidFill>
                 <a:latin typeface="Calibri"/>
               </a:rPr>
-              <a:t>Las cuatro capas, y en cual vive cada regla (3/3)</a:t>
+              <a:t>Las cuatro capas, y en cual vive cada regla (2/3)</a:t>
             </a:r>
           </a:p>
         </p:txBody>
@@ -8814,7 +8560,7 @@
                 </a:solidFill>
                 <a:latin typeface="Calibri"/>
               </a:rPr>
-              <a:t>–   En Oracle ese trigger simplemente no funciona, porque un trigger de fila no puede consultar la tabla en mutacion.</a:t>
+              <a:t>–   Cuarto la aplicacion, y solo para lo que la base no puede saber: el formato del correo, el permiso de la pantalla, el idioma del mensaje.</a:t>
             </a:r>
           </a:p>
           <a:p>
@@ -8830,7 +8576,7 @@
                 </a:solidFill>
                 <a:latin typeface="Calibri"/>
               </a:rPr>
-              <a:t>–   En PostgreSQL SI corre, y ahi esta el peligro: parece funcionar en la demo y no protege de nada cuando hay concurrencia, porque cada transaccion ve su propia foto de la tabla y ninguna ve la cita que la otra acaba de insertar sin confirmar.</a:t>
+              <a:t>–   El criterio para decidir si algo pertenece a la aplicacion se dice en una frase y conviene escribirla en el tablero: una validacion que solo vive en la app se salta conectandose por otra via, como hizo la Clase 2 con SET ROLE.</a:t>
             </a:r>
           </a:p>
           <a:p>
@@ -8846,7 +8592,23 @@
                 </a:solidFill>
                 <a:latin typeface="Calibri"/>
               </a:rPr>
-              <a:t>–   Decir esto hoy es lo que evita que en la Clase 10 el estudiante defienda un trigger que ya escribio.</a:t>
+              <a:t>–   Merece un parrafo la trampa que el estudiante intentara, porque la respuesta correcta es contraintuitiva y depende del motor.</a:t>
+            </a:r>
+          </a:p>
+          <a:p>
+            <a:pPr>
+              <a:spcAft>
+                <a:spcPts val="800"/>
+              </a:spcAft>
+            </a:pPr>
+            <a:r>
+              <a:rPr sz="2000" b="0" i="0">
+                <a:solidFill>
+                  <a:srgbClr val="333333"/>
+                </a:solidFill>
+                <a:latin typeface="Calibri"/>
+              </a:rPr>
+              <a:t>–   La primera idea de todo el mundo para impedir la doble reserva es un trigger que haga SELECT COUNT(*) FROM cita WHERE id_veterinario = NEW.id_veterinario AND fecha_hora = NEW.fecha_hora.</a:t>
             </a:r>
           </a:p>
         </p:txBody>
@@ -9027,141 +8789,21 @@
                 </a:solidFill>
                 <a:latin typeface="Calibri"/>
               </a:rPr>
-              <a:t>Las cuatro capas, y en cual vive cada regla — sintaxis</a:t>
-            </a:r>
-          </a:p>
-        </p:txBody>
-      </p:sp>
-      <p:sp>
-        <p:nvSpPr>
-          <p:cNvPr id="5" name="Rounded Rectangle 4"/>
-          <p:cNvSpPr/>
-          <p:nvPr/>
-        </p:nvSpPr>
-        <p:spPr>
-          <a:xfrm>
-            <a:off x="457200" y="1261872"/>
-            <a:ext cx="11277295" cy="5093208"/>
-          </a:xfrm>
-          <a:prstGeom prst="roundRect">
-            <a:avLst>
-              <a:gd name="adj" fmla="val 12000"/>
-            </a:avLst>
-          </a:prstGeom>
-          <a:solidFill>
-            <a:srgbClr val="1E2A38"/>
-          </a:solidFill>
-          <a:ln>
-            <a:noFill/>
-          </a:ln>
-        </p:spPr>
-        <p:style>
-          <a:lnRef idx="1">
-            <a:schemeClr val="accent1"/>
-          </a:lnRef>
-          <a:fillRef idx="3">
-            <a:schemeClr val="accent1"/>
-          </a:fillRef>
-          <a:effectRef idx="2">
-            <a:schemeClr val="accent1"/>
-          </a:effectRef>
-          <a:fontRef idx="minor">
-            <a:schemeClr val="lt1"/>
-          </a:fontRef>
-        </p:style>
-        <p:txBody>
-          <a:bodyPr rtlCol="0" anchor="ctr"/>
-          <a:lstStyle/>
-          <a:p>
-            <a:pPr algn="ctr"/>
-          </a:p>
-        </p:txBody>
-      </p:sp>
-      <p:sp>
-        <p:nvSpPr>
-          <p:cNvPr id="6" name="Rectangle 5"/>
-          <p:cNvSpPr/>
-          <p:nvPr/>
-        </p:nvSpPr>
-        <p:spPr>
-          <a:xfrm>
-            <a:off x="457200" y="1261872"/>
-            <a:ext cx="11277295" cy="320040"/>
-          </a:xfrm>
-          <a:prstGeom prst="rect">
-            <a:avLst/>
-          </a:prstGeom>
-          <a:solidFill>
-            <a:srgbClr val="095292"/>
-          </a:solidFill>
-          <a:ln>
-            <a:noFill/>
-          </a:ln>
-        </p:spPr>
-        <p:style>
-          <a:lnRef idx="1">
-            <a:schemeClr val="accent1"/>
-          </a:lnRef>
-          <a:fillRef idx="3">
-            <a:schemeClr val="accent1"/>
-          </a:fillRef>
-          <a:effectRef idx="2">
-            <a:schemeClr val="accent1"/>
-          </a:effectRef>
-          <a:fontRef idx="minor">
-            <a:schemeClr val="lt1"/>
-          </a:fontRef>
-        </p:style>
-        <p:txBody>
-          <a:bodyPr rtlCol="0" anchor="ctr"/>
-          <a:lstStyle/>
-          <a:p>
-            <a:pPr algn="ctr"/>
-          </a:p>
-        </p:txBody>
-      </p:sp>
-      <p:sp>
-        <p:nvSpPr>
-          <p:cNvPr id="7" name="TextBox 6"/>
+              <a:t>Las cuatro capas, y en cual vive cada regla (3/3)</a:t>
+            </a:r>
+          </a:p>
+        </p:txBody>
+      </p:sp>
+      <p:sp>
+        <p:nvSpPr>
+          <p:cNvPr id="5" name="TextBox 4"/>
           <p:cNvSpPr txBox="1"/>
           <p:nvPr/>
         </p:nvSpPr>
         <p:spPr>
           <a:xfrm>
-            <a:off x="685800" y="1307592"/>
-            <a:ext cx="10820095" cy="256032"/>
-          </a:xfrm>
-          <a:prstGeom prst="rect">
-            <a:avLst/>
-          </a:prstGeom>
-          <a:noFill/>
-        </p:spPr>
-        <p:txBody>
-          <a:bodyPr wrap="square" anchor="ctr"/>
-          <a:lstStyle/>
-          <a:p>
-            <a:r>
-              <a:rPr sz="1000" b="1" i="0">
-                <a:solidFill>
-                  <a:srgbClr val="269CCB"/>
-                </a:solidFill>
-                <a:latin typeface="Calibri"/>
-              </a:rPr>
-              <a:t>● ● ●</a:t>
-            </a:r>
-          </a:p>
-        </p:txBody>
-      </p:sp>
-      <p:sp>
-        <p:nvSpPr>
-          <p:cNvPr id="8" name="TextBox 7"/>
-          <p:cNvSpPr txBox="1"/>
-          <p:nvPr/>
-        </p:nvSpPr>
-        <p:spPr>
-          <a:xfrm>
-            <a:off x="777240" y="1719072"/>
-            <a:ext cx="10637215" cy="4453128"/>
+            <a:off x="457200" y="1170432"/>
+            <a:ext cx="11277295" cy="5230368"/>
           </a:xfrm>
           <a:prstGeom prst="rect">
             <a:avLst/>
@@ -9176,24 +8818,56 @@
           <a:p>
             <a:pPr>
               <a:spcAft>
-                <a:spcPts val="400"/>
-              </a:spcAft>
-            </a:pPr>
-            <a:r>
-              <a:rPr sz="1400" b="0" i="0">
-                <a:solidFill>
-                  <a:srgbClr val="FFFFFF"/>
-                </a:solidFill>
-                <a:latin typeface="Calibri"/>
-              </a:rPr>
-              <a:t>ALTER TABLE cita ADD CONSTRAINT uq_vet_franja UNIQUE (id_veterinario, fecha_hora)</a:t>
-            </a:r>
-          </a:p>
-        </p:txBody>
-      </p:sp>
-      <p:sp>
-        <p:nvSpPr>
-          <p:cNvPr id="9" name="TextBox 8"/>
+                <a:spcPts val="800"/>
+              </a:spcAft>
+            </a:pPr>
+            <a:r>
+              <a:rPr sz="2000" b="0" i="0">
+                <a:solidFill>
+                  <a:srgbClr val="333333"/>
+                </a:solidFill>
+                <a:latin typeface="Calibri"/>
+              </a:rPr>
+              <a:t>–   En Oracle ese trigger simplemente no funciona, porque un trigger de fila no puede consultar la tabla en mutacion.</a:t>
+            </a:r>
+          </a:p>
+          <a:p>
+            <a:pPr>
+              <a:spcAft>
+                <a:spcPts val="800"/>
+              </a:spcAft>
+            </a:pPr>
+            <a:r>
+              <a:rPr sz="2000" b="0" i="0">
+                <a:solidFill>
+                  <a:srgbClr val="333333"/>
+                </a:solidFill>
+                <a:latin typeface="Calibri"/>
+              </a:rPr>
+              <a:t>–   En PostgreSQL SI corre, y ahi esta el peligro: parece funcionar en la demo y no protege de nada cuando hay concurrencia, porque cada transaccion ve su propia foto de la tabla y ninguna ve la cita que la otra acaba de insertar sin confirmar.</a:t>
+            </a:r>
+          </a:p>
+          <a:p>
+            <a:pPr>
+              <a:spcAft>
+                <a:spcPts val="800"/>
+              </a:spcAft>
+            </a:pPr>
+            <a:r>
+              <a:rPr sz="2000" b="0" i="0">
+                <a:solidFill>
+                  <a:srgbClr val="333333"/>
+                </a:solidFill>
+                <a:latin typeface="Calibri"/>
+              </a:rPr>
+              <a:t>–   Decir esto hoy es lo que evita que en la Clase 10 el estudiante defienda un trigger que ya escribio.</a:t>
+            </a:r>
+          </a:p>
+        </p:txBody>
+      </p:sp>
+      <p:sp>
+        <p:nvSpPr>
+          <p:cNvPr id="6" name="TextBox 5"/>
           <p:cNvSpPr txBox="1"/>
           <p:nvPr/>
         </p:nvSpPr>
@@ -9367,21 +9041,141 @@
                 </a:solidFill>
                 <a:latin typeface="Calibri"/>
               </a:rPr>
-              <a:t>Cuando NO se usa un trigger, y lo que un trigger no ve (1/3)</a:t>
-            </a:r>
-          </a:p>
-        </p:txBody>
-      </p:sp>
-      <p:sp>
-        <p:nvSpPr>
-          <p:cNvPr id="5" name="TextBox 4"/>
+              <a:t>Las cuatro capas, y en cual vive cada regla — sintaxis</a:t>
+            </a:r>
+          </a:p>
+        </p:txBody>
+      </p:sp>
+      <p:sp>
+        <p:nvSpPr>
+          <p:cNvPr id="5" name="Rounded Rectangle 4"/>
+          <p:cNvSpPr/>
+          <p:nvPr/>
+        </p:nvSpPr>
+        <p:spPr>
+          <a:xfrm>
+            <a:off x="457200" y="1261872"/>
+            <a:ext cx="11277295" cy="5093208"/>
+          </a:xfrm>
+          <a:prstGeom prst="roundRect">
+            <a:avLst>
+              <a:gd name="adj" fmla="val 12000"/>
+            </a:avLst>
+          </a:prstGeom>
+          <a:solidFill>
+            <a:srgbClr val="1E2A38"/>
+          </a:solidFill>
+          <a:ln>
+            <a:noFill/>
+          </a:ln>
+        </p:spPr>
+        <p:style>
+          <a:lnRef idx="1">
+            <a:schemeClr val="accent1"/>
+          </a:lnRef>
+          <a:fillRef idx="3">
+            <a:schemeClr val="accent1"/>
+          </a:fillRef>
+          <a:effectRef idx="2">
+            <a:schemeClr val="accent1"/>
+          </a:effectRef>
+          <a:fontRef idx="minor">
+            <a:schemeClr val="lt1"/>
+          </a:fontRef>
+        </p:style>
+        <p:txBody>
+          <a:bodyPr rtlCol="0" anchor="ctr"/>
+          <a:lstStyle/>
+          <a:p>
+            <a:pPr algn="ctr"/>
+          </a:p>
+        </p:txBody>
+      </p:sp>
+      <p:sp>
+        <p:nvSpPr>
+          <p:cNvPr id="6" name="Rectangle 5"/>
+          <p:cNvSpPr/>
+          <p:nvPr/>
+        </p:nvSpPr>
+        <p:spPr>
+          <a:xfrm>
+            <a:off x="457200" y="1261872"/>
+            <a:ext cx="11277295" cy="320040"/>
+          </a:xfrm>
+          <a:prstGeom prst="rect">
+            <a:avLst/>
+          </a:prstGeom>
+          <a:solidFill>
+            <a:srgbClr val="095292"/>
+          </a:solidFill>
+          <a:ln>
+            <a:noFill/>
+          </a:ln>
+        </p:spPr>
+        <p:style>
+          <a:lnRef idx="1">
+            <a:schemeClr val="accent1"/>
+          </a:lnRef>
+          <a:fillRef idx="3">
+            <a:schemeClr val="accent1"/>
+          </a:fillRef>
+          <a:effectRef idx="2">
+            <a:schemeClr val="accent1"/>
+          </a:effectRef>
+          <a:fontRef idx="minor">
+            <a:schemeClr val="lt1"/>
+          </a:fontRef>
+        </p:style>
+        <p:txBody>
+          <a:bodyPr rtlCol="0" anchor="ctr"/>
+          <a:lstStyle/>
+          <a:p>
+            <a:pPr algn="ctr"/>
+          </a:p>
+        </p:txBody>
+      </p:sp>
+      <p:sp>
+        <p:nvSpPr>
+          <p:cNvPr id="7" name="TextBox 6"/>
           <p:cNvSpPr txBox="1"/>
           <p:nvPr/>
         </p:nvSpPr>
         <p:spPr>
           <a:xfrm>
-            <a:off x="457200" y="1170432"/>
-            <a:ext cx="11277295" cy="5230368"/>
+            <a:off x="685800" y="1307592"/>
+            <a:ext cx="10820095" cy="256032"/>
+          </a:xfrm>
+          <a:prstGeom prst="rect">
+            <a:avLst/>
+          </a:prstGeom>
+          <a:noFill/>
+        </p:spPr>
+        <p:txBody>
+          <a:bodyPr wrap="square" anchor="ctr"/>
+          <a:lstStyle/>
+          <a:p>
+            <a:r>
+              <a:rPr sz="1000" b="1" i="0">
+                <a:solidFill>
+                  <a:srgbClr val="269CCB"/>
+                </a:solidFill>
+                <a:latin typeface="Calibri"/>
+              </a:rPr>
+              <a:t>● ● ●</a:t>
+            </a:r>
+          </a:p>
+        </p:txBody>
+      </p:sp>
+      <p:sp>
+        <p:nvSpPr>
+          <p:cNvPr id="8" name="TextBox 7"/>
+          <p:cNvSpPr txBox="1"/>
+          <p:nvPr/>
+        </p:nvSpPr>
+        <p:spPr>
+          <a:xfrm>
+            <a:off x="777240" y="1719072"/>
+            <a:ext cx="10637215" cy="4453128"/>
           </a:xfrm>
           <a:prstGeom prst="rect">
             <a:avLst/>
@@ -9396,88 +9190,24 @@
           <a:p>
             <a:pPr>
               <a:spcAft>
-                <a:spcPts val="800"/>
-              </a:spcAft>
-            </a:pPr>
-            <a:r>
-              <a:rPr sz="2000" b="0" i="0">
-                <a:solidFill>
-                  <a:srgbClr val="333333"/>
-                </a:solidFill>
-                <a:latin typeface="Calibri"/>
-              </a:rPr>
-              <a:t>–   De lo anterior se deduce cuando no usar un trigger, y esta es probablemente la parte mas util de la clase.</a:t>
-            </a:r>
-          </a:p>
-          <a:p>
-            <a:pPr>
-              <a:spcAft>
-                <a:spcPts val="800"/>
-              </a:spcAft>
-            </a:pPr>
-            <a:r>
-              <a:rPr sz="2000" b="0" i="0">
-                <a:solidFill>
-                  <a:srgbClr val="333333"/>
-                </a:solidFill>
-                <a:latin typeface="Calibri"/>
-              </a:rPr>
-              <a:t>–   No se usa cuando una restriccion declarativa resuelve el problema.</a:t>
-            </a:r>
-          </a:p>
-          <a:p>
-            <a:pPr>
-              <a:spcAft>
-                <a:spcPts val="800"/>
-              </a:spcAft>
-            </a:pPr>
-            <a:r>
-              <a:rPr sz="2000" b="0" i="0">
-                <a:solidFill>
-                  <a:srgbClr val="333333"/>
-                </a:solidFill>
-                <a:latin typeface="Calibri"/>
-              </a:rPr>
-              <a:t>–   No se usa cuando la regla pertenece al flujo de la aplicacion y debe admitir excepciones, como un descuento autorizado por el administrador: un trigger no distingue casos autorizados y termina obligando a trucos para desactivarlo.</a:t>
-            </a:r>
-          </a:p>
-          <a:p>
-            <a:pPr>
-              <a:spcAft>
-                <a:spcPts val="800"/>
-              </a:spcAft>
-            </a:pPr>
-            <a:r>
-              <a:rPr sz="2000" b="0" i="0">
-                <a:solidFill>
-                  <a:srgbClr val="333333"/>
-                </a:solidFill>
-                <a:latin typeface="Calibri"/>
-              </a:rPr>
-              <a:t>–   No se usa cuando el efecto es pesado o depende de algo externo, como enviar un correo o llamar un servicio</a:t>
-            </a:r>
-          </a:p>
-          <a:p>
-            <a:pPr>
-              <a:spcAft>
-                <a:spcPts val="800"/>
-              </a:spcAft>
-            </a:pPr>
-            <a:r>
-              <a:rPr sz="2000" b="0" i="0">
-                <a:solidFill>
-                  <a:srgbClr val="333333"/>
-                </a:solidFill>
-                <a:latin typeface="Calibri"/>
-              </a:rPr>
-              <a:t>–   Porque eso corre dentro de la transaccion, alarga los bloqueos y convierte una demora ajena en demora de la base de datos, tema que se retoma en las Clases 8 y 10.</a:t>
-            </a:r>
-          </a:p>
-        </p:txBody>
-      </p:sp>
-      <p:sp>
-        <p:nvSpPr>
-          <p:cNvPr id="6" name="TextBox 5"/>
+                <a:spcPts val="400"/>
+              </a:spcAft>
+            </a:pPr>
+            <a:r>
+              <a:rPr sz="1400" b="0" i="0">
+                <a:solidFill>
+                  <a:srgbClr val="FFFFFF"/>
+                </a:solidFill>
+                <a:latin typeface="Calibri"/>
+              </a:rPr>
+              <a:t>ALTER TABLE cita ADD CONSTRAINT uq_vet_franja UNIQUE (id_veterinario, fecha_hora)</a:t>
+            </a:r>
+          </a:p>
+        </p:txBody>
+      </p:sp>
+      <p:sp>
+        <p:nvSpPr>
+          <p:cNvPr id="9" name="TextBox 8"/>
           <p:cNvSpPr txBox="1"/>
           <p:nvPr/>
         </p:nvSpPr>
@@ -9651,7 +9381,7 @@
                 </a:solidFill>
                 <a:latin typeface="Calibri"/>
               </a:rPr>
-              <a:t>Cuando NO se usa un trigger, y lo que un trigger no ve (2/3)</a:t>
+              <a:t>Cuando NO se usa un trigger, y lo que un trigger no ve (1/3)</a:t>
             </a:r>
           </a:p>
         </p:txBody>
@@ -9690,7 +9420,7 @@
                 </a:solidFill>
                 <a:latin typeface="Calibri"/>
               </a:rPr>
-              <a:t>–   Y no se usa cuando la logica tiene varios pasos y decisiones, porque para eso existe el procedimiento de la Clase 3, que se invoca a proposito y se puede probar solo.</a:t>
+              <a:t>–   De lo anterior se deduce cuando no usar un trigger, y esta es probablemente la parte mas util de la clase.</a:t>
             </a:r>
           </a:p>
           <a:p>
@@ -9706,7 +9436,7 @@
                 </a:solidFill>
                 <a:latin typeface="Calibri"/>
               </a:rPr>
-              <a:t>–   El primero es la invisibilidad: quien lee la aplicacion ve un UPDATE cita SET estado = 'CANCELADA' y no ve que ademas se escribio en audit_cita; el comportamiento del sistema deja de estar en el codigo que se lee.</a:t>
+              <a:t>–   No se usa cuando una restriccion declarativa resuelve el problema.</a:t>
             </a:r>
           </a:p>
           <a:p>
@@ -9722,7 +9452,7 @@
                 </a:solidFill>
                 <a:latin typeface="Calibri"/>
               </a:rPr>
-              <a:t>–   Y no hay ninguna senal en el SQL, asi que la unica defensa es documentarlo.</a:t>
+              <a:t>–   No se usa cuando la regla pertenece al flujo de la aplicacion y debe admitir excepciones, como un descuento autorizado por el administrador: un trigger no distingue casos autorizados y termina obligando a trucos para desactivarlo.</a:t>
             </a:r>
           </a:p>
           <a:p>
@@ -9738,7 +9468,23 @@
                 </a:solidFill>
                 <a:latin typeface="Calibri"/>
               </a:rPr>
-              <a:t>–   El segundo es el encadenamiento: si el trigger de cita inserta en audit_cita y audit_cita tiene su propio trigger, se forma una cadena, y si alguno acaba modificando la tabla que lo activo hay recursion</a:t>
+              <a:t>–   No se usa cuando el efecto es pesado o depende de algo externo, como enviar un correo o llamar un servicio</a:t>
+            </a:r>
+          </a:p>
+          <a:p>
+            <a:pPr>
+              <a:spcAft>
+                <a:spcPts val="800"/>
+              </a:spcAft>
+            </a:pPr>
+            <a:r>
+              <a:rPr sz="2000" b="0" i="0">
+                <a:solidFill>
+                  <a:srgbClr val="333333"/>
+                </a:solidFill>
+                <a:latin typeface="Calibri"/>
+              </a:rPr>
+              <a:t>–   Porque eso corre dentro de la transaccion, alarga los bloqueos y convierte una demora ajena en demora de la base de datos, tema que se retoma en las Clases 8 y 10.</a:t>
             </a:r>
           </a:p>
         </p:txBody>
@@ -9919,7 +9665,7 @@
                 </a:solidFill>
                 <a:latin typeface="Calibri"/>
               </a:rPr>
-              <a:t>Cuando NO se usa un trigger, y lo que un trigger no ve (3/3)</a:t>
+              <a:t>Cuando NO se usa un trigger, y lo que un trigger no ve (2/3)</a:t>
             </a:r>
           </a:p>
         </p:txBody>
@@ -9958,7 +9704,7 @@
                 </a:solidFill>
                 <a:latin typeface="Calibri"/>
               </a:rPr>
-              <a:t>–   El tercero es un limite que hay que nombrar porque es exactamente lo que la seccion 6 del plan de respaldo pide: hay operaciones que un trigger de fila no ve.</a:t>
+              <a:t>–   Y no se usa cuando la logica tiene varios pasos y decisiones, porque para eso existe el procedimiento de la Clase 3, que se invoca a proposito y se puede probar solo.</a:t>
             </a:r>
           </a:p>
           <a:p>
@@ -9974,7 +9720,7 @@
                 </a:solidFill>
                 <a:latin typeface="Calibri"/>
               </a:rPr>
-              <a:t>–   La convencion que conviene fijar para VetCare, como criterio y no como norma del motor, es a lo sumo uno o dos triggers por tabla y solo para dos usos: auditoria de cambios sensibles e invariantes que no se puedan declarar.</a:t>
+              <a:t>–   El primero es la invisibilidad: quien lee la aplicacion ve un UPDATE cita SET estado = 'CANCELADA' y no ve que ademas se escribio en audit_cita; el comportamiento del sistema deja de estar en el codigo que se lee.</a:t>
             </a:r>
           </a:p>
           <a:p>
@@ -9990,7 +9736,23 @@
                 </a:solidFill>
                 <a:latin typeface="Calibri"/>
               </a:rPr>
-              <a:t>–   Dos triggers, no cinco, y esa cifra es deliberada.</a:t>
+              <a:t>–   Y no hay ninguna senal en el SQL, asi que la unica defensa es documentarlo.</a:t>
+            </a:r>
+          </a:p>
+          <a:p>
+            <a:pPr>
+              <a:spcAft>
+                <a:spcPts val="800"/>
+              </a:spcAft>
+            </a:pPr>
+            <a:r>
+              <a:rPr sz="2000" b="0" i="0">
+                <a:solidFill>
+                  <a:srgbClr val="333333"/>
+                </a:solidFill>
+                <a:latin typeface="Calibri"/>
+              </a:rPr>
+              <a:t>–   El segundo es el encadenamiento: si el trigger de cita inserta en audit_cita y audit_cita tiene su propio trigger, se forma una cadena, y si alguno acaba modificando la tabla que lo activo hay recursion</a:t>
             </a:r>
           </a:p>
         </p:txBody>
@@ -10171,7 +9933,7 @@
                 </a:solidFill>
                 <a:latin typeface="Calibri"/>
               </a:rPr>
-              <a:t>Seguridad y respaldo: dos preguntas complementarias (1/3)</a:t>
+              <a:t>Cuando NO se usa un trigger, y lo que un trigger no ve (3/3)</a:t>
             </a:r>
           </a:p>
         </p:txBody>
@@ -10210,7 +9972,7 @@
                 </a:solidFill>
                 <a:latin typeface="Calibri"/>
               </a:rPr>
-              <a:t>–   Seguridad y respaldo van en la misma sesion porque responden a preguntas complementarias: la seguridad intenta que nada malo pase, el respaldo asume que igual pasara.</a:t>
+              <a:t>–   El tercero es un limite que hay que nombrar porque es exactamente lo que la seccion 6 del plan de respaldo pide: hay operaciones que un trigger de fila no ve.</a:t>
             </a:r>
           </a:p>
           <a:p>
@@ -10226,7 +9988,7 @@
                 </a:solidFill>
                 <a:latin typeface="Calibri"/>
               </a:rPr>
-              <a:t>–   Hay que separar dos familias de copia que se confunden todo el tiempo.</a:t>
+              <a:t>–   La convencion que conviene fijar para VetCare, como criterio y no como norma del motor, es a lo sumo uno o dos triggers por tabla y solo para dos usos: auditoria de cambios sensibles e invariantes que no se puedan declarar.</a:t>
             </a:r>
           </a:p>
           <a:p>
@@ -10242,39 +10004,7 @@
                 </a:solidFill>
                 <a:latin typeface="Calibri"/>
               </a:rPr>
-              <a:t>–   Un respaldo logico exporta objetos y datos, como sentencias o en un formato propio del motor; en PostgreSQL la herramienta es pg_dump</a:t>
-            </a:r>
-          </a:p>
-          <a:p>
-            <a:pPr>
-              <a:spcAft>
-                <a:spcPts val="800"/>
-              </a:spcAft>
-            </a:pPr>
-            <a:r>
-              <a:rPr sz="2000" b="0" i="0">
-                <a:solidFill>
-                  <a:srgbClr val="333333"/>
-                </a:solidFill>
-                <a:latin typeface="Calibri"/>
-              </a:rPr>
-              <a:t>–   Y el comando concreto que el plan tiene que nombrar es pg_dump -Fc -d vetcare -f vetcare_AAAAMMDD.dump, donde -Fc pide el formato comprimido propio, que es el que permite restaurar selectivamente con pg_restore.</a:t>
-            </a:r>
-          </a:p>
-          <a:p>
-            <a:pPr>
-              <a:spcAft>
-                <a:spcPts val="800"/>
-              </a:spcAft>
-            </a:pPr>
-            <a:r>
-              <a:rPr sz="2000" b="0" i="0">
-                <a:solidFill>
-                  <a:srgbClr val="333333"/>
-                </a:solidFill>
-                <a:latin typeface="Calibri"/>
-              </a:rPr>
-              <a:t>–   Es portable entre versiones y maquinas, permite restaurar una sola tabla y se puede inspeccionar; en cambio es lento de restaurar en volumenes grandes y no captura un instante exacto de la base entera.</a:t>
+              <a:t>–   Dos triggers, no cinco, y esa cifra es deliberada.</a:t>
             </a:r>
           </a:p>
         </p:txBody>
@@ -10455,7 +10185,7 @@
                 </a:solidFill>
                 <a:latin typeface="Calibri"/>
               </a:rPr>
-              <a:t>Seguridad y respaldo: dos preguntas complementarias (2/3)</a:t>
+              <a:t>Seguridad y respaldo: dos preguntas complementarias (1/3)</a:t>
             </a:r>
           </a:p>
         </p:txBody>
@@ -10494,7 +10224,7 @@
                 </a:solidFill>
                 <a:latin typeface="Calibri"/>
               </a:rPr>
-              <a:t>–   Aqui hay un hueco que casi nadie ve: pg_dump respalda UNA base de datos y NO respalda los roles, porque los roles son objetos del cluster y no de la base.</a:t>
+              <a:t>–   Seguridad y respaldo van en la misma sesion porque responden a preguntas complementarias: la seguridad intenta que nada malo pase, el respaldo asume que igual pasara.</a:t>
             </a:r>
           </a:p>
           <a:p>
@@ -10510,7 +10240,7 @@
                 </a:solidFill>
                 <a:latin typeface="Calibri"/>
               </a:rPr>
-              <a:t>–   Los cuatro roles de la Clase 2 se van con pg_dumpall --globals-only.</a:t>
+              <a:t>–   Hay que separar dos familias de copia que se confunden todo el tiempo.</a:t>
             </a:r>
           </a:p>
           <a:p>
@@ -10526,7 +10256,7 @@
                 </a:solidFill>
                 <a:latin typeface="Calibri"/>
               </a:rPr>
-              <a:t>–   Si ese comando falta en el plan, se restaura la base y ningun rol tiene permisos: el sistema esta ahi y nadie puede entrar.</a:t>
+              <a:t>–   Un respaldo logico exporta objetos y datos, como sentencias o en un formato propio del motor; en PostgreSQL la herramienta es pg_dump</a:t>
             </a:r>
           </a:p>
           <a:p>
@@ -10542,7 +10272,7 @@
                 </a:solidFill>
                 <a:latin typeface="Calibri"/>
               </a:rPr>
-              <a:t>–   Vale decirlo asi, porque es el tipo de detalle por el que un plan de respaldo real falla.</a:t>
+              <a:t>–   Y el comando concreto que el plan tiene que nombrar es pg_dump -Fc -d vetcare -f vetcare_AAAAMMDD.dump, donde -Fc pide el formato comprimido propio, que es el que permite restaurar selectivamente con pg_restore.</a:t>
             </a:r>
           </a:p>
           <a:p>
@@ -10558,23 +10288,7 @@
                 </a:solidFill>
                 <a:latin typeface="Calibri"/>
               </a:rPr>
-              <a:t>–   Un respaldo fisico copia los archivos del motor y los registros de transaccion, con pg_basebackup</a:t>
-            </a:r>
-          </a:p>
-          <a:p>
-            <a:pPr>
-              <a:spcAft>
-                <a:spcPts val="800"/>
-              </a:spcAft>
-            </a:pPr>
-            <a:r>
-              <a:rPr sz="2000" b="0" i="0">
-                <a:solidFill>
-                  <a:srgbClr val="333333"/>
-                </a:solidFill>
-                <a:latin typeface="Calibri"/>
-              </a:rPr>
-              <a:t>–   Y es lo que se usa en produccion porque permite recuperar a un punto exacto en el tiempo aplicando el registro de escritura anticipada, el WAL; exige acceso al sistema de archivos y, en general, la misma version y plataforma.</a:t>
+              <a:t>–   Es portable entre versiones y maquinas, permite restaurar una sola tabla y se puede inspeccionar; en cambio es lento de restaurar en volumenes grandes y no captura un instante exacto de la base entera.</a:t>
             </a:r>
           </a:p>
         </p:txBody>
@@ -10755,7 +10469,7 @@
                 </a:solidFill>
                 <a:latin typeface="Calibri"/>
               </a:rPr>
-              <a:t>Seguridad y respaldo: dos preguntas complementarias (3/3)</a:t>
+              <a:t>Seguridad y respaldo: dos preguntas complementarias (2/3)</a:t>
             </a:r>
           </a:p>
         </p:txBody>
@@ -10794,7 +10508,7 @@
                 </a:solidFill>
                 <a:latin typeface="Calibri"/>
               </a:rPr>
-              <a:t>–   Con esa base se ordenan las estrategias con numeros: un dump diario deja una perdida potencial de veinticuatro horas, y agregar archivado de WAL la baja al orden de minutos; son ejemplos, no valores obligatorios.</a:t>
+              <a:t>–   Aqui hay un hueco que casi nadie ve: pg_dump respalda UNA base de datos y NO respalda los roles, porque los roles son objetos del cluster y no de la base.</a:t>
             </a:r>
           </a:p>
           <a:p>
@@ -10810,7 +10524,71 @@
                 </a:solidFill>
                 <a:latin typeface="Calibri"/>
               </a:rPr>
-              <a:t>–   La consecuencia para este curso hay que decirla sin rodeos y esta en la seccion siguiente: nada de esto se puede EJECUTAR.</a:t>
+              <a:t>–   Los cuatro roles de la Clase 2 se van con pg_dumpall --globals-only.</a:t>
+            </a:r>
+          </a:p>
+          <a:p>
+            <a:pPr>
+              <a:spcAft>
+                <a:spcPts val="800"/>
+              </a:spcAft>
+            </a:pPr>
+            <a:r>
+              <a:rPr sz="2000" b="0" i="0">
+                <a:solidFill>
+                  <a:srgbClr val="333333"/>
+                </a:solidFill>
+                <a:latin typeface="Calibri"/>
+              </a:rPr>
+              <a:t>–   Si ese comando falta en el plan, se restaura la base y ningun rol tiene permisos: el sistema esta ahi y nadie puede entrar.</a:t>
+            </a:r>
+          </a:p>
+          <a:p>
+            <a:pPr>
+              <a:spcAft>
+                <a:spcPts val="800"/>
+              </a:spcAft>
+            </a:pPr>
+            <a:r>
+              <a:rPr sz="2000" b="0" i="0">
+                <a:solidFill>
+                  <a:srgbClr val="333333"/>
+                </a:solidFill>
+                <a:latin typeface="Calibri"/>
+              </a:rPr>
+              <a:t>–   Vale decirlo asi, porque es el tipo de detalle por el que un plan de respaldo real falla.</a:t>
+            </a:r>
+          </a:p>
+          <a:p>
+            <a:pPr>
+              <a:spcAft>
+                <a:spcPts val="800"/>
+              </a:spcAft>
+            </a:pPr>
+            <a:r>
+              <a:rPr sz="2000" b="0" i="0">
+                <a:solidFill>
+                  <a:srgbClr val="333333"/>
+                </a:solidFill>
+                <a:latin typeface="Calibri"/>
+              </a:rPr>
+              <a:t>–   Un respaldo fisico copia los archivos del motor y los registros de transaccion, con pg_basebackup</a:t>
+            </a:r>
+          </a:p>
+          <a:p>
+            <a:pPr>
+              <a:spcAft>
+                <a:spcPts val="800"/>
+              </a:spcAft>
+            </a:pPr>
+            <a:r>
+              <a:rPr sz="2000" b="0" i="0">
+                <a:solidFill>
+                  <a:srgbClr val="333333"/>
+                </a:solidFill>
+                <a:latin typeface="Calibri"/>
+              </a:rPr>
+              <a:t>–   Y es lo que se usa en produccion porque permite recuperar a un punto exacto en el tiempo aplicando el registro de escritura anticipada, el WAL; exige acceso al sistema de archivos y, en general, la misma version y plataforma.</a:t>
             </a:r>
           </a:p>
         </p:txBody>
@@ -10991,7 +10769,7 @@
                 </a:solidFill>
                 <a:latin typeface="Calibri"/>
               </a:rPr>
-              <a:t>RPO y RTO: dos siglas que solo sirven con un numero acordado (1/3)</a:t>
+              <a:t>Seguridad y respaldo: dos preguntas complementarias (3/3)</a:t>
             </a:r>
           </a:p>
         </p:txBody>
@@ -11030,7 +10808,7 @@
                 </a:solidFill>
                 <a:latin typeface="Calibri"/>
               </a:rPr>
-              <a:t>–   El RPO es cuanta informacion se acepta perder, medida en tiempo.</a:t>
+              <a:t>–   Con esa base se ordenan las estrategias con numeros: un dump diario deja una perdida potencial de veinticuatro horas, y agregar archivado de WAL la baja al orden de minutos; son ejemplos, no valores obligatorios.</a:t>
             </a:r>
           </a:p>
           <a:p>
@@ -11046,7 +10824,7 @@
                 </a:solidFill>
                 <a:latin typeface="Calibri"/>
               </a:rPr>
-              <a:t>–   Si Huellitas atiende del orden de cuarenta citas por dia en un horario de lunes a sabado de 7:00 a 19:00, perder cuatro horas de datos son entre quince y veinte citas con sus consultas clinicas y sus facturas</a:t>
+              <a:t>–   La consecuencia para este curso hay que decirla sin rodeos y esta en la seccion siguiente: nada de esto se puede EJECUTAR.</a:t>
             </a:r>
           </a:p>
           <a:p>
@@ -11062,7 +10840,7 @@
                 </a:solidFill>
                 <a:latin typeface="Calibri"/>
               </a:rPr>
-              <a:t>–   Y quien decide si eso es tolerable es el dueno de la clinica, no el administrador de la base; esa asignacion de responsabilidad es regla, no matiz.</a:t>
+              <a:t>–   En VetCare las dos se cruzan en un punto: un rol con DELETE de mas puede borrar la agenda, y solo un respaldo probado la recupera.</a:t>
             </a:r>
           </a:p>
           <a:p>
@@ -11078,7 +10856,7 @@
                 </a:solidFill>
                 <a:latin typeface="Calibri"/>
               </a:rPr>
-              <a:t>–   El RTO es cuanto tiempo puede estar caida la base antes de restaurar: si el sistema se cae un sabado a las diez de la manana con la sala llena, un RTO de ocho horas equivale a cerrar el dia y devolver pacientes.</a:t>
+              <a:t>–   Sin privilegio minimo el respaldo se usa mas; sin respaldo, un error de privilegios es irreversible.</a:t>
             </a:r>
           </a:p>
         </p:txBody>
@@ -12111,7 +11889,7 @@
                 </a:solidFill>
                 <a:latin typeface="Calibri"/>
               </a:rPr>
-              <a:t>RPO y RTO: dos siglas que solo sirven con un numero acordado (2/3)</a:t>
+              <a:t>RPO y RTO: dos siglas que solo sirven con un numero acordado (1/3)</a:t>
             </a:r>
           </a:p>
         </p:txBody>
@@ -12150,7 +11928,7 @@
                 </a:solidFill>
                 <a:latin typeface="Calibri"/>
               </a:rPr>
-              <a:t>–   Y la ventana del respaldo se justifica con el mismo horario: un dump a las 20:30 se defiende porque la facturacion cierra a las 20:00, mientras que «diario» a secas no se defiende.</a:t>
+              <a:t>–   El RPO es cuanta informacion se acepta perder, medida en tiempo.</a:t>
             </a:r>
           </a:p>
           <a:p>
@@ -12166,7 +11944,7 @@
                 </a:solidFill>
                 <a:latin typeface="Calibri"/>
               </a:rPr>
-              <a:t>–   Uno, restaurar en un entorno distinto del original, nunca encima del que funciona, porque una prueba que destruye el dato bueno es un incidente y no una prueba.</a:t>
+              <a:t>–   Si Huellitas atiende del orden de cuarenta citas por dia en un horario de lunes a sabado de 7:00 a 19:00, perder cuatro horas de datos son entre quince y veinte citas con sus consultas clinicas y sus facturas</a:t>
             </a:r>
           </a:p>
           <a:p>
@@ -12182,7 +11960,7 @@
                 </a:solidFill>
                 <a:latin typeface="Calibri"/>
               </a:rPr>
-              <a:t>–   Dos, cronometrar desde que se decide restaurar hasta que una consulta de la aplicacion devuelve datos correctos, porque ese intervalo, y no el tiempo de copiar un archivo, es el RTO medido.</a:t>
+              <a:t>–   Y quien decide si eso es tolerable es el dueno de la clinica, no el administrador de la base; esa asignacion de responsabilidad es regla, no matiz.</a:t>
             </a:r>
           </a:p>
           <a:p>
@@ -12198,7 +11976,7 @@
                 </a:solidFill>
                 <a:latin typeface="Calibri"/>
               </a:rPr>
-              <a:t>–   Tres, verificar con comprobaciones de negocio, y esto es lo que convierte «restaure» en «restaure bien»: los conteos de cita, consulta y factura, y el maximo de fecha_hora en cita, comparados contra los valores del origen al momento del corte.</a:t>
+              <a:t>–   El RTO es cuanto tiempo puede estar caida la base antes de restaurar: si el sistema se cae un sabado a las diez de la manana con la sala llena, un RTO de ocho horas equivale a cerrar el dia y devolver pacientes.</a:t>
             </a:r>
           </a:p>
         </p:txBody>
@@ -12379,7 +12157,7 @@
                 </a:solidFill>
                 <a:latin typeface="Calibri"/>
               </a:rPr>
-              <a:t>RPO y RTO: dos siglas que solo sirven con un numero acordado (3/3)</a:t>
+              <a:t>RPO y RTO: dos siglas que solo sirven con un numero acordado (2/3)</a:t>
             </a:r>
           </a:p>
         </p:txBody>
@@ -12418,7 +12196,7 @@
                 </a:solidFill>
                 <a:latin typeface="Calibri"/>
               </a:rPr>
-              <a:t>–   Y hay una sexta seccion que casi siempre se omite: que NO cubre el plan, y cual es el riesgo residual que se asume.</a:t>
+              <a:t>–   Y la ventana del respaldo se justifica con el mismo horario: un dump a las 20:30 se defiende porque la facturacion cierra a las 20:00, mientras que «diario» a secas no se defiende.</a:t>
             </a:r>
           </a:p>
           <a:p>
@@ -12434,7 +12212,7 @@
                 </a:solidFill>
                 <a:latin typeface="Calibri"/>
               </a:rPr>
-              <a:t>–   Un dump diario no protege del borrado por error que se descubre tres dias despues si la retencion es de dos copias; un respaldo logico no protege de la corrupcion del propio archivo si nunca se restaura.</a:t>
+              <a:t>–   Uno, restaurar en un entorno distinto del original, nunca encima del que funciona, porque una prueba que destruye el dato bueno es un incidente y no una prueba.</a:t>
             </a:r>
           </a:p>
           <a:p>
@@ -12450,7 +12228,23 @@
                 </a:solidFill>
                 <a:latin typeface="Calibri"/>
               </a:rPr>
-              <a:t>–   Nombrar el limite es lo que separa un plan de una lista de comandos, y es lo que un evaluador pregunta primero.</a:t>
+              <a:t>–   Dos, cronometrar desde que se decide restaurar hasta que una consulta de la aplicacion devuelve datos correctos, porque ese intervalo, y no el tiempo de copiar un archivo, es el RTO medido.</a:t>
+            </a:r>
+          </a:p>
+          <a:p>
+            <a:pPr>
+              <a:spcAft>
+                <a:spcPts val="800"/>
+              </a:spcAft>
+            </a:pPr>
+            <a:r>
+              <a:rPr sz="2000" b="0" i="0">
+                <a:solidFill>
+                  <a:srgbClr val="333333"/>
+                </a:solidFill>
+                <a:latin typeface="Calibri"/>
+              </a:rPr>
+              <a:t>–   Tres, verificar con comprobaciones de negocio, y esto es lo que convierte «restaure» en «restaure bien»: los conteos de cita, consulta y factura, y el maximo de fecha_hora en cita, comparados contra los valores del origen al momento del corte.</a:t>
             </a:r>
           </a:p>
         </p:txBody>
@@ -12631,7 +12425,7 @@
                 </a:solidFill>
                 <a:latin typeface="Calibri"/>
               </a:rPr>
-              <a:t>Lo que PostgreSQL en el navegador si puede demostrar, y lo que se documenta en papel</a:t>
+              <a:t>RPO y RTO: dos siglas que solo sirven con un numero acordado (3/3)</a:t>
             </a:r>
           </a:p>
         </p:txBody>
@@ -12670,7 +12464,7 @@
                 </a:solidFill>
                 <a:latin typeface="Calibri"/>
               </a:rPr>
-              <a:t>–   Hay que ser preciso aqui porque es la parte de la clase que se puede entregar mal por una expectativa equivocada.</a:t>
+              <a:t>–   Y hay una sexta seccion que casi siempre se omite: que NO cubre el plan, y cual es el riesgo residual que se asume.</a:t>
             </a:r>
           </a:p>
           <a:p>
@@ -12686,7 +12480,7 @@
                 </a:solidFill>
                 <a:latin typeface="Calibri"/>
               </a:rPr>
-              <a:t>–   El motor de la clase es PostgreSQL, que corre dentro del navegador, y ahi funciona todo el codigo del dia: CREATE FUNCTION con IMMUTABLE</a:t>
+              <a:t>–   Un dump diario no protege del borrado por error que se descubre tres dias despues si la retencion es de dos copias; un respaldo logico no protege de la corrupcion del propio archivo si nunca se restaura.</a:t>
             </a:r>
           </a:p>
           <a:p>
@@ -12702,55 +12496,7 @@
                 </a:solidFill>
                 <a:latin typeface="Calibri"/>
               </a:rPr>
-              <a:t>–   Las dos partes del trigger, RAISE EXCEPTION y RAISE NOTICE, los bloques DO de la Clase 3, current_user, now() e IS DISTINCT FROM.</a:t>
-            </a:r>
-          </a:p>
-          <a:p>
-            <a:pPr>
-              <a:spcAft>
-                <a:spcPts val="800"/>
-              </a:spcAft>
-            </a:pPr>
-            <a:r>
-              <a:rPr sz="2000" b="0" i="0">
-                <a:solidFill>
-                  <a:srgbClr val="333333"/>
-                </a:solidFill>
-                <a:latin typeface="Calibri"/>
-              </a:rPr>
-              <a:t>–   La evidencia de las cuatro primeras preguntas es la salida del motor.</a:t>
-            </a:r>
-          </a:p>
-          <a:p>
-            <a:pPr>
-              <a:spcAft>
-                <a:spcPts val="800"/>
-              </a:spcAft>
-            </a:pPr>
-            <a:r>
-              <a:rPr sz="2000" b="0" i="0">
-                <a:solidFill>
-                  <a:srgbClr val="333333"/>
-                </a:solidFill>
-                <a:latin typeface="Calibri"/>
-              </a:rPr>
-              <a:t>–   El numero que salga, por ejemplo tres minutos, es un RTO honesto y medido, y la consulta de validacion posterior es exactamente la que el plan tiene que traer escrita.</a:t>
-            </a:r>
-          </a:p>
-          <a:p>
-            <a:pPr>
-              <a:spcAft>
-                <a:spcPts val="800"/>
-              </a:spcAft>
-            </a:pPr>
-            <a:r>
-              <a:rPr sz="2000" b="0" i="0">
-                <a:solidFill>
-                  <a:srgbClr val="333333"/>
-                </a:solidFill>
-                <a:latin typeface="Calibri"/>
-              </a:rPr>
-              <a:t>–   Oracle sigue en el kit solo como contraste: alla las herramientas se llaman Data Pump y RMAN, y el trigger se escribe con el cuerpo adentro y con:NEW y:OLD.</a:t>
+              <a:t>–   Nombrar el limite es lo que separa un plan de una lista de comandos, y es lo que un evaluador pregunta primero.</a:t>
             </a:r>
           </a:p>
         </p:txBody>
@@ -12931,7 +12677,7 @@
                 </a:solidFill>
                 <a:latin typeface="Calibri"/>
               </a:rPr>
-              <a:t>Como amarra con las clases vecinas y con el PI (1/2)</a:t>
+              <a:t>Lo que PostgreSQL en el navegador si puede demostrar, y lo que se documenta en papel</a:t>
             </a:r>
           </a:p>
         </p:txBody>
@@ -12970,7 +12716,7 @@
                 </a:solidFill>
                 <a:latin typeface="Calibri"/>
               </a:rPr>
-              <a:t>–   Lo de hoy cierra el Corte 1 y conviene decir como.</a:t>
+              <a:t>–   Hay que ser preciso aqui porque es la parte de la clase que se puede entregar mal por una expectativa equivocada.</a:t>
             </a:r>
           </a:p>
           <a:p>
@@ -12986,7 +12732,7 @@
                 </a:solidFill>
                 <a:latin typeface="Calibri"/>
               </a:rPr>
-              <a:t>–   La Clase 1 dejo el esquema, el CHECK de stock que hoy se retira a proposito para mostrar el hueco, y la restriccion de unicidad que hoy se defiende como la respuesta correcta a la doble reserva.</a:t>
+              <a:t>–   El motor de la clase es PostgreSQL, que corre dentro del navegador, y ahi funciona todo el codigo del dia: CREATE FUNCTION con IMMUTABLE</a:t>
             </a:r>
           </a:p>
           <a:p>
@@ -13002,7 +12748,7 @@
                 </a:solidFill>
                 <a:latin typeface="Calibri"/>
               </a:rPr>
-              <a:t>–   La Clase 2 dejo los roles, y hoy reaparecen en dos puntos: current_user es lo que la columna de auditoria guarda, y pg_dumpall --globals-only es lo que los respalda.</a:t>
+              <a:t>–   Las dos partes del trigger, RAISE EXCEPTION y RAISE NOTICE, los bloques DO de la Clase 3, current_user, now() e IS DISTINCT FROM.</a:t>
             </a:r>
           </a:p>
           <a:p>
@@ -13018,7 +12764,39 @@
                 </a:solidFill>
                 <a:latin typeface="Calibri"/>
               </a:rPr>
-              <a:t>–   La Clase 3 dejo el procedimiento y la bateria de bloques DO, que es la tecnica con la que hoy se prueban los dos triggers.</a:t>
+              <a:t>–   La evidencia de las cuatro primeras preguntas es la salida del motor.</a:t>
+            </a:r>
+          </a:p>
+          <a:p>
+            <a:pPr>
+              <a:spcAft>
+                <a:spcPts val="800"/>
+              </a:spcAft>
+            </a:pPr>
+            <a:r>
+              <a:rPr sz="2000" b="0" i="0">
+                <a:solidFill>
+                  <a:srgbClr val="333333"/>
+                </a:solidFill>
+                <a:latin typeface="Calibri"/>
+              </a:rPr>
+              <a:t>–   El numero que salga, por ejemplo tres minutos, es un RTO honesto y medido, y la consulta de validacion posterior es exactamente la que el plan tiene que traer escrita.</a:t>
+            </a:r>
+          </a:p>
+          <a:p>
+            <a:pPr>
+              <a:spcAft>
+                <a:spcPts val="800"/>
+              </a:spcAft>
+            </a:pPr>
+            <a:r>
+              <a:rPr sz="2000" b="0" i="0">
+                <a:solidFill>
+                  <a:srgbClr val="333333"/>
+                </a:solidFill>
+                <a:latin typeface="Calibri"/>
+              </a:rPr>
+              <a:t>–   Oracle sigue en el kit solo como contraste: alla las herramientas se llaman Data Pump y RMAN, y el trigger se escribe con el cuerpo adentro y con:NEW y:OLD.</a:t>
             </a:r>
           </a:p>
         </p:txBody>
@@ -13199,7 +12977,7 @@
                 </a:solidFill>
                 <a:latin typeface="Calibri"/>
               </a:rPr>
-              <a:t>Como amarra con las clases vecinas y con el PI (2/2)</a:t>
+              <a:t>Como amarra con las clases vecinas y con el PI (1/2)</a:t>
             </a:r>
           </a:p>
         </p:txBody>
@@ -13238,23 +13016,71 @@
                 </a:solidFill>
                 <a:latin typeface="Calibri"/>
               </a:rPr>
+              <a:t>–   Lo de hoy cierra el Corte 1 y conviene decir como.</a:t>
+            </a:r>
+          </a:p>
+          <a:p>
+            <a:pPr>
+              <a:spcAft>
+                <a:spcPts val="800"/>
+              </a:spcAft>
+            </a:pPr>
+            <a:r>
+              <a:rPr sz="2000" b="0" i="0">
+                <a:solidFill>
+                  <a:srgbClr val="333333"/>
+                </a:solidFill>
+                <a:latin typeface="Calibri"/>
+              </a:rPr>
+              <a:t>–   La Clase 1 dejo el esquema, el CHECK de stock que hoy se retira a proposito para mostrar el hueco, y la restriccion de unicidad que hoy se defiende como la respuesta correcta a la doble reserva.</a:t>
+            </a:r>
+          </a:p>
+          <a:p>
+            <a:pPr>
+              <a:spcAft>
+                <a:spcPts val="800"/>
+              </a:spcAft>
+            </a:pPr>
+            <a:r>
+              <a:rPr sz="2000" b="0" i="0">
+                <a:solidFill>
+                  <a:srgbClr val="333333"/>
+                </a:solidFill>
+                <a:latin typeface="Calibri"/>
+              </a:rPr>
+              <a:t>–   La Clase 2 dejo los roles, y hoy reaparecen en dos puntos: current_user es lo que la columna de auditoria guarda, y pg_dumpall --globals-only es lo que los respalda.</a:t>
+            </a:r>
+          </a:p>
+          <a:p>
+            <a:pPr>
+              <a:spcAft>
+                <a:spcPts val="800"/>
+              </a:spcAft>
+            </a:pPr>
+            <a:r>
+              <a:rPr sz="2000" b="0" i="0">
+                <a:solidFill>
+                  <a:srgbClr val="333333"/>
+                </a:solidFill>
+                <a:latin typeface="Calibri"/>
+              </a:rPr>
+              <a:t>–   La Clase 3 dejo el procedimiento y la bateria de bloques DO, que es la tecnica con la que hoy se prueban los dos triggers.</a:t>
+            </a:r>
+          </a:p>
+          <a:p>
+            <a:pPr>
+              <a:spcAft>
+                <a:spcPts val="800"/>
+              </a:spcAft>
+            </a:pPr>
+            <a:r>
+              <a:rPr sz="2000" b="0" i="0">
+                <a:solidFill>
+                  <a:srgbClr val="333333"/>
+                </a:solidFill>
+                <a:latin typeface="Calibri"/>
+              </a:rPr>
               <a:t>–   Hacia adelante, el Parcial 1 de la Clase 5 evalua justamente procedimientos, seguridad y este contenido; la Clase 8 retoma la transaccion</a:t>
-            </a:r>
-          </a:p>
-          <a:p>
-            <a:pPr>
-              <a:spcAft>
-                <a:spcPts val="800"/>
-              </a:spcAft>
-            </a:pPr>
-            <a:r>
-              <a:rPr sz="2000" b="0" i="0">
-                <a:solidFill>
-                  <a:srgbClr val="333333"/>
-                </a:solidFill>
-                <a:latin typeface="Calibri"/>
-              </a:rPr>
-              <a:t>–   Que es el marco dentro del cual corre todo trigger; la Clase 10 explica por que el trigger de conteo no protege de la doble reserva; y la Clase 12 conecta la aplicacion, que es cuando la invisibilidad del trigger deja de ser un concepto.</a:t>
             </a:r>
           </a:p>
         </p:txBody>
@@ -13435,7 +13261,7 @@
                 </a:solidFill>
                 <a:latin typeface="Calibri"/>
               </a:rPr>
-              <a:t>Preguntas frecuentes del grupo (1/3)</a:t>
+              <a:t>Como amarra con las clases vecinas y con el PI (2/2)</a:t>
             </a:r>
           </a:p>
         </p:txBody>
@@ -13474,7 +13300,7 @@
                 </a:solidFill>
                 <a:latin typeface="Calibri"/>
               </a:rPr>
-              <a:t>–   «Cree el trigger y no pasa nada»: la causa mas frecuente es que la funcion existe pero la asociacion no, porque el estudiante escribio solo el CREATE FUNCTION; la segunda es que la asociacion dice UPDATE OF otra columna, o que el WHEN nunca se cumple.</a:t>
+              <a:t>–   Que es el marco dentro del cual corre todo trigger; la Clase 10 explica por que el trigger de conteo no protege de la doble reserva; y la Clase 12 conecta la aplicacion, que es cuando la invisibilidad del trigger deja de ser un concepto.</a:t>
             </a:r>
           </a:p>
           <a:p>
@@ -13490,7 +13316,7 @@
                 </a:solidFill>
                 <a:latin typeface="Calibri"/>
               </a:rPr>
-              <a:t>–   «Puede una funcion modificar datos»: en PostgreSQL si puede, y es una diferencia importante con Oracle, que lo prohibe cuando la funcion se invoca desde una consulta.</a:t>
+              <a:t>–   En el PI esto es la seccion de seguridad y respaldo: roles, matriz, auditoria y plan de restauracion se presentan como una sola pieza.</a:t>
             </a:r>
           </a:p>
           <a:p>
@@ -13506,7 +13332,7 @@
                 </a:solidFill>
                 <a:latin typeface="Calibri"/>
               </a:rPr>
-              <a:t>–   Que pueda no significa que deba: el planificador decide cuantas veces evalua una funcion, de modo que un INSERT escondido en ella podria ejecutarse una vez, ninguna o diez mil, y ademas obliga a declararla VOLATILE.</a:t>
+              <a:t>–   Y en la Clase 12 la cuenta de servicio de la aplicacion es un rol mas de esta matriz, con EXECUTE sobre los procedimientos y sin acceso directo a las tablas.</a:t>
             </a:r>
           </a:p>
         </p:txBody>
@@ -13687,7 +13513,7 @@
                 </a:solidFill>
                 <a:latin typeface="Calibri"/>
               </a:rPr>
-              <a:t>Preguntas frecuentes del grupo (2/3)</a:t>
+              <a:t>Preguntas frecuentes del grupo (1/3)</a:t>
             </a:r>
           </a:p>
         </p:txBody>
@@ -13726,7 +13552,7 @@
                 </a:solidFill>
                 <a:latin typeface="Calibri"/>
               </a:rPr>
-              <a:t>–   Si hace falta modificar datos, es un procedimiento; si debe ocurrir automaticamente, es un trigger.</a:t>
+              <a:t>–   «Cree el trigger y no pasa nada»: la causa mas frecuente es que la funcion existe pero la asociacion no, porque el estudiante escribio solo el CREATE FUNCTION; la segunda es que la asociacion dice UPDATE OF otra columna, o que el WHEN nunca se cumple.</a:t>
             </a:r>
           </a:p>
           <a:p>
@@ -13742,7 +13568,7 @@
                 </a:solidFill>
                 <a:latin typeface="Calibri"/>
               </a:rPr>
-              <a:t>–   «Puedo poner toda la validacion en triggers y no escribir procedimientos»: se puede</a:t>
+              <a:t>–   «Puede una funcion modificar datos»: en PostgreSQL si puede, y es una diferencia importante con Oracle, que lo prohibe cuando la funcion se invoca desde una consulta.</a:t>
             </a:r>
           </a:p>
           <a:p>
@@ -13758,23 +13584,7 @@
                 </a:solidFill>
                 <a:latin typeface="Calibri"/>
               </a:rPr>
-              <a:t>–   Y el sistema se vuelve imposible de razonar; el orden de preferencia que conviene memorizar es declarativo primero, procedimiento despues, trigger al final y solo para lo que los dos anteriores no pueden.</a:t>
-            </a:r>
-          </a:p>
-          <a:p>
-            <a:pPr>
-              <a:spcAft>
-                <a:spcPts val="800"/>
-              </a:spcAft>
-            </a:pPr>
-            <a:r>
-              <a:rPr sz="2000" b="0" i="0">
-                <a:solidFill>
-                  <a:srgbClr val="333333"/>
-                </a:solidFill>
-                <a:latin typeface="Calibri"/>
-              </a:rPr>
-              <a:t>–   «Si ya tengo el trigger de auditoria, para que quiero respaldo»: porque cumplen funciones distintas; la auditoria cuenta que paso y quien lo hizo, el respaldo devuelve los datos</a:t>
+              <a:t>–   Que pueda no significa que deba: el planificador decide cuantas veces evalua una funcion, de modo que un INSERT escondido en ella podria ejecutarse una vez, ninguna o diez mil, y ademas obliga a declararla VOLATILE.</a:t>
             </a:r>
           </a:p>
         </p:txBody>
@@ -13955,7 +13765,7 @@
                 </a:solidFill>
                 <a:latin typeface="Calibri"/>
               </a:rPr>
-              <a:t>Preguntas frecuentes del grupo (3/3)</a:t>
+              <a:t>Preguntas frecuentes del grupo (2/3)</a:t>
             </a:r>
           </a:p>
         </p:txBody>
@@ -13994,7 +13804,7 @@
                 </a:solidFill>
                 <a:latin typeface="Calibri"/>
               </a:rPr>
-              <a:t>–   Y si el incidente afecta el esquema completo, audit_cita se pierde junto con todo lo demas y no reconstruye ni una cita.</a:t>
+              <a:t>–   Si hace falta modificar datos, es un procedimiento; si debe ocurrir automaticamente, es un trigger.</a:t>
             </a:r>
           </a:p>
           <a:p>
@@ -14010,7 +13820,7 @@
                 </a:solidFill>
                 <a:latin typeface="Calibri"/>
               </a:rPr>
-              <a:t>–   «Por que la auditoria registro dos filas y no tres»: por la clausula WHEN, porque el tercer UPDATE asigno el estado que la cita ya tenia; si registra tres, falta el WHEN.</a:t>
+              <a:t>–   «Puedo poner toda la validacion en triggers y no escribir procedimientos»: se puede</a:t>
             </a:r>
           </a:p>
           <a:p>
@@ -14026,7 +13836,23 @@
                 </a:solidFill>
                 <a:latin typeface="Calibri"/>
               </a:rPr>
-              <a:t>–   «Por que el trigger de stock deja pasar un TRUNCATE»: porque TRUNCATE no dispara triggers de fila, y eso va escrito en la seccion de lo que el plan no cubre.</a:t>
+              <a:t>–   Y el sistema se vuelve imposible de razonar; el orden de preferencia que conviene memorizar es declarativo primero, procedimiento despues, trigger al final y solo para lo que los dos anteriores no pueden.</a:t>
+            </a:r>
+          </a:p>
+          <a:p>
+            <a:pPr>
+              <a:spcAft>
+                <a:spcPts val="800"/>
+              </a:spcAft>
+            </a:pPr>
+            <a:r>
+              <a:rPr sz="2000" b="0" i="0">
+                <a:solidFill>
+                  <a:srgbClr val="333333"/>
+                </a:solidFill>
+                <a:latin typeface="Calibri"/>
+              </a:rPr>
+              <a:t>–   «Si ya tengo el trigger de auditoria, para que quiero respaldo»: porque cumplen funciones distintas; la auditoria cuenta que paso y quien lo hizo, el respaldo devuelve los datos</a:t>
             </a:r>
           </a:p>
         </p:txBody>
@@ -14207,141 +14033,21 @@
                 </a:solidFill>
                 <a:latin typeface="Calibri"/>
               </a:rPr>
-              <a:t>La funcion de tarifas, y por que IMMUTABLE importa</a:t>
-            </a:r>
-          </a:p>
-        </p:txBody>
-      </p:sp>
-      <p:sp>
-        <p:nvSpPr>
-          <p:cNvPr id="5" name="Rounded Rectangle 4"/>
-          <p:cNvSpPr/>
-          <p:nvPr/>
-        </p:nvSpPr>
-        <p:spPr>
-          <a:xfrm>
-            <a:off x="457200" y="1261872"/>
-            <a:ext cx="11277295" cy="5093208"/>
-          </a:xfrm>
-          <a:prstGeom prst="roundRect">
-            <a:avLst>
-              <a:gd name="adj" fmla="val 12000"/>
-            </a:avLst>
-          </a:prstGeom>
-          <a:solidFill>
-            <a:srgbClr val="1E2A38"/>
-          </a:solidFill>
-          <a:ln>
-            <a:noFill/>
-          </a:ln>
-        </p:spPr>
-        <p:style>
-          <a:lnRef idx="1">
-            <a:schemeClr val="accent1"/>
-          </a:lnRef>
-          <a:fillRef idx="3">
-            <a:schemeClr val="accent1"/>
-          </a:fillRef>
-          <a:effectRef idx="2">
-            <a:schemeClr val="accent1"/>
-          </a:effectRef>
-          <a:fontRef idx="minor">
-            <a:schemeClr val="lt1"/>
-          </a:fontRef>
-        </p:style>
-        <p:txBody>
-          <a:bodyPr rtlCol="0" anchor="ctr"/>
-          <a:lstStyle/>
-          <a:p>
-            <a:pPr algn="ctr"/>
-          </a:p>
-        </p:txBody>
-      </p:sp>
-      <p:sp>
-        <p:nvSpPr>
-          <p:cNvPr id="6" name="Rectangle 5"/>
-          <p:cNvSpPr/>
-          <p:nvPr/>
-        </p:nvSpPr>
-        <p:spPr>
-          <a:xfrm>
-            <a:off x="457200" y="1261872"/>
-            <a:ext cx="11277295" cy="320040"/>
-          </a:xfrm>
-          <a:prstGeom prst="rect">
-            <a:avLst/>
-          </a:prstGeom>
-          <a:solidFill>
-            <a:srgbClr val="095292"/>
-          </a:solidFill>
-          <a:ln>
-            <a:noFill/>
-          </a:ln>
-        </p:spPr>
-        <p:style>
-          <a:lnRef idx="1">
-            <a:schemeClr val="accent1"/>
-          </a:lnRef>
-          <a:fillRef idx="3">
-            <a:schemeClr val="accent1"/>
-          </a:fillRef>
-          <a:effectRef idx="2">
-            <a:schemeClr val="accent1"/>
-          </a:effectRef>
-          <a:fontRef idx="minor">
-            <a:schemeClr val="lt1"/>
-          </a:fontRef>
-        </p:style>
-        <p:txBody>
-          <a:bodyPr rtlCol="0" anchor="ctr"/>
-          <a:lstStyle/>
-          <a:p>
-            <a:pPr algn="ctr"/>
-          </a:p>
-        </p:txBody>
-      </p:sp>
-      <p:sp>
-        <p:nvSpPr>
-          <p:cNvPr id="7" name="TextBox 6"/>
+              <a:t>Preguntas frecuentes del grupo (3/3)</a:t>
+            </a:r>
+          </a:p>
+        </p:txBody>
+      </p:sp>
+      <p:sp>
+        <p:nvSpPr>
+          <p:cNvPr id="5" name="TextBox 4"/>
           <p:cNvSpPr txBox="1"/>
           <p:nvPr/>
         </p:nvSpPr>
         <p:spPr>
           <a:xfrm>
-            <a:off x="685800" y="1307592"/>
-            <a:ext cx="10820095" cy="256032"/>
-          </a:xfrm>
-          <a:prstGeom prst="rect">
-            <a:avLst/>
-          </a:prstGeom>
-          <a:noFill/>
-        </p:spPr>
-        <p:txBody>
-          <a:bodyPr wrap="square" anchor="ctr"/>
-          <a:lstStyle/>
-          <a:p>
-            <a:r>
-              <a:rPr sz="1000" b="1" i="0">
-                <a:solidFill>
-                  <a:srgbClr val="269CCB"/>
-                </a:solidFill>
-                <a:latin typeface="Calibri"/>
-              </a:rPr>
-              <a:t>● ● ●</a:t>
-            </a:r>
-          </a:p>
-        </p:txBody>
-      </p:sp>
-      <p:sp>
-        <p:nvSpPr>
-          <p:cNvPr id="8" name="TextBox 7"/>
-          <p:cNvSpPr txBox="1"/>
-          <p:nvPr/>
-        </p:nvSpPr>
-        <p:spPr>
-          <a:xfrm>
-            <a:off x="777240" y="1719072"/>
-            <a:ext cx="10637215" cy="4453128"/>
+            <a:off x="457200" y="1170432"/>
+            <a:ext cx="11277295" cy="5230368"/>
           </a:xfrm>
           <a:prstGeom prst="rect">
             <a:avLst/>
@@ -14356,248 +14062,56 @@
           <a:p>
             <a:pPr>
               <a:spcAft>
-                <a:spcPts val="400"/>
-              </a:spcAft>
-            </a:pPr>
-            <a:r>
-              <a:rPr sz="1400" b="0" i="0">
-                <a:solidFill>
-                  <a:srgbClr val="FFFFFF"/>
-                </a:solidFill>
-                <a:latin typeface="Calibri"/>
-              </a:rPr>
-              <a:t>CREATE OR REPLACE FUNCTION fn_recargo_festivo(p_base DECIMAL, p_dia DATE)</a:t>
-            </a:r>
-          </a:p>
-          <a:p>
-            <a:pPr>
-              <a:spcAft>
-                <a:spcPts val="400"/>
-              </a:spcAft>
-            </a:pPr>
-            <a:r>
-              <a:rPr sz="1400" b="0" i="0">
-                <a:solidFill>
-                  <a:srgbClr val="FFFFFF"/>
-                </a:solidFill>
-                <a:latin typeface="Calibri"/>
-              </a:rPr>
-              <a:t>RETURNS DECIMAL</a:t>
-            </a:r>
-          </a:p>
-          <a:p>
-            <a:pPr>
-              <a:spcAft>
-                <a:spcPts val="400"/>
-              </a:spcAft>
-            </a:pPr>
-            <a:r>
-              <a:rPr sz="1400" b="0" i="0">
-                <a:solidFill>
-                  <a:srgbClr val="FFFFFF"/>
-                </a:solidFill>
-                <a:latin typeface="Calibri"/>
-              </a:rPr>
-              <a:t>LANGUAGE plpgsql</a:t>
-            </a:r>
-          </a:p>
-          <a:p>
-            <a:pPr>
-              <a:spcAft>
-                <a:spcPts val="400"/>
-              </a:spcAft>
-            </a:pPr>
-            <a:r>
-              <a:rPr sz="1400" b="0" i="0">
-                <a:solidFill>
-                  <a:srgbClr val="FFFFFF"/>
-                </a:solidFill>
-                <a:latin typeface="Calibri"/>
-              </a:rPr>
-              <a:t>IMMUTABLE               -- mismo resultado para los mismos argumentos</a:t>
-            </a:r>
-          </a:p>
-          <a:p>
-            <a:pPr>
-              <a:spcAft>
-                <a:spcPts val="400"/>
-              </a:spcAft>
-            </a:pPr>
-            <a:r>
-              <a:rPr sz="1400" b="0" i="0">
-                <a:solidFill>
-                  <a:srgbClr val="FFFFFF"/>
-                </a:solidFill>
-                <a:latin typeface="Calibri"/>
-              </a:rPr>
-              <a:t>AS $$</a:t>
-            </a:r>
-          </a:p>
-          <a:p>
-            <a:pPr>
-              <a:spcAft>
-                <a:spcPts val="400"/>
-              </a:spcAft>
-            </a:pPr>
-            <a:r>
-              <a:rPr sz="1400" b="0" i="0">
-                <a:solidFill>
-                  <a:srgbClr val="FFFFFF"/>
-                </a:solidFill>
-                <a:latin typeface="Calibri"/>
-              </a:rPr>
-              <a:t>BEGIN</a:t>
-            </a:r>
-          </a:p>
-          <a:p>
-            <a:pPr>
-              <a:spcAft>
-                <a:spcPts val="400"/>
-              </a:spcAft>
-            </a:pPr>
-            <a:r>
-              <a:rPr sz="1400" b="0" i="0">
-                <a:solidFill>
-                  <a:srgbClr val="FFFFFF"/>
-                </a:solidFill>
-                <a:latin typeface="Calibri"/>
-              </a:rPr>
-              <a:t>  IF EXTRACT(DOW FROM p_dia) IN (0, 6) THEN   -- 0 domingo, 6 sabado</a:t>
-            </a:r>
-          </a:p>
-          <a:p>
-            <a:pPr>
-              <a:spcAft>
-                <a:spcPts val="400"/>
-              </a:spcAft>
-            </a:pPr>
-            <a:r>
-              <a:rPr sz="1400" b="0" i="0">
-                <a:solidFill>
-                  <a:srgbClr val="FFFFFF"/>
-                </a:solidFill>
-                <a:latin typeface="Calibri"/>
-              </a:rPr>
-              <a:t>    RETURN ROUND(p_base * 1.25, 2);</a:t>
-            </a:r>
-          </a:p>
-          <a:p>
-            <a:pPr>
-              <a:spcAft>
-                <a:spcPts val="400"/>
-              </a:spcAft>
-            </a:pPr>
-            <a:r>
-              <a:rPr sz="1400" b="0" i="0">
-                <a:solidFill>
-                  <a:srgbClr val="FFFFFF"/>
-                </a:solidFill>
-                <a:latin typeface="Calibri"/>
-              </a:rPr>
-              <a:t>  END IF;</a:t>
-            </a:r>
-          </a:p>
-          <a:p>
-            <a:pPr>
-              <a:spcAft>
-                <a:spcPts val="400"/>
-              </a:spcAft>
-            </a:pPr>
-            <a:r>
-              <a:rPr sz="1400" b="0" i="0">
-                <a:solidFill>
-                  <a:srgbClr val="FFFFFF"/>
-                </a:solidFill>
-                <a:latin typeface="Calibri"/>
-              </a:rPr>
-              <a:t>  RETURN ROUND(p_base, 2);</a:t>
-            </a:r>
-          </a:p>
-          <a:p>
-            <a:pPr>
-              <a:spcAft>
-                <a:spcPts val="400"/>
-              </a:spcAft>
-            </a:pPr>
-            <a:r>
-              <a:rPr sz="1400" b="0" i="0">
-                <a:solidFill>
-                  <a:srgbClr val="FFFFFF"/>
-                </a:solidFill>
-                <a:latin typeface="Calibri"/>
-              </a:rPr>
-              <a:t>END;</a:t>
-            </a:r>
-          </a:p>
-          <a:p>
-            <a:pPr>
-              <a:spcAft>
-                <a:spcPts val="400"/>
-              </a:spcAft>
-            </a:pPr>
-            <a:r>
-              <a:rPr sz="1400" b="0" i="0">
-                <a:solidFill>
-                  <a:srgbClr val="FFFFFF"/>
-                </a:solidFill>
-                <a:latin typeface="Calibri"/>
-              </a:rPr>
-              <a:t>$$;</a:t>
-            </a:r>
-          </a:p>
-          <a:p>
-            <a:pPr>
-              <a:spcAft>
-                <a:spcPts val="400"/>
-              </a:spcAft>
-            </a:pPr>
-            <a:r>
-              <a:rPr sz="1400" b="0" i="0">
-                <a:solidFill>
-                  <a:srgbClr val="FFFFFF"/>
-                </a:solidFill>
-                <a:latin typeface="Calibri"/>
-              </a:rPr>
-              <a:t/>
-            </a:r>
-          </a:p>
-          <a:p>
-            <a:pPr>
-              <a:spcAft>
-                <a:spcPts val="400"/>
-              </a:spcAft>
-            </a:pPr>
-            <a:r>
-              <a:rPr sz="1400" b="0" i="0">
-                <a:solidFill>
-                  <a:srgbClr val="FFFFFF"/>
-                </a:solidFill>
-                <a:latin typeface="Calibri"/>
-              </a:rPr>
-              <a:t>-- IMMUTABLE permite indexar la expresion y cachear el resultado. Una funcion</a:t>
-            </a:r>
-          </a:p>
-          <a:p>
-            <a:pPr>
-              <a:spcAft>
-                <a:spcPts val="400"/>
-              </a:spcAft>
-            </a:pPr>
-            <a:r>
-              <a:rPr sz="1400" b="0" i="0">
-                <a:solidFill>
-                  <a:srgbClr val="FFFFFF"/>
-                </a:solidFill>
-                <a:latin typeface="Calibri"/>
-              </a:rPr>
-              <a:t>-- que lee NOW() o una tabla NO es inmutable: seria STABLE o VOLATILE.</a:t>
-            </a:r>
-          </a:p>
-        </p:txBody>
-      </p:sp>
-      <p:sp>
-        <p:nvSpPr>
-          <p:cNvPr id="9" name="TextBox 8"/>
+                <a:spcPts val="800"/>
+              </a:spcAft>
+            </a:pPr>
+            <a:r>
+              <a:rPr sz="2000" b="0" i="0">
+                <a:solidFill>
+                  <a:srgbClr val="333333"/>
+                </a:solidFill>
+                <a:latin typeface="Calibri"/>
+              </a:rPr>
+              <a:t>–   Y si el incidente afecta el esquema completo, audit_cita se pierde junto con todo lo demas y no reconstruye ni una cita.</a:t>
+            </a:r>
+          </a:p>
+          <a:p>
+            <a:pPr>
+              <a:spcAft>
+                <a:spcPts val="800"/>
+              </a:spcAft>
+            </a:pPr>
+            <a:r>
+              <a:rPr sz="2000" b="0" i="0">
+                <a:solidFill>
+                  <a:srgbClr val="333333"/>
+                </a:solidFill>
+                <a:latin typeface="Calibri"/>
+              </a:rPr>
+              <a:t>–   «Por que la auditoria registro dos filas y no tres»: por la clausula WHEN, porque el tercer UPDATE asigno el estado que la cita ya tenia; si registra tres, falta el WHEN.</a:t>
+            </a:r>
+          </a:p>
+          <a:p>
+            <a:pPr>
+              <a:spcAft>
+                <a:spcPts val="800"/>
+              </a:spcAft>
+            </a:pPr>
+            <a:r>
+              <a:rPr sz="2000" b="0" i="0">
+                <a:solidFill>
+                  <a:srgbClr val="333333"/>
+                </a:solidFill>
+                <a:latin typeface="Calibri"/>
+              </a:rPr>
+              <a:t>–   «Por que el trigger de stock deja pasar un TRUNCATE»: porque TRUNCATE no dispara triggers de fila, y eso va escrito en la seccion de lo que el plan no cubre.</a:t>
+            </a:r>
+          </a:p>
+        </p:txBody>
+      </p:sp>
+      <p:sp>
+        <p:nvSpPr>
+          <p:cNvPr id="6" name="TextBox 5"/>
           <p:cNvSpPr txBox="1"/>
           <p:nvPr/>
         </p:nvSpPr>
@@ -14771,7 +14285,7 @@
                 </a:solidFill>
                 <a:latin typeface="Calibri"/>
               </a:rPr>
-              <a:t>Un trigger son DOS objetos: la funcion y la asociacion</a:t>
+              <a:t>La funcion de tarifas, y por que IMMUTABLE importa</a:t>
             </a:r>
           </a:p>
         </p:txBody>
@@ -14920,75 +14434,75 @@
           <a:p>
             <a:pPr>
               <a:spcAft>
-                <a:spcPts val="342"/>
-              </a:spcAft>
-            </a:pPr>
-            <a:r>
-              <a:rPr sz="1200" b="0" i="0">
+                <a:spcPts val="400"/>
+              </a:spcAft>
+            </a:pPr>
+            <a:r>
+              <a:rPr sz="1400" b="0" i="0">
                 <a:solidFill>
                   <a:srgbClr val="FFFFFF"/>
                 </a:solidFill>
                 <a:latin typeface="Calibri"/>
               </a:rPr>
-              <a:t>-- 1. la funcion, que devuelve trigger y ve OLD y NEW</a:t>
-            </a:r>
-          </a:p>
-          <a:p>
-            <a:pPr>
-              <a:spcAft>
-                <a:spcPts val="342"/>
-              </a:spcAft>
-            </a:pPr>
-            <a:r>
-              <a:rPr sz="1200" b="0" i="0">
+              <a:t>CREATE OR REPLACE FUNCTION fn_recargo_festivo(p_base DECIMAL, p_dia DATE)</a:t>
+            </a:r>
+          </a:p>
+          <a:p>
+            <a:pPr>
+              <a:spcAft>
+                <a:spcPts val="400"/>
+              </a:spcAft>
+            </a:pPr>
+            <a:r>
+              <a:rPr sz="1400" b="0" i="0">
                 <a:solidFill>
                   <a:srgbClr val="FFFFFF"/>
                 </a:solidFill>
                 <a:latin typeface="Calibri"/>
               </a:rPr>
-              <a:t>CREATE OR REPLACE FUNCTION fn_trg_audit_cita()</a:t>
-            </a:r>
-          </a:p>
-          <a:p>
-            <a:pPr>
-              <a:spcAft>
-                <a:spcPts val="342"/>
-              </a:spcAft>
-            </a:pPr>
-            <a:r>
-              <a:rPr sz="1200" b="0" i="0">
+              <a:t>RETURNS DECIMAL</a:t>
+            </a:r>
+          </a:p>
+          <a:p>
+            <a:pPr>
+              <a:spcAft>
+                <a:spcPts val="400"/>
+              </a:spcAft>
+            </a:pPr>
+            <a:r>
+              <a:rPr sz="1400" b="0" i="0">
                 <a:solidFill>
                   <a:srgbClr val="FFFFFF"/>
                 </a:solidFill>
                 <a:latin typeface="Calibri"/>
               </a:rPr>
-              <a:t>RETURNS trigger</a:t>
-            </a:r>
-          </a:p>
-          <a:p>
-            <a:pPr>
-              <a:spcAft>
-                <a:spcPts val="342"/>
-              </a:spcAft>
-            </a:pPr>
-            <a:r>
-              <a:rPr sz="1200" b="0" i="0">
+              <a:t>LANGUAGE plpgsql</a:t>
+            </a:r>
+          </a:p>
+          <a:p>
+            <a:pPr>
+              <a:spcAft>
+                <a:spcPts val="400"/>
+              </a:spcAft>
+            </a:pPr>
+            <a:r>
+              <a:rPr sz="1400" b="0" i="0">
                 <a:solidFill>
                   <a:srgbClr val="FFFFFF"/>
                 </a:solidFill>
                 <a:latin typeface="Calibri"/>
               </a:rPr>
-              <a:t>LANGUAGE plpgsql</a:t>
-            </a:r>
-          </a:p>
-          <a:p>
-            <a:pPr>
-              <a:spcAft>
-                <a:spcPts val="342"/>
-              </a:spcAft>
-            </a:pPr>
-            <a:r>
-              <a:rPr sz="1200" b="0" i="0">
+              <a:t>IMMUTABLE               -- mismo resultado para los mismos argumentos</a:t>
+            </a:r>
+          </a:p>
+          <a:p>
+            <a:pPr>
+              <a:spcAft>
+                <a:spcPts val="400"/>
+              </a:spcAft>
+            </a:pPr>
+            <a:r>
+              <a:rPr sz="1400" b="0" i="0">
                 <a:solidFill>
                   <a:srgbClr val="FFFFFF"/>
                 </a:solidFill>
@@ -15000,11 +14514,11 @@
           <a:p>
             <a:pPr>
               <a:spcAft>
-                <a:spcPts val="342"/>
-              </a:spcAft>
-            </a:pPr>
-            <a:r>
-              <a:rPr sz="1200" b="0" i="0">
+                <a:spcPts val="400"/>
+              </a:spcAft>
+            </a:pPr>
+            <a:r>
+              <a:rPr sz="1400" b="0" i="0">
                 <a:solidFill>
                   <a:srgbClr val="FFFFFF"/>
                 </a:solidFill>
@@ -15016,75 +14530,91 @@
           <a:p>
             <a:pPr>
               <a:spcAft>
-                <a:spcPts val="342"/>
-              </a:spcAft>
-            </a:pPr>
-            <a:r>
-              <a:rPr sz="1200" b="0" i="0">
+                <a:spcPts val="400"/>
+              </a:spcAft>
+            </a:pPr>
+            <a:r>
+              <a:rPr sz="1400" b="0" i="0">
                 <a:solidFill>
                   <a:srgbClr val="FFFFFF"/>
                 </a:solidFill>
                 <a:latin typeface="Calibri"/>
               </a:rPr>
-              <a:t>  INSERT INTO auditoria_cita (id_cita, estado_ant, estado_nue, cambiado_en)</a:t>
-            </a:r>
-          </a:p>
-          <a:p>
-            <a:pPr>
-              <a:spcAft>
-                <a:spcPts val="342"/>
-              </a:spcAft>
-            </a:pPr>
-            <a:r>
-              <a:rPr sz="1200" b="0" i="0">
+              <a:t>  IF EXTRACT(DOW FROM p_dia) IN (0, 6) THEN   -- 0 domingo, 6 sabado</a:t>
+            </a:r>
+          </a:p>
+          <a:p>
+            <a:pPr>
+              <a:spcAft>
+                <a:spcPts val="400"/>
+              </a:spcAft>
+            </a:pPr>
+            <a:r>
+              <a:rPr sz="1400" b="0" i="0">
                 <a:solidFill>
                   <a:srgbClr val="FFFFFF"/>
                 </a:solidFill>
                 <a:latin typeface="Calibri"/>
               </a:rPr>
-              <a:t>  VALUES (OLD.id_cita, OLD.estado, NEW.estado, NOW());</a:t>
-            </a:r>
-          </a:p>
-          <a:p>
-            <a:pPr>
-              <a:spcAft>
-                <a:spcPts val="342"/>
-              </a:spcAft>
-            </a:pPr>
-            <a:r>
-              <a:rPr sz="1200" b="0" i="0">
+              <a:t>    RETURN ROUND(p_base * 1.25, 2);</a:t>
+            </a:r>
+          </a:p>
+          <a:p>
+            <a:pPr>
+              <a:spcAft>
+                <a:spcPts val="400"/>
+              </a:spcAft>
+            </a:pPr>
+            <a:r>
+              <a:rPr sz="1400" b="0" i="0">
                 <a:solidFill>
                   <a:srgbClr val="FFFFFF"/>
                 </a:solidFill>
                 <a:latin typeface="Calibri"/>
               </a:rPr>
-              <a:t>  RETURN NEW;          -- en AFTER el valor se ignora, pero no se omite</a:t>
-            </a:r>
-          </a:p>
-          <a:p>
-            <a:pPr>
-              <a:spcAft>
-                <a:spcPts val="342"/>
-              </a:spcAft>
-            </a:pPr>
-            <a:r>
-              <a:rPr sz="1200" b="0" i="0">
+              <a:t>  END IF;</a:t>
+            </a:r>
+          </a:p>
+          <a:p>
+            <a:pPr>
+              <a:spcAft>
+                <a:spcPts val="400"/>
+              </a:spcAft>
+            </a:pPr>
+            <a:r>
+              <a:rPr sz="1400" b="0" i="0">
                 <a:solidFill>
                   <a:srgbClr val="FFFFFF"/>
                 </a:solidFill>
                 <a:latin typeface="Calibri"/>
               </a:rPr>
+              <a:t>  RETURN ROUND(p_base, 2);</a:t>
+            </a:r>
+          </a:p>
+          <a:p>
+            <a:pPr>
+              <a:spcAft>
+                <a:spcPts val="400"/>
+              </a:spcAft>
+            </a:pPr>
+            <a:r>
+              <a:rPr sz="1400" b="0" i="0">
+                <a:solidFill>
+                  <a:srgbClr val="FFFFFF"/>
+                </a:solidFill>
+                <a:latin typeface="Calibri"/>
+              </a:rPr>
               <a:t>END;</a:t>
             </a:r>
           </a:p>
           <a:p>
             <a:pPr>
               <a:spcAft>
-                <a:spcPts val="342"/>
-              </a:spcAft>
-            </a:pPr>
-            <a:r>
-              <a:rPr sz="1200" b="0" i="0">
+                <a:spcPts val="400"/>
+              </a:spcAft>
+            </a:pPr>
+            <a:r>
+              <a:rPr sz="1400" b="0" i="0">
                 <a:solidFill>
                   <a:srgbClr val="FFFFFF"/>
                 </a:solidFill>
@@ -15096,11 +14626,11 @@
           <a:p>
             <a:pPr>
               <a:spcAft>
-                <a:spcPts val="342"/>
-              </a:spcAft>
-            </a:pPr>
-            <a:r>
-              <a:rPr sz="1200" b="0" i="0">
+                <a:spcPts val="400"/>
+              </a:spcAft>
+            </a:pPr>
+            <a:r>
+              <a:rPr sz="1400" b="0" i="0">
                 <a:solidFill>
                   <a:srgbClr val="FFFFFF"/>
                 </a:solidFill>
@@ -15112,97 +14642,33 @@
           <a:p>
             <a:pPr>
               <a:spcAft>
-                <a:spcPts val="342"/>
-              </a:spcAft>
-            </a:pPr>
-            <a:r>
-              <a:rPr sz="1200" b="0" i="0">
+                <a:spcPts val="400"/>
+              </a:spcAft>
+            </a:pPr>
+            <a:r>
+              <a:rPr sz="1400" b="0" i="0">
                 <a:solidFill>
                   <a:srgbClr val="FFFFFF"/>
                 </a:solidFill>
                 <a:latin typeface="Calibri"/>
               </a:rPr>
-              <a:t>-- 2. la asociacion, que dice CUANDO se dispara</a:t>
-            </a:r>
-          </a:p>
-          <a:p>
-            <a:pPr>
-              <a:spcAft>
-                <a:spcPts val="342"/>
-              </a:spcAft>
-            </a:pPr>
-            <a:r>
-              <a:rPr sz="1200" b="0" i="0">
+              <a:t>-- IMMUTABLE permite indexar la expresion y cachear el resultado. Una funcion</a:t>
+            </a:r>
+          </a:p>
+          <a:p>
+            <a:pPr>
+              <a:spcAft>
+                <a:spcPts val="400"/>
+              </a:spcAft>
+            </a:pPr>
+            <a:r>
+              <a:rPr sz="1400" b="0" i="0">
                 <a:solidFill>
                   <a:srgbClr val="FFFFFF"/>
                 </a:solidFill>
                 <a:latin typeface="Calibri"/>
               </a:rPr>
-              <a:t>CREATE TRIGGER trg_audit_cita</a:t>
-            </a:r>
-          </a:p>
-          <a:p>
-            <a:pPr>
-              <a:spcAft>
-                <a:spcPts val="342"/>
-              </a:spcAft>
-            </a:pPr>
-            <a:r>
-              <a:rPr sz="1200" b="0" i="0">
-                <a:solidFill>
-                  <a:srgbClr val="FFFFFF"/>
-                </a:solidFill>
-                <a:latin typeface="Calibri"/>
-              </a:rPr>
-              <a:t>AFTER UPDATE OF estado ON cita</a:t>
-            </a:r>
-          </a:p>
-          <a:p>
-            <a:pPr>
-              <a:spcAft>
-                <a:spcPts val="342"/>
-              </a:spcAft>
-            </a:pPr>
-            <a:r>
-              <a:rPr sz="1200" b="0" i="0">
-                <a:solidFill>
-                  <a:srgbClr val="FFFFFF"/>
-                </a:solidFill>
-                <a:latin typeface="Calibri"/>
-              </a:rPr>
-              <a:t>FOR EACH ROW</a:t>
-            </a:r>
-          </a:p>
-          <a:p>
-            <a:pPr>
-              <a:spcAft>
-                <a:spcPts val="342"/>
-              </a:spcAft>
-            </a:pPr>
-            <a:r>
-              <a:rPr sz="1200" b="0" i="0">
-                <a:solidFill>
-                  <a:srgbClr val="FFFFFF"/>
-                </a:solidFill>
-                <a:latin typeface="Calibri"/>
-              </a:rPr>
-              <a:t>WHEN (OLD.estado IS DISTINCT FROM NEW.estado)   -- no auditar no-cambios</a:t>
-            </a:r>
-          </a:p>
-          <a:p>
-            <a:pPr>
-              <a:spcAft>
-                <a:spcPts val="342"/>
-              </a:spcAft>
-            </a:pPr>
-            <a:r>
-              <a:rPr sz="1200" b="0" i="0">
-                <a:solidFill>
-                  <a:srgbClr val="FFFFFF"/>
-                </a:solidFill>
-                <a:latin typeface="Calibri"/>
-              </a:rPr>
-              <a:t>EXECUTE FUNCTION fn_trg_audit_cita();</a:t>
+              <a:t>-- que lee NOW() o una tabla NO es inmutable: seria STABLE o VOLATILE.</a:t>
             </a:r>
           </a:p>
         </p:txBody>
@@ -15667,7 +15133,7 @@
                 </a:solidFill>
                 <a:latin typeface="Calibri"/>
               </a:rPr>
-              <a:t>BEFORE o AFTER: uno puede impedir, el otro solo registrar</a:t>
+              <a:t>Un trigger son DOS objetos: la funcion y la asociacion</a:t>
             </a:r>
           </a:p>
         </p:txBody>
@@ -15816,43 +15282,43 @@
           <a:p>
             <a:pPr>
               <a:spcAft>
-                <a:spcPts val="400"/>
-              </a:spcAft>
-            </a:pPr>
-            <a:r>
-              <a:rPr sz="1400" b="0" i="0">
+                <a:spcPts val="342"/>
+              </a:spcAft>
+            </a:pPr>
+            <a:r>
+              <a:rPr sz="1200" b="0" i="0">
                 <a:solidFill>
                   <a:srgbClr val="FFFFFF"/>
                 </a:solidFill>
                 <a:latin typeface="Calibri"/>
               </a:rPr>
-              <a:t>-- BEFORE puede cambiar NEW o abortar. Es el que IMPIDE.</a:t>
-            </a:r>
-          </a:p>
-          <a:p>
-            <a:pPr>
-              <a:spcAft>
-                <a:spcPts val="400"/>
-              </a:spcAft>
-            </a:pPr>
-            <a:r>
-              <a:rPr sz="1400" b="0" i="0">
+              <a:t>-- 1. la funcion, que devuelve trigger y ve OLD y NEW</a:t>
+            </a:r>
+          </a:p>
+          <a:p>
+            <a:pPr>
+              <a:spcAft>
+                <a:spcPts val="342"/>
+              </a:spcAft>
+            </a:pPr>
+            <a:r>
+              <a:rPr sz="1200" b="0" i="0">
                 <a:solidFill>
                   <a:srgbClr val="FFFFFF"/>
                 </a:solidFill>
                 <a:latin typeface="Calibri"/>
               </a:rPr>
-              <a:t>CREATE OR REPLACE FUNCTION fn_trg_stock_no_negativo()</a:t>
-            </a:r>
-          </a:p>
-          <a:p>
-            <a:pPr>
-              <a:spcAft>
-                <a:spcPts val="400"/>
-              </a:spcAft>
-            </a:pPr>
-            <a:r>
-              <a:rPr sz="1400" b="0" i="0">
+              <a:t>CREATE OR REPLACE FUNCTION fn_trg_audit_cita()</a:t>
+            </a:r>
+          </a:p>
+          <a:p>
+            <a:pPr>
+              <a:spcAft>
+                <a:spcPts val="342"/>
+              </a:spcAft>
+            </a:pPr>
+            <a:r>
+              <a:rPr sz="1200" b="0" i="0">
                 <a:solidFill>
                   <a:srgbClr val="FFFFFF"/>
                 </a:solidFill>
@@ -15864,11 +15330,11 @@
           <a:p>
             <a:pPr>
               <a:spcAft>
-                <a:spcPts val="400"/>
-              </a:spcAft>
-            </a:pPr>
-            <a:r>
-              <a:rPr sz="1400" b="0" i="0">
+                <a:spcPts val="342"/>
+              </a:spcAft>
+            </a:pPr>
+            <a:r>
+              <a:rPr sz="1200" b="0" i="0">
                 <a:solidFill>
                   <a:srgbClr val="FFFFFF"/>
                 </a:solidFill>
@@ -15880,11 +15346,11 @@
           <a:p>
             <a:pPr>
               <a:spcAft>
-                <a:spcPts val="400"/>
-              </a:spcAft>
-            </a:pPr>
-            <a:r>
-              <a:rPr sz="1400" b="0" i="0">
+                <a:spcPts val="342"/>
+              </a:spcAft>
+            </a:pPr>
+            <a:r>
+              <a:rPr sz="1200" b="0" i="0">
                 <a:solidFill>
                   <a:srgbClr val="FFFFFF"/>
                 </a:solidFill>
@@ -15896,11 +15362,11 @@
           <a:p>
             <a:pPr>
               <a:spcAft>
-                <a:spcPts val="400"/>
-              </a:spcAft>
-            </a:pPr>
-            <a:r>
-              <a:rPr sz="1400" b="0" i="0">
+                <a:spcPts val="342"/>
+              </a:spcAft>
+            </a:pPr>
+            <a:r>
+              <a:rPr sz="1200" b="0" i="0">
                 <a:solidFill>
                   <a:srgbClr val="FFFFFF"/>
                 </a:solidFill>
@@ -15912,161 +15378,193 @@
           <a:p>
             <a:pPr>
               <a:spcAft>
-                <a:spcPts val="400"/>
-              </a:spcAft>
-            </a:pPr>
-            <a:r>
-              <a:rPr sz="1400" b="0" i="0">
+                <a:spcPts val="342"/>
+              </a:spcAft>
+            </a:pPr>
+            <a:r>
+              <a:rPr sz="1200" b="0" i="0">
                 <a:solidFill>
                   <a:srgbClr val="FFFFFF"/>
                 </a:solidFill>
                 <a:latin typeface="Calibri"/>
               </a:rPr>
-              <a:t>  IF NEW.stock &lt; 0 THEN</a:t>
-            </a:r>
-          </a:p>
-          <a:p>
-            <a:pPr>
-              <a:spcAft>
-                <a:spcPts val="400"/>
-              </a:spcAft>
-            </a:pPr>
-            <a:r>
-              <a:rPr sz="1400" b="0" i="0">
+              <a:t>  INSERT INTO auditoria_cita (id_cita, estado_ant, estado_nue, cambiado_en)</a:t>
+            </a:r>
+          </a:p>
+          <a:p>
+            <a:pPr>
+              <a:spcAft>
+                <a:spcPts val="342"/>
+              </a:spcAft>
+            </a:pPr>
+            <a:r>
+              <a:rPr sz="1200" b="0" i="0">
                 <a:solidFill>
                   <a:srgbClr val="FFFFFF"/>
                 </a:solidFill>
                 <a:latin typeface="Calibri"/>
               </a:rPr>
-              <a:t>    RAISE EXCEPTION 'Stock negativo en el insumo % (%)', NEW.id_insumo, NEW.stock;</a:t>
-            </a:r>
-          </a:p>
-          <a:p>
-            <a:pPr>
-              <a:spcAft>
-                <a:spcPts val="400"/>
-              </a:spcAft>
-            </a:pPr>
-            <a:r>
-              <a:rPr sz="1400" b="0" i="0">
+              <a:t>  VALUES (OLD.id_cita, OLD.estado, NEW.estado, NOW());</a:t>
+            </a:r>
+          </a:p>
+          <a:p>
+            <a:pPr>
+              <a:spcAft>
+                <a:spcPts val="342"/>
+              </a:spcAft>
+            </a:pPr>
+            <a:r>
+              <a:rPr sz="1200" b="0" i="0">
                 <a:solidFill>
                   <a:srgbClr val="FFFFFF"/>
                 </a:solidFill>
                 <a:latin typeface="Calibri"/>
               </a:rPr>
-              <a:t>  END IF;</a:t>
-            </a:r>
-          </a:p>
-          <a:p>
-            <a:pPr>
-              <a:spcAft>
-                <a:spcPts val="400"/>
-              </a:spcAft>
-            </a:pPr>
-            <a:r>
-              <a:rPr sz="1400" b="0" i="0">
+              <a:t>  RETURN NEW;          -- en AFTER el valor se ignora, pero no se omite</a:t>
+            </a:r>
+          </a:p>
+          <a:p>
+            <a:pPr>
+              <a:spcAft>
+                <a:spcPts val="342"/>
+              </a:spcAft>
+            </a:pPr>
+            <a:r>
+              <a:rPr sz="1200" b="0" i="0">
                 <a:solidFill>
                   <a:srgbClr val="FFFFFF"/>
                 </a:solidFill>
                 <a:latin typeface="Calibri"/>
               </a:rPr>
-              <a:t>  RETURN NEW;          -- en BEFORE, devolver NULL cancela la operacion</a:t>
-            </a:r>
-          </a:p>
-          <a:p>
-            <a:pPr>
-              <a:spcAft>
-                <a:spcPts val="400"/>
-              </a:spcAft>
-            </a:pPr>
-            <a:r>
-              <a:rPr sz="1400" b="0" i="0">
+              <a:t>END;</a:t>
+            </a:r>
+          </a:p>
+          <a:p>
+            <a:pPr>
+              <a:spcAft>
+                <a:spcPts val="342"/>
+              </a:spcAft>
+            </a:pPr>
+            <a:r>
+              <a:rPr sz="1200" b="0" i="0">
                 <a:solidFill>
                   <a:srgbClr val="FFFFFF"/>
                 </a:solidFill>
                 <a:latin typeface="Calibri"/>
               </a:rPr>
-              <a:t>END;</a:t>
-            </a:r>
-          </a:p>
-          <a:p>
-            <a:pPr>
-              <a:spcAft>
-                <a:spcPts val="400"/>
-              </a:spcAft>
-            </a:pPr>
-            <a:r>
-              <a:rPr sz="1400" b="0" i="0">
+              <a:t>$$;</a:t>
+            </a:r>
+          </a:p>
+          <a:p>
+            <a:pPr>
+              <a:spcAft>
+                <a:spcPts val="342"/>
+              </a:spcAft>
+            </a:pPr>
+            <a:r>
+              <a:rPr sz="1200" b="0" i="0">
                 <a:solidFill>
                   <a:srgbClr val="FFFFFF"/>
                 </a:solidFill>
                 <a:latin typeface="Calibri"/>
               </a:rPr>
-              <a:t>$$;</a:t>
-            </a:r>
-          </a:p>
-          <a:p>
-            <a:pPr>
-              <a:spcAft>
-                <a:spcPts val="400"/>
-              </a:spcAft>
-            </a:pPr>
-            <a:r>
-              <a:rPr sz="1400" b="0" i="0">
+              <a:t/>
+            </a:r>
+          </a:p>
+          <a:p>
+            <a:pPr>
+              <a:spcAft>
+                <a:spcPts val="342"/>
+              </a:spcAft>
+            </a:pPr>
+            <a:r>
+              <a:rPr sz="1200" b="0" i="0">
                 <a:solidFill>
                   <a:srgbClr val="FFFFFF"/>
                 </a:solidFill>
                 <a:latin typeface="Calibri"/>
               </a:rPr>
-              <a:t/>
-            </a:r>
-          </a:p>
-          <a:p>
-            <a:pPr>
-              <a:spcAft>
-                <a:spcPts val="400"/>
-              </a:spcAft>
-            </a:pPr>
-            <a:r>
-              <a:rPr sz="1400" b="0" i="0">
+              <a:t>-- 2. la asociacion, que dice CUANDO se dispara</a:t>
+            </a:r>
+          </a:p>
+          <a:p>
+            <a:pPr>
+              <a:spcAft>
+                <a:spcPts val="342"/>
+              </a:spcAft>
+            </a:pPr>
+            <a:r>
+              <a:rPr sz="1200" b="0" i="0">
                 <a:solidFill>
                   <a:srgbClr val="FFFFFF"/>
                 </a:solidFill>
                 <a:latin typeface="Calibri"/>
               </a:rPr>
-              <a:t>CREATE TRIGGER trg_stock_no_negativo</a:t>
-            </a:r>
-          </a:p>
-          <a:p>
-            <a:pPr>
-              <a:spcAft>
-                <a:spcPts val="400"/>
-              </a:spcAft>
-            </a:pPr>
-            <a:r>
-              <a:rPr sz="1400" b="0" i="0">
+              <a:t>CREATE TRIGGER trg_audit_cita</a:t>
+            </a:r>
+          </a:p>
+          <a:p>
+            <a:pPr>
+              <a:spcAft>
+                <a:spcPts val="342"/>
+              </a:spcAft>
+            </a:pPr>
+            <a:r>
+              <a:rPr sz="1200" b="0" i="0">
                 <a:solidFill>
                   <a:srgbClr val="FFFFFF"/>
                 </a:solidFill>
                 <a:latin typeface="Calibri"/>
               </a:rPr>
-              <a:t>BEFORE UPDATE OF stock ON insumo</a:t>
-            </a:r>
-          </a:p>
-          <a:p>
-            <a:pPr>
-              <a:spcAft>
-                <a:spcPts val="400"/>
-              </a:spcAft>
-            </a:pPr>
-            <a:r>
-              <a:rPr sz="1400" b="0" i="0">
+              <a:t>AFTER UPDATE OF estado ON cita</a:t>
+            </a:r>
+          </a:p>
+          <a:p>
+            <a:pPr>
+              <a:spcAft>
+                <a:spcPts val="342"/>
+              </a:spcAft>
+            </a:pPr>
+            <a:r>
+              <a:rPr sz="1200" b="0" i="0">
                 <a:solidFill>
                   <a:srgbClr val="FFFFFF"/>
                 </a:solidFill>
                 <a:latin typeface="Calibri"/>
               </a:rPr>
-              <a:t>FOR EACH ROW EXECUTE FUNCTION fn_trg_stock_no_negativo();</a:t>
+              <a:t>FOR EACH ROW</a:t>
+            </a:r>
+          </a:p>
+          <a:p>
+            <a:pPr>
+              <a:spcAft>
+                <a:spcPts val="342"/>
+              </a:spcAft>
+            </a:pPr>
+            <a:r>
+              <a:rPr sz="1200" b="0" i="0">
+                <a:solidFill>
+                  <a:srgbClr val="FFFFFF"/>
+                </a:solidFill>
+                <a:latin typeface="Calibri"/>
+              </a:rPr>
+              <a:t>WHEN (OLD.estado IS DISTINCT FROM NEW.estado)   -- no auditar no-cambios</a:t>
+            </a:r>
+          </a:p>
+          <a:p>
+            <a:pPr>
+              <a:spcAft>
+                <a:spcPts val="342"/>
+              </a:spcAft>
+            </a:pPr>
+            <a:r>
+              <a:rPr sz="1200" b="0" i="0">
+                <a:solidFill>
+                  <a:srgbClr val="FFFFFF"/>
+                </a:solidFill>
+                <a:latin typeface="Calibri"/>
+              </a:rPr>
+              <a:t>EXECUTE FUNCTION fn_trg_audit_cita();</a:t>
             </a:r>
           </a:p>
         </p:txBody>
@@ -16247,7 +15745,7 @@
                 </a:solidFill>
                 <a:latin typeface="Calibri"/>
               </a:rPr>
-              <a:t>Las cuatro capas, y en cual vive cada regla</a:t>
+              <a:t>BEFORE o AFTER: uno puede impedir, el otro solo registrar</a:t>
             </a:r>
           </a:p>
         </p:txBody>
@@ -16406,7 +15904,7 @@
                 </a:solidFill>
                 <a:latin typeface="Calibri"/>
               </a:rPr>
-              <a:t>-- 1. CHECK: mira SOLO columnas de su propia fila. Barato y siempre activo.</a:t>
+              <a:t>-- BEFORE puede cambiar NEW o abortar. Es el que IMPIDE.</a:t>
             </a:r>
           </a:p>
           <a:p>
@@ -16422,7 +15920,7 @@
                 </a:solidFill>
                 <a:latin typeface="Calibri"/>
               </a:rPr>
-              <a:t>ALTER TABLE insumo ADD CONSTRAINT ck_precio_pos CHECK (precio &gt; 0);</a:t>
+              <a:t>CREATE OR REPLACE FUNCTION fn_trg_stock_no_negativo()</a:t>
             </a:r>
           </a:p>
           <a:p>
@@ -16438,6 +15936,166 @@
                 </a:solidFill>
                 <a:latin typeface="Calibri"/>
               </a:rPr>
+              <a:t>RETURNS trigger</a:t>
+            </a:r>
+          </a:p>
+          <a:p>
+            <a:pPr>
+              <a:spcAft>
+                <a:spcPts val="400"/>
+              </a:spcAft>
+            </a:pPr>
+            <a:r>
+              <a:rPr sz="1400" b="0" i="0">
+                <a:solidFill>
+                  <a:srgbClr val="FFFFFF"/>
+                </a:solidFill>
+                <a:latin typeface="Calibri"/>
+              </a:rPr>
+              <a:t>LANGUAGE plpgsql</a:t>
+            </a:r>
+          </a:p>
+          <a:p>
+            <a:pPr>
+              <a:spcAft>
+                <a:spcPts val="400"/>
+              </a:spcAft>
+            </a:pPr>
+            <a:r>
+              <a:rPr sz="1400" b="0" i="0">
+                <a:solidFill>
+                  <a:srgbClr val="FFFFFF"/>
+                </a:solidFill>
+                <a:latin typeface="Calibri"/>
+              </a:rPr>
+              <a:t>AS $$</a:t>
+            </a:r>
+          </a:p>
+          <a:p>
+            <a:pPr>
+              <a:spcAft>
+                <a:spcPts val="400"/>
+              </a:spcAft>
+            </a:pPr>
+            <a:r>
+              <a:rPr sz="1400" b="0" i="0">
+                <a:solidFill>
+                  <a:srgbClr val="FFFFFF"/>
+                </a:solidFill>
+                <a:latin typeface="Calibri"/>
+              </a:rPr>
+              <a:t>BEGIN</a:t>
+            </a:r>
+          </a:p>
+          <a:p>
+            <a:pPr>
+              <a:spcAft>
+                <a:spcPts val="400"/>
+              </a:spcAft>
+            </a:pPr>
+            <a:r>
+              <a:rPr sz="1400" b="0" i="0">
+                <a:solidFill>
+                  <a:srgbClr val="FFFFFF"/>
+                </a:solidFill>
+                <a:latin typeface="Calibri"/>
+              </a:rPr>
+              <a:t>  IF NEW.stock &lt; 0 THEN</a:t>
+            </a:r>
+          </a:p>
+          <a:p>
+            <a:pPr>
+              <a:spcAft>
+                <a:spcPts val="400"/>
+              </a:spcAft>
+            </a:pPr>
+            <a:r>
+              <a:rPr sz="1400" b="0" i="0">
+                <a:solidFill>
+                  <a:srgbClr val="FFFFFF"/>
+                </a:solidFill>
+                <a:latin typeface="Calibri"/>
+              </a:rPr>
+              <a:t>    RAISE EXCEPTION 'Stock negativo en el insumo % (%)', NEW.id_insumo, NEW.stock;</a:t>
+            </a:r>
+          </a:p>
+          <a:p>
+            <a:pPr>
+              <a:spcAft>
+                <a:spcPts val="400"/>
+              </a:spcAft>
+            </a:pPr>
+            <a:r>
+              <a:rPr sz="1400" b="0" i="0">
+                <a:solidFill>
+                  <a:srgbClr val="FFFFFF"/>
+                </a:solidFill>
+                <a:latin typeface="Calibri"/>
+              </a:rPr>
+              <a:t>  END IF;</a:t>
+            </a:r>
+          </a:p>
+          <a:p>
+            <a:pPr>
+              <a:spcAft>
+                <a:spcPts val="400"/>
+              </a:spcAft>
+            </a:pPr>
+            <a:r>
+              <a:rPr sz="1400" b="0" i="0">
+                <a:solidFill>
+                  <a:srgbClr val="FFFFFF"/>
+                </a:solidFill>
+                <a:latin typeface="Calibri"/>
+              </a:rPr>
+              <a:t>  RETURN NEW;          -- en BEFORE, devolver NULL cancela la operacion</a:t>
+            </a:r>
+          </a:p>
+          <a:p>
+            <a:pPr>
+              <a:spcAft>
+                <a:spcPts val="400"/>
+              </a:spcAft>
+            </a:pPr>
+            <a:r>
+              <a:rPr sz="1400" b="0" i="0">
+                <a:solidFill>
+                  <a:srgbClr val="FFFFFF"/>
+                </a:solidFill>
+                <a:latin typeface="Calibri"/>
+              </a:rPr>
+              <a:t>END;</a:t>
+            </a:r>
+          </a:p>
+          <a:p>
+            <a:pPr>
+              <a:spcAft>
+                <a:spcPts val="400"/>
+              </a:spcAft>
+            </a:pPr>
+            <a:r>
+              <a:rPr sz="1400" b="0" i="0">
+                <a:solidFill>
+                  <a:srgbClr val="FFFFFF"/>
+                </a:solidFill>
+                <a:latin typeface="Calibri"/>
+              </a:rPr>
+              <a:t>$$;</a:t>
+            </a:r>
+          </a:p>
+          <a:p>
+            <a:pPr>
+              <a:spcAft>
+                <a:spcPts val="400"/>
+              </a:spcAft>
+            </a:pPr>
+            <a:r>
+              <a:rPr sz="1400" b="0" i="0">
+                <a:solidFill>
+                  <a:srgbClr val="FFFFFF"/>
+                </a:solidFill>
+                <a:latin typeface="Calibri"/>
+              </a:rPr>
               <a:t/>
             </a:r>
           </a:p>
@@ -16454,7 +16112,7 @@
                 </a:solidFill>
                 <a:latin typeface="Calibri"/>
               </a:rPr>
-              <a:t>-- 2. PROCEDIMIENTO: necesita consultar otra tabla. Solo aplica si se llama.</a:t>
+              <a:t>CREATE TRIGGER trg_stock_no_negativo</a:t>
             </a:r>
           </a:p>
           <a:p>
@@ -16470,7 +16128,7 @@
                 </a:solidFill>
                 <a:latin typeface="Calibri"/>
               </a:rPr>
-              <a:t>--    IF NOT EXISTS (SELECT 1 FROM mascota WHERE ... AND activa='S') ...</a:t>
+              <a:t>BEFORE UPDATE OF stock ON insumo</a:t>
             </a:r>
           </a:p>
           <a:p>
@@ -16486,87 +16144,7 @@
                 </a:solidFill>
                 <a:latin typeface="Calibri"/>
               </a:rPr>
-              <a:t/>
-            </a:r>
-          </a:p>
-          <a:p>
-            <a:pPr>
-              <a:spcAft>
-                <a:spcPts val="400"/>
-              </a:spcAft>
-            </a:pPr>
-            <a:r>
-              <a:rPr sz="1400" b="0" i="0">
-                <a:solidFill>
-                  <a:srgbClr val="FFFFFF"/>
-                </a:solidFill>
-                <a:latin typeface="Calibri"/>
-              </a:rPr>
-              <a:t>-- 3. TRIGGER: necesita otra tabla Y tiene que aplicar aunque nadie llame.</a:t>
-            </a:r>
-          </a:p>
-          <a:p>
-            <a:pPr>
-              <a:spcAft>
-                <a:spcPts val="400"/>
-              </a:spcAft>
-            </a:pPr>
-            <a:r>
-              <a:rPr sz="1400" b="0" i="0">
-                <a:solidFill>
-                  <a:srgbClr val="FFFFFF"/>
-                </a:solidFill>
-                <a:latin typeface="Calibri"/>
-              </a:rPr>
-              <a:t>--    Es la unica capa que no se puede saltar por la puerta de atras.</a:t>
-            </a:r>
-          </a:p>
-          <a:p>
-            <a:pPr>
-              <a:spcAft>
-                <a:spcPts val="400"/>
-              </a:spcAft>
-            </a:pPr>
-            <a:r>
-              <a:rPr sz="1400" b="0" i="0">
-                <a:solidFill>
-                  <a:srgbClr val="FFFFFF"/>
-                </a:solidFill>
-                <a:latin typeface="Calibri"/>
-              </a:rPr>
-              <a:t/>
-            </a:r>
-          </a:p>
-          <a:p>
-            <a:pPr>
-              <a:spcAft>
-                <a:spcPts val="400"/>
-              </a:spcAft>
-            </a:pPr>
-            <a:r>
-              <a:rPr sz="1400" b="0" i="0">
-                <a:solidFill>
-                  <a:srgbClr val="FFFFFF"/>
-                </a:solidFill>
-                <a:latin typeface="Calibri"/>
-              </a:rPr>
-              <a:t>-- 4. APLICACION: mensajes al usuario y reglas de pantalla. Nunca la ULTIMA</a:t>
-            </a:r>
-          </a:p>
-          <a:p>
-            <a:pPr>
-              <a:spcAft>
-                <a:spcPts val="400"/>
-              </a:spcAft>
-            </a:pPr>
-            <a:r>
-              <a:rPr sz="1400" b="0" i="0">
-                <a:solidFill>
-                  <a:srgbClr val="FFFFFF"/>
-                </a:solidFill>
-                <a:latin typeface="Calibri"/>
-              </a:rPr>
-              <a:t>--    linea de defensa: un psql abierto la deja en cero.</a:t>
+              <a:t>FOR EACH ROW EXECUTE FUNCTION fn_trg_stock_no_negativo();</a:t>
             </a:r>
           </a:p>
         </p:txBody>
@@ -16747,7 +16325,7 @@
                 </a:solidFill>
                 <a:latin typeface="Calibri"/>
               </a:rPr>
-              <a:t>Un trigger son DOS objetos: la funcion y la asociacion</a:t>
+              <a:t>Las cuatro capas, y en cual vive cada regla</a:t>
             </a:r>
           </a:p>
         </p:txBody>
@@ -16761,7 +16339,7 @@
         <p:spPr>
           <a:xfrm>
             <a:off x="457200" y="1261872"/>
-            <a:ext cx="11277295" cy="4773168"/>
+            <a:ext cx="11277295" cy="5093208"/>
           </a:xfrm>
           <a:prstGeom prst="roundRect">
             <a:avLst>
@@ -16881,7 +16459,7 @@
         <p:spPr>
           <a:xfrm>
             <a:off x="777240" y="1719072"/>
-            <a:ext cx="10637215" cy="4133087"/>
+            <a:ext cx="10637215" cy="4453128"/>
           </a:xfrm>
           <a:prstGeom prst="rect">
             <a:avLst/>
@@ -16896,257 +16474,177 @@
           <a:p>
             <a:pPr>
               <a:spcAft>
-                <a:spcPts val="371"/>
-              </a:spcAft>
-            </a:pPr>
-            <a:r>
-              <a:rPr sz="1300" b="0" i="0">
+                <a:spcPts val="400"/>
+              </a:spcAft>
+            </a:pPr>
+            <a:r>
+              <a:rPr sz="1400" b="0" i="0">
                 <a:solidFill>
                   <a:srgbClr val="FFFFFF"/>
                 </a:solidFill>
                 <a:latin typeface="Calibri"/>
               </a:rPr>
-              <a:t>-- 1) La funcion: NEW y OLD SIN dos puntos</a:t>
-            </a:r>
-          </a:p>
-          <a:p>
-            <a:pPr>
-              <a:spcAft>
-                <a:spcPts val="371"/>
-              </a:spcAft>
-            </a:pPr>
-            <a:r>
-              <a:rPr sz="1300" b="0" i="0">
+              <a:t>-- 1. CHECK: mira SOLO columnas de su propia fila. Barato y siempre activo.</a:t>
+            </a:r>
+          </a:p>
+          <a:p>
+            <a:pPr>
+              <a:spcAft>
+                <a:spcPts val="400"/>
+              </a:spcAft>
+            </a:pPr>
+            <a:r>
+              <a:rPr sz="1400" b="0" i="0">
                 <a:solidFill>
                   <a:srgbClr val="FFFFFF"/>
                 </a:solidFill>
                 <a:latin typeface="Calibri"/>
               </a:rPr>
-              <a:t>CREATE OR REPLACE FUNCTION fn_trg_audit_cita()</a:t>
-            </a:r>
-          </a:p>
-          <a:p>
-            <a:pPr>
-              <a:spcAft>
-                <a:spcPts val="371"/>
-              </a:spcAft>
-            </a:pPr>
-            <a:r>
-              <a:rPr sz="1300" b="0" i="0">
+              <a:t>ALTER TABLE insumo ADD CONSTRAINT ck_precio_pos CHECK (precio &gt; 0);</a:t>
+            </a:r>
+          </a:p>
+          <a:p>
+            <a:pPr>
+              <a:spcAft>
+                <a:spcPts val="400"/>
+              </a:spcAft>
+            </a:pPr>
+            <a:r>
+              <a:rPr sz="1400" b="0" i="0">
                 <a:solidFill>
                   <a:srgbClr val="FFFFFF"/>
                 </a:solidFill>
                 <a:latin typeface="Calibri"/>
               </a:rPr>
-              <a:t>RETURNS TRIGGER LANGUAGE plpgsql AS $fn$</a:t>
-            </a:r>
-          </a:p>
-          <a:p>
-            <a:pPr>
-              <a:spcAft>
-                <a:spcPts val="371"/>
-              </a:spcAft>
-            </a:pPr>
-            <a:r>
-              <a:rPr sz="1300" b="0" i="0">
+              <a:t/>
+            </a:r>
+          </a:p>
+          <a:p>
+            <a:pPr>
+              <a:spcAft>
+                <a:spcPts val="400"/>
+              </a:spcAft>
+            </a:pPr>
+            <a:r>
+              <a:rPr sz="1400" b="0" i="0">
                 <a:solidFill>
                   <a:srgbClr val="FFFFFF"/>
                 </a:solidFill>
                 <a:latin typeface="Calibri"/>
               </a:rPr>
-              <a:t>BEGIN</a:t>
-            </a:r>
-          </a:p>
-          <a:p>
-            <a:pPr>
-              <a:spcAft>
-                <a:spcPts val="371"/>
-              </a:spcAft>
-            </a:pPr>
-            <a:r>
-              <a:rPr sz="1300" b="0" i="0">
+              <a:t>-- 2. PROCEDIMIENTO: necesita consultar otra tabla. Solo aplica si se llama.</a:t>
+            </a:r>
+          </a:p>
+          <a:p>
+            <a:pPr>
+              <a:spcAft>
+                <a:spcPts val="400"/>
+              </a:spcAft>
+            </a:pPr>
+            <a:r>
+              <a:rPr sz="1400" b="0" i="0">
                 <a:solidFill>
                   <a:srgbClr val="FFFFFF"/>
                 </a:solidFill>
                 <a:latin typeface="Calibri"/>
               </a:rPr>
-              <a:t>  INSERT INTO audit_cita(id_cita, accion,</a:t>
-            </a:r>
-          </a:p>
-          <a:p>
-            <a:pPr>
-              <a:spcAft>
-                <a:spcPts val="371"/>
-              </a:spcAft>
-            </a:pPr>
-            <a:r>
-              <a:rPr sz="1300" b="0" i="0">
+              <a:t>--    IF NOT EXISTS (SELECT 1 FROM mascota WHERE ... AND activa='S') ...</a:t>
+            </a:r>
+          </a:p>
+          <a:p>
+            <a:pPr>
+              <a:spcAft>
+                <a:spcPts val="400"/>
+              </a:spcAft>
+            </a:pPr>
+            <a:r>
+              <a:rPr sz="1400" b="0" i="0">
                 <a:solidFill>
                   <a:srgbClr val="FFFFFF"/>
                 </a:solidFill>
                 <a:latin typeface="Calibri"/>
               </a:rPr>
-              <a:t>                         valor_anterior, valor_nuevo)</a:t>
-            </a:r>
-          </a:p>
-          <a:p>
-            <a:pPr>
-              <a:spcAft>
-                <a:spcPts val="371"/>
-              </a:spcAft>
-            </a:pPr>
-            <a:r>
-              <a:rPr sz="1300" b="0" i="0">
+              <a:t/>
+            </a:r>
+          </a:p>
+          <a:p>
+            <a:pPr>
+              <a:spcAft>
+                <a:spcPts val="400"/>
+              </a:spcAft>
+            </a:pPr>
+            <a:r>
+              <a:rPr sz="1400" b="0" i="0">
                 <a:solidFill>
                   <a:srgbClr val="FFFFFF"/>
                 </a:solidFill>
                 <a:latin typeface="Calibri"/>
               </a:rPr>
-              <a:t>  VALUES (NEW.id_cita, 'CAMBIO_ESTADO',</a:t>
-            </a:r>
-          </a:p>
-          <a:p>
-            <a:pPr>
-              <a:spcAft>
-                <a:spcPts val="371"/>
-              </a:spcAft>
-            </a:pPr>
-            <a:r>
-              <a:rPr sz="1300" b="0" i="0">
+              <a:t>-- 3. TRIGGER: necesita otra tabla Y tiene que aplicar aunque nadie llame.</a:t>
+            </a:r>
+          </a:p>
+          <a:p>
+            <a:pPr>
+              <a:spcAft>
+                <a:spcPts val="400"/>
+              </a:spcAft>
+            </a:pPr>
+            <a:r>
+              <a:rPr sz="1400" b="0" i="0">
                 <a:solidFill>
                   <a:srgbClr val="FFFFFF"/>
                 </a:solidFill>
                 <a:latin typeface="Calibri"/>
               </a:rPr>
-              <a:t>          OLD.estado, NEW.estado);   -- usuario y fecha: DEFAULT</a:t>
-            </a:r>
-          </a:p>
-          <a:p>
-            <a:pPr>
-              <a:spcAft>
-                <a:spcPts val="371"/>
-              </a:spcAft>
-            </a:pPr>
-            <a:r>
-              <a:rPr sz="1300" b="0" i="0">
+              <a:t>--    Es la unica capa que no se puede saltar por la puerta de atras.</a:t>
+            </a:r>
+          </a:p>
+          <a:p>
+            <a:pPr>
+              <a:spcAft>
+                <a:spcPts val="400"/>
+              </a:spcAft>
+            </a:pPr>
+            <a:r>
+              <a:rPr sz="1400" b="0" i="0">
                 <a:solidFill>
                   <a:srgbClr val="FFFFFF"/>
                 </a:solidFill>
                 <a:latin typeface="Calibri"/>
               </a:rPr>
-              <a:t>  RETURN NEW;                        -- obligatorio</a:t>
-            </a:r>
-          </a:p>
-          <a:p>
-            <a:pPr>
-              <a:spcAft>
-                <a:spcPts val="371"/>
-              </a:spcAft>
-            </a:pPr>
-            <a:r>
-              <a:rPr sz="1300" b="0" i="0">
+              <a:t/>
+            </a:r>
+          </a:p>
+          <a:p>
+            <a:pPr>
+              <a:spcAft>
+                <a:spcPts val="400"/>
+              </a:spcAft>
+            </a:pPr>
+            <a:r>
+              <a:rPr sz="1400" b="0" i="0">
                 <a:solidFill>
                   <a:srgbClr val="FFFFFF"/>
                 </a:solidFill>
                 <a:latin typeface="Calibri"/>
               </a:rPr>
-              <a:t>END; $fn$;</a:t>
-            </a:r>
-          </a:p>
-          <a:p>
-            <a:pPr>
-              <a:spcAft>
-                <a:spcPts val="371"/>
-              </a:spcAft>
-            </a:pPr>
-            <a:r>
-              <a:rPr sz="1300" b="0" i="0">
+              <a:t>-- 4. APLICACION: mensajes al usuario y reglas de pantalla. Nunca la ULTIMA</a:t>
+            </a:r>
+          </a:p>
+          <a:p>
+            <a:pPr>
+              <a:spcAft>
+                <a:spcPts val="400"/>
+              </a:spcAft>
+            </a:pPr>
+            <a:r>
+              <a:rPr sz="1400" b="0" i="0">
                 <a:solidFill>
                   <a:srgbClr val="FFFFFF"/>
                 </a:solidFill>
                 <a:latin typeface="Calibri"/>
               </a:rPr>
-              <a:t/>
-            </a:r>
-          </a:p>
-          <a:p>
-            <a:pPr>
-              <a:spcAft>
-                <a:spcPts val="371"/>
-              </a:spcAft>
-            </a:pPr>
-            <a:r>
-              <a:rPr sz="1300" b="0" i="0">
-                <a:solidFill>
-                  <a:srgbClr val="FFFFFF"/>
-                </a:solidFill>
-                <a:latin typeface="Calibri"/>
-              </a:rPr>
-              <a:t>-- 2) La asociacion: cuando se dispara y a quien llama</a:t>
-            </a:r>
-          </a:p>
-          <a:p>
-            <a:pPr>
-              <a:spcAft>
-                <a:spcPts val="371"/>
-              </a:spcAft>
-            </a:pPr>
-            <a:r>
-              <a:rPr sz="1300" b="0" i="0">
-                <a:solidFill>
-                  <a:srgbClr val="FFFFFF"/>
-                </a:solidFill>
-                <a:latin typeface="Calibri"/>
-              </a:rPr>
-              <a:t>CREATE TRIGGER trg_audit_cita</a:t>
-            </a:r>
-          </a:p>
-          <a:p>
-            <a:pPr>
-              <a:spcAft>
-                <a:spcPts val="371"/>
-              </a:spcAft>
-            </a:pPr>
-            <a:r>
-              <a:rPr sz="1300" b="0" i="0">
-                <a:solidFill>
-                  <a:srgbClr val="FFFFFF"/>
-                </a:solidFill>
-                <a:latin typeface="Calibri"/>
-              </a:rPr>
-              <a:t>AFTER UPDATE OF estado ON cita FOR EACH ROW</a:t>
-            </a:r>
-          </a:p>
-          <a:p>
-            <a:pPr>
-              <a:spcAft>
-                <a:spcPts val="371"/>
-              </a:spcAft>
-            </a:pPr>
-            <a:r>
-              <a:rPr sz="1300" b="0" i="0">
-                <a:solidFill>
-                  <a:srgbClr val="FFFFFF"/>
-                </a:solidFill>
-                <a:latin typeface="Calibri"/>
-              </a:rPr>
-              <a:t>WHEN (OLD.estado IS DISTINCT FROM NEW.estado)</a:t>
-            </a:r>
-          </a:p>
-          <a:p>
-            <a:pPr>
-              <a:spcAft>
-                <a:spcPts val="371"/>
-              </a:spcAft>
-            </a:pPr>
-            <a:r>
-              <a:rPr sz="1300" b="0" i="0">
-                <a:solidFill>
-                  <a:srgbClr val="FFFFFF"/>
-                </a:solidFill>
-                <a:latin typeface="Calibri"/>
-              </a:rPr>
-              <a:t>EXECUTE FUNCTION fn_trg_audit_cita();</a:t>
+              <a:t>--    linea de defensa: un psql abierto la deja en cero.</a:t>
             </a:r>
           </a:p>
         </p:txBody>
@@ -17154,41 +16652,6 @@
       <p:sp>
         <p:nvSpPr>
           <p:cNvPr id="9" name="TextBox 8"/>
-          <p:cNvSpPr txBox="1"/>
-          <p:nvPr/>
-        </p:nvSpPr>
-        <p:spPr>
-          <a:xfrm>
-            <a:off x="457200" y="6080760"/>
-            <a:ext cx="11277295" cy="320040"/>
-          </a:xfrm>
-          <a:prstGeom prst="rect">
-            <a:avLst/>
-          </a:prstGeom>
-          <a:noFill/>
-        </p:spPr>
-        <p:txBody>
-          <a:bodyPr wrap="square">
-            <a:spAutoFit/>
-          </a:bodyPr>
-          <a:lstStyle/>
-          <a:p>
-            <a:pPr algn="ctr"/>
-            <a:r>
-              <a:rPr sz="1200" b="0" i="1">
-                <a:solidFill>
-                  <a:srgbClr val="666666"/>
-                </a:solidFill>
-                <a:latin typeface="Calibri"/>
-              </a:rPr>
-              <a:t>El «WHEN» es lo que hace que 3 UPDATE dejen 2 filas de auditoria. Se dispara solo: el riesgo es que sea invisible para quien solo lee el codigo de la app.</a:t>
-            </a:r>
-          </a:p>
-        </p:txBody>
-      </p:sp>
-      <p:sp>
-        <p:nvSpPr>
-          <p:cNvPr id="10" name="TextBox 9"/>
           <p:cNvSpPr txBox="1"/>
           <p:nvPr/>
         </p:nvSpPr>
@@ -17362,21 +16825,141 @@
                 </a:solidFill>
                 <a:latin typeface="Calibri"/>
               </a:rPr>
-              <a:t>La funcion de tarifas: RETURNS NUMERIC, CASE, COALESCE e IMMUTABLE</a:t>
-            </a:r>
-          </a:p>
-        </p:txBody>
-      </p:sp>
-      <p:sp>
-        <p:nvSpPr>
-          <p:cNvPr id="5" name="TextBox 4"/>
+              <a:t>Un trigger son DOS objetos: la funcion y la asociacion</a:t>
+            </a:r>
+          </a:p>
+        </p:txBody>
+      </p:sp>
+      <p:sp>
+        <p:nvSpPr>
+          <p:cNvPr id="5" name="Rounded Rectangle 4"/>
+          <p:cNvSpPr/>
+          <p:nvPr/>
+        </p:nvSpPr>
+        <p:spPr>
+          <a:xfrm>
+            <a:off x="457200" y="1261872"/>
+            <a:ext cx="11277295" cy="4773168"/>
+          </a:xfrm>
+          <a:prstGeom prst="roundRect">
+            <a:avLst>
+              <a:gd name="adj" fmla="val 12000"/>
+            </a:avLst>
+          </a:prstGeom>
+          <a:solidFill>
+            <a:srgbClr val="1E2A38"/>
+          </a:solidFill>
+          <a:ln>
+            <a:noFill/>
+          </a:ln>
+        </p:spPr>
+        <p:style>
+          <a:lnRef idx="1">
+            <a:schemeClr val="accent1"/>
+          </a:lnRef>
+          <a:fillRef idx="3">
+            <a:schemeClr val="accent1"/>
+          </a:fillRef>
+          <a:effectRef idx="2">
+            <a:schemeClr val="accent1"/>
+          </a:effectRef>
+          <a:fontRef idx="minor">
+            <a:schemeClr val="lt1"/>
+          </a:fontRef>
+        </p:style>
+        <p:txBody>
+          <a:bodyPr rtlCol="0" anchor="ctr"/>
+          <a:lstStyle/>
+          <a:p>
+            <a:pPr algn="ctr"/>
+          </a:p>
+        </p:txBody>
+      </p:sp>
+      <p:sp>
+        <p:nvSpPr>
+          <p:cNvPr id="6" name="Rectangle 5"/>
+          <p:cNvSpPr/>
+          <p:nvPr/>
+        </p:nvSpPr>
+        <p:spPr>
+          <a:xfrm>
+            <a:off x="457200" y="1261872"/>
+            <a:ext cx="11277295" cy="320040"/>
+          </a:xfrm>
+          <a:prstGeom prst="rect">
+            <a:avLst/>
+          </a:prstGeom>
+          <a:solidFill>
+            <a:srgbClr val="095292"/>
+          </a:solidFill>
+          <a:ln>
+            <a:noFill/>
+          </a:ln>
+        </p:spPr>
+        <p:style>
+          <a:lnRef idx="1">
+            <a:schemeClr val="accent1"/>
+          </a:lnRef>
+          <a:fillRef idx="3">
+            <a:schemeClr val="accent1"/>
+          </a:fillRef>
+          <a:effectRef idx="2">
+            <a:schemeClr val="accent1"/>
+          </a:effectRef>
+          <a:fontRef idx="minor">
+            <a:schemeClr val="lt1"/>
+          </a:fontRef>
+        </p:style>
+        <p:txBody>
+          <a:bodyPr rtlCol="0" anchor="ctr"/>
+          <a:lstStyle/>
+          <a:p>
+            <a:pPr algn="ctr"/>
+          </a:p>
+        </p:txBody>
+      </p:sp>
+      <p:sp>
+        <p:nvSpPr>
+          <p:cNvPr id="7" name="TextBox 6"/>
           <p:cNvSpPr txBox="1"/>
           <p:nvPr/>
         </p:nvSpPr>
         <p:spPr>
           <a:xfrm>
-            <a:off x="457200" y="1170432"/>
-            <a:ext cx="11277295" cy="5230368"/>
+            <a:off x="685800" y="1307592"/>
+            <a:ext cx="10820095" cy="256032"/>
+          </a:xfrm>
+          <a:prstGeom prst="rect">
+            <a:avLst/>
+          </a:prstGeom>
+          <a:noFill/>
+        </p:spPr>
+        <p:txBody>
+          <a:bodyPr wrap="square" anchor="ctr"/>
+          <a:lstStyle/>
+          <a:p>
+            <a:r>
+              <a:rPr sz="1000" b="1" i="0">
+                <a:solidFill>
+                  <a:srgbClr val="269CCB"/>
+                </a:solidFill>
+                <a:latin typeface="Calibri"/>
+              </a:rPr>
+              <a:t>● ● ●</a:t>
+            </a:r>
+          </a:p>
+        </p:txBody>
+      </p:sp>
+      <p:sp>
+        <p:nvSpPr>
+          <p:cNvPr id="8" name="TextBox 7"/>
+          <p:cNvSpPr txBox="1"/>
+          <p:nvPr/>
+        </p:nvSpPr>
+        <p:spPr>
+          <a:xfrm>
+            <a:off x="777240" y="1719072"/>
+            <a:ext cx="10637215" cy="4133087"/>
           </a:xfrm>
           <a:prstGeom prst="rect">
             <a:avLst/>
@@ -17391,286 +16974,299 @@
           <a:p>
             <a:pPr>
               <a:spcAft>
-                <a:spcPts val="800"/>
-              </a:spcAft>
-            </a:pPr>
-            <a:r>
-              <a:rPr sz="1900" b="0" i="0">
-                <a:solidFill>
-                  <a:srgbClr val="333333"/>
-                </a:solidFill>
-                <a:latin typeface="Calibri"/>
-              </a:rPr>
-              <a:t>–   </a:t>
-            </a:r>
-            <a:r>
-              <a:rPr sz="1900" b="1" i="0">
-                <a:solidFill>
-                  <a:srgbClr val="333333"/>
-                </a:solidFill>
-                <a:latin typeface="Calibri"/>
-              </a:rPr>
-              <a:t>La firma decide todo lo demas.</a:t>
-            </a:r>
-            <a:r>
-              <a:rPr sz="1900" b="0" i="0">
-                <a:solidFill>
-                  <a:srgbClr val="333333"/>
-                </a:solidFill>
-                <a:latin typeface="Calibri"/>
-              </a:rPr>
-              <a:t> «CREATE FUNCTION fn_precio_consulta(p_especie TEXT, p_urgencia BOOLEAN) RETURNS NUMERIC LANGUAGE plpgsql IMMUTABLE AS $fn$ ... $fn$;». Es «RETURNS NUMERIC», </a:t>
-            </a:r>
-            <a:r>
-              <a:rPr sz="1900" b="1" i="0">
-                <a:solidFill>
-                  <a:srgbClr val="333333"/>
-                </a:solidFill>
-                <a:latin typeface="Calibri"/>
-              </a:rPr>
-              <a:t>no «RETURNS TRIGGER»</a:t>
-            </a:r>
-            <a:r>
-              <a:rPr sz="1900" b="0" i="0">
-                <a:solidFill>
-                  <a:srgbClr val="333333"/>
-                </a:solidFill>
-                <a:latin typeface="Calibri"/>
-              </a:rPr>
-              <a:t>: esta funcion no se asocia a ninguna tabla, se llama desde una consulta.</a:t>
-            </a:r>
-          </a:p>
-          <a:p>
-            <a:pPr>
-              <a:spcAft>
-                <a:spcPts val="800"/>
-              </a:spcAft>
-            </a:pPr>
-            <a:r>
-              <a:rPr sz="1900" b="0" i="0">
-                <a:solidFill>
-                  <a:srgbClr val="333333"/>
-                </a:solidFill>
-                <a:latin typeface="Calibri"/>
-              </a:rPr>
-              <a:t>–   </a:t>
-            </a:r>
-            <a:r>
-              <a:rPr sz="1900" b="1" i="0">
-                <a:solidFill>
-                  <a:srgbClr val="333333"/>
-                </a:solidFill>
-                <a:latin typeface="Calibri"/>
-              </a:rPr>
-              <a:t>La tabla de tarifas es un «CASE».</a:t>
-            </a:r>
-            <a:r>
-              <a:rPr sz="1900" b="0" i="0">
-                <a:solidFill>
-                  <a:srgbClr val="333333"/>
-                </a:solidFill>
-                <a:latin typeface="Calibri"/>
-              </a:rPr>
-              <a:t> «CASE UPPER(p_especie) WHEN 'CANINO' THEN 45000 WHEN 'FELINO' THEN 40000 ELSE 35000 END». El «UPPER()» es lo que hace la comparacion </a:t>
-            </a:r>
-            <a:r>
-              <a:rPr sz="1900" b="1" i="0">
-                <a:solidFill>
-                  <a:srgbClr val="333333"/>
-                </a:solidFill>
-                <a:latin typeface="Calibri"/>
-              </a:rPr>
-              <a:t>insensible a mayusculas</a:t>
-            </a:r>
-            <a:r>
-              <a:rPr sz="1900" b="0" i="0">
-                <a:solidFill>
-                  <a:srgbClr val="333333"/>
-                </a:solidFill>
-                <a:latin typeface="Calibri"/>
-              </a:rPr>
-              <a:t>: sin el, «canino» en minuscula cae en el «ELSE» y cobra 35000.</a:t>
-            </a:r>
-          </a:p>
-          <a:p>
-            <a:pPr>
-              <a:spcAft>
-                <a:spcPts val="800"/>
-              </a:spcAft>
-            </a:pPr>
-            <a:r>
-              <a:rPr sz="1900" b="0" i="0">
-                <a:solidFill>
-                  <a:srgbClr val="333333"/>
-                </a:solidFill>
-                <a:latin typeface="Calibri"/>
-              </a:rPr>
-              <a:t>–   </a:t>
-            </a:r>
-            <a:r>
-              <a:rPr sz="1900" b="1" i="0">
-                <a:solidFill>
-                  <a:srgbClr val="333333"/>
-                </a:solidFill>
-                <a:latin typeface="Calibri"/>
-              </a:rPr>
-              <a:t>El «NULL» de la urgencia: hazlo explicito con «COALESCE».</a:t>
-            </a:r>
-            <a:r>
-              <a:rPr sz="1900" b="0" i="0">
-                <a:solidFill>
-                  <a:srgbClr val="333333"/>
-                </a:solidFill>
-                <a:latin typeface="Calibri"/>
-              </a:rPr>
-              <a:t> «IF COALESCE(p_urgencia, FALSE) THEN v_base := v_base * 1.35; END IF;». Un «IF» a secas ya trata «NULL» como falso, pero en cuanto el booleano entra en una </a:t>
-            </a:r>
-            <a:r>
-              <a:rPr sz="1900" b="1" i="0">
-                <a:solidFill>
-                  <a:srgbClr val="333333"/>
-                </a:solidFill>
-                <a:latin typeface="Calibri"/>
-              </a:rPr>
-              <a:t>cuenta</a:t>
-            </a:r>
-            <a:r>
-              <a:rPr sz="1900" b="0" i="0">
-                <a:solidFill>
-                  <a:srgbClr val="333333"/>
-                </a:solidFill>
-                <a:latin typeface="Calibri"/>
-              </a:rPr>
-              <a:t> el «NULL» se propaga y la funcion devuelve «NULL».</a:t>
-            </a:r>
-          </a:p>
-          <a:p>
-            <a:pPr>
-              <a:spcAft>
-                <a:spcPts val="800"/>
-              </a:spcAft>
-            </a:pPr>
-            <a:r>
-              <a:rPr sz="1900" b="0" i="0">
-                <a:solidFill>
-                  <a:srgbClr val="333333"/>
-                </a:solidFill>
-                <a:latin typeface="Calibri"/>
-              </a:rPr>
-              <a:t>–   </a:t>
-            </a:r>
-            <a:r>
-              <a:rPr sz="1900" b="1" i="0">
-                <a:solidFill>
-                  <a:srgbClr val="333333"/>
-                </a:solidFill>
-                <a:latin typeface="Calibri"/>
-              </a:rPr>
-              <a:t>«IMMUTABLE» es una promesa que el motor cobra:</a:t>
-            </a:r>
-            <a:r>
-              <a:rPr sz="1900" b="0" i="0">
-                <a:solidFill>
-                  <a:srgbClr val="333333"/>
-                </a:solidFill>
-                <a:latin typeface="Calibri"/>
-              </a:rPr>
-              <a:t> </a:t>
-            </a:r>
-            <a:r>
-              <a:rPr sz="1900" b="1" i="0">
-                <a:solidFill>
-                  <a:srgbClr val="333333"/>
-                </a:solidFill>
-                <a:latin typeface="Calibri"/>
-              </a:rPr>
-              <a:t>misma entrada, misma salida, sin leer tablas</a:t>
-            </a:r>
-            <a:r>
-              <a:rPr sz="1900" b="0" i="0">
-                <a:solidFill>
-                  <a:srgbClr val="333333"/>
-                </a:solidFill>
-                <a:latin typeface="Calibri"/>
-              </a:rPr>
-              <a:t>. Por eso el filtro «WHERE m.activa = 'S'» va en la consulta y </a:t>
-            </a:r>
-            <a:r>
-              <a:rPr sz="1900" b="1" i="0">
-                <a:solidFill>
-                  <a:srgbClr val="333333"/>
-                </a:solidFill>
-                <a:latin typeface="Calibri"/>
-              </a:rPr>
-              <a:t>no</a:t>
-            </a:r>
-            <a:r>
-              <a:rPr sz="1900" b="0" i="0">
-                <a:solidFill>
-                  <a:srgbClr val="333333"/>
-                </a:solidFill>
-                <a:latin typeface="Calibri"/>
-              </a:rPr>
-              <a:t> dentro de la funcion. Una funcion que consulta tablas seria «STABLE», nunca «IMMUTABLE».</a:t>
-            </a:r>
-          </a:p>
-          <a:p>
-            <a:pPr>
-              <a:spcAft>
-                <a:spcPts val="800"/>
-              </a:spcAft>
-            </a:pPr>
-            <a:r>
-              <a:rPr sz="1900" b="0" i="0">
-                <a:solidFill>
-                  <a:srgbClr val="333333"/>
-                </a:solidFill>
-                <a:latin typeface="Calibri"/>
-              </a:rPr>
-              <a:t>–   </a:t>
-            </a:r>
-            <a:r>
-              <a:rPr sz="1900" b="1" i="0">
-                <a:solidFill>
-                  <a:srgbClr val="333333"/>
-                </a:solidFill>
-                <a:latin typeface="Calibri"/>
-              </a:rPr>
-              <a:t>Y se usa dentro del «SELECT», que es lo que la hace funcion</a:t>
-            </a:r>
-            <a:r>
-              <a:rPr sz="1900" b="0" i="0">
-                <a:solidFill>
-                  <a:srgbClr val="333333"/>
-                </a:solidFill>
-                <a:latin typeface="Calibri"/>
-              </a:rPr>
-              <a:t> (el contraste de la Clase 3): «SELECT nombre, especie, fn_precio_consulta(especie, FALSE) AS tarifa_normal, fn_precio_consulta(especie, TRUE) AS tarifa_urgencia FROM mascota ORDER BY id_mascota;» — un canino en urgencia da </a:t>
-            </a:r>
-            <a:r>
-              <a:rPr sz="1900" b="1" i="0">
-                <a:solidFill>
-                  <a:srgbClr val="333333"/>
-                </a:solidFill>
-                <a:latin typeface="Calibri"/>
-              </a:rPr>
-              <a:t>60750</a:t>
-            </a:r>
-            <a:r>
-              <a:rPr sz="1900" b="0" i="0">
-                <a:solidFill>
-                  <a:srgbClr val="333333"/>
-                </a:solidFill>
-                <a:latin typeface="Calibri"/>
-              </a:rPr>
-              <a:t> (45000 × 1.35).</a:t>
-            </a:r>
-          </a:p>
-        </p:txBody>
-      </p:sp>
-      <p:sp>
-        <p:nvSpPr>
-          <p:cNvPr id="6" name="TextBox 5"/>
+                <a:spcPts val="371"/>
+              </a:spcAft>
+            </a:pPr>
+            <a:r>
+              <a:rPr sz="1300" b="0" i="0">
+                <a:solidFill>
+                  <a:srgbClr val="FFFFFF"/>
+                </a:solidFill>
+                <a:latin typeface="Calibri"/>
+              </a:rPr>
+              <a:t>-- 1) La funcion: NEW y OLD SIN dos puntos</a:t>
+            </a:r>
+          </a:p>
+          <a:p>
+            <a:pPr>
+              <a:spcAft>
+                <a:spcPts val="371"/>
+              </a:spcAft>
+            </a:pPr>
+            <a:r>
+              <a:rPr sz="1300" b="0" i="0">
+                <a:solidFill>
+                  <a:srgbClr val="FFFFFF"/>
+                </a:solidFill>
+                <a:latin typeface="Calibri"/>
+              </a:rPr>
+              <a:t>CREATE OR REPLACE FUNCTION fn_trg_audit_cita()</a:t>
+            </a:r>
+          </a:p>
+          <a:p>
+            <a:pPr>
+              <a:spcAft>
+                <a:spcPts val="371"/>
+              </a:spcAft>
+            </a:pPr>
+            <a:r>
+              <a:rPr sz="1300" b="0" i="0">
+                <a:solidFill>
+                  <a:srgbClr val="FFFFFF"/>
+                </a:solidFill>
+                <a:latin typeface="Calibri"/>
+              </a:rPr>
+              <a:t>RETURNS TRIGGER LANGUAGE plpgsql AS $fn$</a:t>
+            </a:r>
+          </a:p>
+          <a:p>
+            <a:pPr>
+              <a:spcAft>
+                <a:spcPts val="371"/>
+              </a:spcAft>
+            </a:pPr>
+            <a:r>
+              <a:rPr sz="1300" b="0" i="0">
+                <a:solidFill>
+                  <a:srgbClr val="FFFFFF"/>
+                </a:solidFill>
+                <a:latin typeface="Calibri"/>
+              </a:rPr>
+              <a:t>BEGIN</a:t>
+            </a:r>
+          </a:p>
+          <a:p>
+            <a:pPr>
+              <a:spcAft>
+                <a:spcPts val="371"/>
+              </a:spcAft>
+            </a:pPr>
+            <a:r>
+              <a:rPr sz="1300" b="0" i="0">
+                <a:solidFill>
+                  <a:srgbClr val="FFFFFF"/>
+                </a:solidFill>
+                <a:latin typeface="Calibri"/>
+              </a:rPr>
+              <a:t>  INSERT INTO audit_cita(id_cita, accion,</a:t>
+            </a:r>
+          </a:p>
+          <a:p>
+            <a:pPr>
+              <a:spcAft>
+                <a:spcPts val="371"/>
+              </a:spcAft>
+            </a:pPr>
+            <a:r>
+              <a:rPr sz="1300" b="0" i="0">
+                <a:solidFill>
+                  <a:srgbClr val="FFFFFF"/>
+                </a:solidFill>
+                <a:latin typeface="Calibri"/>
+              </a:rPr>
+              <a:t>                         valor_anterior, valor_nuevo)</a:t>
+            </a:r>
+          </a:p>
+          <a:p>
+            <a:pPr>
+              <a:spcAft>
+                <a:spcPts val="371"/>
+              </a:spcAft>
+            </a:pPr>
+            <a:r>
+              <a:rPr sz="1300" b="0" i="0">
+                <a:solidFill>
+                  <a:srgbClr val="FFFFFF"/>
+                </a:solidFill>
+                <a:latin typeface="Calibri"/>
+              </a:rPr>
+              <a:t>  VALUES (NEW.id_cita, 'CAMBIO_ESTADO',</a:t>
+            </a:r>
+          </a:p>
+          <a:p>
+            <a:pPr>
+              <a:spcAft>
+                <a:spcPts val="371"/>
+              </a:spcAft>
+            </a:pPr>
+            <a:r>
+              <a:rPr sz="1300" b="0" i="0">
+                <a:solidFill>
+                  <a:srgbClr val="FFFFFF"/>
+                </a:solidFill>
+                <a:latin typeface="Calibri"/>
+              </a:rPr>
+              <a:t>          OLD.estado, NEW.estado);   -- usuario y fecha: DEFAULT</a:t>
+            </a:r>
+          </a:p>
+          <a:p>
+            <a:pPr>
+              <a:spcAft>
+                <a:spcPts val="371"/>
+              </a:spcAft>
+            </a:pPr>
+            <a:r>
+              <a:rPr sz="1300" b="0" i="0">
+                <a:solidFill>
+                  <a:srgbClr val="FFFFFF"/>
+                </a:solidFill>
+                <a:latin typeface="Calibri"/>
+              </a:rPr>
+              <a:t>  RETURN NEW;                        -- obligatorio</a:t>
+            </a:r>
+          </a:p>
+          <a:p>
+            <a:pPr>
+              <a:spcAft>
+                <a:spcPts val="371"/>
+              </a:spcAft>
+            </a:pPr>
+            <a:r>
+              <a:rPr sz="1300" b="0" i="0">
+                <a:solidFill>
+                  <a:srgbClr val="FFFFFF"/>
+                </a:solidFill>
+                <a:latin typeface="Calibri"/>
+              </a:rPr>
+              <a:t>END; $fn$;</a:t>
+            </a:r>
+          </a:p>
+          <a:p>
+            <a:pPr>
+              <a:spcAft>
+                <a:spcPts val="371"/>
+              </a:spcAft>
+            </a:pPr>
+            <a:r>
+              <a:rPr sz="1300" b="0" i="0">
+                <a:solidFill>
+                  <a:srgbClr val="FFFFFF"/>
+                </a:solidFill>
+                <a:latin typeface="Calibri"/>
+              </a:rPr>
+              <a:t/>
+            </a:r>
+          </a:p>
+          <a:p>
+            <a:pPr>
+              <a:spcAft>
+                <a:spcPts val="371"/>
+              </a:spcAft>
+            </a:pPr>
+            <a:r>
+              <a:rPr sz="1300" b="0" i="0">
+                <a:solidFill>
+                  <a:srgbClr val="FFFFFF"/>
+                </a:solidFill>
+                <a:latin typeface="Calibri"/>
+              </a:rPr>
+              <a:t>-- 2) La asociacion: cuando se dispara y a quien llama</a:t>
+            </a:r>
+          </a:p>
+          <a:p>
+            <a:pPr>
+              <a:spcAft>
+                <a:spcPts val="371"/>
+              </a:spcAft>
+            </a:pPr>
+            <a:r>
+              <a:rPr sz="1300" b="0" i="0">
+                <a:solidFill>
+                  <a:srgbClr val="FFFFFF"/>
+                </a:solidFill>
+                <a:latin typeface="Calibri"/>
+              </a:rPr>
+              <a:t>CREATE TRIGGER trg_audit_cita</a:t>
+            </a:r>
+          </a:p>
+          <a:p>
+            <a:pPr>
+              <a:spcAft>
+                <a:spcPts val="371"/>
+              </a:spcAft>
+            </a:pPr>
+            <a:r>
+              <a:rPr sz="1300" b="0" i="0">
+                <a:solidFill>
+                  <a:srgbClr val="FFFFFF"/>
+                </a:solidFill>
+                <a:latin typeface="Calibri"/>
+              </a:rPr>
+              <a:t>AFTER UPDATE OF estado ON cita FOR EACH ROW</a:t>
+            </a:r>
+          </a:p>
+          <a:p>
+            <a:pPr>
+              <a:spcAft>
+                <a:spcPts val="371"/>
+              </a:spcAft>
+            </a:pPr>
+            <a:r>
+              <a:rPr sz="1300" b="0" i="0">
+                <a:solidFill>
+                  <a:srgbClr val="FFFFFF"/>
+                </a:solidFill>
+                <a:latin typeface="Calibri"/>
+              </a:rPr>
+              <a:t>WHEN (OLD.estado IS DISTINCT FROM NEW.estado)</a:t>
+            </a:r>
+          </a:p>
+          <a:p>
+            <a:pPr>
+              <a:spcAft>
+                <a:spcPts val="371"/>
+              </a:spcAft>
+            </a:pPr>
+            <a:r>
+              <a:rPr sz="1300" b="0" i="0">
+                <a:solidFill>
+                  <a:srgbClr val="FFFFFF"/>
+                </a:solidFill>
+                <a:latin typeface="Calibri"/>
+              </a:rPr>
+              <a:t>EXECUTE FUNCTION fn_trg_audit_cita();</a:t>
+            </a:r>
+          </a:p>
+        </p:txBody>
+      </p:sp>
+      <p:sp>
+        <p:nvSpPr>
+          <p:cNvPr id="9" name="TextBox 8"/>
+          <p:cNvSpPr txBox="1"/>
+          <p:nvPr/>
+        </p:nvSpPr>
+        <p:spPr>
+          <a:xfrm>
+            <a:off x="457200" y="6080760"/>
+            <a:ext cx="11277295" cy="320040"/>
+          </a:xfrm>
+          <a:prstGeom prst="rect">
+            <a:avLst/>
+          </a:prstGeom>
+          <a:noFill/>
+        </p:spPr>
+        <p:txBody>
+          <a:bodyPr wrap="square">
+            <a:spAutoFit/>
+          </a:bodyPr>
+          <a:lstStyle/>
+          <a:p>
+            <a:pPr algn="ctr"/>
+            <a:r>
+              <a:rPr sz="1200" b="0" i="1">
+                <a:solidFill>
+                  <a:srgbClr val="666666"/>
+                </a:solidFill>
+                <a:latin typeface="Calibri"/>
+              </a:rPr>
+              <a:t>El «WHEN» es lo que hace que 3 UPDATE dejen 2 filas de auditoria. Se dispara solo: el riesgo es que sea invisible para quien solo lee el codigo de la app.</a:t>
+            </a:r>
+          </a:p>
+        </p:txBody>
+      </p:sp>
+      <p:sp>
+        <p:nvSpPr>
+          <p:cNvPr id="10" name="TextBox 9"/>
           <p:cNvSpPr txBox="1"/>
           <p:nvPr/>
         </p:nvSpPr>
@@ -17738,7 +17334,7 @@
         <p:spPr>
           <a:xfrm>
             <a:off x="0" y="0"/>
-            <a:ext cx="12191695" cy="960120"/>
+            <a:ext cx="12191695" cy="1170432"/>
           </a:xfrm>
           <a:prstGeom prst="rect">
             <a:avLst/>
@@ -17780,7 +17376,7 @@
         </p:nvSpPr>
         <p:spPr>
           <a:xfrm>
-            <a:off x="0" y="960120"/>
+            <a:off x="0" y="1170432"/>
             <a:ext cx="12191695" cy="41148"/>
           </a:xfrm>
           <a:prstGeom prst="rect">
@@ -17824,7 +17420,7 @@
         <p:spPr>
           <a:xfrm>
             <a:off x="457200" y="164592"/>
-            <a:ext cx="11277295" cy="502920"/>
+            <a:ext cx="11277295" cy="384048"/>
           </a:xfrm>
           <a:prstGeom prst="rect">
             <a:avLst/>
@@ -17844,7 +17440,7 @@
                 </a:solidFill>
                 <a:latin typeface="Calibri"/>
               </a:rPr>
-              <a:t>Donde vive cada validacion: CHECK, trigger o aplicacion</a:t>
+              <a:t>La funcion de tarifas: RETURNS NUMERIC, CASE, COALESCE e IMMUTABLE</a:t>
             </a:r>
           </a:p>
         </p:txBody>
@@ -17857,8 +17453,8 @@
         </p:nvSpPr>
         <p:spPr>
           <a:xfrm>
-            <a:off x="457200" y="1170432"/>
-            <a:ext cx="11277295" cy="5230368"/>
+            <a:off x="457200" y="566928"/>
+            <a:ext cx="11277295" cy="411480"/>
           </a:xfrm>
           <a:prstGeom prst="rect">
             <a:avLst/>
@@ -17871,13 +17467,47 @@
           </a:bodyPr>
           <a:lstStyle/>
           <a:p>
+            <a:r>
+              <a:rPr sz="1400" b="0" i="0">
+                <a:solidFill>
+                  <a:srgbClr val="B8D8EE"/>
+                </a:solidFill>
+                <a:latin typeface="Calibri"/>
+              </a:rPr>
+              <a:t>Los tres errores mas comunes: un RETURNS TRIGGER copiado del trigger, el UPPER() olvidado y un IMMUTABLE que lee tablas</a:t>
+            </a:r>
+          </a:p>
+        </p:txBody>
+      </p:sp>
+      <p:sp>
+        <p:nvSpPr>
+          <p:cNvPr id="6" name="TextBox 5"/>
+          <p:cNvSpPr txBox="1"/>
+          <p:nvPr/>
+        </p:nvSpPr>
+        <p:spPr>
+          <a:xfrm>
+            <a:off x="457200" y="1380744"/>
+            <a:ext cx="11277295" cy="5020056"/>
+          </a:xfrm>
+          <a:prstGeom prst="rect">
+            <a:avLst/>
+          </a:prstGeom>
+          <a:noFill/>
+        </p:spPr>
+        <p:txBody>
+          <a:bodyPr wrap="square">
+            <a:spAutoFit/>
+          </a:bodyPr>
+          <a:lstStyle/>
+          <a:p>
             <a:pPr>
               <a:spcAft>
                 <a:spcPts val="800"/>
               </a:spcAft>
             </a:pPr>
             <a:r>
-              <a:rPr sz="2000" b="0" i="0">
+              <a:rPr sz="1900" b="0" i="0">
                 <a:solidFill>
                   <a:srgbClr val="333333"/>
                 </a:solidFill>
@@ -17886,31 +17516,40 @@
               <a:t>–   </a:t>
             </a:r>
             <a:r>
-              <a:rPr sz="2000" b="1" i="0">
-                <a:solidFill>
-                  <a:srgbClr val="333333"/>
-                </a:solidFill>
-                <a:latin typeface="Calibri"/>
-              </a:rPr>
-              <a:t>«CHECK»: una sola fila, una sola columna.</a:t>
-            </a:r>
-            <a:r>
-              <a:rPr sz="2000" b="0" i="0">
-                <a:solidFill>
-                  <a:srgbClr val="333333"/>
-                </a:solidFill>
-                <a:latin typeface="Calibri"/>
-              </a:rPr>
-              <a:t> «stock &gt;= 0», «precio &gt; 0», «estado IN (...)». Es lo mas barato y lo mas dificil de saltarse, porque lo aplica el motor sin una linea de codigo. </a:t>
-            </a:r>
-            <a:r>
-              <a:rPr sz="2000" b="1" i="0">
-                <a:solidFill>
-                  <a:srgbClr val="333333"/>
-                </a:solidFill>
-                <a:latin typeface="Calibri"/>
-              </a:rPr>
-              <a:t>Si la regla cabe en un CHECK, no se hace trigger.</a:t>
+              <a:rPr sz="1900" b="1" i="0">
+                <a:solidFill>
+                  <a:srgbClr val="333333"/>
+                </a:solidFill>
+                <a:latin typeface="Calibri"/>
+              </a:rPr>
+              <a:t>La firma decide todo lo demas.</a:t>
+            </a:r>
+            <a:r>
+              <a:rPr sz="1900" b="0" i="0">
+                <a:solidFill>
+                  <a:srgbClr val="333333"/>
+                </a:solidFill>
+                <a:latin typeface="Calibri"/>
+              </a:rPr>
+              <a:t> «CREATE FUNCTION fn_precio_consulta(p_especie TEXT, p_urgencia BOOLEAN) RETURNS NUMERIC LANGUAGE plpgsql IMMUTABLE AS $fn$ ... $fn$;». Es «RETURNS NUMERIC», </a:t>
+            </a:r>
+            <a:r>
+              <a:rPr sz="1900" b="1" i="0">
+                <a:solidFill>
+                  <a:srgbClr val="333333"/>
+                </a:solidFill>
+                <a:latin typeface="Calibri"/>
+              </a:rPr>
+              <a:t>no «RETURNS TRIGGER»</a:t>
+            </a:r>
+            <a:r>
+              <a:rPr sz="1900" b="0" i="0">
+                <a:solidFill>
+                  <a:srgbClr val="333333"/>
+                </a:solidFill>
+                <a:latin typeface="Calibri"/>
+              </a:rPr>
+              <a:t>: esta funcion no se asocia a ninguna tabla, se llama desde una consulta.</a:t>
             </a:r>
           </a:p>
           <a:p>
@@ -17920,7 +17559,7 @@
               </a:spcAft>
             </a:pPr>
             <a:r>
-              <a:rPr sz="2000" b="0" i="0">
+              <a:rPr sz="1900" b="0" i="0">
                 <a:solidFill>
                   <a:srgbClr val="333333"/>
                 </a:solidFill>
@@ -17929,22 +17568,40 @@
               <a:t>–   </a:t>
             </a:r>
             <a:r>
-              <a:rPr sz="2000" b="1" i="0">
-                <a:solidFill>
-                  <a:srgbClr val="333333"/>
-                </a:solidFill>
-                <a:latin typeface="Calibri"/>
-              </a:rPr>
-              <a:t>«UNIQUE» y «FK»: la relacion entre filas o entre tablas.</a:t>
-            </a:r>
-            <a:r>
-              <a:rPr sz="2000" b="0" i="0">
-                <a:solidFill>
-                  <a:srgbClr val="333333"/>
-                </a:solidFill>
-                <a:latin typeface="Calibri"/>
-              </a:rPr>
-              <a:t> «un veterinario no puede tener dos citas en la misma franja» es «UNIQUE (id_veterinario, fecha_hora)», no un trigger.</a:t>
+              <a:rPr sz="1900" b="1" i="0">
+                <a:solidFill>
+                  <a:srgbClr val="333333"/>
+                </a:solidFill>
+                <a:latin typeface="Calibri"/>
+              </a:rPr>
+              <a:t>La tabla de tarifas es un «CASE».</a:t>
+            </a:r>
+            <a:r>
+              <a:rPr sz="1900" b="0" i="0">
+                <a:solidFill>
+                  <a:srgbClr val="333333"/>
+                </a:solidFill>
+                <a:latin typeface="Calibri"/>
+              </a:rPr>
+              <a:t> «CASE UPPER(p_especie) WHEN 'CANINO' THEN 45000 WHEN 'FELINO' THEN 40000 ELSE 35000 END». El «UPPER()» es lo que hace la comparacion </a:t>
+            </a:r>
+            <a:r>
+              <a:rPr sz="1900" b="1" i="0">
+                <a:solidFill>
+                  <a:srgbClr val="333333"/>
+                </a:solidFill>
+                <a:latin typeface="Calibri"/>
+              </a:rPr>
+              <a:t>insensible a mayusculas</a:t>
+            </a:r>
+            <a:r>
+              <a:rPr sz="1900" b="0" i="0">
+                <a:solidFill>
+                  <a:srgbClr val="333333"/>
+                </a:solidFill>
+                <a:latin typeface="Calibri"/>
+              </a:rPr>
+              <a:t>: sin el, «canino» en minuscula cae en el «ELSE» y cobra 35000.</a:t>
             </a:r>
           </a:p>
           <a:p>
@@ -17954,7 +17611,7 @@
               </a:spcAft>
             </a:pPr>
             <a:r>
-              <a:rPr sz="2000" b="0" i="0">
+              <a:rPr sz="1900" b="0" i="0">
                 <a:solidFill>
                   <a:srgbClr val="333333"/>
                 </a:solidFill>
@@ -17963,40 +17620,40 @@
               <a:t>–   </a:t>
             </a:r>
             <a:r>
-              <a:rPr sz="2000" b="1" i="0">
-                <a:solidFill>
-                  <a:srgbClr val="333333"/>
-                </a:solidFill>
-                <a:latin typeface="Calibri"/>
-              </a:rPr>
-              <a:t>Trigger: cuando la regla necesita OTRA fila u OTRA tabla.</a:t>
-            </a:r>
-            <a:r>
-              <a:rPr sz="2000" b="0" i="0">
-                <a:solidFill>
-                  <a:srgbClr val="333333"/>
-                </a:solidFill>
-                <a:latin typeface="Calibri"/>
-              </a:rPr>
-              <a:t> Comparar «OLD» con «NEW», mirar el stock de «insumo» mientras se actualiza otra tabla, o </a:t>
-            </a:r>
-            <a:r>
-              <a:rPr sz="2000" b="1" i="0">
-                <a:solidFill>
-                  <a:srgbClr val="333333"/>
-                </a:solidFill>
-                <a:latin typeface="Calibri"/>
-              </a:rPr>
-              <a:t>escribir en una segunda tabla</a:t>
-            </a:r>
-            <a:r>
-              <a:rPr sz="2000" b="0" i="0">
-                <a:solidFill>
-                  <a:srgbClr val="333333"/>
-                </a:solidFill>
-                <a:latin typeface="Calibri"/>
-              </a:rPr>
-              <a:t> (auditoria). Nada de eso cabe en un «CHECK».</a:t>
+              <a:rPr sz="1900" b="1" i="0">
+                <a:solidFill>
+                  <a:srgbClr val="333333"/>
+                </a:solidFill>
+                <a:latin typeface="Calibri"/>
+              </a:rPr>
+              <a:t>El «NULL» de la urgencia: hazlo explicito con «COALESCE».</a:t>
+            </a:r>
+            <a:r>
+              <a:rPr sz="1900" b="0" i="0">
+                <a:solidFill>
+                  <a:srgbClr val="333333"/>
+                </a:solidFill>
+                <a:latin typeface="Calibri"/>
+              </a:rPr>
+              <a:t> «IF COALESCE(p_urgencia, FALSE) THEN v_base := v_base * 1.35; END IF;». Un «IF» a secas ya trata «NULL» como falso, pero en cuanto el booleano entra en una </a:t>
+            </a:r>
+            <a:r>
+              <a:rPr sz="1900" b="1" i="0">
+                <a:solidFill>
+                  <a:srgbClr val="333333"/>
+                </a:solidFill>
+                <a:latin typeface="Calibri"/>
+              </a:rPr>
+              <a:t>cuenta</a:t>
+            </a:r>
+            <a:r>
+              <a:rPr sz="1900" b="0" i="0">
+                <a:solidFill>
+                  <a:srgbClr val="333333"/>
+                </a:solidFill>
+                <a:latin typeface="Calibri"/>
+              </a:rPr>
+              <a:t> el «NULL» se propaga y la funcion devuelve «NULL».</a:t>
             </a:r>
           </a:p>
           <a:p>
@@ -18006,7 +17663,7 @@
               </a:spcAft>
             </a:pPr>
             <a:r>
-              <a:rPr sz="2000" b="0" i="0">
+              <a:rPr sz="1900" b="0" i="0">
                 <a:solidFill>
                   <a:srgbClr val="333333"/>
                 </a:solidFill>
@@ -18015,40 +17672,58 @@
               <a:t>–   </a:t>
             </a:r>
             <a:r>
-              <a:rPr sz="2000" b="1" i="0">
-                <a:solidFill>
-                  <a:srgbClr val="333333"/>
-                </a:solidFill>
-                <a:latin typeface="Calibri"/>
-              </a:rPr>
-              <a:t>Aplicacion: solo lo que la base no puede saber.</a:t>
-            </a:r>
-            <a:r>
-              <a:rPr sz="2000" b="0" i="0">
-                <a:solidFill>
-                  <a:srgbClr val="333333"/>
-                </a:solidFill>
-                <a:latin typeface="Calibri"/>
-              </a:rPr>
-              <a:t> El formato del correo, el permiso de la pantalla, la traduccion del mensaje. Y el criterio para decidir: </a:t>
-            </a:r>
-            <a:r>
-              <a:rPr sz="2000" b="1" i="0">
-                <a:solidFill>
-                  <a:srgbClr val="333333"/>
-                </a:solidFill>
-                <a:latin typeface="Calibri"/>
-              </a:rPr>
-              <a:t>una validacion que solo vive en la app se salta conectandose por «psql»</a:t>
-            </a:r>
-            <a:r>
-              <a:rPr sz="2000" b="0" i="0">
-                <a:solidFill>
-                  <a:srgbClr val="333333"/>
-                </a:solidFill>
-                <a:latin typeface="Calibri"/>
-              </a:rPr>
-              <a:t>.</a:t>
+              <a:rPr sz="1900" b="1" i="0">
+                <a:solidFill>
+                  <a:srgbClr val="333333"/>
+                </a:solidFill>
+                <a:latin typeface="Calibri"/>
+              </a:rPr>
+              <a:t>«IMMUTABLE» es una promesa que el motor cobra:</a:t>
+            </a:r>
+            <a:r>
+              <a:rPr sz="1900" b="0" i="0">
+                <a:solidFill>
+                  <a:srgbClr val="333333"/>
+                </a:solidFill>
+                <a:latin typeface="Calibri"/>
+              </a:rPr>
+              <a:t> </a:t>
+            </a:r>
+            <a:r>
+              <a:rPr sz="1900" b="1" i="0">
+                <a:solidFill>
+                  <a:srgbClr val="333333"/>
+                </a:solidFill>
+                <a:latin typeface="Calibri"/>
+              </a:rPr>
+              <a:t>misma entrada, misma salida, sin leer tablas</a:t>
+            </a:r>
+            <a:r>
+              <a:rPr sz="1900" b="0" i="0">
+                <a:solidFill>
+                  <a:srgbClr val="333333"/>
+                </a:solidFill>
+                <a:latin typeface="Calibri"/>
+              </a:rPr>
+              <a:t>. Por eso el filtro «WHERE m.activa = 'S'» va en la consulta y </a:t>
+            </a:r>
+            <a:r>
+              <a:rPr sz="1900" b="1" i="0">
+                <a:solidFill>
+                  <a:srgbClr val="333333"/>
+                </a:solidFill>
+                <a:latin typeface="Calibri"/>
+              </a:rPr>
+              <a:t>no</a:t>
+            </a:r>
+            <a:r>
+              <a:rPr sz="1900" b="0" i="0">
+                <a:solidFill>
+                  <a:srgbClr val="333333"/>
+                </a:solidFill>
+                <a:latin typeface="Calibri"/>
+              </a:rPr>
+              <a:t> dentro de la funcion. Una funcion que consulta tablas seria «STABLE», nunca «IMMUTABLE».</a:t>
             </a:r>
           </a:p>
           <a:p>
@@ -18058,7 +17733,7 @@
               </a:spcAft>
             </a:pPr>
             <a:r>
-              <a:rPr sz="2000" b="0" i="0">
+              <a:rPr sz="1900" b="0" i="0">
                 <a:solidFill>
                   <a:srgbClr val="333333"/>
                 </a:solidFill>
@@ -18067,29 +17742,47 @@
               <a:t>–   </a:t>
             </a:r>
             <a:r>
-              <a:rPr sz="2000" b="1" i="0">
-                <a:solidFill>
-                  <a:srgbClr val="333333"/>
-                </a:solidFill>
-                <a:latin typeface="Calibri"/>
-              </a:rPr>
-              <a:t>BEFORE valida, AFTER audita.</a:t>
-            </a:r>
-            <a:r>
-              <a:rPr sz="2000" b="0" i="0">
-                <a:solidFill>
-                  <a:srgbClr val="333333"/>
-                </a:solidFill>
-                <a:latin typeface="Calibri"/>
-              </a:rPr>
-              <a:t> Un trigger que rechaza corre «BEFORE», porque despues el dato ya esta escrito; uno que registra un hecho consumado corre «AFTER». Poner «AFTER» en el de stock es el error mas comun del dia.</a:t>
-            </a:r>
-          </a:p>
-        </p:txBody>
-      </p:sp>
-      <p:sp>
-        <p:nvSpPr>
-          <p:cNvPr id="6" name="TextBox 5"/>
+              <a:rPr sz="1900" b="1" i="0">
+                <a:solidFill>
+                  <a:srgbClr val="333333"/>
+                </a:solidFill>
+                <a:latin typeface="Calibri"/>
+              </a:rPr>
+              <a:t>Y se usa dentro del «SELECT», que es lo que la hace funcion</a:t>
+            </a:r>
+            <a:r>
+              <a:rPr sz="1900" b="0" i="0">
+                <a:solidFill>
+                  <a:srgbClr val="333333"/>
+                </a:solidFill>
+                <a:latin typeface="Calibri"/>
+              </a:rPr>
+              <a:t> (el contraste de la Clase 3): «SELECT nombre, especie, fn_precio_consulta(especie, FALSE) AS tarifa_normal, fn_precio_consulta(especie, TRUE) AS tarifa_urgencia FROM mascota ORDER BY id_mascota;» — un canino en urgencia da </a:t>
+            </a:r>
+            <a:r>
+              <a:rPr sz="1900" b="1" i="0">
+                <a:solidFill>
+                  <a:srgbClr val="333333"/>
+                </a:solidFill>
+                <a:latin typeface="Calibri"/>
+              </a:rPr>
+              <a:t>60750</a:t>
+            </a:r>
+            <a:r>
+              <a:rPr sz="1900" b="0" i="0">
+                <a:solidFill>
+                  <a:srgbClr val="333333"/>
+                </a:solidFill>
+                <a:latin typeface="Calibri"/>
+              </a:rPr>
+              <a:t> (45000 × 1.35).</a:t>
+            </a:r>
+          </a:p>
+        </p:txBody>
+      </p:sp>
+      <p:sp>
+        <p:nvSpPr>
+          <p:cNvPr id="7" name="TextBox 6"/>
           <p:cNvSpPr txBox="1"/>
           <p:nvPr/>
         </p:nvSpPr>
@@ -18157,7 +17850,7 @@
         <p:spPr>
           <a:xfrm>
             <a:off x="0" y="0"/>
-            <a:ext cx="12191695" cy="960120"/>
+            <a:ext cx="12191695" cy="1170432"/>
           </a:xfrm>
           <a:prstGeom prst="rect">
             <a:avLst/>
@@ -18199,7 +17892,7 @@
         </p:nvSpPr>
         <p:spPr>
           <a:xfrm>
-            <a:off x="0" y="960120"/>
+            <a:off x="0" y="1170432"/>
             <a:ext cx="12191695" cy="41148"/>
           </a:xfrm>
           <a:prstGeom prst="rect">
@@ -18243,7 +17936,7 @@
         <p:spPr>
           <a:xfrm>
             <a:off x="457200" y="164592"/>
-            <a:ext cx="11277295" cy="502920"/>
+            <a:ext cx="11277295" cy="384048"/>
           </a:xfrm>
           <a:prstGeom prst="rect">
             <a:avLst/>
@@ -18263,7 +17956,7 @@
                 </a:solidFill>
                 <a:latin typeface="Calibri"/>
               </a:rPr>
-              <a:t>Plan de respaldo: 6 secciones y herramientas reales de PostgreSQL</a:t>
+              <a:t>Donde vive cada validacion: CHECK, trigger o aplicacion</a:t>
             </a:r>
           </a:p>
         </p:txBody>
@@ -18276,8 +17969,8 @@
         </p:nvSpPr>
         <p:spPr>
           <a:xfrm>
-            <a:off x="457200" y="1170432"/>
-            <a:ext cx="11277295" cy="5230368"/>
+            <a:off x="457200" y="566928"/>
+            <a:ext cx="11277295" cy="411480"/>
           </a:xfrm>
           <a:prstGeom prst="rect">
             <a:avLst/>
@@ -18290,6 +17983,40 @@
           </a:bodyPr>
           <a:lstStyle/>
           <a:p>
+            <a:r>
+              <a:rPr sz="1400" b="0" i="0">
+                <a:solidFill>
+                  <a:srgbClr val="B8D8EE"/>
+                </a:solidFill>
+                <a:latin typeface="Calibri"/>
+              </a:rPr>
+              <a:t>Cada regla tiene una capa natural: la que la garantiza aunque el SQL no venga de la aplicacion</a:t>
+            </a:r>
+          </a:p>
+        </p:txBody>
+      </p:sp>
+      <p:sp>
+        <p:nvSpPr>
+          <p:cNvPr id="6" name="TextBox 5"/>
+          <p:cNvSpPr txBox="1"/>
+          <p:nvPr/>
+        </p:nvSpPr>
+        <p:spPr>
+          <a:xfrm>
+            <a:off x="457200" y="1380744"/>
+            <a:ext cx="11277295" cy="5020056"/>
+          </a:xfrm>
+          <a:prstGeom prst="rect">
+            <a:avLst/>
+          </a:prstGeom>
+          <a:noFill/>
+        </p:spPr>
+        <p:txBody>
+          <a:bodyPr wrap="square">
+            <a:spAutoFit/>
+          </a:bodyPr>
+          <a:lstStyle/>
+          <a:p>
             <a:pPr>
               <a:spcAft>
                 <a:spcPts val="800"/>
@@ -18311,7 +18038,7 @@
                 </a:solidFill>
                 <a:latin typeface="Calibri"/>
               </a:rPr>
-              <a:t>1. Que se respalda y con que.</a:t>
+              <a:t>«CHECK»: una sola fila, una sola columna.</a:t>
             </a:r>
             <a:r>
               <a:rPr sz="2000" b="0" i="0">
@@ -18320,7 +18047,7 @@
                 </a:solidFill>
                 <a:latin typeface="Calibri"/>
               </a:rPr>
-              <a:t> «pg_dump -Fc -d vetcare -f vetcare_AAAAMMDD.dump» para los datos, y «pg_dumpall --globals-only» para los </a:t>
+              <a:t> «stock &gt;= 0», «precio &gt; 0», «estado IN (...)». Es lo mas barato y lo mas dificil de saltarse, porque lo aplica el motor sin una linea de codigo. </a:t>
             </a:r>
             <a:r>
               <a:rPr sz="2000" b="1" i="0">
@@ -18329,8 +18056,15 @@
                 </a:solidFill>
                 <a:latin typeface="Calibri"/>
               </a:rPr>
-              <a:t>roles de la Clase 2</a:t>
-            </a:r>
+              <a:t>Si la regla cabe en un CHECK, no se hace trigger.</a:t>
+            </a:r>
+          </a:p>
+          <a:p>
+            <a:pPr>
+              <a:spcAft>
+                <a:spcPts val="800"/>
+              </a:spcAft>
+            </a:pPr>
             <a:r>
               <a:rPr sz="2000" b="0" i="0">
                 <a:solidFill>
@@ -18338,7 +18072,25 @@
                 </a:solidFill>
                 <a:latin typeface="Calibri"/>
               </a:rPr>
-              <a:t>: «pg_dump» es de UNA base y los roles son del cluster, asi que no los respalda. Si falta, se restaura la base y ningun rol tiene permisos.</a:t>
+              <a:t>–   </a:t>
+            </a:r>
+            <a:r>
+              <a:rPr sz="2000" b="1" i="0">
+                <a:solidFill>
+                  <a:srgbClr val="333333"/>
+                </a:solidFill>
+                <a:latin typeface="Calibri"/>
+              </a:rPr>
+              <a:t>«UNIQUE» y «FK»: la relacion entre filas o entre tablas.</a:t>
+            </a:r>
+            <a:r>
+              <a:rPr sz="2000" b="0" i="0">
+                <a:solidFill>
+                  <a:srgbClr val="333333"/>
+                </a:solidFill>
+                <a:latin typeface="Calibri"/>
+              </a:rPr>
+              <a:t> «un veterinario no puede tener dos citas en la misma franja» es «UNIQUE (id_veterinario, fecha_hora)», no un trigger.</a:t>
             </a:r>
           </a:p>
           <a:p>
@@ -18363,7 +18115,7 @@
                 </a:solidFill>
                 <a:latin typeface="Calibri"/>
               </a:rPr>
-              <a:t>2. Frecuencia, con su razon.</a:t>
+              <a:t>Trigger: cuando la regla necesita OTRA fila u OTRA tabla.</a:t>
             </a:r>
             <a:r>
               <a:rPr sz="2000" b="0" i="0">
@@ -18372,7 +18124,7 @@
                 </a:solidFill>
                 <a:latin typeface="Calibri"/>
               </a:rPr>
-              <a:t> No «diario»: ««pg_dump -Fc» a las 20:30 </a:t>
+              <a:t> Comparar «OLD» con «NEW», mirar el stock de «insumo» mientras se actualiza otra tabla, o </a:t>
             </a:r>
             <a:r>
               <a:rPr sz="2000" b="1" i="0">
@@ -18381,7 +18133,7 @@
                 </a:solidFill>
                 <a:latin typeface="Calibri"/>
               </a:rPr>
-              <a:t>porque</a:t>
+              <a:t>escribir en una segunda tabla</a:t>
             </a:r>
             <a:r>
               <a:rPr sz="2000" b="0" i="0">
@@ -18390,7 +18142,7 @@
                 </a:solidFill>
                 <a:latin typeface="Calibri"/>
               </a:rPr>
-              <a:t> la facturacion de Huellitas cierra a las 20:00». La hora se justifica con un hecho del negocio.</a:t>
+              <a:t> (auditoria). Nada de eso cabe en un «CHECK».</a:t>
             </a:r>
           </a:p>
           <a:p>
@@ -18415,7 +18167,7 @@
                 </a:solidFill>
                 <a:latin typeface="Calibri"/>
               </a:rPr>
-              <a:t>3. Retencion</a:t>
+              <a:t>Aplicacion: solo lo que la base no puede saber.</a:t>
             </a:r>
             <a:r>
               <a:rPr sz="2000" b="0" i="0">
@@ -18424,7 +18176,7 @@
                 </a:solidFill>
                 <a:latin typeface="Calibri"/>
               </a:rPr>
-              <a:t> —cuantas copias y donde: 7 diarias, 4 semanales, 12 mensuales, y </a:t>
+              <a:t> El formato del correo, el permiso de la pantalla, la traduccion del mensaje. Y el criterio para decidir: </a:t>
             </a:r>
             <a:r>
               <a:rPr sz="2000" b="1" i="0">
@@ -18433,7 +18185,7 @@
                 </a:solidFill>
                 <a:latin typeface="Calibri"/>
               </a:rPr>
-              <a:t>al menos una fuera del mismo servidor</a:t>
+              <a:t>una validacion que solo vive en la app se salta conectandose por «psql»</a:t>
             </a:r>
             <a:r>
               <a:rPr sz="2000" b="0" i="0">
@@ -18442,7 +18194,23 @@
                 </a:solidFill>
                 <a:latin typeface="Calibri"/>
               </a:rPr>
-              <a:t>— y </a:t>
+              <a:t>.</a:t>
+            </a:r>
+          </a:p>
+          <a:p>
+            <a:pPr>
+              <a:spcAft>
+                <a:spcPts val="800"/>
+              </a:spcAft>
+            </a:pPr>
+            <a:r>
+              <a:rPr sz="2000" b="0" i="0">
+                <a:solidFill>
+                  <a:srgbClr val="333333"/>
+                </a:solidFill>
+                <a:latin typeface="Calibri"/>
+              </a:rPr>
+              <a:t>–   </a:t>
             </a:r>
             <a:r>
               <a:rPr sz="2000" b="1" i="0">
@@ -18451,7 +18219,7 @@
                 </a:solidFill>
                 <a:latin typeface="Calibri"/>
               </a:rPr>
-              <a:t>4. RPO y RTO en numeros</a:t>
+              <a:t>BEFORE valida, AFTER audita.</a:t>
             </a:r>
             <a:r>
               <a:rPr sz="2000" b="0" i="0">
@@ -18460,136 +18228,14 @@
                 </a:solidFill>
                 <a:latin typeface="Calibri"/>
               </a:rPr>
-              <a:t>: cuantos datos se acepta perder («maximo 1 hora de citas») y cuanto puede estar caida la base. Un dump diario implica un RPO de 24 h: si no alcanza, hace falta </a:t>
-            </a:r>
-            <a:r>
-              <a:rPr sz="2000" b="1" i="0">
-                <a:solidFill>
-                  <a:srgbClr val="333333"/>
-                </a:solidFill>
-                <a:latin typeface="Calibri"/>
-              </a:rPr>
-              <a:t>archivado de WAL</a:t>
-            </a:r>
-            <a:r>
-              <a:rPr sz="2000" b="0" i="0">
-                <a:solidFill>
-                  <a:srgbClr val="333333"/>
-                </a:solidFill>
-                <a:latin typeface="Calibri"/>
-              </a:rPr>
-              <a:t>.</a:t>
-            </a:r>
-          </a:p>
-          <a:p>
-            <a:pPr>
-              <a:spcAft>
-                <a:spcPts val="800"/>
-              </a:spcAft>
-            </a:pPr>
-            <a:r>
-              <a:rPr sz="2000" b="0" i="0">
-                <a:solidFill>
-                  <a:srgbClr val="333333"/>
-                </a:solidFill>
-                <a:latin typeface="Calibri"/>
-              </a:rPr>
-              <a:t>–   </a:t>
-            </a:r>
-            <a:r>
-              <a:rPr sz="2000" b="1" i="0">
-                <a:solidFill>
-                  <a:srgbClr val="333333"/>
-                </a:solidFill>
-                <a:latin typeface="Calibri"/>
-              </a:rPr>
-              <a:t>5. Restore de prueba</a:t>
-            </a:r>
-            <a:r>
-              <a:rPr sz="2000" b="0" i="0">
-                <a:solidFill>
-                  <a:srgbClr val="333333"/>
-                </a:solidFill>
-                <a:latin typeface="Calibri"/>
-              </a:rPr>
-              <a:t> con «pg_restore» sobre una base vacia: fecha, duracion medida, la consulta que confirma el conteo, cada cuanto se ensaya y quien firma. </a:t>
-            </a:r>
-            <a:r>
-              <a:rPr sz="2000" b="1" i="0">
-                <a:solidFill>
-                  <a:srgbClr val="333333"/>
-                </a:solidFill>
-                <a:latin typeface="Calibri"/>
-              </a:rPr>
-              <a:t>Un respaldo que nunca se restauro no es un respaldo:</a:t>
-            </a:r>
-            <a:r>
-              <a:rPr sz="2000" b="0" i="0">
-                <a:solidFill>
-                  <a:srgbClr val="333333"/>
-                </a:solidFill>
-                <a:latin typeface="Calibri"/>
-              </a:rPr>
-              <a:t> es un archivo.</a:t>
-            </a:r>
-          </a:p>
-          <a:p>
-            <a:pPr>
-              <a:spcAft>
-                <a:spcPts val="800"/>
-              </a:spcAft>
-            </a:pPr>
-            <a:r>
-              <a:rPr sz="2000" b="0" i="0">
-                <a:solidFill>
-                  <a:srgbClr val="333333"/>
-                </a:solidFill>
-                <a:latin typeface="Calibri"/>
-              </a:rPr>
-              <a:t>–   </a:t>
-            </a:r>
-            <a:r>
-              <a:rPr sz="2000" b="1" i="0">
-                <a:solidFill>
-                  <a:srgbClr val="333333"/>
-                </a:solidFill>
-                <a:latin typeface="Calibri"/>
-              </a:rPr>
-              <a:t>6. Que NO cubre el plan</a:t>
-            </a:r>
-            <a:r>
-              <a:rPr sz="2000" b="0" i="0">
-                <a:solidFill>
-                  <a:srgbClr val="333333"/>
-                </a:solidFill>
-                <a:latin typeface="Calibri"/>
-              </a:rPr>
-              <a:t> y cual es el riesgo residual que se asume: el borrado por error que se descubre tres dias despues, la hora de citas que cabe en el RPO. </a:t>
-            </a:r>
-            <a:r>
-              <a:rPr sz="2000" b="1" i="0">
-                <a:solidFill>
-                  <a:srgbClr val="333333"/>
-                </a:solidFill>
-                <a:latin typeface="Calibri"/>
-              </a:rPr>
-              <a:t>Es la seccion que separa un plan de una lista de comandos</a:t>
-            </a:r>
-            <a:r>
-              <a:rPr sz="2000" b="0" i="0">
-                <a:solidFill>
-                  <a:srgbClr val="333333"/>
-                </a:solidFill>
-                <a:latin typeface="Calibri"/>
-              </a:rPr>
-              <a:t>, y la que mas se olvida.</a:t>
-            </a:r>
-          </a:p>
-        </p:txBody>
-      </p:sp>
-      <p:sp>
-        <p:nvSpPr>
-          <p:cNvPr id="6" name="TextBox 5"/>
+              <a:t> Un trigger que rechaza corre «BEFORE», porque despues el dato ya esta escrito; uno que registra un hecho consumado corre «AFTER». Poner «AFTER» en el de stock es el error mas comun del dia.</a:t>
+            </a:r>
+          </a:p>
+        </p:txBody>
+      </p:sp>
+      <p:sp>
+        <p:nvSpPr>
+          <p:cNvPr id="7" name="TextBox 6"/>
           <p:cNvSpPr txBox="1"/>
           <p:nvPr/>
         </p:nvSpPr>
@@ -18657,7 +18303,7 @@
         <p:spPr>
           <a:xfrm>
             <a:off x="0" y="0"/>
-            <a:ext cx="12191695" cy="960120"/>
+            <a:ext cx="12191695" cy="1170432"/>
           </a:xfrm>
           <a:prstGeom prst="rect">
             <a:avLst/>
@@ -18699,7 +18345,7 @@
         </p:nvSpPr>
         <p:spPr>
           <a:xfrm>
-            <a:off x="0" y="960120"/>
+            <a:off x="0" y="1170432"/>
             <a:ext cx="12191695" cy="41148"/>
           </a:xfrm>
           <a:prstGeom prst="rect">
@@ -18743,7 +18389,7 @@
         <p:spPr>
           <a:xfrm>
             <a:off x="457200" y="164592"/>
-            <a:ext cx="11277295" cy="502920"/>
+            <a:ext cx="11277295" cy="384048"/>
           </a:xfrm>
           <a:prstGeom prst="rect">
             <a:avLst/>
@@ -18763,7 +18409,7 @@
                 </a:solidFill>
                 <a:latin typeface="Calibri"/>
               </a:rPr>
-              <a:t>Demo del dia</a:t>
+              <a:t>Plan de respaldo: 6 secciones y herramientas reales de PostgreSQL</a:t>
             </a:r>
           </a:p>
         </p:txBody>
@@ -18776,8 +18422,8 @@
         </p:nvSpPr>
         <p:spPr>
           <a:xfrm>
-            <a:off x="457200" y="1170432"/>
-            <a:ext cx="11277295" cy="5230368"/>
+            <a:off x="457200" y="566928"/>
+            <a:ext cx="11277295" cy="411480"/>
           </a:xfrm>
           <a:prstGeom prst="rect">
             <a:avLst/>
@@ -18790,13 +18436,47 @@
           </a:bodyPr>
           <a:lstStyle/>
           <a:p>
+            <a:r>
+              <a:rPr sz="1400" b="0" i="0">
+                <a:solidFill>
+                  <a:srgbClr val="B8D8EE"/>
+                </a:solidFill>
+                <a:latin typeface="Calibri"/>
+              </a:rPr>
+              <a:t>Un plan de respaldo dice cuanto se pierde, en cuanto se vuelve y como se comprueba que el restore sirvio</a:t>
+            </a:r>
+          </a:p>
+        </p:txBody>
+      </p:sp>
+      <p:sp>
+        <p:nvSpPr>
+          <p:cNvPr id="6" name="TextBox 5"/>
+          <p:cNvSpPr txBox="1"/>
+          <p:nvPr/>
+        </p:nvSpPr>
+        <p:spPr>
+          <a:xfrm>
+            <a:off x="457200" y="1380744"/>
+            <a:ext cx="11277295" cy="5020056"/>
+          </a:xfrm>
+          <a:prstGeom prst="rect">
+            <a:avLst/>
+          </a:prstGeom>
+          <a:noFill/>
+        </p:spPr>
+        <p:txBody>
+          <a:bodyPr wrap="square">
+            <a:spAutoFit/>
+          </a:bodyPr>
+          <a:lstStyle/>
+          <a:p>
             <a:pPr>
               <a:spcAft>
                 <a:spcPts val="800"/>
               </a:spcAft>
             </a:pPr>
             <a:r>
-              <a:rPr sz="2000" b="0" i="0">
+              <a:rPr sz="1900" b="0" i="0">
                 <a:solidFill>
                   <a:srgbClr val="333333"/>
                 </a:solidFill>
@@ -18805,22 +18485,40 @@
               <a:t>–   </a:t>
             </a:r>
             <a:r>
-              <a:rPr sz="2000" b="1" i="0">
-                <a:solidFill>
-                  <a:srgbClr val="333333"/>
-                </a:solidFill>
-                <a:latin typeface="Calibri"/>
-              </a:rPr>
-              <a:t>Herramienta:</a:t>
-            </a:r>
-            <a:r>
-              <a:rPr sz="2000" b="0" i="0">
-                <a:solidFill>
-                  <a:srgbClr val="333333"/>
-                </a:solidFill>
-                <a:latin typeface="Calibri"/>
-              </a:rPr>
-              <a:t> PostgreSQL + Google Docs</a:t>
+              <a:rPr sz="1900" b="1" i="0">
+                <a:solidFill>
+                  <a:srgbClr val="333333"/>
+                </a:solidFill>
+                <a:latin typeface="Calibri"/>
+              </a:rPr>
+              <a:t>1. Que se respalda y con que.</a:t>
+            </a:r>
+            <a:r>
+              <a:rPr sz="1900" b="0" i="0">
+                <a:solidFill>
+                  <a:srgbClr val="333333"/>
+                </a:solidFill>
+                <a:latin typeface="Calibri"/>
+              </a:rPr>
+              <a:t> «pg_dump -Fc -d vetcare -f vetcare_AAAAMMDD.dump» para los datos, y «pg_dumpall --globals-only» para los </a:t>
+            </a:r>
+            <a:r>
+              <a:rPr sz="1900" b="1" i="0">
+                <a:solidFill>
+                  <a:srgbClr val="333333"/>
+                </a:solidFill>
+                <a:latin typeface="Calibri"/>
+              </a:rPr>
+              <a:t>roles de la Clase 2</a:t>
+            </a:r>
+            <a:r>
+              <a:rPr sz="1900" b="0" i="0">
+                <a:solidFill>
+                  <a:srgbClr val="333333"/>
+                </a:solidFill>
+                <a:latin typeface="Calibri"/>
+              </a:rPr>
+              <a:t>: «pg_dump» es de UNA base y los roles son del cluster, asi que no los respalda. Si falta, se restaura la base y ningun rol tiene permisos.</a:t>
             </a:r>
           </a:p>
           <a:p>
@@ -18830,7 +18528,7 @@
               </a:spcAft>
             </a:pPr>
             <a:r>
-              <a:rPr sz="2000" b="0" i="0">
+              <a:rPr sz="1900" b="0" i="0">
                 <a:solidFill>
                   <a:srgbClr val="333333"/>
                 </a:solidFill>
@@ -18839,22 +18537,40 @@
               <a:t>–   </a:t>
             </a:r>
             <a:r>
-              <a:rPr sz="2000" b="1" i="0">
-                <a:solidFill>
-                  <a:srgbClr val="333333"/>
-                </a:solidFill>
-                <a:latin typeface="Calibri"/>
-              </a:rPr>
-              <a:t>Demo:</a:t>
-            </a:r>
-            <a:r>
-              <a:rPr sz="2000" b="0" i="0">
-                <a:solidFill>
-                  <a:srgbClr val="333333"/>
-                </a:solidFill>
-                <a:latin typeface="Calibri"/>
-              </a:rPr>
-              <a:t> fn_precio_consulta + fn_trg_audit_cita con su CREATE TRIGGER ... EXECUTE FUNCTION, y el esqueleto del plan de respaldo.</a:t>
+              <a:rPr sz="1900" b="1" i="0">
+                <a:solidFill>
+                  <a:srgbClr val="333333"/>
+                </a:solidFill>
+                <a:latin typeface="Calibri"/>
+              </a:rPr>
+              <a:t>2. Frecuencia, con su razon.</a:t>
+            </a:r>
+            <a:r>
+              <a:rPr sz="1900" b="0" i="0">
+                <a:solidFill>
+                  <a:srgbClr val="333333"/>
+                </a:solidFill>
+                <a:latin typeface="Calibri"/>
+              </a:rPr>
+              <a:t> No «diario»: ««pg_dump -Fc» a las 20:30 </a:t>
+            </a:r>
+            <a:r>
+              <a:rPr sz="1900" b="1" i="0">
+                <a:solidFill>
+                  <a:srgbClr val="333333"/>
+                </a:solidFill>
+                <a:latin typeface="Calibri"/>
+              </a:rPr>
+              <a:t>porque</a:t>
+            </a:r>
+            <a:r>
+              <a:rPr sz="1900" b="0" i="0">
+                <a:solidFill>
+                  <a:srgbClr val="333333"/>
+                </a:solidFill>
+                <a:latin typeface="Calibri"/>
+              </a:rPr>
+              <a:t> la facturacion de Huellitas cierra a las 20:00». La hora se justifica con un hecho del negocio.</a:t>
             </a:r>
           </a:p>
           <a:p>
@@ -18864,13 +18580,85 @@
               </a:spcAft>
             </a:pPr>
             <a:r>
-              <a:rPr sz="2000" b="0" i="0">
-                <a:solidFill>
-                  <a:srgbClr val="333333"/>
-                </a:solidFill>
-                <a:latin typeface="Calibri"/>
-              </a:rPr>
-              <a:t>–   Sigan el mismo dominio VetCare (no inventen otro caso).</a:t>
+              <a:rPr sz="1900" b="0" i="0">
+                <a:solidFill>
+                  <a:srgbClr val="333333"/>
+                </a:solidFill>
+                <a:latin typeface="Calibri"/>
+              </a:rPr>
+              <a:t>–   </a:t>
+            </a:r>
+            <a:r>
+              <a:rPr sz="1900" b="1" i="0">
+                <a:solidFill>
+                  <a:srgbClr val="333333"/>
+                </a:solidFill>
+                <a:latin typeface="Calibri"/>
+              </a:rPr>
+              <a:t>3. Retencion</a:t>
+            </a:r>
+            <a:r>
+              <a:rPr sz="1900" b="0" i="0">
+                <a:solidFill>
+                  <a:srgbClr val="333333"/>
+                </a:solidFill>
+                <a:latin typeface="Calibri"/>
+              </a:rPr>
+              <a:t> —cuantas copias y donde: 7 diarias, 4 semanales, 12 mensuales, y </a:t>
+            </a:r>
+            <a:r>
+              <a:rPr sz="1900" b="1" i="0">
+                <a:solidFill>
+                  <a:srgbClr val="333333"/>
+                </a:solidFill>
+                <a:latin typeface="Calibri"/>
+              </a:rPr>
+              <a:t>al menos una fuera del mismo servidor</a:t>
+            </a:r>
+            <a:r>
+              <a:rPr sz="1900" b="0" i="0">
+                <a:solidFill>
+                  <a:srgbClr val="333333"/>
+                </a:solidFill>
+                <a:latin typeface="Calibri"/>
+              </a:rPr>
+              <a:t>— y </a:t>
+            </a:r>
+            <a:r>
+              <a:rPr sz="1900" b="1" i="0">
+                <a:solidFill>
+                  <a:srgbClr val="333333"/>
+                </a:solidFill>
+                <a:latin typeface="Calibri"/>
+              </a:rPr>
+              <a:t>4. RPO y RTO en numeros</a:t>
+            </a:r>
+            <a:r>
+              <a:rPr sz="1900" b="0" i="0">
+                <a:solidFill>
+                  <a:srgbClr val="333333"/>
+                </a:solidFill>
+                <a:latin typeface="Calibri"/>
+              </a:rPr>
+              <a:t>: cuantos datos se acepta perder («maximo 1 hora de citas») y cuanto puede estar caida la base. Un dump diario implica un RPO de 24 h: si no alcanza, hace falta </a:t>
+            </a:r>
+            <a:r>
+              <a:rPr sz="1900" b="1" i="0">
+                <a:solidFill>
+                  <a:srgbClr val="333333"/>
+                </a:solidFill>
+                <a:latin typeface="Calibri"/>
+              </a:rPr>
+              <a:t>archivado de WAL</a:t>
+            </a:r>
+            <a:r>
+              <a:rPr sz="1900" b="0" i="0">
+                <a:solidFill>
+                  <a:srgbClr val="333333"/>
+                </a:solidFill>
+                <a:latin typeface="Calibri"/>
+              </a:rPr>
+              <a:t>.</a:t>
             </a:r>
           </a:p>
           <a:p>
@@ -18880,20 +18668,108 @@
               </a:spcAft>
             </a:pPr>
             <a:r>
-              <a:rPr sz="2000" b="0" i="0">
-                <a:solidFill>
-                  <a:srgbClr val="333333"/>
-                </a:solidFill>
-                <a:latin typeface="Calibri"/>
-              </a:rPr>
-              <a:t>–   Al final de la demo: dejar enlace/script compartible al grupo.</a:t>
-            </a:r>
-          </a:p>
-        </p:txBody>
-      </p:sp>
-      <p:sp>
-        <p:nvSpPr>
-          <p:cNvPr id="6" name="TextBox 5"/>
+              <a:rPr sz="1900" b="0" i="0">
+                <a:solidFill>
+                  <a:srgbClr val="333333"/>
+                </a:solidFill>
+                <a:latin typeface="Calibri"/>
+              </a:rPr>
+              <a:t>–   </a:t>
+            </a:r>
+            <a:r>
+              <a:rPr sz="1900" b="1" i="0">
+                <a:solidFill>
+                  <a:srgbClr val="333333"/>
+                </a:solidFill>
+                <a:latin typeface="Calibri"/>
+              </a:rPr>
+              <a:t>5. Restore de prueba</a:t>
+            </a:r>
+            <a:r>
+              <a:rPr sz="1900" b="0" i="0">
+                <a:solidFill>
+                  <a:srgbClr val="333333"/>
+                </a:solidFill>
+                <a:latin typeface="Calibri"/>
+              </a:rPr>
+              <a:t> con «pg_restore» sobre una base vacia: fecha, duracion medida, la consulta que confirma el conteo, cada cuanto se ensaya y quien firma. </a:t>
+            </a:r>
+            <a:r>
+              <a:rPr sz="1900" b="1" i="0">
+                <a:solidFill>
+                  <a:srgbClr val="333333"/>
+                </a:solidFill>
+                <a:latin typeface="Calibri"/>
+              </a:rPr>
+              <a:t>Un respaldo que nunca se restauro no es un respaldo:</a:t>
+            </a:r>
+            <a:r>
+              <a:rPr sz="1900" b="0" i="0">
+                <a:solidFill>
+                  <a:srgbClr val="333333"/>
+                </a:solidFill>
+                <a:latin typeface="Calibri"/>
+              </a:rPr>
+              <a:t> es un archivo.</a:t>
+            </a:r>
+          </a:p>
+          <a:p>
+            <a:pPr>
+              <a:spcAft>
+                <a:spcPts val="800"/>
+              </a:spcAft>
+            </a:pPr>
+            <a:r>
+              <a:rPr sz="1900" b="0" i="0">
+                <a:solidFill>
+                  <a:srgbClr val="333333"/>
+                </a:solidFill>
+                <a:latin typeface="Calibri"/>
+              </a:rPr>
+              <a:t>–   </a:t>
+            </a:r>
+            <a:r>
+              <a:rPr sz="1900" b="1" i="0">
+                <a:solidFill>
+                  <a:srgbClr val="333333"/>
+                </a:solidFill>
+                <a:latin typeface="Calibri"/>
+              </a:rPr>
+              <a:t>6. Que NO cubre el plan</a:t>
+            </a:r>
+            <a:r>
+              <a:rPr sz="1900" b="0" i="0">
+                <a:solidFill>
+                  <a:srgbClr val="333333"/>
+                </a:solidFill>
+                <a:latin typeface="Calibri"/>
+              </a:rPr>
+              <a:t> y cual es el riesgo residual que se asume: el borrado por error que se descubre tres dias despues, la hora de citas que cabe en el RPO. </a:t>
+            </a:r>
+            <a:r>
+              <a:rPr sz="1900" b="1" i="0">
+                <a:solidFill>
+                  <a:srgbClr val="333333"/>
+                </a:solidFill>
+                <a:latin typeface="Calibri"/>
+              </a:rPr>
+              <a:t>Es la seccion que separa un plan de una lista de comandos</a:t>
+            </a:r>
+            <a:r>
+              <a:rPr sz="1900" b="0" i="0">
+                <a:solidFill>
+                  <a:srgbClr val="333333"/>
+                </a:solidFill>
+                <a:latin typeface="Calibri"/>
+              </a:rPr>
+              <a:t>, y la que mas se olvida.</a:t>
+            </a:r>
+          </a:p>
+        </p:txBody>
+      </p:sp>
+      <p:sp>
+        <p:nvSpPr>
+          <p:cNvPr id="7" name="TextBox 6"/>
           <p:cNvSpPr txBox="1"/>
           <p:nvPr/>
         </p:nvSpPr>
@@ -18935,6 +18811,328 @@
 </file>
 
 <file path=ppt/slides/slide47.xml><?xml version="1.0" encoding="utf-8"?>
+<p:sld xmlns:a="http://schemas.openxmlformats.org/drawingml/2006/main" xmlns:p="http://schemas.openxmlformats.org/presentationml/2006/main" xmlns:r="http://schemas.openxmlformats.org/officeDocument/2006/relationships">
+  <p:cSld>
+    <p:bg>
+      <p:bgPr>
+        <a:solidFill>
+          <a:srgbClr val="FFFFFF"/>
+        </a:solidFill>
+        <a:effectLst/>
+      </p:bgPr>
+    </p:bg>
+    <p:spTree>
+      <p:nvGrpSpPr>
+        <p:cNvPr id="1" name=""/>
+        <p:cNvGrpSpPr/>
+        <p:nvPr/>
+      </p:nvGrpSpPr>
+      <p:grpSpPr/>
+      <p:sp>
+        <p:nvSpPr>
+          <p:cNvPr id="2" name="Rectangle 1"/>
+          <p:cNvSpPr/>
+          <p:nvPr/>
+        </p:nvSpPr>
+        <p:spPr>
+          <a:xfrm>
+            <a:off x="0" y="0"/>
+            <a:ext cx="12191695" cy="960120"/>
+          </a:xfrm>
+          <a:prstGeom prst="rect">
+            <a:avLst/>
+          </a:prstGeom>
+          <a:solidFill>
+            <a:srgbClr val="095292"/>
+          </a:solidFill>
+          <a:ln>
+            <a:noFill/>
+          </a:ln>
+        </p:spPr>
+        <p:style>
+          <a:lnRef idx="1">
+            <a:schemeClr val="accent1"/>
+          </a:lnRef>
+          <a:fillRef idx="3">
+            <a:schemeClr val="accent1"/>
+          </a:fillRef>
+          <a:effectRef idx="2">
+            <a:schemeClr val="accent1"/>
+          </a:effectRef>
+          <a:fontRef idx="minor">
+            <a:schemeClr val="lt1"/>
+          </a:fontRef>
+        </p:style>
+        <p:txBody>
+          <a:bodyPr rtlCol="0" anchor="ctr"/>
+          <a:lstStyle/>
+          <a:p>
+            <a:pPr algn="ctr"/>
+          </a:p>
+        </p:txBody>
+      </p:sp>
+      <p:sp>
+        <p:nvSpPr>
+          <p:cNvPr id="3" name="Rectangle 2"/>
+          <p:cNvSpPr/>
+          <p:nvPr/>
+        </p:nvSpPr>
+        <p:spPr>
+          <a:xfrm>
+            <a:off x="0" y="960120"/>
+            <a:ext cx="12191695" cy="41148"/>
+          </a:xfrm>
+          <a:prstGeom prst="rect">
+            <a:avLst/>
+          </a:prstGeom>
+          <a:solidFill>
+            <a:srgbClr val="FFD000"/>
+          </a:solidFill>
+          <a:ln>
+            <a:noFill/>
+          </a:ln>
+        </p:spPr>
+        <p:style>
+          <a:lnRef idx="1">
+            <a:schemeClr val="accent1"/>
+          </a:lnRef>
+          <a:fillRef idx="3">
+            <a:schemeClr val="accent1"/>
+          </a:fillRef>
+          <a:effectRef idx="2">
+            <a:schemeClr val="accent1"/>
+          </a:effectRef>
+          <a:fontRef idx="minor">
+            <a:schemeClr val="lt1"/>
+          </a:fontRef>
+        </p:style>
+        <p:txBody>
+          <a:bodyPr rtlCol="0" anchor="ctr"/>
+          <a:lstStyle/>
+          <a:p>
+            <a:pPr algn="ctr"/>
+          </a:p>
+        </p:txBody>
+      </p:sp>
+      <p:sp>
+        <p:nvSpPr>
+          <p:cNvPr id="4" name="TextBox 3"/>
+          <p:cNvSpPr txBox="1"/>
+          <p:nvPr/>
+        </p:nvSpPr>
+        <p:spPr>
+          <a:xfrm>
+            <a:off x="457200" y="164592"/>
+            <a:ext cx="11277295" cy="502920"/>
+          </a:xfrm>
+          <a:prstGeom prst="rect">
+            <a:avLst/>
+          </a:prstGeom>
+          <a:noFill/>
+        </p:spPr>
+        <p:txBody>
+          <a:bodyPr wrap="square">
+            <a:spAutoFit/>
+          </a:bodyPr>
+          <a:lstStyle/>
+          <a:p>
+            <a:r>
+              <a:rPr sz="2600" b="1" i="0">
+                <a:solidFill>
+                  <a:srgbClr val="FFFFFF"/>
+                </a:solidFill>
+                <a:latin typeface="Calibri"/>
+              </a:rPr>
+              <a:t>Demo del dia</a:t>
+            </a:r>
+          </a:p>
+        </p:txBody>
+      </p:sp>
+      <p:sp>
+        <p:nvSpPr>
+          <p:cNvPr id="5" name="TextBox 4"/>
+          <p:cNvSpPr txBox="1"/>
+          <p:nvPr/>
+        </p:nvSpPr>
+        <p:spPr>
+          <a:xfrm>
+            <a:off x="457200" y="1170432"/>
+            <a:ext cx="11277295" cy="5230368"/>
+          </a:xfrm>
+          <a:prstGeom prst="rect">
+            <a:avLst/>
+          </a:prstGeom>
+          <a:noFill/>
+        </p:spPr>
+        <p:txBody>
+          <a:bodyPr wrap="square">
+            <a:spAutoFit/>
+          </a:bodyPr>
+          <a:lstStyle/>
+          <a:p>
+            <a:pPr>
+              <a:spcAft>
+                <a:spcPts val="800"/>
+              </a:spcAft>
+            </a:pPr>
+            <a:r>
+              <a:rPr sz="2000" b="0" i="0">
+                <a:solidFill>
+                  <a:srgbClr val="333333"/>
+                </a:solidFill>
+                <a:latin typeface="Calibri"/>
+              </a:rPr>
+              <a:t>–   </a:t>
+            </a:r>
+            <a:r>
+              <a:rPr sz="2000" b="1" i="0">
+                <a:solidFill>
+                  <a:srgbClr val="333333"/>
+                </a:solidFill>
+                <a:latin typeface="Calibri"/>
+              </a:rPr>
+              <a:t>Herramienta:</a:t>
+            </a:r>
+            <a:r>
+              <a:rPr sz="2000" b="0" i="0">
+                <a:solidFill>
+                  <a:srgbClr val="333333"/>
+                </a:solidFill>
+                <a:latin typeface="Calibri"/>
+              </a:rPr>
+              <a:t> PostgreSQL + Google Docs</a:t>
+            </a:r>
+          </a:p>
+          <a:p>
+            <a:pPr>
+              <a:spcAft>
+                <a:spcPts val="800"/>
+              </a:spcAft>
+            </a:pPr>
+            <a:r>
+              <a:rPr sz="2000" b="0" i="0">
+                <a:solidFill>
+                  <a:srgbClr val="333333"/>
+                </a:solidFill>
+                <a:latin typeface="Calibri"/>
+              </a:rPr>
+              <a:t>–   </a:t>
+            </a:r>
+            <a:r>
+              <a:rPr sz="2000" b="1" i="0">
+                <a:solidFill>
+                  <a:srgbClr val="333333"/>
+                </a:solidFill>
+                <a:latin typeface="Calibri"/>
+              </a:rPr>
+              <a:t>Demo:</a:t>
+            </a:r>
+            <a:r>
+              <a:rPr sz="2000" b="0" i="0">
+                <a:solidFill>
+                  <a:srgbClr val="333333"/>
+                </a:solidFill>
+                <a:latin typeface="Calibri"/>
+              </a:rPr>
+              <a:t> fn_precio_consulta + fn_trg_audit_cita con su CREATE TRIGGER ... EXECUTE FUNCTION, y el esqueleto del plan de respaldo.</a:t>
+            </a:r>
+          </a:p>
+          <a:p>
+            <a:pPr>
+              <a:spcAft>
+                <a:spcPts val="800"/>
+              </a:spcAft>
+            </a:pPr>
+            <a:r>
+              <a:rPr sz="2000" b="0" i="0">
+                <a:solidFill>
+                  <a:srgbClr val="333333"/>
+                </a:solidFill>
+                <a:latin typeface="Calibri"/>
+              </a:rPr>
+              <a:t>–   Sigan el mismo dominio VetCare (no inventen otro caso).</a:t>
+            </a:r>
+          </a:p>
+          <a:p>
+            <a:pPr>
+              <a:spcAft>
+                <a:spcPts val="800"/>
+              </a:spcAft>
+            </a:pPr>
+            <a:r>
+              <a:rPr sz="2000" b="0" i="0">
+                <a:solidFill>
+                  <a:srgbClr val="333333"/>
+                </a:solidFill>
+                <a:latin typeface="Calibri"/>
+              </a:rPr>
+              <a:t>–   </a:t>
+            </a:r>
+            <a:r>
+              <a:rPr sz="2000" b="1" i="0">
+                <a:solidFill>
+                  <a:srgbClr val="333333"/>
+                </a:solidFill>
+                <a:latin typeface="Calibri"/>
+              </a:rPr>
+              <a:t>Qué observar:</a:t>
+            </a:r>
+            <a:r>
+              <a:rPr sz="2000" b="0" i="0">
+                <a:solidFill>
+                  <a:srgbClr val="333333"/>
+                </a:solidFill>
+                <a:latin typeface="Calibri"/>
+              </a:rPr>
+              <a:t> tres UPDATE de estado dejan solo dos filas en audit_cita, porque el WHEN ignora el que no cambio el valor; y el trigger de stock rechaza el negativo.</a:t>
+            </a:r>
+          </a:p>
+        </p:txBody>
+      </p:sp>
+      <p:sp>
+        <p:nvSpPr>
+          <p:cNvPr id="6" name="TextBox 5"/>
+          <p:cNvSpPr txBox="1"/>
+          <p:nvPr/>
+        </p:nvSpPr>
+        <p:spPr>
+          <a:xfrm>
+            <a:off x="11185855" y="6473952"/>
+            <a:ext cx="640080" cy="274320"/>
+          </a:xfrm>
+          <a:prstGeom prst="rect">
+            <a:avLst/>
+          </a:prstGeom>
+          <a:noFill/>
+        </p:spPr>
+        <p:txBody>
+          <a:bodyPr wrap="square">
+            <a:spAutoFit/>
+          </a:bodyPr>
+          <a:lstStyle/>
+          <a:p>
+            <a:pPr algn="r"/>
+            <a:r>
+              <a:rPr sz="1100" b="0" i="0">
+                <a:solidFill>
+                  <a:srgbClr val="666666"/>
+                </a:solidFill>
+                <a:latin typeface="Calibri"/>
+              </a:rPr>
+              <a:t>47</a:t>
+            </a:r>
+          </a:p>
+        </p:txBody>
+      </p:sp>
+    </p:spTree>
+  </p:cSld>
+  <p:clrMapOvr>
+    <a:masterClrMapping/>
+  </p:clrMapOvr>
+</p:sld>
+</file>
+
+<file path=ppt/slides/slide48.xml><?xml version="1.0" encoding="utf-8"?>
 <p:sld xmlns:a="http://schemas.openxmlformats.org/drawingml/2006/main" xmlns:p="http://schemas.openxmlformats.org/presentationml/2006/main" xmlns:r="http://schemas.openxmlformats.org/officeDocument/2006/relationships">
   <p:cSld>
     <p:bg>

--- a/Bases de Datos II/Clases/Clase 4 - Funciones disparadores seguridad respaldo/Presentacion.pptx
+++ b/Bases de Datos II/Clases/Clase 4 - Funciones disparadores seguridad respaldo/Presentacion.pptx
@@ -714,7 +714,7 @@
           <a:lstStyle/>
           <a:p>
             <a:r>
-              <a:t>Fuera de la lamina (habla de la practica): En la rubrica del PI, seguridad y respaldo valen 15 de los 100 puntos del proyecto.</a:t>
+              <a:t>Fuera de la lamina (habla de la practica): En la rubrica del proyecto, seguridad y respaldo valen 15 de los 100 puntos del proyecto.</a:t>
             </a:r>
           </a:p>
         </p:txBody>
@@ -784,7 +784,7 @@
           <a:lstStyle/>
           <a:p>
             <a:r>
-              <a:t>La aplicacion de Huellitas puede mandar 'Canino', 'canino' o 'CANINO', y comparar el texto tal como llega significa que dos de las tres formas caen al precio de otra especie.</a:t>
+              <a:t>La aplicacion de la clínica puede mandar 'Canino', 'canino' o 'CANINO', y comparar el texto tal como llega significa que dos de las tres formas caen al precio de otra especie.</a:t>
             </a:r>
           </a:p>
           <a:p>
@@ -4757,7 +4757,7 @@
                 </a:solidFill>
                 <a:latin typeface="Calibri"/>
               </a:rPr>
-              <a:t>Integridad + RAA1 del PI VetCare</a:t>
+              <a:t>Integridad + RAA1 del proyecto de la clínica</a:t>
             </a:r>
           </a:p>
         </p:txBody>
@@ -8006,7 +8006,7 @@
                 </a:solidFill>
                 <a:latin typeface="Calibri"/>
               </a:rPr>
-              <a:t>–   Recorrido: teoría del tema, una lámina por concepto, y demo del docente sobre VetCare DB.</a:t>
+              <a:t>–   Recorrido: teoría del tema, una lámina por concepto, y demo del docente sobre la base de la clínica.</a:t>
             </a:r>
           </a:p>
           <a:p>
@@ -9988,7 +9988,7 @@
                 </a:solidFill>
                 <a:latin typeface="Calibri"/>
               </a:rPr>
-              <a:t>–   La convencion que conviene fijar para VetCare, como criterio y no como norma del motor, es a lo sumo uno o dos triggers por tabla y solo para dos usos: auditoria de cambios sensibles e invariantes que no se puedan declarar.</a:t>
+              <a:t>–   La convencion que conviene fijar para la clínica, como criterio y no como norma del motor, es a lo sumo uno o dos triggers por tabla y solo para dos usos: auditoria de cambios sensibles e invariantes que no se puedan declarar.</a:t>
             </a:r>
           </a:p>
           <a:p>
@@ -10272,7 +10272,7 @@
                 </a:solidFill>
                 <a:latin typeface="Calibri"/>
               </a:rPr>
-              <a:t>–   Y el comando concreto que el plan tiene que nombrar es pg_dump -Fc -d vetcare -f vetcare_AAAAMMDD.dump, donde -Fc pide el formato comprimido propio, que es el que permite restaurar selectivamente con pg_restore.</a:t>
+              <a:t>–   Y el comando concreto que el plan tiene que nombrar es pg_dump -Fc -d clinica -f clinica_AAAAMMDD.dump, donde -Fc pide el formato comprimido propio, que es el que permite restaurar selectivamente con pg_restore.</a:t>
             </a:r>
           </a:p>
           <a:p>
@@ -10840,7 +10840,7 @@
                 </a:solidFill>
                 <a:latin typeface="Calibri"/>
               </a:rPr>
-              <a:t>–   En VetCare las dos se cruzan en un punto: un rol con DELETE de mas puede borrar la agenda, y solo un respaldo probado la recupera.</a:t>
+              <a:t>–   En la clínica las dos se cruzan en un punto: un rol con DELETE de mas puede borrar la agenda, y solo un respaldo probado la recupera.</a:t>
             </a:r>
           </a:p>
           <a:p>
@@ -11195,7 +11195,7 @@
                 </a:solidFill>
                 <a:latin typeface="Calibri"/>
               </a:rPr>
-              <a:t>Encuadre · clase regular · VetCare</a:t>
+              <a:t>Encuadre · clase regular · la clínica</a:t>
             </a:r>
           </a:p>
         </p:txBody>
@@ -11310,7 +11310,7 @@
                 </a:solidFill>
                 <a:latin typeface="Calibri"/>
               </a:rPr>
-              <a:t>Teoría Core breve (al servicio del PI)</a:t>
+              <a:t>Teoría Core breve (al servicio del proyecto)</a:t>
             </a:r>
           </a:p>
         </p:txBody>
@@ -11944,7 +11944,7 @@
                 </a:solidFill>
                 <a:latin typeface="Calibri"/>
               </a:rPr>
-              <a:t>–   Si Huellitas atiende del orden de cuarenta citas por dia en un horario de lunes a sabado de 7:00 a 19:00, perder cuatro horas de datos son entre quince y veinte citas con sus consultas clinicas y sus facturas</a:t>
+              <a:t>–   Si la clínica atiende del orden de cuarenta citas por dia en un horario de lunes a sabado de 7:00 a 19:00, perder cuatro horas de datos son entre quince y veinte citas con sus consultas clinicas y sus facturas</a:t>
             </a:r>
           </a:p>
           <a:p>
@@ -12977,7 +12977,7 @@
                 </a:solidFill>
                 <a:latin typeface="Calibri"/>
               </a:rPr>
-              <a:t>Como amarra con las clases vecinas y con el PI (1/2)</a:t>
+              <a:t>Como amarra con las clases vecinas (1/2)</a:t>
             </a:r>
           </a:p>
         </p:txBody>
@@ -13261,7 +13261,7 @@
                 </a:solidFill>
                 <a:latin typeface="Calibri"/>
               </a:rPr>
-              <a:t>Como amarra con las clases vecinas y con el PI (2/2)</a:t>
+              <a:t>Como amarra con las clases vecinas (2/2)</a:t>
             </a:r>
           </a:p>
         </p:txBody>
@@ -13316,7 +13316,7 @@
                 </a:solidFill>
                 <a:latin typeface="Calibri"/>
               </a:rPr>
-              <a:t>–   En el PI esto es la seccion de seguridad y respaldo: roles, matriz, auditoria y plan de restauracion se presentan como una sola pieza.</a:t>
+              <a:t>–   En el proyecto esto es la seccion de seguridad y respaldo: roles, matriz, auditoria y plan de restauracion se presentan como una sola pieza.</a:t>
             </a:r>
           </a:p>
           <a:p>
@@ -18500,7 +18500,7 @@
                 </a:solidFill>
                 <a:latin typeface="Calibri"/>
               </a:rPr>
-              <a:t> «pg_dump -Fc -d vetcare -f vetcare_AAAAMMDD.dump» para los datos, y «pg_dumpall --globals-only» para los </a:t>
+              <a:t> «pg_dump -Fc -d clinica -f clinica_AAAAMMDD.dump» para los datos, y «pg_dumpall --globals-only» para los </a:t>
             </a:r>
             <a:r>
               <a:rPr sz="1900" b="1" i="0">
@@ -18570,7 +18570,7 @@
                 </a:solidFill>
                 <a:latin typeface="Calibri"/>
               </a:rPr>
-              <a:t> la facturacion de Huellitas cierra a las 20:00». La hora se justifica con un hecho del negocio.</a:t>
+              <a:t> la facturacion de la clínica cierra a las 20:00». La hora se justifica con un hecho del negocio.</a:t>
             </a:r>
           </a:p>
           <a:p>
@@ -19050,7 +19050,7 @@
                 </a:solidFill>
                 <a:latin typeface="Calibri"/>
               </a:rPr>
-              <a:t>–   Sigan el mismo dominio VetCare (no inventen otro caso).</a:t>
+              <a:t>–   Sigan el mismo dominio de la clínica (no inventen otro caso).</a:t>
             </a:r>
           </a:p>
           <a:p>

--- a/Bases de Datos II/Clases/Clase 4 - Funciones disparadores seguridad respaldo/Presentacion.pptx
+++ b/Bases de Datos II/Clases/Clase 4 - Funciones disparadores seguridad respaldo/Presentacion.pptx
@@ -7,8 +7,8 @@
   <p:sldIdLst>
     <p:sldId id="256" r:id="rId7"/>
     <p:sldId id="257" r:id="rId8"/>
-    <p:sldId id="258" r:id="rId10"/>
-    <p:sldId id="259" r:id="rId11"/>
+    <p:sldId id="258" r:id="rId9"/>
+    <p:sldId id="259" r:id="rId10"/>
     <p:sldId id="260" r:id="rId12"/>
     <p:sldId id="261" r:id="rId13"/>
     <p:sldId id="262" r:id="rId14"/>
@@ -526,43 +526,107 @@
           <a:lstStyle/>
           <a:p>
             <a:r>
-              <a:t>TEXTO COMPLETO DE LA LÁMINA (se proyecta resumido):</a:t>
-            </a:r>
-          </a:p>
-          <a:p/>
-          <a:p>
-            <a:r>
-              <a:t>Tema de hoy: Funciones · Triggers · Seguridad y respaldo</a:t>
-            </a:r>
-          </a:p>
-          <a:p/>
-          <a:p>
-            <a:r>
-              <a:t>Herramienta: PostgreSQL + Google Docs · Bloque 120 min</a:t>
-            </a:r>
-          </a:p>
-          <a:p/>
-          <a:p>
-            <a:r>
-              <a:t>Gratis + navegador · free tier · sin software de pago obligatorio.</a:t>
-            </a:r>
-          </a:p>
-          <a:p/>
-          <a:p>
-            <a:r>
-              <a:t>Recorrido: teoría del tema, una lámina por concepto, y demo del docente sobre la base de la clínica.</a:t>
-            </a:r>
-          </a:p>
-          <a:p/>
-          <a:p>
-            <a:r>
-              <a:t>Cada lámina se sostiene sola: sirve para repasar aunque hayas faltado.</a:t>
-            </a:r>
-          </a:p>
-          <a:p/>
-          <a:p>
-            <a:r>
-              <a:t>Conceptos de hoy: Funcion y procedimiento · La funcion de tarifas, y por que IMMUTABLE importa · Los tres detalles de fn_precio_consulta · El trigger.</a:t>
+              <a:t>DESARROLLO (para explicarlo, no se proyecta):</a:t>
+            </a:r>
+          </a:p>
+          <a:p>
+            <a:r>
+              <a:t>Un procedimiento se invoca para que HAGA algo y se llama con CALL; una funcion se invoca para que DEVUELVA un valor, y ese valor se usa dentro de una expresion SQL, como en AS tarifa</a:t>
+            </a:r>
+          </a:p>
+          <a:p>
+            <a:r>
+              <a:t>El molde es el mismo de la Clase 3 con una linea mas: RETURNS NUMERIC LANGUAGE plpgsql IMMUTABLE AS $fn$... $fn$;.</a:t>
+            </a:r>
+          </a:p>
+          <a:p>
+            <a:r>
+              <a:t>Nada de RETURN NUMBER IS: eso es Oracle y aqui no compila.</a:t>
+            </a:r>
+          </a:p>
+          <a:p>
+            <a:r>
+              <a:t>La palabra que hay que desempacar es IMMUTABLE, porque es una de las tres categorias de volatilidad que PostgreSQL define y el estudiante no las conoce.</a:t>
+            </a:r>
+          </a:p>
+          <a:p>
+            <a:r>
+              <a:t>IMMUTABLE promete que con los mismos argumentos la funcion devuelve siempre lo mismo y que no lee ni escribe la base; el motor puede entonces evaluarla una sola vez y reutilizar el resultado, e incluso resolverla al planificar.</a:t>
+            </a:r>
+          </a:p>
+          <a:p>
+            <a:r>
+              <a:t>STABLE promete que el resultado no cambia DENTRO de una misma sentencia, y es lo que corresponde a una funcion que consulta tablas.</a:t>
+            </a:r>
+          </a:p>
+          <a:p>
+            <a:r>
+              <a:t>VOLATILE es el valor por omision y significa que puede devolver cualquier cosa cada vez. fn_precio_consulta es IMMUTABLE porque solo depende de sus dos parametros.</a:t>
+            </a:r>
+          </a:p>
+          <a:p>
+            <a:r>
+              <a:t>El contraejemplo util es fn_edad_mascota calculando la edad con now() por dentro: no es inmutable, porque manana devuelve otro numero para la misma mascota</a:t>
+            </a:r>
+          </a:p>
+          <a:p>
+            <a:r>
+              <a:t>Y por eso no puede sostener un indice sobre expresion de los que se veran en la Clase 7; la correccion es de una linea, pasar la fecha de referencia como parametro.</a:t>
+            </a:r>
+          </a:p>
+          <a:p>
+            <a:r>
+              <a:t>Vale advertir que declarar IMMUTABLE una funcion que si lee tablas no produce un error, produce algo peor: resultados obsoletos que el motor considera correctos.</a:t>
+            </a:r>
+          </a:p>
+          <a:p>
+            <a:r>
+              <a:t>Hay un segundo efecto que hay que dimensionar con numeros porque conecta con la Clase 6: una funcion invocada dentro de un SELECT se ejecuta una vez por fila evaluada.</a:t>
+            </a:r>
+          </a:p>
+          <a:p>
+            <a:r>
+              <a:t>Si fn_saldo_factura(p_id_factura) hace un SUM sobre detalle_factura y la consulta recorre diez mil facturas, el motor ejecuta diez mil consultas internas; el resultado es correcto y el tiempo es inaceptable.</a:t>
+            </a:r>
+          </a:p>
+          <a:p>
+            <a:r>
+              <a:t>La alternativa es una consulta con GROUP BY, y esa comparacion es material directo de la Clase 6.</a:t>
+            </a:r>
+          </a:p>
+          <a:p>
+            <a:r>
+              <a:t>NOTAS:</a:t>
+            </a:r>
+          </a:p>
+          <a:p>
+            <a:r>
+              <a:t>Una funcion y un procedimiento se parecen tanto en la escritura que conviene separarlos por su papel y no por su sintaxis.</a:t>
+            </a:r>
+          </a:p>
+          <a:p>
+            <a:r>
+              <a:t>RETURNS declara el tipo del valor devuelto, y dentro del cuerpo tiene que haber al menos un RETURN, porque una funcion de PL/pgSQL que termina sin retornar lanza un error en ejecucion.</a:t>
+            </a:r>
+          </a:p>
+          <a:p>
+            <a:r>
+              <a:t>CÓDIGO CITADO (referencia):</a:t>
+            </a:r>
+          </a:p>
+          <a:p>
+            <a:r>
+              <a:t>SELECT m.nombre, fn_precio_consulta(m.especie, FALSE)</a:t>
+            </a:r>
+          </a:p>
+          <a:p>
+            <a:r>
+              <a:t>FROM mascota m WHERE m.activa = 'S'</a:t>
+            </a:r>
+          </a:p>
+          <a:p>
+            <a:r>
+              <a:t>CREATE OR REPLACE FUNCTION fn_precio_consulta(p_especie TEXT, p_urgencia BOOLEAN)</a:t>
             </a:r>
           </a:p>
         </p:txBody>
@@ -632,37 +696,92 @@
           <a:lstStyle/>
           <a:p>
             <a:r>
-              <a:t>TEXTO COMPLETO DE LA LÁMINA (se proyecta resumido):</a:t>
-            </a:r>
-          </a:p>
-          <a:p/>
-          <a:p>
-            <a:r>
-              <a:t>`CHECK`: una sola fila, una sola columna. `stock &gt;= 0`, `precio &gt; 0`, `estado IN (...)`. Es lo mas barato y lo mas dificil de saltarse, porque lo aplica el motor sin una linea de codigo. Si la regla cabe en un CHECK, no se hace trigger.</a:t>
-            </a:r>
-          </a:p>
-          <a:p/>
-          <a:p>
-            <a:r>
-              <a:t>`UNIQUE` y `FK`: la relacion entre filas o entre tablas. «un veterinario no puede tener dos citas en la misma franja» es `UNIQUE (id_veterinario, fecha_hora)`, no un trigger.</a:t>
-            </a:r>
-          </a:p>
-          <a:p/>
-          <a:p>
-            <a:r>
-              <a:t>Trigger: cuando la regla necesita OTRA fila u OTRA tabla. Comparar `OLD` con `NEW`, mirar el stock de `insumo` mientras se actualiza otra tabla, o escribir en una segunda tabla (auditoria). Nada de eso cabe en un `CHECK`.</a:t>
-            </a:r>
-          </a:p>
-          <a:p/>
-          <a:p>
-            <a:r>
-              <a:t>Aplicacion: solo lo que la base no puede saber. El formato del correo, el permiso de la pantalla, la traduccion del mensaje. Y el criterio para decidir: una validacion que solo vive en la app se salta conectandose por `psql`.</a:t>
-            </a:r>
-          </a:p>
-          <a:p/>
-          <a:p>
-            <a:r>
-              <a:t>BEFORE valida, AFTER audita. Un trigger que rechaza corre `BEFORE`, porque despues el dato ya esta escrito; uno que registra un hecho consumado corre `AFTER`. Poner `AFTER` en el de stock es el error mas comun del dia.</a:t>
+              <a:t>DESARROLLO (para explicarlo, no se proyecta):</a:t>
+            </a:r>
+          </a:p>
+          <a:p>
+            <a:r>
+              <a:t>De lo anterior se deduce cuando no usar un trigger, y esta es probablemente la parte mas util de la clase.</a:t>
+            </a:r>
+          </a:p>
+          <a:p>
+            <a:r>
+              <a:t>No se usa cuando una restriccion declarativa resuelve el problema.</a:t>
+            </a:r>
+          </a:p>
+          <a:p>
+            <a:r>
+              <a:t>No se usa cuando la regla pertenece al flujo de la aplicacion y debe admitir excepciones, como un descuento autorizado por el administrador: un trigger no distingue casos autorizados y termina obligando a trucos para desactivarlo.</a:t>
+            </a:r>
+          </a:p>
+          <a:p>
+            <a:r>
+              <a:t>No se usa cuando el efecto es pesado o depende de algo externo, como enviar un correo o llamar un servicio</a:t>
+            </a:r>
+          </a:p>
+          <a:p>
+            <a:r>
+              <a:t>Porque eso corre dentro de la transaccion, alarga los bloqueos y convierte una demora ajena en demora de la base de datos, tema que se retoma en las Clases 8 y 10.</a:t>
+            </a:r>
+          </a:p>
+          <a:p>
+            <a:r>
+              <a:t>Y no se usa cuando la logica tiene varios pasos y decisiones, porque para eso existe el procedimiento de la Clase 3, que se invoca a proposito y se puede probar solo.</a:t>
+            </a:r>
+          </a:p>
+          <a:p>
+            <a:r>
+              <a:t>El primero es la invisibilidad: quien lee la aplicacion ve un UPDATE cita SET estado = 'CANCELADA' y no ve que ademas se escribio en audit_cita; el comportamiento del sistema deja de estar en el codigo que se lee.</a:t>
+            </a:r>
+          </a:p>
+          <a:p>
+            <a:r>
+              <a:t>Y no hay ninguna senal en el SQL, asi que la unica defensa es documentarlo.</a:t>
+            </a:r>
+          </a:p>
+          <a:p>
+            <a:r>
+              <a:t>El segundo es el encadenamiento: si el trigger de cita inserta en audit_cita y audit_cita tiene su propio trigger, se forma una cadena, y si alguno acaba modificando la tabla que lo activo hay recursion</a:t>
+            </a:r>
+          </a:p>
+          <a:p>
+            <a:r>
+              <a:t>La convencion que conviene fijar para la clínica, como criterio y no como norma del motor, es a lo sumo uno o dos triggers por tabla y solo para dos usos: auditoria de cambios sensibles e invariantes que no se puedan declarar.</a:t>
+            </a:r>
+          </a:p>
+          <a:p>
+            <a:r>
+              <a:t>Dos triggers, no cinco, y esa cifra es deliberada.</a:t>
+            </a:r>
+          </a:p>
+          <a:p>
+            <a:r>
+              <a:t>NOTAS:</a:t>
+            </a:r>
+          </a:p>
+          <a:p>
+            <a:r>
+              <a:t>Hay tres riesgos que conviene exponer con ejemplos y no como advertencia generica.</a:t>
+            </a:r>
+          </a:p>
+          <a:p>
+            <a:r>
+              <a:t>PostgreSQL no la prohibe, la corta cuando se agota la pila, y eso ocurre en produccion y con datos reales, no durante la prueba.</a:t>
+            </a:r>
+          </a:p>
+          <a:p>
+            <a:r>
+              <a:t>El tercero es un limite que hay que nombrar porque es exactamente lo que la seccion 6 del plan de respaldo pide: hay operaciones que un trigger de fila no ve.</a:t>
+            </a:r>
+          </a:p>
+          <a:p>
+            <a:r>
+              <a:t>TRUNCATE no dispara triggers de fila, asi que un TRUNCATE insumo pasa por encima de la validacion de stock sin que se escriba una sola linea de auditoria.</a:t>
+            </a:r>
+          </a:p>
+          <a:p>
+            <a:r>
+              <a:t>Fuera de la lamina (habla de la practica): Y no hay ninguna senal en el SQL, asi que la unica defensa es documentarlo, que es parte del entregable.</a:t>
             </a:r>
           </a:p>
         </p:txBody>
@@ -737,57 +856,72 @@
           </a:p>
           <a:p>
             <a:r>
-              <a:t>De lo anterior se deduce cuando no usar un trigger, y esta es probablemente la parte mas util de la clase.</a:t>
-            </a:r>
-          </a:p>
-          <a:p>
-            <a:r>
-              <a:t>No se usa cuando una restriccion declarativa resuelve el problema.</a:t>
-            </a:r>
-          </a:p>
-          <a:p>
-            <a:r>
-              <a:t>No se usa cuando la regla pertenece al flujo de la aplicacion y debe admitir excepciones, como un descuento autorizado por el administrador: un trigger no distingue casos autorizados y termina obligando a trucos para desactivarlo.</a:t>
-            </a:r>
-          </a:p>
-          <a:p>
-            <a:r>
-              <a:t>No se usa cuando el efecto es pesado o depende de algo externo, como enviar un correo o llamar un servicio</a:t>
-            </a:r>
-          </a:p>
-          <a:p>
-            <a:r>
-              <a:t>Porque eso corre dentro de la transaccion, alarga los bloqueos y convierte una demora ajena en demora de la base de datos, tema que se retoma en las Clases 8 y 10.</a:t>
-            </a:r>
-          </a:p>
-          <a:p>
-            <a:r>
-              <a:t>Y no se usa cuando la logica tiene varios pasos y decisiones, porque para eso existe el procedimiento de la Clase 3, que se invoca a proposito y se puede probar solo.</a:t>
-            </a:r>
-          </a:p>
-          <a:p>
-            <a:r>
-              <a:t>El primero es la invisibilidad: quien lee la aplicacion ve un UPDATE cita SET estado = 'CANCELADA' y no ve que ademas se escribio en audit_cita; el comportamiento del sistema deja de estar en el codigo que se lee.</a:t>
-            </a:r>
-          </a:p>
-          <a:p>
-            <a:r>
-              <a:t>Y no hay ninguna senal en el SQL, asi que la unica defensa es documentarlo.</a:t>
-            </a:r>
-          </a:p>
-          <a:p>
-            <a:r>
-              <a:t>El segundo es el encadenamiento: si el trigger de cita inserta en audit_cita y audit_cita tiene su propio trigger, se forma una cadena, y si alguno acaba modificando la tabla que lo activo hay recursion</a:t>
-            </a:r>
-          </a:p>
-          <a:p>
-            <a:r>
-              <a:t>La convencion que conviene fijar para la clínica, como criterio y no como norma del motor, es a lo sumo uno o dos triggers por tabla y solo para dos usos: auditoria de cambios sensibles e invariantes que no se puedan declarar.</a:t>
-            </a:r>
-          </a:p>
-          <a:p>
-            <a:r>
-              <a:t>Dos triggers, no cinco, y esa cifra es deliberada.</a:t>
+              <a:t>Seguridad y respaldo van en la misma sesion porque responden a preguntas complementarias: la seguridad intenta que nada malo pase, el respaldo asume que igual pasara.</a:t>
+            </a:r>
+          </a:p>
+          <a:p>
+            <a:r>
+              <a:t>Hay que separar dos familias de copia que se confunden todo el tiempo.</a:t>
+            </a:r>
+          </a:p>
+          <a:p>
+            <a:r>
+              <a:t>Un respaldo logico exporta objetos y datos, como sentencias o en un formato propio del motor; en PostgreSQL la herramienta es pg_dump</a:t>
+            </a:r>
+          </a:p>
+          <a:p>
+            <a:r>
+              <a:t>Y el comando concreto que el plan tiene que nombrar es pg_dump -Fc -d clinica -f clinica_AAAAMMDD.dump, donde -Fc pide el formato comprimido propio, que es el que permite restaurar selectivamente con pg_restore.</a:t>
+            </a:r>
+          </a:p>
+          <a:p>
+            <a:r>
+              <a:t>Es portable entre versiones y maquinas, permite restaurar una sola tabla y se puede inspeccionar; en cambio es lento de restaurar en volumenes grandes y no captura un instante exacto de la base entera.</a:t>
+            </a:r>
+          </a:p>
+          <a:p>
+            <a:r>
+              <a:t>Aqui hay un hueco que casi nadie ve: pg_dump respalda UNA base de datos y NO respalda los roles, porque los roles son objetos del cluster y no de la base.</a:t>
+            </a:r>
+          </a:p>
+          <a:p>
+            <a:r>
+              <a:t>Los cuatro roles de la Clase 2 se van con pg_dumpall --globals-only.</a:t>
+            </a:r>
+          </a:p>
+          <a:p>
+            <a:r>
+              <a:t>Si ese comando falta en el plan, se restaura la base y ningun rol tiene permisos: el sistema esta ahi y nadie puede entrar.</a:t>
+            </a:r>
+          </a:p>
+          <a:p>
+            <a:r>
+              <a:t>Vale decirlo asi, porque es el tipo de detalle por el que un plan de respaldo real falla.</a:t>
+            </a:r>
+          </a:p>
+          <a:p>
+            <a:r>
+              <a:t>Un respaldo fisico copia los archivos del motor y los registros de transaccion, con pg_basebackup</a:t>
+            </a:r>
+          </a:p>
+          <a:p>
+            <a:r>
+              <a:t>Y es lo que se usa en produccion porque permite recuperar a un punto exacto en el tiempo aplicando el registro de escritura anticipada, el WAL; exige acceso al sistema de archivos y, en general, la misma version y plataforma.</a:t>
+            </a:r>
+          </a:p>
+          <a:p>
+            <a:r>
+              <a:t>Con esa base se ordenan las estrategias con numeros: un dump diario deja una perdida potencial de veinticuatro horas, y agregar archivado de WAL la baja al orden de minutos; son ejemplos, no valores obligatorios.</a:t>
+            </a:r>
+          </a:p>
+          <a:p>
+            <a:r>
+              <a:t>En la clínica las dos se cruzan en un punto: un rol con DELETE de mas puede borrar la agenda, y solo un respaldo probado la recupera.</a:t>
+            </a:r>
+          </a:p>
+          <a:p>
+            <a:r>
+              <a:t>Sin privilegio minimo el respaldo se usa mas; sin respaldo, un error de privilegios es irreversible.</a:t>
             </a:r>
           </a:p>
           <a:p>
@@ -797,27 +931,7 @@
           </a:p>
           <a:p>
             <a:r>
-              <a:t>Hay tres riesgos que conviene exponer con ejemplos y no como advertencia generica.</a:t>
-            </a:r>
-          </a:p>
-          <a:p>
-            <a:r>
-              <a:t>PostgreSQL no la prohibe, la corta cuando se agota la pila, y eso ocurre en produccion y con datos reales, no durante la prueba.</a:t>
-            </a:r>
-          </a:p>
-          <a:p>
-            <a:r>
-              <a:t>El tercero es un limite que hay que nombrar porque es exactamente lo que la seccion 6 del plan de respaldo pide: hay operaciones que un trigger de fila no ve.</a:t>
-            </a:r>
-          </a:p>
-          <a:p>
-            <a:r>
-              <a:t>TRUNCATE no dispara triggers de fila, asi que un TRUNCATE insumo pasa por encima de la validacion de stock sin que se escriba una sola linea de auditoria.</a:t>
-            </a:r>
-          </a:p>
-          <a:p>
-            <a:r>
-              <a:t>Fuera de la lamina (habla de la practica): Y no hay ninguna senal en el SQL, asi que la unica defensa es documentarlo, que es parte del entregable.</a:t>
+              <a:t>La consecuencia para este curso hay que decirla sin rodeos y esta en la seccion siguiente: nada de esto se puede EJECUTAR.</a:t>
             </a:r>
           </a:p>
         </p:txBody>
@@ -887,87 +1001,37 @@
           <a:lstStyle/>
           <a:p>
             <a:r>
-              <a:t>DESARROLLO (para explicarlo, no se proyecta):</a:t>
-            </a:r>
-          </a:p>
-          <a:p>
-            <a:r>
-              <a:t>Seguridad y respaldo van en la misma sesion porque responden a preguntas complementarias: la seguridad intenta que nada malo pase, el respaldo asume que igual pasara.</a:t>
-            </a:r>
-          </a:p>
-          <a:p>
-            <a:r>
-              <a:t>Hay que separar dos familias de copia que se confunden todo el tiempo.</a:t>
-            </a:r>
-          </a:p>
-          <a:p>
-            <a:r>
-              <a:t>Un respaldo logico exporta objetos y datos, como sentencias o en un formato propio del motor; en PostgreSQL la herramienta es pg_dump</a:t>
-            </a:r>
-          </a:p>
-          <a:p>
-            <a:r>
-              <a:t>Y el comando concreto que el plan tiene que nombrar es pg_dump -Fc -d clinica -f clinica_AAAAMMDD.dump, donde -Fc pide el formato comprimido propio, que es el que permite restaurar selectivamente con pg_restore.</a:t>
-            </a:r>
-          </a:p>
-          <a:p>
-            <a:r>
-              <a:t>Es portable entre versiones y maquinas, permite restaurar una sola tabla y se puede inspeccionar; en cambio es lento de restaurar en volumenes grandes y no captura un instante exacto de la base entera.</a:t>
-            </a:r>
-          </a:p>
-          <a:p>
-            <a:r>
-              <a:t>Aqui hay un hueco que casi nadie ve: pg_dump respalda UNA base de datos y NO respalda los roles, porque los roles son objetos del cluster y no de la base.</a:t>
-            </a:r>
-          </a:p>
-          <a:p>
-            <a:r>
-              <a:t>Los cuatro roles de la Clase 2 se van con pg_dumpall --globals-only.</a:t>
-            </a:r>
-          </a:p>
-          <a:p>
-            <a:r>
-              <a:t>Si ese comando falta en el plan, se restaura la base y ningun rol tiene permisos: el sistema esta ahi y nadie puede entrar.</a:t>
-            </a:r>
-          </a:p>
-          <a:p>
-            <a:r>
-              <a:t>Vale decirlo asi, porque es el tipo de detalle por el que un plan de respaldo real falla.</a:t>
-            </a:r>
-          </a:p>
-          <a:p>
-            <a:r>
-              <a:t>Un respaldo fisico copia los archivos del motor y los registros de transaccion, con pg_basebackup</a:t>
-            </a:r>
-          </a:p>
-          <a:p>
-            <a:r>
-              <a:t>Y es lo que se usa en produccion porque permite recuperar a un punto exacto en el tiempo aplicando el registro de escritura anticipada, el WAL; exige acceso al sistema de archivos y, en general, la misma version y plataforma.</a:t>
-            </a:r>
-          </a:p>
-          <a:p>
-            <a:r>
-              <a:t>Con esa base se ordenan las estrategias con numeros: un dump diario deja una perdida potencial de veinticuatro horas, y agregar archivado de WAL la baja al orden de minutos; son ejemplos, no valores obligatorios.</a:t>
-            </a:r>
-          </a:p>
-          <a:p>
-            <a:r>
-              <a:t>En la clínica las dos se cruzan en un punto: un rol con DELETE de mas puede borrar la agenda, y solo un respaldo probado la recupera.</a:t>
-            </a:r>
-          </a:p>
-          <a:p>
-            <a:r>
-              <a:t>Sin privilegio minimo el respaldo se usa mas; sin respaldo, un error de privilegios es irreversible.</a:t>
-            </a:r>
-          </a:p>
-          <a:p>
-            <a:r>
-              <a:t>NOTAS:</a:t>
-            </a:r>
-          </a:p>
-          <a:p>
-            <a:r>
-              <a:t>La consecuencia para este curso hay que decirla sin rodeos y esta en la seccion siguiente: nada de esto se puede EJECUTAR.</a:t>
+              <a:t>TEXTO COMPLETO DE LA LÁMINA (se proyecta resumido):</a:t>
+            </a:r>
+          </a:p>
+          <a:p/>
+          <a:p>
+            <a:r>
+              <a:t>1. Que se respalda y con que. `pg_dump -Fc -d clinica -f clinica_AAAAMMDD.dump` para los datos, y `pg_dumpall --globals-only` para los roles de la Clase 2: `pg_dump` es de UNA base y los roles son del cluster, asi que no los respalda. Si falta, se restaura la base y ningun rol tiene permisos.</a:t>
+            </a:r>
+          </a:p>
+          <a:p/>
+          <a:p>
+            <a:r>
+              <a:t>2. Frecuencia, con su razon. No «diario»: «`pg_dump -Fc` a las 20:30 porque la facturacion de la clínica cierra a las 20:00». La hora se justifica con un hecho del negocio.</a:t>
+            </a:r>
+          </a:p>
+          <a:p/>
+          <a:p>
+            <a:r>
+              <a:t>3. Retencion —cuantas copias y donde: 7 diarias, 4 semanales, 12 mensuales, y al menos una fuera del mismo servidor— y 4. RPO y RTO en numeros: cuantos datos se acepta perder («maximo 1 hora de citas») y cuanto puede estar caida la base. Un dump diario implica un RPO de 24 h: si no alcanza, hace falta archivado de WAL.</a:t>
+            </a:r>
+          </a:p>
+          <a:p/>
+          <a:p>
+            <a:r>
+              <a:t>5. Restore de prueba con `pg_restore` sobre una base vacia: fecha, duracion medida, la consulta que confirma el conteo, cada cuanto se ensaya y quien firma. Un respaldo que nunca se restauro no es un respaldo: es un archivo.</a:t>
+            </a:r>
+          </a:p>
+          <a:p/>
+          <a:p>
+            <a:r>
+              <a:t>6. Que NO cubre el plan y cual es el riesgo residual que se asume: el borrado por error que se descubre tres dias despues, la hora de citas que cabe en el RPO. Es la seccion que separa un plan de una lista de comandos, y la que mas se olvida.</a:t>
             </a:r>
           </a:p>
         </p:txBody>
@@ -1037,37 +1101,87 @@
           <a:lstStyle/>
           <a:p>
             <a:r>
-              <a:t>TEXTO COMPLETO DE LA LÁMINA (se proyecta resumido):</a:t>
-            </a:r>
-          </a:p>
-          <a:p/>
-          <a:p>
-            <a:r>
-              <a:t>1. Que se respalda y con que. `pg_dump -Fc -d clinica -f clinica_AAAAMMDD.dump` para los datos, y `pg_dumpall --globals-only` para los roles de la Clase 2: `pg_dump` es de UNA base y los roles son del cluster, asi que no los respalda. Si falta, se restaura la base y ningun rol tiene permisos.</a:t>
-            </a:r>
-          </a:p>
-          <a:p/>
-          <a:p>
-            <a:r>
-              <a:t>2. Frecuencia, con su razon. No «diario»: «`pg_dump -Fc` a las 20:30 porque la facturacion de la clínica cierra a las 20:00». La hora se justifica con un hecho del negocio.</a:t>
-            </a:r>
-          </a:p>
-          <a:p/>
-          <a:p>
-            <a:r>
-              <a:t>3. Retencion —cuantas copias y donde: 7 diarias, 4 semanales, 12 mensuales, y al menos una fuera del mismo servidor— y 4. RPO y RTO en numeros: cuantos datos se acepta perder («maximo 1 hora de citas») y cuanto puede estar caida la base. Un dump diario implica un RPO de 24 h: si no alcanza, hace falta archivado de WAL.</a:t>
-            </a:r>
-          </a:p>
-          <a:p/>
-          <a:p>
-            <a:r>
-              <a:t>5. Restore de prueba con `pg_restore` sobre una base vacia: fecha, duracion medida, la consulta que confirma el conteo, cada cuanto se ensaya y quien firma. Un respaldo que nunca se restauro no es un respaldo: es un archivo.</a:t>
-            </a:r>
-          </a:p>
-          <a:p/>
-          <a:p>
-            <a:r>
-              <a:t>6. Que NO cubre el plan y cual es el riesgo residual que se asume: el borrado por error que se descubre tres dias despues, la hora de citas que cabe en el RPO. Es la seccion que separa un plan de una lista de comandos, y la que mas se olvida.</a:t>
+              <a:t>DESARROLLO (para explicarlo, no se proyecta):</a:t>
+            </a:r>
+          </a:p>
+          <a:p>
+            <a:r>
+              <a:t>El RPO es cuanta informacion se acepta perder, medida en tiempo.</a:t>
+            </a:r>
+          </a:p>
+          <a:p>
+            <a:r>
+              <a:t>Si la clínica atiende del orden de cuarenta citas por dia en un horario de lunes a sabado de 7:00 a 19:00, perder cuatro horas de datos son entre quince y veinte citas con sus consultas clinicas y sus facturas</a:t>
+            </a:r>
+          </a:p>
+          <a:p>
+            <a:r>
+              <a:t>Y quien decide si eso es tolerable es el dueno de la clinica, no el administrador de la base; esa asignacion de responsabilidad es regla, no matiz.</a:t>
+            </a:r>
+          </a:p>
+          <a:p>
+            <a:r>
+              <a:t>El RTO es cuanto tiempo puede estar caida la base antes de restaurar: si el sistema se cae un sabado a las diez de la manana con la sala llena, un RTO de ocho horas equivale a cerrar el dia y devolver pacientes.</a:t>
+            </a:r>
+          </a:p>
+          <a:p>
+            <a:r>
+              <a:t>Y la ventana del respaldo se justifica con el mismo horario: un dump a las 20:30 se defiende porque la facturacion cierra a las 20:00, mientras que «diario» a secas no se defiende.</a:t>
+            </a:r>
+          </a:p>
+          <a:p>
+            <a:r>
+              <a:t>Uno, restaurar en un entorno distinto del original, nunca encima del que funciona, porque una prueba que destruye el dato bueno es un incidente y no una prueba.</a:t>
+            </a:r>
+          </a:p>
+          <a:p>
+            <a:r>
+              <a:t>Dos, cronometrar desde que se decide restaurar hasta que una consulta de la aplicacion devuelve datos correctos, porque ese intervalo, y no el tiempo de copiar un archivo, es el RTO medido.</a:t>
+            </a:r>
+          </a:p>
+          <a:p>
+            <a:r>
+              <a:t>Tres, verificar con comprobaciones de negocio, y esto es lo que convierte «restaure» en «restaure bien»: los conteos de cita, consulta y factura, y el maximo de fecha_hora en cita, comparados contra los valores del origen al momento del corte.</a:t>
+            </a:r>
+          </a:p>
+          <a:p>
+            <a:r>
+              <a:t>Y hay una sexta seccion que casi siempre se omite: que NO cubre el plan, y cual es el riesgo residual que se asume.</a:t>
+            </a:r>
+          </a:p>
+          <a:p>
+            <a:r>
+              <a:t>Un dump diario no protege del borrado por error que se descubre tres dias despues si la retencion es de dos copias; un respaldo logico no protege de la corrupcion del propio archivo si nunca se restaura.</a:t>
+            </a:r>
+          </a:p>
+          <a:p>
+            <a:r>
+              <a:t>Nombrar el limite es lo que separa un plan de una lista de comandos, y es lo que un evaluador pregunta primero.</a:t>
+            </a:r>
+          </a:p>
+          <a:p>
+            <a:r>
+              <a:t>NOTAS:</a:t>
+            </a:r>
+          </a:p>
+          <a:p>
+            <a:r>
+              <a:t>RPO y RTO dejan de ser siglas cuando se les pone un numero acordado con el negocio.</a:t>
+            </a:r>
+          </a:p>
+          <a:p>
+            <a:r>
+              <a:t>Probar un restore de verdad tiene cuatro pasos y conviene dictarlos como procedimiento.</a:t>
+            </a:r>
+          </a:p>
+          <a:p>
+            <a:r>
+              <a:t>Cuatro, dejar bitacora con fecha, responsable, resultado y RTO medido; si no hay bitacora, la prueba no existe.</a:t>
+            </a:r>
+          </a:p>
+          <a:p>
+            <a:r>
+              <a:t>Fuera de la lamina (habla de la practica): RPO y RTO dejan de ser siglas cuando se les pone un numero acordado con el negocio, y la rubrica pide precisamente el numero con su justificacion.</a:t>
             </a:r>
           </a:p>
         </p:txBody>
@@ -1142,57 +1256,27 @@
           </a:p>
           <a:p>
             <a:r>
-              <a:t>El RPO es cuanta informacion se acepta perder, medida en tiempo.</a:t>
-            </a:r>
-          </a:p>
-          <a:p>
-            <a:r>
-              <a:t>Si la clínica atiende del orden de cuarenta citas por dia en un horario de lunes a sabado de 7:00 a 19:00, perder cuatro horas de datos son entre quince y veinte citas con sus consultas clinicas y sus facturas</a:t>
-            </a:r>
-          </a:p>
-          <a:p>
-            <a:r>
-              <a:t>Y quien decide si eso es tolerable es el dueno de la clinica, no el administrador de la base; esa asignacion de responsabilidad es regla, no matiz.</a:t>
-            </a:r>
-          </a:p>
-          <a:p>
-            <a:r>
-              <a:t>El RTO es cuanto tiempo puede estar caida la base antes de restaurar: si el sistema se cae un sabado a las diez de la manana con la sala llena, un RTO de ocho horas equivale a cerrar el dia y devolver pacientes.</a:t>
-            </a:r>
-          </a:p>
-          <a:p>
-            <a:r>
-              <a:t>Y la ventana del respaldo se justifica con el mismo horario: un dump a las 20:30 se defiende porque la facturacion cierra a las 20:00, mientras que «diario» a secas no se defiende.</a:t>
-            </a:r>
-          </a:p>
-          <a:p>
-            <a:r>
-              <a:t>Uno, restaurar en un entorno distinto del original, nunca encima del que funciona, porque una prueba que destruye el dato bueno es un incidente y no una prueba.</a:t>
-            </a:r>
-          </a:p>
-          <a:p>
-            <a:r>
-              <a:t>Dos, cronometrar desde que se decide restaurar hasta que una consulta de la aplicacion devuelve datos correctos, porque ese intervalo, y no el tiempo de copiar un archivo, es el RTO medido.</a:t>
-            </a:r>
-          </a:p>
-          <a:p>
-            <a:r>
-              <a:t>Tres, verificar con comprobaciones de negocio, y esto es lo que convierte «restaure» en «restaure bien»: los conteos de cita, consulta y factura, y el maximo de fecha_hora en cita, comparados contra los valores del origen al momento del corte.</a:t>
-            </a:r>
-          </a:p>
-          <a:p>
-            <a:r>
-              <a:t>Y hay una sexta seccion que casi siempre se omite: que NO cubre el plan, y cual es el riesgo residual que se asume.</a:t>
-            </a:r>
-          </a:p>
-          <a:p>
-            <a:r>
-              <a:t>Un dump diario no protege del borrado por error que se descubre tres dias despues si la retencion es de dos copias; un respaldo logico no protege de la corrupcion del propio archivo si nunca se restaura.</a:t>
-            </a:r>
-          </a:p>
-          <a:p>
-            <a:r>
-              <a:t>Nombrar el limite es lo que separa un plan de una lista de comandos, y es lo que un evaluador pregunta primero.</a:t>
+              <a:t>El motor de la clase es PostgreSQL, que corre dentro del navegador, y ahi funciona todo el codigo del dia: CREATE FUNCTION con IMMUTABLE</a:t>
+            </a:r>
+          </a:p>
+          <a:p>
+            <a:r>
+              <a:t>Las dos partes del trigger, RAISE EXCEPTION y RAISE NOTICE, los bloques DO de la Clase 3, current_user, now() e IS DISTINCT FROM.</a:t>
+            </a:r>
+          </a:p>
+          <a:p>
+            <a:r>
+              <a:t>La evidencia de las cuatro primeras preguntas es la salida del motor.</a:t>
+            </a:r>
+          </a:p>
+          <a:p>
+            <a:r>
+              <a:t>El numero que salga, por ejemplo tres minutos, es un RTO honesto y medido, y la consulta de validacion posterior es exactamente la que el plan tiene que traer escrita.</a:t>
+            </a:r>
+          </a:p>
+          <a:p>
+            <a:r>
+              <a:t>Oracle sigue en el kit solo como contraste: alla las herramientas se llaman Data Pump y RMAN, y el trigger se escribe con el cuerpo adentro y con:NEW y:OLD.</a:t>
             </a:r>
           </a:p>
           <a:p>
@@ -1202,22 +1286,32 @@
           </a:p>
           <a:p>
             <a:r>
-              <a:t>RPO y RTO dejan de ser siglas cuando se les pone un numero acordado con el negocio.</a:t>
-            </a:r>
-          </a:p>
-          <a:p>
-            <a:r>
-              <a:t>Probar un restore de verdad tiene cuatro pasos y conviene dictarlos como procedimiento.</a:t>
-            </a:r>
-          </a:p>
-          <a:p>
-            <a:r>
-              <a:t>Cuatro, dejar bitacora con fecha, responsable, resultado y RTO medido; si no hay bitacora, la prueba no existe.</a:t>
-            </a:r>
-          </a:p>
-          <a:p>
-            <a:r>
-              <a:t>Fuera de la lamina (habla de la practica): RPO y RTO dejan de ser siglas cuando se les pone un numero acordado con el negocio, y la rubrica pide precisamente el numero con su justificacion.</a:t>
+              <a:t>Hay que ser preciso aqui porque es la parte de la clase que se puede entregar mal por una expectativa equivocada.</a:t>
+            </a:r>
+          </a:p>
+          <a:p>
+            <a:r>
+              <a:t>Lo que NO se puede ejecutar es pg_dump, pg_dumpall, pg_basebackup ni pg_restore, y la razon hay que decirla con precision en vez de dejarla en «la herramienta no sirve»: son programas de linea de comandos que leen y escriben archivos, y ahi no hay sistema de archivos ni servidor al que conectarse.</a:t>
+            </a:r>
+          </a:p>
+          <a:p>
+            <a:r>
+              <a:t>Esa distincion hay que decirla en clase, porque un estudiante que intente ejecutar pg_dump va a perder veinte minutos y va a creer que hizo algo mal.</a:t>
+            </a:r>
+          </a:p>
+          <a:p>
+            <a:r>
+              <a:t>Lo que si se puede ensayar de verdad, y conviene hacerlo, es el restore a escala de aula: borrar el esquema completo y volverlo a levantar pegando el propio guion del estudiante, con cronometro en mano.</a:t>
+            </a:r>
+          </a:p>
+          <a:p>
+            <a:r>
+              <a:t>Vale un minuto senalarlo para quien se encuentre Oracle en el trabajo, y no vale mas, porque la calificacion ocurre en PostgreSQL.</a:t>
+            </a:r>
+          </a:p>
+          <a:p>
+            <a:r>
+              <a:t>Fuera de la lamina (habla de la practica): Por eso la pregunta 5 es un documento y no una ejecucion: se califica que el plan nombre la herramienta correcta para cada cosa, no que el estudiante la haya corrido.</a:t>
             </a:r>
           </a:p>
         </p:txBody>
@@ -1287,32 +1381,66 @@
           <a:lstStyle/>
           <a:p>
             <a:r>
+              <a:t>TEXTO COMPLETO DE LA LÁMINA (se proyecta resumido):</a:t>
+            </a:r>
+          </a:p>
+          <a:p/>
+          <a:p>
+            <a:r>
+              <a:t>La Clase 1 dejo el esquema, el CHECK de stock que hoy se retira a proposito para mostrar el hueco.</a:t>
+            </a:r>
+          </a:p>
+          <a:p/>
+          <a:p>
+            <a:r>
+              <a:t>La Clase 2 dejo los roles, y hoy reaparecen en dos puntos: current_user es lo que la columna de auditoria guarda, y pg_dumpall --globals-only es lo que los respalda.</a:t>
+            </a:r>
+          </a:p>
+          <a:p/>
+          <a:p>
+            <a:r>
+              <a:t>La Clase 3 dejo el procedimiento y la bateria de bloques DO, que es la tecnica con la que hoy se prueban los dos triggers.</a:t>
+            </a:r>
+          </a:p>
+          <a:p/>
+          <a:p>
+            <a:r>
               <a:t>DESARROLLO (para explicarlo, no se proyecta):</a:t>
             </a:r>
           </a:p>
           <a:p>
             <a:r>
-              <a:t>El motor de la clase es PostgreSQL, que corre dentro del navegador, y ahi funciona todo el codigo del dia: CREATE FUNCTION con IMMUTABLE</a:t>
-            </a:r>
-          </a:p>
-          <a:p>
-            <a:r>
-              <a:t>Las dos partes del trigger, RAISE EXCEPTION y RAISE NOTICE, los bloques DO de la Clase 3, current_user, now() e IS DISTINCT FROM.</a:t>
-            </a:r>
-          </a:p>
-          <a:p>
-            <a:r>
-              <a:t>La evidencia de las cuatro primeras preguntas es la salida del motor.</a:t>
-            </a:r>
-          </a:p>
-          <a:p>
-            <a:r>
-              <a:t>El numero que salga, por ejemplo tres minutos, es un RTO honesto y medido, y la consulta de validacion posterior es exactamente la que el plan tiene que traer escrita.</a:t>
-            </a:r>
-          </a:p>
-          <a:p>
-            <a:r>
-              <a:t>Oracle sigue en el kit solo como contraste: alla las herramientas se llaman Data Pump y RMAN, y el trigger se escribe con el cuerpo adentro y con:NEW y:OLD.</a:t>
+              <a:t>La Clase 1 dejo el esquema, el CHECK de stock que hoy se retira a proposito para mostrar el hueco, y la restriccion de unicidad que hoy se defiende como la respuesta correcta a la doble reserva.</a:t>
+            </a:r>
+          </a:p>
+          <a:p>
+            <a:r>
+              <a:t>La Clase 2 dejo los roles, y hoy reaparecen en dos puntos: current_user es lo que la columna de auditoria guarda, y pg_dumpall --globals-only es lo que los respalda.</a:t>
+            </a:r>
+          </a:p>
+          <a:p>
+            <a:r>
+              <a:t>La Clase 3 dejo el procedimiento y la bateria de bloques DO, que es la tecnica con la que hoy se prueban los dos triggers.</a:t>
+            </a:r>
+          </a:p>
+          <a:p>
+            <a:r>
+              <a:t>Hacia adelante, el Parcial 1 de la Clase 5 evalua justamente procedimientos, seguridad y este contenido; la Clase 8 retoma la transaccion</a:t>
+            </a:r>
+          </a:p>
+          <a:p>
+            <a:r>
+              <a:t>Que es el marco dentro del cual corre todo trigger; la Clase 10 explica por que el trigger de conteo no protege de la doble reserva; y la Clase 12 conecta la aplicacion, que es cuando la invisibilidad del trigger deja de ser un concepto.</a:t>
+            </a:r>
+          </a:p>
+          <a:p>
+            <a:r>
+              <a:t>En el proyecto esto es la seccion de seguridad y respaldo: roles, matriz, auditoria y plan de restauracion se presentan como una sola pieza.</a:t>
+            </a:r>
+          </a:p>
+          <a:p>
+            <a:r>
+              <a:t>Y en la Clase 12 la cuenta de servicio de la aplicacion es un rol mas de esta matriz, con EXECUTE sobre los procedimientos y sin acceso directo a las tablas.</a:t>
             </a:r>
           </a:p>
           <a:p>
@@ -1322,32 +1450,67 @@
           </a:p>
           <a:p>
             <a:r>
-              <a:t>Hay que ser preciso aqui porque es la parte de la clase que se puede entregar mal por una expectativa equivocada.</a:t>
-            </a:r>
-          </a:p>
-          <a:p>
-            <a:r>
-              <a:t>Lo que NO se puede ejecutar es pg_dump, pg_dumpall, pg_basebackup ni pg_restore, y la razon hay que decirla con precision en vez de dejarla en «la herramienta no sirve»: son programas de linea de comandos que leen y escriben archivos, y ahi no hay sistema de archivos ni servidor al que conectarse.</a:t>
-            </a:r>
-          </a:p>
-          <a:p>
-            <a:r>
-              <a:t>Esa distincion hay que decirla en clase, porque un estudiante que intente ejecutar pg_dump va a perder veinte minutos y va a creer que hizo algo mal.</a:t>
-            </a:r>
-          </a:p>
-          <a:p>
-            <a:r>
-              <a:t>Lo que si se puede ensayar de verdad, y conviene hacerlo, es el restore a escala de aula: borrar el esquema completo y volverlo a levantar pegando el propio guion del estudiante, con cronometro en mano.</a:t>
-            </a:r>
-          </a:p>
-          <a:p>
-            <a:r>
-              <a:t>Vale un minuto senalarlo para quien se encuentre Oracle en el trabajo, y no vale mas, porque la calificacion ocurre en PostgreSQL.</a:t>
-            </a:r>
-          </a:p>
-          <a:p>
-            <a:r>
-              <a:t>Fuera de la lamina (habla de la practica): Por eso la pregunta 5 es un documento y no una ejecucion: se califica que el plan nombre la herramienta correcta para cada cosa, no que el estudiante la haya corrido.</a:t>
+              <a:t>Lo de hoy cierra el Corte 1 y conviene decir como.</a:t>
+            </a:r>
+          </a:p>
+          <a:p>
+            <a:r>
+              <a:t>PREGUNTAS FRECUENTES DEL GRUPO</a:t>
+            </a:r>
+          </a:p>
+          <a:p>
+            <a:r>
+              <a:t>«Cree el trigger y no pasa nada»: la causa mas frecuente es que la funcion existe pero la asociacion no, porque el estudiante escribio solo el CREATE FUNCTION; la segunda es que la asociacion dice UPDATE OF otra columna, o que el WHEN nunca se cumple.</a:t>
+            </a:r>
+          </a:p>
+          <a:p>
+            <a:r>
+              <a:t>«Puede una funcion modificar datos»: en PostgreSQL si puede, y es una diferencia importante con Oracle, que lo prohibe cuando la funcion se invoca desde una consulta.</a:t>
+            </a:r>
+          </a:p>
+          <a:p>
+            <a:r>
+              <a:t>Que pueda no significa que deba: el planificador decide cuantas veces evalua una funcion, de modo que un INSERT escondido en ella podria ejecutarse una vez, ninguna o diez mil, y ademas obliga a declararla VOLATILE.</a:t>
+            </a:r>
+          </a:p>
+          <a:p>
+            <a:r>
+              <a:t>Si hace falta modificar datos, es un procedimiento; si debe ocurrir automaticamente, es un trigger.</a:t>
+            </a:r>
+          </a:p>
+          <a:p>
+            <a:r>
+              <a:t>«Puedo poner toda la validacion en triggers y no escribir procedimientos»: se puede</a:t>
+            </a:r>
+          </a:p>
+          <a:p>
+            <a:r>
+              <a:t>Y el sistema se vuelve imposible de razonar; el orden de preferencia que conviene memorizar es declarativo primero, procedimiento despues, trigger al final y solo para lo que los dos anteriores no pueden.</a:t>
+            </a:r>
+          </a:p>
+          <a:p>
+            <a:r>
+              <a:t>«Si ya tengo el trigger de auditoria, para que quiero respaldo»: porque cumplen funciones distintas; la auditoria cuenta que paso y quien lo hizo, el respaldo devuelve los datos</a:t>
+            </a:r>
+          </a:p>
+          <a:p>
+            <a:r>
+              <a:t>Y si el incidente afecta el esquema completo, audit_cita se pierde junto con todo lo demas y no reconstruye ni una cita.</a:t>
+            </a:r>
+          </a:p>
+          <a:p>
+            <a:r>
+              <a:t>«Por que la auditoria registro dos filas y no tres»: por la clausula WHEN, porque el tercer UPDATE asigno el estado que la cita ya tenia; si registra tres, falta el WHEN.</a:t>
+            </a:r>
+          </a:p>
+          <a:p>
+            <a:r>
+              <a:t>«Por que el trigger de stock deja pasar un TRUNCATE»: porque TRUNCATE no dispara triggers de fila, y eso va escrito en la seccion de lo que el plan no cubre.</a:t>
+            </a:r>
+          </a:p>
+          <a:p>
+            <a:r>
+              <a:t>Fuera de la lamina (habla de la practica): En la rubrica del proyecto, seguridad y respaldo valen 15 de los 100 puntos del proyecto.</a:t>
             </a:r>
           </a:p>
         </p:txBody>
@@ -1417,181 +1580,6 @@
           <a:lstStyle/>
           <a:p>
             <a:r>
-              <a:t>DESARROLLO (para explicarlo, no se proyecta):</a:t>
-            </a:r>
-          </a:p>
-          <a:p>
-            <a:r>
-              <a:t>La Clase 1 dejo el esquema, el CHECK de stock que hoy se retira a proposito para mostrar el hueco, y la restriccion de unicidad que hoy se defiende como la respuesta correcta a la doble reserva.</a:t>
-            </a:r>
-          </a:p>
-          <a:p>
-            <a:r>
-              <a:t>La Clase 2 dejo los roles, y hoy reaparecen en dos puntos: current_user es lo que la columna de auditoria guarda, y pg_dumpall --globals-only es lo que los respalda.</a:t>
-            </a:r>
-          </a:p>
-          <a:p>
-            <a:r>
-              <a:t>La Clase 3 dejo el procedimiento y la bateria de bloques DO, que es la tecnica con la que hoy se prueban los dos triggers.</a:t>
-            </a:r>
-          </a:p>
-          <a:p>
-            <a:r>
-              <a:t>Hacia adelante, el Parcial 1 de la Clase 5 evalua justamente procedimientos, seguridad y este contenido; la Clase 8 retoma la transaccion</a:t>
-            </a:r>
-          </a:p>
-          <a:p>
-            <a:r>
-              <a:t>Que es el marco dentro del cual corre todo trigger; la Clase 10 explica por que el trigger de conteo no protege de la doble reserva; y la Clase 12 conecta la aplicacion, que es cuando la invisibilidad del trigger deja de ser un concepto.</a:t>
-            </a:r>
-          </a:p>
-          <a:p>
-            <a:r>
-              <a:t>En el proyecto esto es la seccion de seguridad y respaldo: roles, matriz, auditoria y plan de restauracion se presentan como una sola pieza.</a:t>
-            </a:r>
-          </a:p>
-          <a:p>
-            <a:r>
-              <a:t>Y en la Clase 12 la cuenta de servicio de la aplicacion es un rol mas de esta matriz, con EXECUTE sobre los procedimientos y sin acceso directo a las tablas.</a:t>
-            </a:r>
-          </a:p>
-          <a:p>
-            <a:r>
-              <a:t>NOTAS:</a:t>
-            </a:r>
-          </a:p>
-          <a:p>
-            <a:r>
-              <a:t>Lo de hoy cierra el Corte 1 y conviene decir como.</a:t>
-            </a:r>
-          </a:p>
-          <a:p>
-            <a:r>
-              <a:t>PREGUNTAS FRECUENTES DEL GRUPO</a:t>
-            </a:r>
-          </a:p>
-          <a:p>
-            <a:r>
-              <a:t>«Cree el trigger y no pasa nada»: la causa mas frecuente es que la funcion existe pero la asociacion no, porque el estudiante escribio solo el CREATE FUNCTION; la segunda es que la asociacion dice UPDATE OF otra columna, o que el WHEN nunca se cumple.</a:t>
-            </a:r>
-          </a:p>
-          <a:p>
-            <a:r>
-              <a:t>«Puede una funcion modificar datos»: en PostgreSQL si puede, y es una diferencia importante con Oracle, que lo prohibe cuando la funcion se invoca desde una consulta.</a:t>
-            </a:r>
-          </a:p>
-          <a:p>
-            <a:r>
-              <a:t>Que pueda no significa que deba: el planificador decide cuantas veces evalua una funcion, de modo que un INSERT escondido en ella podria ejecutarse una vez, ninguna o diez mil, y ademas obliga a declararla VOLATILE.</a:t>
-            </a:r>
-          </a:p>
-          <a:p>
-            <a:r>
-              <a:t>Si hace falta modificar datos, es un procedimiento; si debe ocurrir automaticamente, es un trigger.</a:t>
-            </a:r>
-          </a:p>
-          <a:p>
-            <a:r>
-              <a:t>«Puedo poner toda la validacion en triggers y no escribir procedimientos»: se puede</a:t>
-            </a:r>
-          </a:p>
-          <a:p>
-            <a:r>
-              <a:t>Y el sistema se vuelve imposible de razonar; el orden de preferencia que conviene memorizar es declarativo primero, procedimiento despues, trigger al final y solo para lo que los dos anteriores no pueden.</a:t>
-            </a:r>
-          </a:p>
-          <a:p>
-            <a:r>
-              <a:t>«Si ya tengo el trigger de auditoria, para que quiero respaldo»: porque cumplen funciones distintas; la auditoria cuenta que paso y quien lo hizo, el respaldo devuelve los datos</a:t>
-            </a:r>
-          </a:p>
-          <a:p>
-            <a:r>
-              <a:t>Y si el incidente afecta el esquema completo, audit_cita se pierde junto con todo lo demas y no reconstruye ni una cita.</a:t>
-            </a:r>
-          </a:p>
-          <a:p>
-            <a:r>
-              <a:t>«Por que la auditoria registro dos filas y no tres»: por la clausula WHEN, porque el tercer UPDATE asigno el estado que la cita ya tenia; si registra tres, falta el WHEN.</a:t>
-            </a:r>
-          </a:p>
-          <a:p>
-            <a:r>
-              <a:t>«Por que el trigger de stock deja pasar un TRUNCATE»: porque TRUNCATE no dispara triggers de fila, y eso va escrito en la seccion de lo que el plan no cubre.</a:t>
-            </a:r>
-          </a:p>
-          <a:p>
-            <a:r>
-              <a:t>Fuera de la lamina (habla de la practica): En la rubrica del proyecto, seguridad y respaldo valen 15 de los 100 puntos del proyecto.</a:t>
-            </a:r>
-          </a:p>
-        </p:txBody>
-      </p:sp>
-      <p:sp>
-        <p:nvSpPr>
-          <p:cNvPr id="4" name="Slide Number Placeholder 3"/>
-          <p:cNvSpPr>
-            <a:spLocks noGrp="1"/>
-          </p:cNvSpPr>
-          <p:nvPr>
-            <p:ph type="sldNum" idx="5" sz="quarter"/>
-          </p:nvPr>
-        </p:nvSpPr>
-        <p:spPr/>
-      </p:sp>
-    </p:spTree>
-  </p:cSld>
-  <p:clrMapOvr>
-    <a:masterClrMapping/>
-  </p:clrMapOvr>
-</p:notes>
-</file>
-
-<file path=ppt/notesSlides/notesSlide17.xml><?xml version="1.0" encoding="utf-8"?>
-<p:notes xmlns:a="http://schemas.openxmlformats.org/drawingml/2006/main" xmlns:p="http://schemas.openxmlformats.org/presentationml/2006/main" xmlns:r="http://schemas.openxmlformats.org/officeDocument/2006/relationships">
-  <p:cSld>
-    <p:spTree>
-      <p:nvGrpSpPr>
-        <p:cNvPr id="1" name=""/>
-        <p:cNvGrpSpPr/>
-        <p:nvPr/>
-      </p:nvGrpSpPr>
-      <p:grpSpPr>
-        <a:xfrm>
-          <a:off x="0" y="0"/>
-          <a:ext cx="0" cy="0"/>
-          <a:chOff x="0" y="0"/>
-          <a:chExt cx="0" cy="0"/>
-        </a:xfrm>
-      </p:grpSpPr>
-      <p:sp>
-        <p:nvSpPr>
-          <p:cNvPr id="2" name="Slide Image Placeholder 1"/>
-          <p:cNvSpPr>
-            <a:spLocks noGrp="1"/>
-          </p:cNvSpPr>
-          <p:nvPr>
-            <p:ph type="sldImg" idx="2"/>
-          </p:nvPr>
-        </p:nvSpPr>
-        <p:spPr/>
-      </p:sp>
-      <p:sp>
-        <p:nvSpPr>
-          <p:cNvPr id="3" name="Notes Placeholder 2"/>
-          <p:cNvSpPr>
-            <a:spLocks noGrp="1"/>
-          </p:cNvSpPr>
-          <p:nvPr>
-            <p:ph type="body" idx="3" sz="quarter"/>
-          </p:nvPr>
-        </p:nvSpPr>
-        <p:spPr/>
-        <p:txBody>
-          <a:bodyPr/>
-          <a:lstStyle/>
-          <a:p>
-            <a:r>
               <a:t>TEXTO COMPLETO DE LA LÁMINA (se proyecta resumido):</a:t>
             </a:r>
           </a:p>
@@ -1691,67 +1679,47 @@
           </a:p>
           <a:p>
             <a:r>
-              <a:t>Un procedimiento se invoca para que HAGA algo y se llama con CALL; una funcion se invoca para que DEVUELVA un valor, y ese valor se usa dentro de una expresion SQL, como en AS tarifa</a:t>
-            </a:r>
-          </a:p>
-          <a:p>
-            <a:r>
-              <a:t>El molde es el mismo de la Clase 3 con una linea mas: RETURNS NUMERIC LANGUAGE plpgsql IMMUTABLE AS $fn$... $fn$;.</a:t>
-            </a:r>
-          </a:p>
-          <a:p>
-            <a:r>
-              <a:t>Nada de RETURN NUMBER IS: eso es Oracle y aqui no compila.</a:t>
-            </a:r>
-          </a:p>
-          <a:p>
-            <a:r>
-              <a:t>La palabra que hay que desempacar es IMMUTABLE, porque es una de las tres categorias de volatilidad que PostgreSQL define y el estudiante no las conoce.</a:t>
-            </a:r>
-          </a:p>
-          <a:p>
-            <a:r>
-              <a:t>IMMUTABLE promete que con los mismos argumentos la funcion devuelve siempre lo mismo y que no lee ni escribe la base; el motor puede entonces evaluarla una sola vez y reutilizar el resultado, e incluso resolverla al planificar.</a:t>
-            </a:r>
-          </a:p>
-          <a:p>
-            <a:r>
-              <a:t>STABLE promete que el resultado no cambia DENTRO de una misma sentencia, y es lo que corresponde a una funcion que consulta tablas.</a:t>
-            </a:r>
-          </a:p>
-          <a:p>
-            <a:r>
-              <a:t>VOLATILE es el valor por omision y significa que puede devolver cualquier cosa cada vez. fn_precio_consulta es IMMUTABLE porque solo depende de sus dos parametros.</a:t>
-            </a:r>
-          </a:p>
-          <a:p>
-            <a:r>
-              <a:t>El contraejemplo util es fn_edad_mascota calculando la edad con now() por dentro: no es inmutable, porque manana devuelve otro numero para la misma mascota</a:t>
-            </a:r>
-          </a:p>
-          <a:p>
-            <a:r>
-              <a:t>Y por eso no puede sostener un indice sobre expresion de los que se veran en la Clase 7; la correccion es de una linea, pasar la fecha de referencia como parametro.</a:t>
-            </a:r>
-          </a:p>
-          <a:p>
-            <a:r>
-              <a:t>Vale advertir que declarar IMMUTABLE una funcion que si lee tablas no produce un error, produce algo peor: resultados obsoletos que el motor considera correctos.</a:t>
-            </a:r>
-          </a:p>
-          <a:p>
-            <a:r>
-              <a:t>Hay un segundo efecto que hay que dimensionar con numeros porque conecta con la Clase 6: una funcion invocada dentro de un SELECT se ejecuta una vez por fila evaluada.</a:t>
-            </a:r>
-          </a:p>
-          <a:p>
-            <a:r>
-              <a:t>Si fn_saldo_factura(p_id_factura) hace un SUM sobre detalle_factura y la consulta recorre diez mil facturas, el motor ejecuta diez mil consultas internas; el resultado es correcto y el tiempo es inaceptable.</a:t>
-            </a:r>
-          </a:p>
-          <a:p>
-            <a:r>
-              <a:t>La alternativa es una consulta con GROUP BY, y esa comparacion es material directo de la Clase 6.</a:t>
+              <a:t>La funcion de la clase tiene tres decisiones pequenas, y ninguna es evidente.</a:t>
+            </a:r>
+          </a:p>
+          <a:p>
+            <a:r>
+              <a:t>La primera es UPPER sobre la especie.</a:t>
+            </a:r>
+          </a:p>
+          <a:p>
+            <a:r>
+              <a:t>Se escribe CASE UPPER(p_especie) WHEN 'CANINO' THEN 45000 WHEN 'FELINO' THEN 40000 ELSE 35000 END</a:t>
+            </a:r>
+          </a:p>
+          <a:p>
+            <a:r>
+              <a:t>Y el ELSE no es pereza: es la definicion de negocio de que cualquier otra especie tarifa 35000, de modo que la funcion nunca devuelve nulo por una especie que nadie previo.</a:t>
+            </a:r>
+          </a:p>
+          <a:p>
+            <a:r>
+              <a:t>La segunda es COALESCE sobre la urgencia.</a:t>
+            </a:r>
+          </a:p>
+          <a:p>
+            <a:r>
+              <a:t>Se escribe IF COALESCE(p_urgencia, FALSE) THEN, que traduce ausencia de dato a no urgente.</a:t>
+            </a:r>
+          </a:p>
+          <a:p>
+            <a:r>
+              <a:t>La tercera es el recargo como multiplicacion y no como suma escrita a mano: v_base:= v_base * 1.35 en lugar de sumar un valor calculado aparte.</a:t>
+            </a:r>
+          </a:p>
+          <a:p>
+            <a:r>
+              <a:t>Con 45000 el resultado es 60750 exactos, y conviene proyectar ese numero porque es el que el estudiante va a comparar contra su propia salida.</a:t>
+            </a:r>
+          </a:p>
+          <a:p>
+            <a:r>
+              <a:t>El tipo de retorno es NUMERIC y no FLOAT por la razon de la Clase 1: el dinero no se representa en binario.</a:t>
             </a:r>
           </a:p>
           <a:p>
@@ -1761,32 +1729,17 @@
           </a:p>
           <a:p>
             <a:r>
-              <a:t>Una funcion y un procedimiento se parecen tanto en la escritura que conviene separarlos por su papel y no por su sintaxis.</a:t>
-            </a:r>
-          </a:p>
-          <a:p>
-            <a:r>
-              <a:t>RETURNS declara el tipo del valor devuelto, y dentro del cuerpo tiene que haber al menos un RETURN, porque una funcion de PL/pgSQL que termina sin retornar lanza un error en ejecucion.</a:t>
-            </a:r>
-          </a:p>
-          <a:p>
-            <a:r>
-              <a:t>CÓDIGO CITADO (referencia):</a:t>
-            </a:r>
-          </a:p>
-          <a:p>
-            <a:r>
-              <a:t>SELECT m.nombre, fn_precio_consulta(m.especie, FALSE)</a:t>
-            </a:r>
-          </a:p>
-          <a:p>
-            <a:r>
-              <a:t>FROM mascota m WHERE m.activa = 'S'</a:t>
-            </a:r>
-          </a:p>
-          <a:p>
-            <a:r>
-              <a:t>CREATE OR REPLACE FUNCTION fn_precio_consulta(p_especie TEXT, p_urgencia BOOLEAN)</a:t>
+              <a:t>La aplicacion de la clínica puede mandar 'Canino', 'canino' o 'CANINO', y comparar el texto tal como llega significa que dos de las tres formas caen al precio de otra especie.</a:t>
+            </a:r>
+          </a:p>
+          <a:p>
+            <a:r>
+              <a:t>Si la casilla de urgencia llega en nulo, que es lo que hace una interfaz donde el usuario no marco nada, entonces IF p_urgencia THEN no entra —nulo no es verdadero— pero cualquier aritmetica con nulo si contamina: v_base * p_urgencia daria nulo y la factura saldria vacia.</a:t>
+            </a:r>
+          </a:p>
+          <a:p>
+            <a:r>
+              <a:t>Vale decir en voz alta el criterio general, porque reaparece todo el semestre: en SQL, nulo no significa falso, significa desconocido, y toda comparacion con nulo devuelve nulo.</a:t>
             </a:r>
           </a:p>
         </p:txBody>
@@ -1856,72 +1809,37 @@
           <a:lstStyle/>
           <a:p>
             <a:r>
-              <a:t>DESARROLLO (para explicarlo, no se proyecta):</a:t>
-            </a:r>
-          </a:p>
-          <a:p>
-            <a:r>
-              <a:t>La funcion de la clase tiene tres decisiones pequenas, y ninguna es evidente.</a:t>
-            </a:r>
-          </a:p>
-          <a:p>
-            <a:r>
-              <a:t>La primera es UPPER sobre la especie.</a:t>
-            </a:r>
-          </a:p>
-          <a:p>
-            <a:r>
-              <a:t>Se escribe CASE UPPER(p_especie) WHEN 'CANINO' THEN 45000 WHEN 'FELINO' THEN 40000 ELSE 35000 END</a:t>
-            </a:r>
-          </a:p>
-          <a:p>
-            <a:r>
-              <a:t>Y el ELSE no es pereza: es la definicion de negocio de que cualquier otra especie tarifa 35000, de modo que la funcion nunca devuelve nulo por una especie que nadie previo.</a:t>
-            </a:r>
-          </a:p>
-          <a:p>
-            <a:r>
-              <a:t>La segunda es COALESCE sobre la urgencia.</a:t>
-            </a:r>
-          </a:p>
-          <a:p>
-            <a:r>
-              <a:t>Se escribe IF COALESCE(p_urgencia, FALSE) THEN, que traduce ausencia de dato a no urgente.</a:t>
-            </a:r>
-          </a:p>
-          <a:p>
-            <a:r>
-              <a:t>La tercera es el recargo como multiplicacion y no como suma escrita a mano: v_base:= v_base * 1.35 en lugar de sumar un valor calculado aparte.</a:t>
-            </a:r>
-          </a:p>
-          <a:p>
-            <a:r>
-              <a:t>Con 45000 el resultado es 60750 exactos, y conviene proyectar ese numero porque es el que el estudiante va a comparar contra su propia salida.</a:t>
-            </a:r>
-          </a:p>
-          <a:p>
-            <a:r>
-              <a:t>El tipo de retorno es NUMERIC y no FLOAT por la razon de la Clase 1: el dinero no se representa en binario.</a:t>
-            </a:r>
-          </a:p>
-          <a:p>
-            <a:r>
-              <a:t>NOTAS:</a:t>
-            </a:r>
-          </a:p>
-          <a:p>
-            <a:r>
-              <a:t>La aplicacion de la clínica puede mandar 'Canino', 'canino' o 'CANINO', y comparar el texto tal como llega significa que dos de las tres formas caen al precio de otra especie.</a:t>
-            </a:r>
-          </a:p>
-          <a:p>
-            <a:r>
-              <a:t>Si la casilla de urgencia llega en nulo, que es lo que hace una interfaz donde el usuario no marco nada, entonces IF p_urgencia THEN no entra —nulo no es verdadero— pero cualquier aritmetica con nulo si contamina: v_base * p_urgencia daria nulo y la factura saldria vacia.</a:t>
-            </a:r>
-          </a:p>
-          <a:p>
-            <a:r>
-              <a:t>Vale decir en voz alta el criterio general, porque reaparece todo el semestre: en SQL, nulo no significa falso, significa desconocido, y toda comparacion con nulo devuelve nulo.</a:t>
+              <a:t>TEXTO COMPLETO DE LA LÁMINA (se proyecta resumido):</a:t>
+            </a:r>
+          </a:p>
+          <a:p/>
+          <a:p>
+            <a:r>
+              <a:t>La firma decide todo lo demas. `CREATE FUNCTION fn_precio_consulta(p_especie TEXT, p_urgencia BOOLEAN) RETURNS NUMERIC LANGUAGE plpgsql IMMUTABLE AS $fn$ ... $fn$;`. Es `RETURNS NUMERIC`, no `RETURNS TRIGGER`: esta funcion no se asocia a ninguna tabla, se llama desde una consulta.</a:t>
+            </a:r>
+          </a:p>
+          <a:p/>
+          <a:p>
+            <a:r>
+              <a:t>La tabla de tarifas es un `CASE`. `CASE UPPER(p_especie) WHEN 'CANINO' THEN 45000 WHEN 'FELINO' THEN 40000 ELSE 35000 END`. El `UPPER()` es lo que hace la comparacion insensible a mayusculas: sin el, «canino» en minuscula cae en el `ELSE` y cobra 35000.</a:t>
+            </a:r>
+          </a:p>
+          <a:p/>
+          <a:p>
+            <a:r>
+              <a:t>El `NULL` de la urgencia: hazlo explicito con `COALESCE`. `IF COALESCE(p_urgencia, FALSE) THEN v_base := v_base * 1.35; END IF;`. Un `IF` a secas ya trata `NULL` como falso, pero en cuanto el booleano entra en una cuenta el `NULL` se propaga y la funcion devuelve `NULL`.</a:t>
+            </a:r>
+          </a:p>
+          <a:p/>
+          <a:p>
+            <a:r>
+              <a:t>`IMMUTABLE` es una promesa que el motor cobra: misma entrada, misma salida, sin leer tablas. Por eso el filtro `WHERE m.activa = 'S'` va en la consulta y no dentro de la funcion. Una funcion que consulta tablas seria `STABLE`, nunca `IMMUTABLE`.</a:t>
+            </a:r>
+          </a:p>
+          <a:p/>
+          <a:p>
+            <a:r>
+              <a:t>Y se usa dentro del `SELECT`, que es lo que la hace funcion (el contraste de la Clase 3): `SELECT nombre, especie, fn_precio_consulta(especie, FALSE) AS tarifa_normal, fn_precio_consulta(especie, TRUE) AS tarifa_urgencia FROM mascota ORDER BY id_mascota;` — un canino en urgencia da 60750 (45000 × 1.35).</a:t>
             </a:r>
           </a:p>
         </p:txBody>
@@ -1991,37 +1909,97 @@
           <a:lstStyle/>
           <a:p>
             <a:r>
-              <a:t>TEXTO COMPLETO DE LA LÁMINA (se proyecta resumido):</a:t>
-            </a:r>
-          </a:p>
-          <a:p/>
-          <a:p>
-            <a:r>
-              <a:t>La firma decide todo lo demas. `CREATE FUNCTION fn_precio_consulta(p_especie TEXT, p_urgencia BOOLEAN) RETURNS NUMERIC LANGUAGE plpgsql IMMUTABLE AS $fn$ ... $fn$;`. Es `RETURNS NUMERIC`, no `RETURNS TRIGGER`: esta funcion no se asocia a ninguna tabla, se llama desde una consulta.</a:t>
-            </a:r>
-          </a:p>
-          <a:p/>
-          <a:p>
-            <a:r>
-              <a:t>La tabla de tarifas es un `CASE`. `CASE UPPER(p_especie) WHEN 'CANINO' THEN 45000 WHEN 'FELINO' THEN 40000 ELSE 35000 END`. El `UPPER()` es lo que hace la comparacion insensible a mayusculas: sin el, «canino» en minuscula cae en el `ELSE` y cobra 35000.</a:t>
-            </a:r>
-          </a:p>
-          <a:p/>
-          <a:p>
-            <a:r>
-              <a:t>El `NULL` de la urgencia: hazlo explicito con `COALESCE`. `IF COALESCE(p_urgencia, FALSE) THEN v_base := v_base * 1.35; END IF;`. Un `IF` a secas ya trata `NULL` como falso, pero en cuanto el booleano entra en una cuenta el `NULL` se propaga y la funcion devuelve `NULL`.</a:t>
-            </a:r>
-          </a:p>
-          <a:p/>
-          <a:p>
-            <a:r>
-              <a:t>`IMMUTABLE` es una promesa que el motor cobra: misma entrada, misma salida, sin leer tablas. Por eso el filtro `WHERE m.activa = 'S'` va en la consulta y no dentro de la funcion. Una funcion que consulta tablas seria `STABLE`, nunca `IMMUTABLE`.</a:t>
-            </a:r>
-          </a:p>
-          <a:p/>
-          <a:p>
-            <a:r>
-              <a:t>Y se usa dentro del `SELECT`, que es lo que la hace funcion (el contraste de la Clase 3): `SELECT nombre, especie, fn_precio_consulta(especie, FALSE) AS tarifa_normal, fn_precio_consulta(especie, TRUE) AS tarifa_urgencia FROM mascota ORDER BY id_mascota;` — un canino en urgencia da 60750 (45000 × 1.35).</a:t>
+              <a:t>DESARROLLO (para explicarlo, no se proyecta):</a:t>
+            </a:r>
+          </a:p>
+          <a:p>
+            <a:r>
+              <a:t>Un trigger se distingue de todo lo anterior en que nadie lo llama: se declara una vez y el motor lo ejecuta cuando ocurre el evento declarado, un INSERT, un UPDATE o un DELETE sobre una tabla.</a:t>
+            </a:r>
+          </a:p>
+          <a:p>
+            <a:r>
+              <a:t>Y aqui esta la pieza de sintaxis central del dia: en PostgreSQL un trigger son SIEMPRE dos objetos separados, no uno.</a:t>
+            </a:r>
+          </a:p>
+          <a:p>
+            <a:r>
+              <a:t>Primero la funcion, RETURNS TRIGGER LANGUAGE plpgsql AS $fn$... $fn$;, que no recibe parametros declarados y cuyo tipo de retorno es literalmente TRIGGER.</a:t>
+            </a:r>
+          </a:p>
+          <a:p>
+            <a:r>
+              <a:t>Dos notas de sintaxis que ahorran tiempo: dentro de la funcion las filas se leen como NEW y OLD SIN los dos puntos —NEW.estado, no:NEW.estado, que aqui es un error de sintaxis—, y en la asociacion se escribe EXECUTE FUNCTION</a:t>
+            </a:r>
+          </a:p>
+          <a:p>
+            <a:r>
+              <a:t>El detalle que cambia todo el analisis, y que rara vez se dice, es que el trigger corre dentro de la misma transaccion de la sentencia que lo activo.</a:t>
+            </a:r>
+          </a:p>
+          <a:p>
+            <a:r>
+              <a:t>El orden de creacion es fijo: primero la funcion RETURNS TRIGGER y despues el CREATE TRIGGER que la asocia a la tabla.</a:t>
+            </a:r>
+          </a:p>
+          <a:p>
+            <a:r>
+              <a:t>Mientras el trigger exista, la funcion no se puede borrar con un DROP FUNCTION simple: hace falta CASCADE, que elimina tambien el trigger.</a:t>
+            </a:r>
+          </a:p>
+          <a:p>
+            <a:r>
+              <a:t>NOTAS:</a:t>
+            </a:r>
+          </a:p>
+          <a:p>
+            <a:r>
+              <a:t>Despues la asociacion,;, que dice cuando dispararla y a quien llamar.</a:t>
+            </a:r>
+          </a:p>
+          <a:p>
+            <a:r>
+              <a:t>No existe la forma de Oracle con el cuerpo dentro del CREATE TRIGGER.</a:t>
+            </a:r>
+          </a:p>
+          <a:p>
+            <a:r>
+              <a:t>EXECUTE PROCEDURE todavia se acepta por compatibilidad, pero esta obsoleto y no conviene ensenarlo.</a:t>
+            </a:r>
+          </a:p>
+          <a:p>
+            <a:r>
+              <a:t>De ahi salen sus dos caras: si el trigger falla, la sentencia original tambien falla y se deshace, que es exactamente lo que se quiere para un invariante como que el stock nunca quede negativo; y si el trigger es lento, la sentencia original se vuelve lenta, y si bloquea, bloquea al usuario que hizo el UPDATE.</a:t>
+            </a:r>
+          </a:p>
+          <a:p>
+            <a:r>
+              <a:t>Conviene mencionar tambien las variables especiales que PL/pgSQL pone a disposicion dentro de una funcion de trigger, porque permiten escribir una sola funcion para varios eventos: TG_OP dice si fue INSERT, UPDATE o DELETE, TG_TABLE_NAME dice sobre que tabla, y TG_WHEN y TG_LEVEL dicen si es BEFORE o AFTER y de fila o de sentencia.</a:t>
+            </a:r>
+          </a:p>
+          <a:p>
+            <a:r>
+              <a:t>Hoy no hacen falta, pero saber que existen evita que el estudiante escriba tres funciones casi identicas.</a:t>
+            </a:r>
+          </a:p>
+          <a:p>
+            <a:r>
+              <a:t>CÓDIGO CITADO (referencia):</a:t>
+            </a:r>
+          </a:p>
+          <a:p>
+            <a:r>
+              <a:t>CREATE OR REPLACE FUNCTION fn_trg_audit_cita()</a:t>
+            </a:r>
+          </a:p>
+          <a:p>
+            <a:r>
+              <a:t>CREATE TRIGGER trg_audit_cita AFTER UPDATE OF estado ON cita FOR EACH ROW EXECUTE FUNCTION fn_trg_audit_cita()</a:t>
+            </a:r>
+          </a:p>
+          <a:p>
+            <a:r>
+              <a:t>Fuera de la lamina (habla de la practica): No existe la forma de Oracle con el cuerpo dentro del CREATE TRIGGER, y hay que decirlo tal cual porque es el error que la rubrica penaliza expresamente.</a:t>
             </a:r>
           </a:p>
         </p:txBody>
@@ -2096,37 +2074,32 @@
           </a:p>
           <a:p>
             <a:r>
-              <a:t>Un trigger se distingue de todo lo anterior en que nadie lo llama: se declara una vez y el motor lo ejecuta cuando ocurre el evento declarado, un INSERT, un UPDATE o un DELETE sobre una tabla.</a:t>
-            </a:r>
-          </a:p>
-          <a:p>
-            <a:r>
-              <a:t>Y aqui esta la pieza de sintaxis central del dia: en PostgreSQL un trigger son SIEMPRE dos objetos separados, no uno.</a:t>
-            </a:r>
-          </a:p>
-          <a:p>
-            <a:r>
-              <a:t>Primero la funcion, RETURNS TRIGGER LANGUAGE plpgsql AS $fn$... $fn$;, que no recibe parametros declarados y cuyo tipo de retorno es literalmente TRIGGER.</a:t>
-            </a:r>
-          </a:p>
-          <a:p>
-            <a:r>
-              <a:t>Dos notas de sintaxis que ahorran tiempo: dentro de la funcion las filas se leen como NEW y OLD SIN los dos puntos —NEW.estado, no:NEW.estado, que aqui es un error de sintaxis—, y en la asociacion se escribe EXECUTE FUNCTION</a:t>
-            </a:r>
-          </a:p>
-          <a:p>
-            <a:r>
-              <a:t>El detalle que cambia todo el analisis, y que rara vez se dice, es que el trigger corre dentro de la misma transaccion de la sentencia que lo activo.</a:t>
-            </a:r>
-          </a:p>
-          <a:p>
-            <a:r>
-              <a:t>El orden de creacion es fijo: primero la funcion RETURNS TRIGGER y despues el CREATE TRIGGER que la asocia a la tabla.</a:t>
-            </a:r>
-          </a:p>
-          <a:p>
-            <a:r>
-              <a:t>Mientras el trigger exista, la funcion no se puede borrar con un DROP FUNCTION simple: hace falta CASCADE, que elimina tambien el trigger.</a:t>
+              <a:t>En un trigger BEFORE de fila, la fila aun no esta escrita y lo que la funcion retorna es lo que se va a guardar: si retorna NEW, se guarda tal cual</a:t>
+            </a:r>
+          </a:p>
+          <a:p>
+            <a:r>
+              <a:t>Si retorna una version modificada de NEW, por ejemplo tras hacer NEW.estado:= UPPER(NEW.estado), se guarda la version modificada; y si retorna NULL, la operacion se cancela en silencio, sin error y sin mensaje.</a:t>
+            </a:r>
+          </a:p>
+          <a:p>
+            <a:r>
+              <a:t>En un trigger AFTER de fila la fila ya esta escrita y el valor de retorno se ignora; se escribe RETURN NEW por convencion.</a:t>
+            </a:r>
+          </a:p>
+          <a:p>
+            <a:r>
+              <a:t>Sin esa clausula el trigger es de sentencia, corre una sola vez y no tiene OLD ni NEW.</a:t>
+            </a:r>
+          </a:p>
+          <a:p>
+            <a:r>
+              <a:t>El numero hace palpable la diferencia: un UPDATE que toca quinientas citas ejecuta un trigger de fila quinientas veces y uno de sentencia una sola vez.</a:t>
+            </a:r>
+          </a:p>
+          <a:p>
+            <a:r>
+              <a:t>Es la clase de matiz que separa saber la regla de entenderla.</a:t>
             </a:r>
           </a:p>
           <a:p>
@@ -2136,52 +2109,37 @@
           </a:p>
           <a:p>
             <a:r>
-              <a:t>Despues la asociacion,;, que dice cuando dispararla y a quien llamar.</a:t>
-            </a:r>
-          </a:p>
-          <a:p>
-            <a:r>
-              <a:t>No existe la forma de Oracle con el cuerpo dentro del CREATE TRIGGER.</a:t>
-            </a:r>
-          </a:p>
-          <a:p>
-            <a:r>
-              <a:t>EXECUTE PROCEDURE todavia se acepta por compatibilidad, pero esta obsoleto y no conviene ensenarlo.</a:t>
-            </a:r>
-          </a:p>
-          <a:p>
-            <a:r>
-              <a:t>De ahi salen sus dos caras: si el trigger falla, la sentencia original tambien falla y se deshace, que es exactamente lo que se quiere para un invariante como que el stock nunca quede negativo; y si el trigger es lento, la sentencia original se vuelve lenta, y si bloquea, bloquea al usuario que hizo el UPDATE.</a:t>
-            </a:r>
-          </a:p>
-          <a:p>
-            <a:r>
-              <a:t>Conviene mencionar tambien las variables especiales que PL/pgSQL pone a disposicion dentro de una funcion de trigger, porque permiten escribir una sola funcion para varios eventos: TG_OP dice si fue INSERT, UPDATE o DELETE, TG_TABLE_NAME dice sobre que tabla, y TG_WHEN y TG_LEVEL dicen si es BEFORE o AFTER y de fila o de sentencia.</a:t>
-            </a:r>
-          </a:p>
-          <a:p>
-            <a:r>
-              <a:t>Hoy no hacen falta, pero saber que existen evita que el estudiante escriba tres funciones casi identicas.</a:t>
-            </a:r>
-          </a:p>
-          <a:p>
-            <a:r>
-              <a:t>CÓDIGO CITADO (referencia):</a:t>
-            </a:r>
-          </a:p>
-          <a:p>
-            <a:r>
-              <a:t>CREATE OR REPLACE FUNCTION fn_trg_audit_cita()</a:t>
-            </a:r>
-          </a:p>
-          <a:p>
-            <a:r>
-              <a:t>CREATE TRIGGER trg_audit_cita AFTER UPDATE OF estado ON cita FOR EACH ROW EXECUTE FUNCTION fn_trg_audit_cita()</a:t>
-            </a:r>
-          </a:p>
-          <a:p>
-            <a:r>
-              <a:t>Fuera de la lamina (habla de la practica): No existe la forma de Oracle con el cuerpo dentro del CREATE TRIGGER, y hay que decirlo tal cual porque es el error que la rubrica penaliza expresamente.</a:t>
+              <a:t>BEFORE y AFTER no son estilos alternativos, tienen capacidades distintas, y en PostgreSQL la diferencia se expresa a traves del valor de retorno de la funcion, que es la parte que el estudiante no adivina.</a:t>
+            </a:r>
+          </a:p>
+          <a:p>
+            <a:r>
+              <a:t>Ese ultimo caso hay que nombrarlo como trampa: cancelar retornando NULL parece elegante y deja a la aplicacion creyendo que guardo, asi que para RECHAZAR se usa RAISE EXCEPTION y no un RETURN NULL.</a:t>
+            </a:r>
+          </a:p>
+          <a:p>
+            <a:r>
+              <a:t>Para un trigger de DELETE se retorna OLD, porque NEW no existe en ese evento; simetricamente, en un INSERT no existe OLD.</a:t>
+            </a:r>
+          </a:p>
+          <a:p>
+            <a:r>
+              <a:t>FOR EACH ROW indica que se ejecuta una vez por fila afectada y da acceso a OLD y NEW.</a:t>
+            </a:r>
+          </a:p>
+          <a:p>
+            <a:r>
+              <a:t>La regla operativa.</a:t>
+            </a:r>
+          </a:p>
+          <a:p>
+            <a:r>
+              <a:t>Poner AFTER en el trigger de stock es el error mas comun del dia, y conviene explicar por que es un error y no solo un descuento: un AFTER que lanza excepcion tambien deshace la transaccion, asi que el dato malo no queda, pero el motor ya hizo el trabajo de escribirlo y, sobre todo, con AFTER no se puede corregir el valor, solo abortar.</a:t>
+            </a:r>
+          </a:p>
+          <a:p>
+            <a:r>
+              <a:t>Fuera de la lamina (habla de la practica): La regla operativa, que es la que se califica en la pregunta 4, se dice en una frase: el que VALIDA va BEFORE, porque tiene que abortar antes de que el dato quede escrito y porque solo ahi puede corregirlo; el que AUDITA va AFTER, porque registra un hecho ya consumado.</a:t>
             </a:r>
           </a:p>
         </p:txBody>
@@ -2256,32 +2214,42 @@
           </a:p>
           <a:p>
             <a:r>
-              <a:t>En un trigger BEFORE de fila, la fila aun no esta escrita y lo que la funcion retorna es lo que se va a guardar: si retorna NEW, se guarda tal cual</a:t>
-            </a:r>
-          </a:p>
-          <a:p>
-            <a:r>
-              <a:t>Si retorna una version modificada de NEW, por ejemplo tras hacer NEW.estado:= UPPER(NEW.estado), se guarda la version modificada; y si retorna NULL, la operacion se cancela en silencio, sin error y sin mensaje.</a:t>
-            </a:r>
-          </a:p>
-          <a:p>
-            <a:r>
-              <a:t>En un trigger AFTER de fila la fila ya esta escrita y el valor de retorno se ignora; se escribe RETURN NEW por convencion.</a:t>
-            </a:r>
-          </a:p>
-          <a:p>
-            <a:r>
-              <a:t>Sin esa clausula el trigger es de sentencia, corre una sola vez y no tiene OLD ni NEW.</a:t>
-            </a:r>
-          </a:p>
-          <a:p>
-            <a:r>
-              <a:t>El numero hace palpable la diferencia: un UPDATE que toca quinientas citas ejecuta un trigger de fila quinientas veces y uno de sentencia una sola vez.</a:t>
-            </a:r>
-          </a:p>
-          <a:p>
-            <a:r>
-              <a:t>Es la clase de matiz que separa saber la regla de entenderla.</a:t>
+              <a:t>La auditoria es el uso donde los triggers brillan, porque es el unico mecanismo que no se puede evitar olvidandose de llamarlo.</a:t>
+            </a:r>
+          </a:p>
+          <a:p>
+            <a:r>
+              <a:t>Y WHEN (OLD.estado IS DISTINCT FROM NEW.estado) es la pieza que decide el resultado de la prueba: hace que tres UPDATE dejen DOS filas de auditoria y no tres, porque el tercero asigna a la cita el estado que ya tenia.</a:t>
+            </a:r>
+          </a:p>
+          <a:p>
+            <a:r>
+              <a:t>IS DISTINCT FROM trata el nulo como un valor mas y devuelve verdadero o falso siempre.</a:t>
+            </a:r>
+          </a:p>
+          <a:p>
+            <a:r>
+              <a:t>Sobre el diseno de la tabla de auditoria hay un criterio exigible: una fila debe responder quien, cuando, que, y de que a que.</a:t>
+            </a:r>
+          </a:p>
+          <a:p>
+            <a:r>
+              <a:t>Registrar solo que la cita cambio no sirve para investigar nada.</a:t>
+            </a:r>
+          </a:p>
+          <a:p>
+            <a:r>
+              <a:t>Las columnas de audit_cita son id_cita, accion con el texto 'CAMBIO_ESTADO', valor_anterior y valor_nuevo tomados de OLD.estado y NEW.estado, y dos que se llenan solas con DEFAULT: usuario_bd con current_user y fecha_evento con now().</a:t>
+            </a:r>
+          </a:p>
+          <a:p>
+            <a:r>
+              <a:t>Ninguna de las dos columnas se pasa desde el trigger: se dejan al DEFAULT, porque un dato de auditoria que el codigo puede escribir es un dato que el codigo puede falsear.</a:t>
+            </a:r>
+          </a:p>
+          <a:p>
+            <a:r>
+              <a:t>Por ultimo, el identificador va SERIAL y no calculado con el maximo mas uno: dos sesiones simultaneas leen el mismo maximo y una pierde, y el porque completo se estudia en la Clase 10.</a:t>
             </a:r>
           </a:p>
           <a:p>
@@ -2291,37 +2259,42 @@
           </a:p>
           <a:p>
             <a:r>
-              <a:t>BEFORE y AFTER no son estilos alternativos, tienen capacidades distintas, y en PostgreSQL la diferencia se expresa a traves del valor de retorno de la funcion, que es la parte que el estudiante no adivina.</a:t>
-            </a:r>
-          </a:p>
-          <a:p>
-            <a:r>
-              <a:t>Ese ultimo caso hay que nombrarlo como trampa: cancelar retornando NULL parece elegante y deja a la aplicacion creyendo que guardo, asi que para RECHAZAR se usa RAISE EXCEPTION y no un RETURN NULL.</a:t>
-            </a:r>
-          </a:p>
-          <a:p>
-            <a:r>
-              <a:t>Para un trigger de DELETE se retorna OLD, porque NEW no existe en ese evento; simetricamente, en un INSERT no existe OLD.</a:t>
-            </a:r>
-          </a:p>
-          <a:p>
-            <a:r>
-              <a:t>FOR EACH ROW indica que se ejecuta una vez por fila afectada y da acceso a OLD y NEW.</a:t>
-            </a:r>
-          </a:p>
-          <a:p>
-            <a:r>
-              <a:t>La regla operativa.</a:t>
-            </a:r>
-          </a:p>
-          <a:p>
-            <a:r>
-              <a:t>Poner AFTER en el trigger de stock es el error mas comun del dia, y conviene explicar por que es un error y no solo un descuento: un AFTER que lanza excepcion tambien deshace la transaccion, asi que el dato malo no queda, pero el motor ya hizo el trabajo de escribirlo y, sobre todo, con AFTER no se puede corregir el valor, solo abortar.</a:t>
-            </a:r>
-          </a:p>
-          <a:p>
-            <a:r>
-              <a:t>Fuera de la lamina (habla de la practica): La regla operativa, que es la que se califica en la pregunta 4, se dice en una frase: el que VALIDA va BEFORE, porque tiene que abortar antes de que el dato quede escrito y porque solo ahi puede corregirlo; el que AUDITA va AFTER, porque registra un hecho ya consumado.</a:t>
+              <a:t>Vale leer la cabecera del trigger del proyecto palabra por palabra, porque cada pieza tiene razon.</a:t>
+            </a:r>
+          </a:p>
+          <a:p>
+            <a:r>
+              <a:t>AFTER UPDATE OF estado ON cita limita el disparo a los cambios de esa columna y no a cualquier actualizacion de la fila, de modo que corregir el telefono no escribe una fila de auditoria.</a:t>
+            </a:r>
+          </a:p>
+          <a:p>
+            <a:r>
+              <a:t>FOR EACH ROW da acceso a OLD y NEW.</a:t>
+            </a:r>
+          </a:p>
+          <a:p>
+            <a:r>
+              <a:t>Sin WHEN, la auditoria se llena de eventos donde no cambio nada y deja de servir para investigar.</a:t>
+            </a:r>
+          </a:p>
+          <a:p>
+            <a:r>
+              <a:t>Hay que explicar tambien por que se escribe IS DISTINCT FROM y no el operador de desigualdad: si uno de los dos lados es nulo, la desigualdad devuelve nulo, y un WHEN que evalua a nulo NO dispara; una cita que pasa de estado nulo a 'PROGRAMADA' se quedaria sin auditar.</a:t>
+            </a:r>
+          </a:p>
+          <a:p>
+            <a:r>
+              <a:t>Conviene detenerse en esos dos defaults porque tienen matices. current_user devuelve el rol EFECTIVO, es decir el que la Clase 2 cambiaba con SET ROLE, y no necesariamente quien inicio la sesion, que es session_user; para auditar interesa el efectivo.</a:t>
+            </a:r>
+          </a:p>
+          <a:p>
+            <a:r>
+              <a:t>Y now() devuelve el instante de inicio de la transaccion, no el del reloj, asi que si una transaccion escribe cinco filas de auditoria las cinco llevan la misma marca de tiempo; si eso importa, existe clock_timestamp().</a:t>
+            </a:r>
+          </a:p>
+          <a:p>
+            <a:r>
+              <a:t>Como referencia de dimensionamiento, si la clinica registra doscientos cambios auditables por dia, la tabla crece del orden de setenta y tres mil filas en doce meses, cifra que obliga a definir retencion en el mismo plan de respaldo.</a:t>
             </a:r>
           </a:p>
         </p:txBody>
@@ -2396,42 +2369,42 @@
           </a:p>
           <a:p>
             <a:r>
-              <a:t>La auditoria es el uso donde los triggers brillan, porque es el unico mecanismo que no se puede evitar olvidandose de llamarlo.</a:t>
-            </a:r>
-          </a:p>
-          <a:p>
-            <a:r>
-              <a:t>Y WHEN (OLD.estado IS DISTINCT FROM NEW.estado) es la pieza que decide el resultado de la prueba: hace que tres UPDATE dejen DOS filas de auditoria y no tres, porque el tercero asigna a la cita el estado que ya tenia.</a:t>
-            </a:r>
-          </a:p>
-          <a:p>
-            <a:r>
-              <a:t>IS DISTINCT FROM trata el nulo como un valor mas y devuelve verdadero o falso siempre.</a:t>
-            </a:r>
-          </a:p>
-          <a:p>
-            <a:r>
-              <a:t>Sobre el diseno de la tabla de auditoria hay un criterio exigible: una fila debe responder quien, cuando, que, y de que a que.</a:t>
-            </a:r>
-          </a:p>
-          <a:p>
-            <a:r>
-              <a:t>Registrar solo que la cita cambio no sirve para investigar nada.</a:t>
-            </a:r>
-          </a:p>
-          <a:p>
-            <a:r>
-              <a:t>Las columnas de audit_cita son id_cita, accion con el texto 'CAMBIO_ESTADO', valor_anterior y valor_nuevo tomados de OLD.estado y NEW.estado, y dos que se llenan solas con DEFAULT: usuario_bd con current_user y fecha_evento con now().</a:t>
-            </a:r>
-          </a:p>
-          <a:p>
-            <a:r>
-              <a:t>Ninguna de las dos columnas se pasa desde el trigger: se dejan al DEFAULT, porque un dato de auditoria que el codigo puede escribir es un dato que el codigo puede falsear.</a:t>
-            </a:r>
-          </a:p>
-          <a:p>
-            <a:r>
-              <a:t>Por ultimo, el identificador va SERIAL y no calculado con el maximo mas uno: dos sesiones simultaneas leen el mismo maximo y una pierde, y el porque completo se estudia en la Clase 10.</a:t>
+              <a:t>La segunda mitad del tema es el trigger que rechaza, y la demostracion se monta sobre un hueco real.</a:t>
+            </a:r>
+          </a:p>
+          <a:p>
+            <a:r>
+              <a:t>El esquema de la Clase 1 trae CHECK (stock &gt;= 0) sobre insumo, asi que la primera reaccion sensata del grupo es que el trigger no hace falta.</a:t>
+            </a:r>
+          </a:p>
+          <a:p>
+            <a:r>
+              <a:t>La demo retira la restriccion a proposito con ALTER TABLE insumo DROP CONSTRAINT, ejecuta UPDATE insumo SET stock = stock - 10 WHERE id_insumo = 2 sobre un insumo que tiene tres unidades, y muestra el stock en menos siete.</a:t>
+            </a:r>
+          </a:p>
+          <a:p>
+            <a:r>
+              <a:t>Ese numero es el argumento entero de la clase: sin defensa, la base guarda un imposible fisico.</a:t>
+            </a:r>
+          </a:p>
+          <a:p>
+            <a:r>
+              <a:t>Un CHECK es mas barato, no se puede olvidar, lo aplica el motor sin una linea de codigo y se documenta solo al leer el DDL: si la regla cabe en un CHECK, no se hace trigger.</a:t>
+            </a:r>
+          </a:p>
+          <a:p>
+            <a:r>
+              <a:t>Un CHECK solo puede fallar; no puede explicar.</a:t>
+            </a:r>
+          </a:p>
+          <a:p>
+            <a:r>
+              <a:t>La prueba tambien tiene dos mitades y las dos importan: el descuento invalido rechazado, y el descuento legitimo que sigue funcionando.</a:t>
+            </a:r>
+          </a:p>
+          <a:p>
+            <a:r>
+              <a:t>No se bloqueo la operacion, se bloqueo el resultado invalido, y sin la segunda mitad nadie puede saber que el trigger no rompio nada mas.</a:t>
             </a:r>
           </a:p>
           <a:p>
@@ -2441,42 +2414,37 @@
           </a:p>
           <a:p>
             <a:r>
-              <a:t>Vale leer la cabecera del trigger del proyecto palabra por palabra, porque cada pieza tiene razon.</a:t>
-            </a:r>
-          </a:p>
-          <a:p>
-            <a:r>
-              <a:t>AFTER UPDATE OF estado ON cita limita el disparo a los cambios de esa columna y no a cualquier actualizacion de la fila, de modo que corregir el telefono no escribe una fila de auditoria.</a:t>
-            </a:r>
-          </a:p>
-          <a:p>
-            <a:r>
-              <a:t>FOR EACH ROW da acceso a OLD y NEW.</a:t>
-            </a:r>
-          </a:p>
-          <a:p>
-            <a:r>
-              <a:t>Sin WHEN, la auditoria se llena de eventos donde no cambio nada y deja de servir para investigar.</a:t>
-            </a:r>
-          </a:p>
-          <a:p>
-            <a:r>
-              <a:t>Hay que explicar tambien por que se escribe IS DISTINCT FROM y no el operador de desigualdad: si uno de los dos lados es nulo, la desigualdad devuelve nulo, y un WHEN que evalua a nulo NO dispara; una cita que pasa de estado nulo a 'PROGRAMADA' se quedaria sin auditar.</a:t>
-            </a:r>
-          </a:p>
-          <a:p>
-            <a:r>
-              <a:t>Conviene detenerse en esos dos defaults porque tienen matices. current_user devuelve el rol EFECTIVO, es decir el que la Clase 2 cambiaba con SET ROLE, y no necesariamente quien inicio la sesion, que es session_user; para auditar interesa el efectivo.</a:t>
-            </a:r>
-          </a:p>
-          <a:p>
-            <a:r>
-              <a:t>Y now() devuelve el instante de inicio de la transaccion, no el del reloj, asi que si una transaccion escribe cinco filas de auditoria las cinco llevan la misma marca de tiempo; si eso importa, existe clock_timestamp().</a:t>
-            </a:r>
-          </a:p>
-          <a:p>
-            <a:r>
-              <a:t>Como referencia de dimensionamiento, si la clinica registra doscientos cambios auditables por dia, la tabla crece del orden de setenta y tres mil filas en doce meses, cifra que obliga a definir retencion en el mismo plan de respaldo.</a:t>
+              <a:t>Hay que ser preciso al comparar los dos mecanismos, porque decir que el trigger es mejor seria falso.</a:t>
+            </a:r>
+          </a:p>
+          <a:p>
+            <a:r>
+              <a:t>Lo que un CHECK no puede hacer es mirar OTRA fila, OTRA tabla, o el valor ANTERIOR de la fila que se esta cambiando; solo ve los valores finales de la fila que se inserta o actualiza.</a:t>
+            </a:r>
+          </a:p>
+          <a:p>
+            <a:r>
+              <a:t>Por eso el trigger de stock de la clase no es un reemplazo del CHECK sino una demostracion de la capacidad extra: la funcion fn_trg_stock_no_negativo() puede escribir RAISE EXCEPTION 'ERROR: el stock de % no puede quedar negativo (resultado: %)', OLD.nombre, NEW.stock, es decir puede nombrar el insumo tomando el dato de OLD y el resultado de NEW en el mismo mensaje.</a:t>
+            </a:r>
+          </a:p>
+          <a:p>
+            <a:r>
+              <a:t>La asociacion va BEFORE</a:t>
+            </a:r>
+          </a:p>
+          <a:p>
+            <a:r>
+              <a:t>CÓDIGO CITADO (referencia):</a:t>
+            </a:r>
+          </a:p>
+          <a:p>
+            <a:r>
+              <a:t>UPDATE OF stock ON insumo FOR EACH ROW</a:t>
+            </a:r>
+          </a:p>
+          <a:p>
+            <a:r>
+              <a:t>Fuera de la lamina (habla de la practica): La asociacion va BEFORE UPDATE OF stock ON insumo FOR EACH ROW, y el mensaje es parte del entregable, igual que en la Clase 3: es lo que la aplicacion va a mostrar y lo que la prueba va a verificar.</a:t>
             </a:r>
           </a:p>
         </p:txBody>
@@ -2551,42 +2519,47 @@
           </a:p>
           <a:p>
             <a:r>
-              <a:t>La segunda mitad del tema es el trigger que rechaza, y la demostracion se monta sobre un hueco real.</a:t>
-            </a:r>
-          </a:p>
-          <a:p>
-            <a:r>
-              <a:t>El esquema de la Clase 1 trae CHECK (stock &gt;= 0) sobre insumo, asi que la primera reaccion sensata del grupo es que el trigger no hace falta.</a:t>
-            </a:r>
-          </a:p>
-          <a:p>
-            <a:r>
-              <a:t>La demo retira la restriccion a proposito con ALTER TABLE insumo DROP CONSTRAINT, ejecuta UPDATE insumo SET stock = stock - 10 WHERE id_insumo = 2 sobre un insumo que tiene tres unidades, y muestra el stock en menos siete.</a:t>
-            </a:r>
-          </a:p>
-          <a:p>
-            <a:r>
-              <a:t>Ese numero es el argumento entero de la clase: sin defensa, la base guarda un imposible fisico.</a:t>
-            </a:r>
-          </a:p>
-          <a:p>
-            <a:r>
-              <a:t>Un CHECK es mas barato, no se puede olvidar, lo aplica el motor sin una linea de codigo y se documenta solo al leer el DDL: si la regla cabe en un CHECK, no se hace trigger.</a:t>
-            </a:r>
-          </a:p>
-          <a:p>
-            <a:r>
-              <a:t>Un CHECK solo puede fallar; no puede explicar.</a:t>
-            </a:r>
-          </a:p>
-          <a:p>
-            <a:r>
-              <a:t>La prueba tambien tiene dos mitades y las dos importan: el descuento invalido rechazado, y el descuento legitimo que sigue funcionando.</a:t>
-            </a:r>
-          </a:p>
-          <a:p>
-            <a:r>
-              <a:t>No se bloqueo la operacion, se bloqueo el resultado invalido, y sin la segunda mitad nadie puede saber que el trigger no rompio nada mas.</a:t>
+              <a:t>Primero lo declarativo de una fila: NOT NULL, CHECK y DEFAULT resuelven todo lo que se puede decidir mirando los valores finales de una sola fila —stock no negativo</a:t>
+            </a:r>
+          </a:p>
+          <a:p>
+            <a:r>
+              <a:t>Precio positivo, estado dentro de una lista—, y son lo mas barato y lo mas dificil de saltarse.</a:t>
+            </a:r>
+          </a:p>
+          <a:p>
+            <a:r>
+              <a:t>Segundo lo declarativo entre filas y entre tablas: UNIQUE y las claves foraneas.</a:t>
+            </a:r>
+          </a:p>
+          <a:p>
+            <a:r>
+              <a:t>Tercero el trigger, cuando la regla necesita comparar OLD con NEW, mirar otra tabla o escribir en una segunda tabla; la auditoria entra aqui por definicion, porque escribir en audit_cita no cabe en ninguna restriccion.</a:t>
+            </a:r>
+          </a:p>
+          <a:p>
+            <a:r>
+              <a:t>Cuarto la aplicacion, y solo para lo que la base no puede saber: el formato del correo, el permiso de la pantalla, el idioma del mensaje.</a:t>
+            </a:r>
+          </a:p>
+          <a:p>
+            <a:r>
+              <a:t>La primera idea de todo el mundo para impedir la doble reserva es un trigger que haga SELECT COUNT(*) FROM cita WHERE id_veterinario = NEW.id_veterinario AND fecha_hora = NEW.fecha_hora.</a:t>
+            </a:r>
+          </a:p>
+          <a:p>
+            <a:r>
+              <a:t>En Oracle ese trigger simplemente no funciona, porque un trigger de fila no puede consultar la tabla en mutacion.</a:t>
+            </a:r>
+          </a:p>
+          <a:p>
+            <a:r>
+              <a:t>En PostgreSQL SI corre, y ahi esta el peligro: parece funcionar en la demo y no protege de nada cuando hay concurrencia, porque cada transaccion ve su propia foto de la tabla y ninguna ve la cita que la otra acaba de insertar sin confirmar.</a:t>
+            </a:r>
+          </a:p>
+          <a:p>
+            <a:r>
+              <a:t>Decir esto hoy es lo que evita que en la Clase 10 el estudiante defienda un trigger que ya escribio.</a:t>
             </a:r>
           </a:p>
           <a:p>
@@ -2596,22 +2569,32 @@
           </a:p>
           <a:p>
             <a:r>
-              <a:t>Hay que ser preciso al comparar los dos mecanismos, porque decir que el trigger es mejor seria falso.</a:t>
-            </a:r>
-          </a:p>
-          <a:p>
-            <a:r>
-              <a:t>Lo que un CHECK no puede hacer es mirar OTRA fila, OTRA tabla, o el valor ANTERIOR de la fila que se esta cambiando; solo ve los valores finales de la fila que se inserta o actualiza.</a:t>
-            </a:r>
-          </a:p>
-          <a:p>
-            <a:r>
-              <a:t>Por eso el trigger de stock de la clase no es un reemplazo del CHECK sino una demostracion de la capacidad extra: la funcion fn_trg_stock_no_negativo() puede escribir RAISE EXCEPTION 'ERROR: el stock de % no puede quedar negativo (resultado: %)', OLD.nombre, NEW.stock, es decir puede nombrar el insumo tomando el dato de OLD y el resultado de NEW en el mismo mensaje.</a:t>
-            </a:r>
-          </a:p>
-          <a:p>
-            <a:r>
-              <a:t>La asociacion va BEFORE</a:t>
+              <a:t>Conviene dictar las cuatro capas en orden de preferencia, porque el orden es la respuesta.</a:t>
+            </a:r>
+          </a:p>
+          <a:p>
+            <a:r>
+              <a:t>Aqui hay un ejemplo que hay que dar porque es el que el estudiante resuelve mal: la regla de que un veterinario no puede tener dos citas en la misma franja es UNIQUE (id_veterinario, fecha_hora) y no un trigger.</a:t>
+            </a:r>
+          </a:p>
+          <a:p>
+            <a:r>
+              <a:t>El criterio para decidir si algo pertenece a la aplicacion se dice en una frase y conviene escribirla en el tablero: una validacion que solo vive en la app se salta conectandose por otra via, como hizo la Clase 2 con SET ROLE.</a:t>
+            </a:r>
+          </a:p>
+          <a:p>
+            <a:r>
+              <a:t>Merece un parrafo la trampa que el estudiante intentara, porque la respuesta correcta es contraintuitiva y depende del motor.</a:t>
+            </a:r>
+          </a:p>
+          <a:p>
+            <a:r>
+              <a:t>Las dos pasan la verificacion y las dos insertan.</a:t>
+            </a:r>
+          </a:p>
+          <a:p>
+            <a:r>
+              <a:t>La respuesta correcta es declarativa ——, es mas rapida, mas clara y a prueba de concurrencia, y el porque completo llega en la Clase 10.</a:t>
             </a:r>
           </a:p>
           <a:p>
@@ -2621,12 +2604,12 @@
           </a:p>
           <a:p>
             <a:r>
-              <a:t>UPDATE OF stock ON insumo FOR EACH ROW</a:t>
-            </a:r>
-          </a:p>
-          <a:p>
-            <a:r>
-              <a:t>Fuera de la lamina (habla de la practica): La asociacion va BEFORE UPDATE OF stock ON insumo FOR EACH ROW, y el mensaje es parte del entregable, igual que en la Clase 3: es lo que la aplicacion va a mostrar y lo que la prueba va a verificar.</a:t>
+              <a:t>ALTER TABLE cita ADD CONSTRAINT uq_vet_franja UNIQUE (id_veterinario, fecha_hora)</a:t>
+            </a:r>
+          </a:p>
+          <a:p>
+            <a:r>
+              <a:t>Fuera de la lamina (habla de la practica): La pregunta 4 vale quince puntos, no pide codigo y es la que mejor mide si el estudiante entendio el dia: hay que ubicar cada validacion en su capa y justificar por que ahi.</a:t>
             </a:r>
           </a:p>
         </p:txBody>
@@ -2696,102 +2679,37 @@
           <a:lstStyle/>
           <a:p>
             <a:r>
-              <a:t>DESARROLLO (para explicarlo, no se proyecta):</a:t>
-            </a:r>
-          </a:p>
-          <a:p>
-            <a:r>
-              <a:t>Primero lo declarativo de una fila: NOT NULL, CHECK y DEFAULT resuelven todo lo que se puede decidir mirando los valores finales de una sola fila —stock no negativo</a:t>
-            </a:r>
-          </a:p>
-          <a:p>
-            <a:r>
-              <a:t>Precio positivo, estado dentro de una lista—, y son lo mas barato y lo mas dificil de saltarse.</a:t>
-            </a:r>
-          </a:p>
-          <a:p>
-            <a:r>
-              <a:t>Segundo lo declarativo entre filas y entre tablas: UNIQUE y las claves foraneas.</a:t>
-            </a:r>
-          </a:p>
-          <a:p>
-            <a:r>
-              <a:t>Tercero el trigger, cuando la regla necesita comparar OLD con NEW, mirar otra tabla o escribir en una segunda tabla; la auditoria entra aqui por definicion, porque escribir en audit_cita no cabe en ninguna restriccion.</a:t>
-            </a:r>
-          </a:p>
-          <a:p>
-            <a:r>
-              <a:t>Cuarto la aplicacion, y solo para lo que la base no puede saber: el formato del correo, el permiso de la pantalla, el idioma del mensaje.</a:t>
-            </a:r>
-          </a:p>
-          <a:p>
-            <a:r>
-              <a:t>La primera idea de todo el mundo para impedir la doble reserva es un trigger que haga SELECT COUNT(*) FROM cita WHERE id_veterinario = NEW.id_veterinario AND fecha_hora = NEW.fecha_hora.</a:t>
-            </a:r>
-          </a:p>
-          <a:p>
-            <a:r>
-              <a:t>En Oracle ese trigger simplemente no funciona, porque un trigger de fila no puede consultar la tabla en mutacion.</a:t>
-            </a:r>
-          </a:p>
-          <a:p>
-            <a:r>
-              <a:t>En PostgreSQL SI corre, y ahi esta el peligro: parece funcionar en la demo y no protege de nada cuando hay concurrencia, porque cada transaccion ve su propia foto de la tabla y ninguna ve la cita que la otra acaba de insertar sin confirmar.</a:t>
-            </a:r>
-          </a:p>
-          <a:p>
-            <a:r>
-              <a:t>Decir esto hoy es lo que evita que en la Clase 10 el estudiante defienda un trigger que ya escribio.</a:t>
-            </a:r>
-          </a:p>
-          <a:p>
-            <a:r>
-              <a:t>NOTAS:</a:t>
-            </a:r>
-          </a:p>
-          <a:p>
-            <a:r>
-              <a:t>Conviene dictar las cuatro capas en orden de preferencia, porque el orden es la respuesta.</a:t>
-            </a:r>
-          </a:p>
-          <a:p>
-            <a:r>
-              <a:t>Aqui hay un ejemplo que hay que dar porque es el que el estudiante resuelve mal: la regla de que un veterinario no puede tener dos citas en la misma franja es UNIQUE (id_veterinario, fecha_hora) y no un trigger.</a:t>
-            </a:r>
-          </a:p>
-          <a:p>
-            <a:r>
-              <a:t>El criterio para decidir si algo pertenece a la aplicacion se dice en una frase y conviene escribirla en el tablero: una validacion que solo vive en la app se salta conectandose por otra via, como hizo la Clase 2 con SET ROLE.</a:t>
-            </a:r>
-          </a:p>
-          <a:p>
-            <a:r>
-              <a:t>Merece un parrafo la trampa que el estudiante intentara, porque la respuesta correcta es contraintuitiva y depende del motor.</a:t>
-            </a:r>
-          </a:p>
-          <a:p>
-            <a:r>
-              <a:t>Las dos pasan la verificacion y las dos insertan.</a:t>
-            </a:r>
-          </a:p>
-          <a:p>
-            <a:r>
-              <a:t>La respuesta correcta es declarativa ——, es mas rapida, mas clara y a prueba de concurrencia, y el porque completo llega en la Clase 10.</a:t>
-            </a:r>
-          </a:p>
-          <a:p>
-            <a:r>
-              <a:t>CÓDIGO CITADO (referencia):</a:t>
-            </a:r>
-          </a:p>
-          <a:p>
-            <a:r>
-              <a:t>ALTER TABLE cita ADD CONSTRAINT uq_vet_franja UNIQUE (id_veterinario, fecha_hora)</a:t>
-            </a:r>
-          </a:p>
-          <a:p>
-            <a:r>
-              <a:t>Fuera de la lamina (habla de la practica): La pregunta 4 vale quince puntos, no pide codigo y es la que mejor mide si el estudiante entendio el dia: hay que ubicar cada validacion en su capa y justificar por que ahi.</a:t>
+              <a:t>TEXTO COMPLETO DE LA LÁMINA (se proyecta resumido):</a:t>
+            </a:r>
+          </a:p>
+          <a:p/>
+          <a:p>
+            <a:r>
+              <a:t>`CHECK`: una sola fila, una sola columna. `stock &gt;= 0`, `precio &gt; 0`, `estado IN (...)`. Es lo mas barato y lo mas dificil de saltarse, porque lo aplica el motor sin una linea de codigo. Si la regla cabe en un CHECK, no se hace trigger.</a:t>
+            </a:r>
+          </a:p>
+          <a:p/>
+          <a:p>
+            <a:r>
+              <a:t>`UNIQUE` y `FK`: la relacion entre filas o entre tablas. «un veterinario no puede tener dos citas en la misma franja» es `UNIQUE (id_veterinario, fecha_hora)`, no un trigger.</a:t>
+            </a:r>
+          </a:p>
+          <a:p/>
+          <a:p>
+            <a:r>
+              <a:t>Trigger: cuando la regla necesita OTRA fila u OTRA tabla. Comparar `OLD` con `NEW`, mirar el stock de `insumo` mientras se actualiza otra tabla, o escribir en una segunda tabla (auditoria). Nada de eso cabe en un `CHECK`.</a:t>
+            </a:r>
+          </a:p>
+          <a:p/>
+          <a:p>
+            <a:r>
+              <a:t>Aplicacion: solo lo que la base no puede saber. El formato del correo, el permiso de la pantalla, la traduccion del mensaje. Y el criterio para decidir: una validacion que solo vive en la app se salta conectandose por `psql`.</a:t>
+            </a:r>
+          </a:p>
+          <a:p/>
+          <a:p>
+            <a:r>
+              <a:t>BEFORE valida, AFTER audita. Un trigger que rechaza corre `BEFORE`, porque despues el dato ya esta escrito; uno que registra un hecho consumado corre `AFTER`. Poner `AFTER` en el de stock es el error mas comun del dia.</a:t>
             </a:r>
           </a:p>
         </p:txBody>
@@ -13328,8 +13246,8 @@
         </p:nvSpPr>
         <p:spPr>
           <a:xfrm>
-            <a:off x="5797149" y="1738234"/>
-            <a:ext cx="6010497" cy="3939314"/>
+            <a:off x="5797149" y="1449082"/>
+            <a:ext cx="6010497" cy="4837658"/>
           </a:xfrm>
           <a:prstGeom prst="roundRect">
             <a:avLst>
@@ -13367,7 +13285,7 @@
       </p:sp>
       <p:pic>
         <p:nvPicPr>
-          <p:cNvPr id="7" name="Picture 6" descr="layers-of-rock-strata.jpg"/>
+          <p:cNvPr id="7" name="Picture 6" descr="ilus-donde-validar-paso1.png"/>
           <p:cNvPicPr>
             <a:picLocks noChangeAspect="1"/>
           </p:cNvPicPr>
@@ -13381,8 +13299,8 @@
         </p:blipFill>
         <p:spPr>
           <a:xfrm>
-            <a:off x="5870301" y="1811386"/>
-            <a:ext cx="5864193" cy="3793010"/>
+            <a:off x="5870301" y="1522234"/>
+            <a:ext cx="5864193" cy="4691354"/>
           </a:xfrm>
           <a:prstGeom prst="rect">
             <a:avLst/>
@@ -13392,41 +13310,6 @@
       <p:sp>
         <p:nvSpPr>
           <p:cNvPr id="8" name="TextBox 7"/>
-          <p:cNvSpPr txBox="1"/>
-          <p:nvPr/>
-        </p:nvSpPr>
-        <p:spPr>
-          <a:xfrm>
-            <a:off x="5870301" y="5961888"/>
-            <a:ext cx="5864193" cy="320040"/>
-          </a:xfrm>
-          <a:prstGeom prst="rect">
-            <a:avLst/>
-          </a:prstGeom>
-          <a:noFill/>
-        </p:spPr>
-        <p:txBody>
-          <a:bodyPr wrap="square">
-            <a:spAutoFit/>
-          </a:bodyPr>
-          <a:lstStyle/>
-          <a:p>
-            <a:pPr algn="ctr"/>
-            <a:r>
-              <a:rPr sz="1100" b="0" i="1">
-                <a:solidFill>
-                  <a:srgbClr val="666666"/>
-                </a:solidFill>
-                <a:latin typeface="Calibri"/>
-              </a:rPr>
-              <a:t>Foto: Miguel Delima · Pexels</a:t>
-            </a:r>
-          </a:p>
-        </p:txBody>
-      </p:sp>
-      <p:sp>
-        <p:nvSpPr>
-          <p:cNvPr id="9" name="TextBox 8"/>
           <p:cNvSpPr txBox="1"/>
           <p:nvPr/>
         </p:nvSpPr>
@@ -13567,7 +13450,7 @@
       </p:sp>
       <p:sp>
         <p:nvSpPr>
-          <p:cNvPr id="10" name="TextBox 9"/>
+          <p:cNvPr id="9" name="TextBox 8"/>
           <p:cNvSpPr txBox="1"/>
           <p:nvPr/>
         </p:nvSpPr>
@@ -14937,118 +14820,14 @@
       </p:sp>
       <p:sp>
         <p:nvSpPr>
-          <p:cNvPr id="5" name="Rounded Rectangle 4"/>
-          <p:cNvSpPr/>
-          <p:nvPr/>
-        </p:nvSpPr>
-        <p:spPr>
-          <a:xfrm>
-            <a:off x="5797149" y="1573813"/>
-            <a:ext cx="6010497" cy="4057845"/>
-          </a:xfrm>
-          <a:prstGeom prst="roundRect">
-            <a:avLst>
-              <a:gd name="adj" fmla="val 4000"/>
-            </a:avLst>
-          </a:prstGeom>
-          <a:solidFill>
-            <a:srgbClr val="E8EEF4"/>
-          </a:solidFill>
-          <a:ln>
-            <a:noFill/>
-          </a:ln>
-        </p:spPr>
-        <p:style>
-          <a:lnRef idx="1">
-            <a:schemeClr val="accent1"/>
-          </a:lnRef>
-          <a:fillRef idx="3">
-            <a:schemeClr val="accent1"/>
-          </a:fillRef>
-          <a:effectRef idx="2">
-            <a:schemeClr val="accent1"/>
-          </a:effectRef>
-          <a:fontRef idx="minor">
-            <a:schemeClr val="lt1"/>
-          </a:fontRef>
-        </p:style>
-        <p:txBody>
-          <a:bodyPr rtlCol="0" anchor="ctr"/>
-          <a:lstStyle/>
-          <a:p>
-            <a:pPr algn="ctr"/>
-          </a:p>
-        </p:txBody>
-      </p:sp>
-      <p:pic>
-        <p:nvPicPr>
-          <p:cNvPr id="6" name="Picture 5" descr="notebook-planning-desk-coffee.jpg"/>
-          <p:cNvPicPr>
-            <a:picLocks noChangeAspect="1"/>
-          </p:cNvPicPr>
-          <p:nvPr/>
-        </p:nvPicPr>
-        <p:blipFill>
-          <a:blip r:embed="rId2"/>
-          <a:stretch>
-            <a:fillRect/>
-          </a:stretch>
-        </p:blipFill>
-        <p:spPr>
-          <a:xfrm>
-            <a:off x="5870301" y="1646965"/>
-            <a:ext cx="5864193" cy="3911541"/>
-          </a:xfrm>
-          <a:prstGeom prst="rect">
-            <a:avLst/>
-          </a:prstGeom>
-        </p:spPr>
-      </p:pic>
-      <p:sp>
-        <p:nvSpPr>
-          <p:cNvPr id="7" name="TextBox 6"/>
+          <p:cNvPr id="5" name="TextBox 4"/>
           <p:cNvSpPr txBox="1"/>
           <p:nvPr/>
         </p:nvSpPr>
         <p:spPr>
           <a:xfrm>
-            <a:off x="5870301" y="5961888"/>
-            <a:ext cx="5864193" cy="320040"/>
-          </a:xfrm>
-          <a:prstGeom prst="rect">
-            <a:avLst/>
-          </a:prstGeom>
-          <a:noFill/>
-        </p:spPr>
-        <p:txBody>
-          <a:bodyPr wrap="square">
-            <a:spAutoFit/>
-          </a:bodyPr>
-          <a:lstStyle/>
-          <a:p>
-            <a:pPr algn="ctr"/>
-            <a:r>
-              <a:rPr sz="1100" b="0" i="1">
-                <a:solidFill>
-                  <a:srgbClr val="666666"/>
-                </a:solidFill>
-                <a:latin typeface="Calibri"/>
-              </a:rPr>
-              <a:t>Foto: Cup of  Couple · Pexels</a:t>
-            </a:r>
-          </a:p>
-        </p:txBody>
-      </p:sp>
-      <p:sp>
-        <p:nvSpPr>
-          <p:cNvPr id="8" name="TextBox 7"/>
-          <p:cNvSpPr txBox="1"/>
-          <p:nvPr/>
-        </p:nvSpPr>
-        <p:spPr>
-          <a:xfrm>
-            <a:off x="457200" y="1353312"/>
-            <a:ext cx="5093061" cy="5047488"/>
+            <a:off x="457200" y="1170432"/>
+            <a:ext cx="11277295" cy="5230368"/>
           </a:xfrm>
           <a:prstGeom prst="rect">
             <a:avLst/>
@@ -15169,11 +14948,61 @@
               <a:t>–   Recorrido: teoría del tema, una lámina por concepto, y demo del docente sobre la base de la clínica.</a:t>
             </a:r>
           </a:p>
-        </p:txBody>
-      </p:sp>
-      <p:sp>
-        <p:nvSpPr>
-          <p:cNvPr id="9" name="TextBox 8"/>
+          <a:p>
+            <a:pPr>
+              <a:spcAft>
+                <a:spcPts val="800"/>
+              </a:spcAft>
+            </a:pPr>
+            <a:r>
+              <a:rPr sz="2000" b="0" i="0">
+                <a:solidFill>
+                  <a:srgbClr val="333333"/>
+                </a:solidFill>
+                <a:latin typeface="Calibri"/>
+              </a:rPr>
+              <a:t>–   Cada lámina se sostiene sola: sirve para repasar aunque hayas faltado.</a:t>
+            </a:r>
+          </a:p>
+          <a:p>
+            <a:pPr>
+              <a:spcAft>
+                <a:spcPts val="800"/>
+              </a:spcAft>
+            </a:pPr>
+            <a:r>
+              <a:rPr sz="2000" b="0" i="0">
+                <a:solidFill>
+                  <a:srgbClr val="333333"/>
+                </a:solidFill>
+                <a:latin typeface="Calibri"/>
+              </a:rPr>
+              <a:t>–   </a:t>
+            </a:r>
+            <a:r>
+              <a:rPr sz="2000" b="1" i="0">
+                <a:solidFill>
+                  <a:srgbClr val="333333"/>
+                </a:solidFill>
+                <a:latin typeface="Calibri"/>
+              </a:rPr>
+              <a:t>Conceptos de hoy:</a:t>
+            </a:r>
+            <a:r>
+              <a:rPr sz="2000" b="0" i="0">
+                <a:solidFill>
+                  <a:srgbClr val="333333"/>
+                </a:solidFill>
+                <a:latin typeface="Calibri"/>
+              </a:rPr>
+              <a:t> Funcion y procedimiento · La funcion de tarifas, y por que IMMUTABLE importa · Los tres detalles de fn_precio_consulta · El trigger.</a:t>
+            </a:r>
+          </a:p>
+        </p:txBody>
+      </p:sp>
+      <p:sp>
+        <p:nvSpPr>
+          <p:cNvPr id="6" name="TextBox 5"/>
           <p:cNvSpPr txBox="1"/>
           <p:nvPr/>
         </p:nvSpPr>
@@ -15394,8 +15223,8 @@
         </p:nvSpPr>
         <p:spPr>
           <a:xfrm>
-            <a:off x="5797149" y="1678969"/>
-            <a:ext cx="6010497" cy="4057845"/>
+            <a:off x="5797149" y="1449082"/>
+            <a:ext cx="6010497" cy="4837658"/>
           </a:xfrm>
           <a:prstGeom prst="roundRect">
             <a:avLst>
@@ -15433,7 +15262,7 @@
       </p:sp>
       <p:pic>
         <p:nvPicPr>
-          <p:cNvPr id="7" name="Picture 6" descr="backup-hard-drive-external.jpg"/>
+          <p:cNvPr id="7" name="Picture 6" descr="ilus-plan-respaldo-paso1.png"/>
           <p:cNvPicPr>
             <a:picLocks noChangeAspect="1"/>
           </p:cNvPicPr>
@@ -15447,8 +15276,8 @@
         </p:blipFill>
         <p:spPr>
           <a:xfrm>
-            <a:off x="5870301" y="1752121"/>
-            <a:ext cx="5864193" cy="3911541"/>
+            <a:off x="5870301" y="1522234"/>
+            <a:ext cx="5864193" cy="4691354"/>
           </a:xfrm>
           <a:prstGeom prst="rect">
             <a:avLst/>
@@ -15458,41 +15287,6 @@
       <p:sp>
         <p:nvSpPr>
           <p:cNvPr id="8" name="TextBox 7"/>
-          <p:cNvSpPr txBox="1"/>
-          <p:nvPr/>
-        </p:nvSpPr>
-        <p:spPr>
-          <a:xfrm>
-            <a:off x="5870301" y="5961888"/>
-            <a:ext cx="5864193" cy="320040"/>
-          </a:xfrm>
-          <a:prstGeom prst="rect">
-            <a:avLst/>
-          </a:prstGeom>
-          <a:noFill/>
-        </p:spPr>
-        <p:txBody>
-          <a:bodyPr wrap="square">
-            <a:spAutoFit/>
-          </a:bodyPr>
-          <a:lstStyle/>
-          <a:p>
-            <a:pPr algn="ctr"/>
-            <a:r>
-              <a:rPr sz="1100" b="0" i="1">
-                <a:solidFill>
-                  <a:srgbClr val="666666"/>
-                </a:solidFill>
-                <a:latin typeface="Calibri"/>
-              </a:rPr>
-              <a:t>Foto: Arina Krasnikova · Pexels</a:t>
-            </a:r>
-          </a:p>
-        </p:txBody>
-      </p:sp>
-      <p:sp>
-        <p:nvSpPr>
-          <p:cNvPr id="9" name="TextBox 8"/>
           <p:cNvSpPr txBox="1"/>
           <p:nvPr/>
         </p:nvSpPr>
@@ -15642,7 +15436,7 @@
       </p:sp>
       <p:sp>
         <p:nvSpPr>
-          <p:cNvPr id="10" name="TextBox 9"/>
+          <p:cNvPr id="9" name="TextBox 8"/>
           <p:cNvSpPr txBox="1"/>
           <p:nvPr/>
         </p:nvSpPr>
@@ -16462,8 +16256,8 @@
         </p:nvSpPr>
         <p:spPr>
           <a:xfrm>
-            <a:off x="5797149" y="1583170"/>
-            <a:ext cx="6010497" cy="4039130"/>
+            <a:off x="5797149" y="1343926"/>
+            <a:ext cx="6010497" cy="4837658"/>
           </a:xfrm>
           <a:prstGeom prst="roundRect">
             <a:avLst>
@@ -16501,7 +16295,7 @@
       </p:sp>
       <p:pic>
         <p:nvPicPr>
-          <p:cNvPr id="6" name="Picture 5" descr="laptop-code-editor-database.jpg"/>
+          <p:cNvPr id="6" name="Picture 5" descr="ilus-navegador-papel-paso1.png"/>
           <p:cNvPicPr>
             <a:picLocks noChangeAspect="1"/>
           </p:cNvPicPr>
@@ -16515,8 +16309,8 @@
         </p:blipFill>
         <p:spPr>
           <a:xfrm>
-            <a:off x="5870301" y="1656322"/>
-            <a:ext cx="5864193" cy="3892826"/>
+            <a:off x="5870301" y="1417078"/>
+            <a:ext cx="5864193" cy="4691354"/>
           </a:xfrm>
           <a:prstGeom prst="rect">
             <a:avLst/>
@@ -16526,41 +16320,6 @@
       <p:sp>
         <p:nvSpPr>
           <p:cNvPr id="7" name="TextBox 6"/>
-          <p:cNvSpPr txBox="1"/>
-          <p:nvPr/>
-        </p:nvSpPr>
-        <p:spPr>
-          <a:xfrm>
-            <a:off x="5870301" y="5961888"/>
-            <a:ext cx="5864193" cy="320040"/>
-          </a:xfrm>
-          <a:prstGeom prst="rect">
-            <a:avLst/>
-          </a:prstGeom>
-          <a:noFill/>
-        </p:spPr>
-        <p:txBody>
-          <a:bodyPr wrap="square">
-            <a:spAutoFit/>
-          </a:bodyPr>
-          <a:lstStyle/>
-          <a:p>
-            <a:pPr algn="ctr"/>
-            <a:r>
-              <a:rPr sz="1100" b="0" i="1">
-                <a:solidFill>
-                  <a:srgbClr val="666666"/>
-                </a:solidFill>
-                <a:latin typeface="Calibri"/>
-              </a:rPr>
-              <a:t>Foto: luis gomes · Pexels</a:t>
-            </a:r>
-          </a:p>
-        </p:txBody>
-      </p:sp>
-      <p:sp>
-        <p:nvSpPr>
-          <p:cNvPr id="8" name="TextBox 7"/>
           <p:cNvSpPr txBox="1"/>
           <p:nvPr/>
         </p:nvSpPr>
@@ -16647,7 +16406,7 @@
       </p:sp>
       <p:sp>
         <p:nvSpPr>
-          <p:cNvPr id="9" name="TextBox 8"/>
+          <p:cNvPr id="8" name="TextBox 7"/>
           <p:cNvSpPr txBox="1"/>
           <p:nvPr/>
         </p:nvSpPr>
@@ -16834,8 +16593,8 @@
         </p:nvSpPr>
         <p:spPr>
           <a:xfrm>
-            <a:off x="5797149" y="1573813"/>
-            <a:ext cx="6010497" cy="4057845"/>
+            <a:off x="5797149" y="1343926"/>
+            <a:ext cx="6010497" cy="4837658"/>
           </a:xfrm>
           <a:prstGeom prst="roundRect">
             <a:avLst>
@@ -16873,7 +16632,7 @@
       </p:sp>
       <p:pic>
         <p:nvPicPr>
-          <p:cNvPr id="6" name="Picture 5" descr="puzzle-pieces-connected.jpg"/>
+          <p:cNvPr id="6" name="Picture 5" descr="ilus-amarre-paso1.png"/>
           <p:cNvPicPr>
             <a:picLocks noChangeAspect="1"/>
           </p:cNvPicPr>
@@ -16887,8 +16646,8 @@
         </p:blipFill>
         <p:spPr>
           <a:xfrm>
-            <a:off x="5870301" y="1646965"/>
-            <a:ext cx="5864193" cy="3911541"/>
+            <a:off x="5870301" y="1417078"/>
+            <a:ext cx="5864193" cy="4691354"/>
           </a:xfrm>
           <a:prstGeom prst="rect">
             <a:avLst/>
@@ -16898,41 +16657,6 @@
       <p:sp>
         <p:nvSpPr>
           <p:cNvPr id="7" name="TextBox 6"/>
-          <p:cNvSpPr txBox="1"/>
-          <p:nvPr/>
-        </p:nvSpPr>
-        <p:spPr>
-          <a:xfrm>
-            <a:off x="5870301" y="5961888"/>
-            <a:ext cx="5864193" cy="320040"/>
-          </a:xfrm>
-          <a:prstGeom prst="rect">
-            <a:avLst/>
-          </a:prstGeom>
-          <a:noFill/>
-        </p:spPr>
-        <p:txBody>
-          <a:bodyPr wrap="square">
-            <a:spAutoFit/>
-          </a:bodyPr>
-          <a:lstStyle/>
-          <a:p>
-            <a:pPr algn="ctr"/>
-            <a:r>
-              <a:rPr sz="1100" b="0" i="1">
-                <a:solidFill>
-                  <a:srgbClr val="666666"/>
-                </a:solidFill>
-                <a:latin typeface="Calibri"/>
-              </a:rPr>
-              <a:t>Foto: Diva Plavalaguna · Pexels</a:t>
-            </a:r>
-          </a:p>
-        </p:txBody>
-      </p:sp>
-      <p:sp>
-        <p:nvSpPr>
-          <p:cNvPr id="8" name="TextBox 7"/>
           <p:cNvSpPr txBox="1"/>
           <p:nvPr/>
         </p:nvSpPr>
@@ -17003,7 +16727,7 @@
       </p:sp>
       <p:sp>
         <p:nvSpPr>
-          <p:cNvPr id="9" name="TextBox 8"/>
+          <p:cNvPr id="8" name="TextBox 7"/>
           <p:cNvSpPr txBox="1"/>
           <p:nvPr/>
         </p:nvSpPr>
@@ -17190,8 +16914,8 @@
         </p:nvSpPr>
         <p:spPr>
           <a:xfrm>
-            <a:off x="5797149" y="1573813"/>
-            <a:ext cx="6010497" cy="4057845"/>
+            <a:off x="5797149" y="1343926"/>
+            <a:ext cx="6010497" cy="4837658"/>
           </a:xfrm>
           <a:prstGeom prst="roundRect">
             <a:avLst>
@@ -17229,7 +16953,7 @@
       </p:sp>
       <p:pic>
         <p:nvPicPr>
-          <p:cNvPr id="6" name="Picture 5" descr="laptop-code-live-demo.jpg"/>
+          <p:cNvPr id="6" name="Picture 5" descr="ilus-demo-paso1.png"/>
           <p:cNvPicPr>
             <a:picLocks noChangeAspect="1"/>
           </p:cNvPicPr>
@@ -17243,8 +16967,8 @@
         </p:blipFill>
         <p:spPr>
           <a:xfrm>
-            <a:off x="5870301" y="1646965"/>
-            <a:ext cx="5864193" cy="3911541"/>
+            <a:off x="5870301" y="1417078"/>
+            <a:ext cx="5864193" cy="4691354"/>
           </a:xfrm>
           <a:prstGeom prst="rect">
             <a:avLst/>
@@ -17254,41 +16978,6 @@
       <p:sp>
         <p:nvSpPr>
           <p:cNvPr id="7" name="TextBox 6"/>
-          <p:cNvSpPr txBox="1"/>
-          <p:nvPr/>
-        </p:nvSpPr>
-        <p:spPr>
-          <a:xfrm>
-            <a:off x="5870301" y="5961888"/>
-            <a:ext cx="5864193" cy="320040"/>
-          </a:xfrm>
-          <a:prstGeom prst="rect">
-            <a:avLst/>
-          </a:prstGeom>
-          <a:noFill/>
-        </p:spPr>
-        <p:txBody>
-          <a:bodyPr wrap="square">
-            <a:spAutoFit/>
-          </a:bodyPr>
-          <a:lstStyle/>
-          <a:p>
-            <a:pPr algn="ctr"/>
-            <a:r>
-              <a:rPr sz="1100" b="0" i="1">
-                <a:solidFill>
-                  <a:srgbClr val="666666"/>
-                </a:solidFill>
-                <a:latin typeface="Calibri"/>
-              </a:rPr>
-              <a:t>Foto: olia danilevich · Pexels</a:t>
-            </a:r>
-          </a:p>
-        </p:txBody>
-      </p:sp>
-      <p:sp>
-        <p:nvSpPr>
-          <p:cNvPr id="8" name="TextBox 7"/>
           <p:cNvSpPr txBox="1"/>
           <p:nvPr/>
         </p:nvSpPr>
@@ -17429,7 +17118,7 @@
       </p:sp>
       <p:sp>
         <p:nvSpPr>
-          <p:cNvPr id="9" name="TextBox 8"/>
+          <p:cNvPr id="8" name="TextBox 7"/>
           <p:cNvSpPr txBox="1"/>
           <p:nvPr/>
         </p:nvSpPr>
@@ -18809,33 +18498,9 @@
           </a:prstGeom>
         </p:spPr>
       </p:pic>
-      <p:pic>
-        <p:nvPicPr>
-          <p:cNvPr id="9" name="Picture 8" descr="funcion-o-procedimiento-paso4.png"/>
-          <p:cNvPicPr>
-            <a:picLocks noChangeAspect="1"/>
-          </p:cNvPicPr>
-          <p:nvPr/>
-        </p:nvPicPr>
-        <p:blipFill>
-          <a:blip r:embed="rId5"/>
-          <a:stretch>
-            <a:fillRect/>
-          </a:stretch>
-        </p:blipFill>
-        <p:spPr>
-          <a:xfrm>
-            <a:off x="5876318" y="1261872"/>
-            <a:ext cx="5852160" cy="4681728"/>
-          </a:xfrm>
-          <a:prstGeom prst="rect">
-            <a:avLst/>
-          </a:prstGeom>
-        </p:spPr>
-      </p:pic>
-      <p:sp>
-        <p:nvSpPr>
-          <p:cNvPr id="18" name="TextBox 17"/>
+      <p:sp>
+        <p:nvSpPr>
+          <p:cNvPr id="13" name="TextBox 12"/>
           <p:cNvSpPr txBox="1"/>
           <p:nvPr/>
         </p:nvSpPr>
@@ -18870,7 +18535,7 @@
       </p:sp>
       <p:sp>
         <p:nvSpPr>
-          <p:cNvPr id="19" name="TextBox 18"/>
+          <p:cNvPr id="14" name="TextBox 13"/>
           <p:cNvSpPr txBox="1"/>
           <p:nvPr/>
         </p:nvSpPr>
@@ -18957,7 +18622,7 @@
       </p:sp>
       <p:sp>
         <p:nvSpPr>
-          <p:cNvPr id="20" name="TextBox 19"/>
+          <p:cNvPr id="15" name="TextBox 14"/>
           <p:cNvSpPr txBox="1"/>
           <p:nvPr/>
         </p:nvSpPr>
@@ -19097,59 +18762,6 @@
                                         <p:cTn id="12" dur="450"/>
                                         <p:tgtEl>
                                           <p:spTgt spid="8"/>
-                                        </p:tgtEl>
-                                      </p:cBhvr>
-                                    </p:animEffect>
-                                  </p:childTnLst>
-                                </p:cTn>
-                              </p:par>
-                            </p:childTnLst>
-                          </p:cTn>
-                        </p:par>
-                      </p:childTnLst>
-                    </p:cTn>
-                  </p:par>
-                  <p:par>
-                    <p:cTn id="13" fill="hold">
-                      <p:stCondLst>
-                        <p:cond delay="indefinite"/>
-                      </p:stCondLst>
-                      <p:childTnLst>
-                        <p:par>
-                          <p:cTn id="14" fill="hold">
-                            <p:stCondLst>
-                              <p:cond delay="0"/>
-                            </p:stCondLst>
-                            <p:childTnLst>
-                              <p:par>
-                                <p:cTn id="15" presetID="10" presetClass="entr" presetSubtype="0" fill="hold" nodeType="clickEffect">
-                                  <p:stCondLst>
-                                    <p:cond delay="0"/>
-                                  </p:stCondLst>
-                                  <p:childTnLst>
-                                    <p:set>
-                                      <p:cBhvr>
-                                        <p:cTn id="16" dur="1" fill="hold">
-                                          <p:stCondLst>
-                                            <p:cond delay="0"/>
-                                          </p:stCondLst>
-                                        </p:cTn>
-                                        <p:tgtEl>
-                                          <p:spTgt spid="9"/>
-                                        </p:tgtEl>
-                                        <p:attrNameLst>
-                                          <p:attrName>style.visibility</p:attrName>
-                                        </p:attrNameLst>
-                                      </p:cBhvr>
-                                      <p:to>
-                                        <p:strVal val="visible"/>
-                                      </p:to>
-                                    </p:set>
-                                    <p:animEffect transition="in" filter="fade">
-                                      <p:cBhvr>
-                                        <p:cTn id="17" dur="450"/>
-                                        <p:tgtEl>
-                                          <p:spTgt spid="9"/>
                                         </p:tgtEl>
                                       </p:cBhvr>
                                     </p:animEffect>
@@ -21569,8 +21181,8 @@
         </p:nvSpPr>
         <p:spPr>
           <a:xfrm>
-            <a:off x="5797149" y="1685207"/>
-            <a:ext cx="6010497" cy="4045368"/>
+            <a:off x="5797149" y="1449082"/>
+            <a:ext cx="6010497" cy="4837658"/>
           </a:xfrm>
           <a:prstGeom prst="roundRect">
             <a:avLst>
@@ -21608,7 +21220,7 @@
       </p:sp>
       <p:pic>
         <p:nvPicPr>
-          <p:cNvPr id="7" name="Picture 6" descr="price-tags-veterinary.jpg"/>
+          <p:cNvPr id="7" name="Picture 6" descr="ilus-firma-funcion-paso1.png"/>
           <p:cNvPicPr>
             <a:picLocks noChangeAspect="1"/>
           </p:cNvPicPr>
@@ -21622,8 +21234,8 @@
         </p:blipFill>
         <p:spPr>
           <a:xfrm>
-            <a:off x="5870301" y="1758359"/>
-            <a:ext cx="5864193" cy="3899064"/>
+            <a:off x="5870301" y="1522234"/>
+            <a:ext cx="5864193" cy="4691354"/>
           </a:xfrm>
           <a:prstGeom prst="rect">
             <a:avLst/>
@@ -21633,41 +21245,6 @@
       <p:sp>
         <p:nvSpPr>
           <p:cNvPr id="8" name="TextBox 7"/>
-          <p:cNvSpPr txBox="1"/>
-          <p:nvPr/>
-        </p:nvSpPr>
-        <p:spPr>
-          <a:xfrm>
-            <a:off x="5870301" y="5961888"/>
-            <a:ext cx="5864193" cy="320040"/>
-          </a:xfrm>
-          <a:prstGeom prst="rect">
-            <a:avLst/>
-          </a:prstGeom>
-          <a:noFill/>
-        </p:spPr>
-        <p:txBody>
-          <a:bodyPr wrap="square">
-            <a:spAutoFit/>
-          </a:bodyPr>
-          <a:lstStyle/>
-          <a:p>
-            <a:pPr algn="ctr"/>
-            <a:r>
-              <a:rPr sz="1100" b="0" i="1">
-                <a:solidFill>
-                  <a:srgbClr val="666666"/>
-                </a:solidFill>
-                <a:latin typeface="Calibri"/>
-              </a:rPr>
-              <a:t>Foto: Miguel Á. Padriñán · Pexels</a:t>
-            </a:r>
-          </a:p>
-        </p:txBody>
-      </p:sp>
-      <p:sp>
-        <p:nvSpPr>
-          <p:cNvPr id="9" name="TextBox 8"/>
           <p:cNvSpPr txBox="1"/>
           <p:nvPr/>
         </p:nvSpPr>
@@ -21826,7 +21403,7 @@
       </p:sp>
       <p:sp>
         <p:nvSpPr>
-          <p:cNvPr id="10" name="TextBox 9"/>
+          <p:cNvPr id="9" name="TextBox 8"/>
           <p:cNvSpPr txBox="1"/>
           <p:nvPr/>
         </p:nvSpPr>
